--- a/slides/T320_Classificação (Parte I).pptx
+++ b/slides/T320_Classificação (Parte I).pptx
@@ -305,7 +305,7 @@
           <a:p>
             <a:fld id="{144F1436-6906-4D93-B7A2-786C327BFA14}" type="datetimeFigureOut">
               <a:rPr lang="nl-BE" smtClean="0"/>
-              <a:t>14/02/2026</a:t>
+              <a:t>26/02/2026</a:t>
             </a:fld>
             <a:endParaRPr lang="nl-BE"/>
           </a:p>
@@ -470,7 +470,7 @@
           <a:p>
             <a:fld id="{AA8CD09E-2914-4F47-B6C1-51B2C31814C9}" type="datetimeFigureOut">
               <a:rPr lang="pt-BR" smtClean="0"/>
-              <a:t>14/02/2026</a:t>
+              <a:t>26/02/2026</a:t>
             </a:fld>
             <a:endParaRPr lang="pt-BR"/>
           </a:p>
@@ -2990,7 +2990,7 @@
           <a:p>
             <a:fld id="{63289F7E-B80B-496E-81B4-D396C37C9454}" type="datetimeFigureOut">
               <a:rPr lang="pt-BR" smtClean="0"/>
-              <a:t>14/02/2026</a:t>
+              <a:t>26/02/2026</a:t>
             </a:fld>
             <a:endParaRPr lang="pt-BR"/>
           </a:p>
@@ -3188,7 +3188,7 @@
           <a:p>
             <a:fld id="{63289F7E-B80B-496E-81B4-D396C37C9454}" type="datetimeFigureOut">
               <a:rPr lang="pt-BR" smtClean="0"/>
-              <a:t>14/02/2026</a:t>
+              <a:t>26/02/2026</a:t>
             </a:fld>
             <a:endParaRPr lang="pt-BR"/>
           </a:p>
@@ -3396,7 +3396,7 @@
           <a:p>
             <a:fld id="{63289F7E-B80B-496E-81B4-D396C37C9454}" type="datetimeFigureOut">
               <a:rPr lang="pt-BR" smtClean="0"/>
-              <a:t>14/02/2026</a:t>
+              <a:t>26/02/2026</a:t>
             </a:fld>
             <a:endParaRPr lang="pt-BR"/>
           </a:p>
@@ -3594,7 +3594,7 @@
           <a:p>
             <a:fld id="{63289F7E-B80B-496E-81B4-D396C37C9454}" type="datetimeFigureOut">
               <a:rPr lang="pt-BR" smtClean="0"/>
-              <a:t>14/02/2026</a:t>
+              <a:t>26/02/2026</a:t>
             </a:fld>
             <a:endParaRPr lang="pt-BR"/>
           </a:p>
@@ -3869,7 +3869,7 @@
           <a:p>
             <a:fld id="{63289F7E-B80B-496E-81B4-D396C37C9454}" type="datetimeFigureOut">
               <a:rPr lang="pt-BR" smtClean="0"/>
-              <a:t>14/02/2026</a:t>
+              <a:t>26/02/2026</a:t>
             </a:fld>
             <a:endParaRPr lang="pt-BR"/>
           </a:p>
@@ -4134,7 +4134,7 @@
           <a:p>
             <a:fld id="{63289F7E-B80B-496E-81B4-D396C37C9454}" type="datetimeFigureOut">
               <a:rPr lang="pt-BR" smtClean="0"/>
-              <a:t>14/02/2026</a:t>
+              <a:t>26/02/2026</a:t>
             </a:fld>
             <a:endParaRPr lang="pt-BR"/>
           </a:p>
@@ -4546,7 +4546,7 @@
           <a:p>
             <a:fld id="{63289F7E-B80B-496E-81B4-D396C37C9454}" type="datetimeFigureOut">
               <a:rPr lang="pt-BR" smtClean="0"/>
-              <a:t>14/02/2026</a:t>
+              <a:t>26/02/2026</a:t>
             </a:fld>
             <a:endParaRPr lang="pt-BR"/>
           </a:p>
@@ -4687,7 +4687,7 @@
           <a:p>
             <a:fld id="{63289F7E-B80B-496E-81B4-D396C37C9454}" type="datetimeFigureOut">
               <a:rPr lang="pt-BR" smtClean="0"/>
-              <a:t>14/02/2026</a:t>
+              <a:t>26/02/2026</a:t>
             </a:fld>
             <a:endParaRPr lang="pt-BR"/>
           </a:p>
@@ -4800,7 +4800,7 @@
           <a:p>
             <a:fld id="{63289F7E-B80B-496E-81B4-D396C37C9454}" type="datetimeFigureOut">
               <a:rPr lang="pt-BR" smtClean="0"/>
-              <a:t>14/02/2026</a:t>
+              <a:t>26/02/2026</a:t>
             </a:fld>
             <a:endParaRPr lang="pt-BR"/>
           </a:p>
@@ -5111,7 +5111,7 @@
           <a:p>
             <a:fld id="{63289F7E-B80B-496E-81B4-D396C37C9454}" type="datetimeFigureOut">
               <a:rPr lang="pt-BR" smtClean="0"/>
-              <a:t>14/02/2026</a:t>
+              <a:t>26/02/2026</a:t>
             </a:fld>
             <a:endParaRPr lang="pt-BR"/>
           </a:p>
@@ -5399,7 +5399,7 @@
           <a:p>
             <a:fld id="{63289F7E-B80B-496E-81B4-D396C37C9454}" type="datetimeFigureOut">
               <a:rPr lang="pt-BR" smtClean="0"/>
-              <a:t>14/02/2026</a:t>
+              <a:t>26/02/2026</a:t>
             </a:fld>
             <a:endParaRPr lang="pt-BR"/>
           </a:p>
@@ -5640,7 +5640,7 @@
           <a:p>
             <a:fld id="{63289F7E-B80B-496E-81B4-D396C37C9454}" type="datetimeFigureOut">
               <a:rPr lang="pt-BR" smtClean="0"/>
-              <a:t>14/02/2026</a:t>
+              <a:t>26/02/2026</a:t>
             </a:fld>
             <a:endParaRPr lang="pt-BR"/>
           </a:p>
@@ -7532,8 +7532,8 @@
           </a:p>
         </p:txBody>
       </p:sp>
-      <mc:AlternateContent xmlns:mc="http://schemas.openxmlformats.org/markup-compatibility/2006">
-        <mc:Choice xmlns:a14="http://schemas.microsoft.com/office/drawing/2010/main" Requires="a14">
+      <mc:AlternateContent xmlns:mc="http://schemas.openxmlformats.org/markup-compatibility/2006" xmlns:a14="http://schemas.microsoft.com/office/drawing/2010/main">
+        <mc:Choice Requires="a14">
           <p:sp>
             <p:nvSpPr>
               <p:cNvPr id="3" name="Content Placeholder 2"/>
@@ -7742,7 +7742,7 @@
             </p:txBody>
           </p:sp>
         </mc:Choice>
-        <mc:Fallback>
+        <mc:Fallback xmlns="">
           <p:sp>
             <p:nvSpPr>
               <p:cNvPr id="3" name="Content Placeholder 2"/>
@@ -8334,8 +8334,8 @@
           </a:p>
         </p:txBody>
       </p:sp>
-      <mc:AlternateContent xmlns:mc="http://schemas.openxmlformats.org/markup-compatibility/2006">
-        <mc:Choice xmlns:a14="http://schemas.microsoft.com/office/drawing/2010/main" Requires="a14">
+      <mc:AlternateContent xmlns:mc="http://schemas.openxmlformats.org/markup-compatibility/2006" xmlns:a14="http://schemas.microsoft.com/office/drawing/2010/main">
+        <mc:Choice Requires="a14">
           <p:sp>
             <p:nvSpPr>
               <p:cNvPr id="3" name="Content Placeholder 2"/>
@@ -8456,7 +8456,7 @@
             </p:txBody>
           </p:sp>
         </mc:Choice>
-        <mc:Fallback>
+        <mc:Fallback xmlns="">
           <p:sp>
             <p:nvSpPr>
               <p:cNvPr id="3" name="Content Placeholder 2"/>
@@ -9048,8 +9048,8 @@
           </a:p>
         </p:txBody>
       </p:sp>
-      <mc:AlternateContent xmlns:mc="http://schemas.openxmlformats.org/markup-compatibility/2006">
-        <mc:Choice xmlns:a14="http://schemas.microsoft.com/office/drawing/2010/main" Requires="a14">
+      <mc:AlternateContent xmlns:mc="http://schemas.openxmlformats.org/markup-compatibility/2006" xmlns:a14="http://schemas.microsoft.com/office/drawing/2010/main">
+        <mc:Choice Requires="a14">
           <p:sp>
             <p:nvSpPr>
               <p:cNvPr id="3" name="Content Placeholder 2"/>
@@ -10217,7 +10217,7 @@
             </p:txBody>
           </p:sp>
         </mc:Choice>
-        <mc:Fallback>
+        <mc:Fallback xmlns="">
           <p:sp>
             <p:nvSpPr>
               <p:cNvPr id="3" name="Content Placeholder 2"/>
@@ -10652,8 +10652,8 @@
           </a:p>
         </p:txBody>
       </p:sp>
-      <mc:AlternateContent xmlns:mc="http://schemas.openxmlformats.org/markup-compatibility/2006">
-        <mc:Choice xmlns:a14="http://schemas.microsoft.com/office/drawing/2010/main" Requires="a14">
+      <mc:AlternateContent xmlns:mc="http://schemas.openxmlformats.org/markup-compatibility/2006" xmlns:a14="http://schemas.microsoft.com/office/drawing/2010/main">
+        <mc:Choice Requires="a14">
           <p:sp>
             <p:nvSpPr>
               <p:cNvPr id="3" name="Espaço Reservado para Conteúdo 2">
@@ -11508,7 +11508,7 @@
             </p:txBody>
           </p:sp>
         </mc:Choice>
-        <mc:Fallback>
+        <mc:Fallback xmlns="">
           <p:sp>
             <p:nvSpPr>
               <p:cNvPr id="3" name="Espaço Reservado para Conteúdo 2">
@@ -11552,8 +11552,8 @@
           </p:sp>
         </mc:Fallback>
       </mc:AlternateContent>
-      <mc:AlternateContent xmlns:mc="http://schemas.openxmlformats.org/markup-compatibility/2006">
-        <mc:Choice xmlns:a14="http://schemas.microsoft.com/office/drawing/2010/main" Requires="a14">
+      <mc:AlternateContent xmlns:mc="http://schemas.openxmlformats.org/markup-compatibility/2006" xmlns:a14="http://schemas.microsoft.com/office/drawing/2010/main">
+        <mc:Choice Requires="a14">
           <p:sp>
             <p:nvSpPr>
               <p:cNvPr id="4" name="Rectangle 3">
@@ -11770,7 +11770,7 @@
             </p:txBody>
           </p:sp>
         </mc:Choice>
-        <mc:Fallback>
+        <mc:Fallback xmlns="">
           <p:sp>
             <p:nvSpPr>
               <p:cNvPr id="4" name="Rectangle 3">
@@ -11867,8 +11867,8 @@
           </a:p>
         </p:txBody>
       </p:sp>
-      <mc:AlternateContent xmlns:mc="http://schemas.openxmlformats.org/markup-compatibility/2006">
-        <mc:Choice xmlns:a14="http://schemas.microsoft.com/office/drawing/2010/main" Requires="a14">
+      <mc:AlternateContent xmlns:mc="http://schemas.openxmlformats.org/markup-compatibility/2006" xmlns:a14="http://schemas.microsoft.com/office/drawing/2010/main">
+        <mc:Choice Requires="a14">
           <p:sp>
             <p:nvSpPr>
               <p:cNvPr id="3" name="Content Placeholder 2"/>
@@ -12178,7 +12178,7 @@
             </p:txBody>
           </p:sp>
         </mc:Choice>
-        <mc:Fallback>
+        <mc:Fallback xmlns="">
           <p:sp>
             <p:nvSpPr>
               <p:cNvPr id="3" name="Content Placeholder 2"/>
@@ -12510,8 +12510,8 @@
           </a:p>
         </p:txBody>
       </p:sp>
-      <mc:AlternateContent xmlns:mc="http://schemas.openxmlformats.org/markup-compatibility/2006">
-        <mc:Choice xmlns:a14="http://schemas.microsoft.com/office/drawing/2010/main" Requires="a14">
+      <mc:AlternateContent xmlns:mc="http://schemas.openxmlformats.org/markup-compatibility/2006" xmlns:a14="http://schemas.microsoft.com/office/drawing/2010/main">
+        <mc:Choice Requires="a14">
           <p:sp>
             <p:nvSpPr>
               <p:cNvPr id="3" name="Content Placeholder 2"/>
@@ -12749,7 +12749,7 @@
             </p:txBody>
           </p:sp>
         </mc:Choice>
-        <mc:Fallback>
+        <mc:Fallback xmlns="">
           <p:sp>
             <p:nvSpPr>
               <p:cNvPr id="3" name="Content Placeholder 2"/>
@@ -13556,8 +13556,8 @@
           </a:p>
         </p:txBody>
       </p:sp>
-      <mc:AlternateContent xmlns:mc="http://schemas.openxmlformats.org/markup-compatibility/2006">
-        <mc:Choice xmlns:a14="http://schemas.microsoft.com/office/drawing/2010/main" Requires="a14">
+      <mc:AlternateContent xmlns:mc="http://schemas.openxmlformats.org/markup-compatibility/2006" xmlns:a14="http://schemas.microsoft.com/office/drawing/2010/main">
+        <mc:Choice Requires="a14">
           <p:sp>
             <p:nvSpPr>
               <p:cNvPr id="3" name="Espaço Reservado para Conteúdo 2">
@@ -14035,7 +14035,7 @@
             </p:txBody>
           </p:sp>
         </mc:Choice>
-        <mc:Fallback>
+        <mc:Fallback xmlns="">
           <p:sp>
             <p:nvSpPr>
               <p:cNvPr id="3" name="Espaço Reservado para Conteúdo 2">
@@ -14172,8 +14172,8 @@
           </a:p>
         </p:txBody>
       </p:sp>
-      <mc:AlternateContent xmlns:mc="http://schemas.openxmlformats.org/markup-compatibility/2006">
-        <mc:Choice xmlns:a14="http://schemas.microsoft.com/office/drawing/2010/main" Requires="a14">
+      <mc:AlternateContent xmlns:mc="http://schemas.openxmlformats.org/markup-compatibility/2006" xmlns:a14="http://schemas.microsoft.com/office/drawing/2010/main">
+        <mc:Choice Requires="a14">
           <p:sp>
             <p:nvSpPr>
               <p:cNvPr id="3" name="Espaço Reservado para Conteúdo 2">
@@ -14332,19 +14332,7 @@
                                 <a:rPr lang="pt-BR" sz="2400" b="0" i="1" smtClean="0">
                                   <a:latin typeface="Cambria Math" panose="02040503050406030204" pitchFamily="18" charset="0"/>
                                 </a:rPr>
-                                <m:t>=1,  </m:t>
-                              </m:r>
-                              <m:r>
-                                <a:rPr lang="pt-BR" sz="2400" b="0" i="1" smtClean="0">
-                                  <a:latin typeface="Cambria Math" panose="02040503050406030204" pitchFamily="18" charset="0"/>
-                                </a:rPr>
-                                <m:t>               </m:t>
-                              </m:r>
-                              <m:r>
-                                <a:rPr lang="pt-BR" sz="2400" b="0" i="1" smtClean="0">
-                                  <a:latin typeface="Cambria Math" panose="02040503050406030204" pitchFamily="18" charset="0"/>
-                                </a:rPr>
-                                <m:t>   </m:t>
+                                <m:t>=1,                    </m:t>
                               </m:r>
                               <m:r>
                                 <a:rPr lang="pt-BR" sz="2400" b="0" i="1">
@@ -14393,19 +14381,7 @@
                                 <a:rPr lang="pt-BR" sz="2400" b="0" i="1" smtClean="0">
                                   <a:latin typeface="Cambria Math" panose="02040503050406030204" pitchFamily="18" charset="0"/>
                                 </a:rPr>
-                                <m:t>=2,  </m:t>
-                              </m:r>
-                              <m:r>
-                                <a:rPr lang="pt-BR" sz="2400" b="0" i="1" smtClean="0">
-                                  <a:latin typeface="Cambria Math" panose="02040503050406030204" pitchFamily="18" charset="0"/>
-                                </a:rPr>
-                                <m:t>        </m:t>
-                              </m:r>
-                              <m:r>
-                                <a:rPr lang="pt-BR" sz="2400" b="0" i="1" smtClean="0">
-                                  <a:latin typeface="Cambria Math" panose="02040503050406030204" pitchFamily="18" charset="0"/>
-                                </a:rPr>
-                                <m:t>           </m:t>
+                                <m:t>=2,                     </m:t>
                               </m:r>
                               <m:r>
                                 <a:rPr lang="pt-BR" sz="2400" b="0" i="1" smtClean="0">
@@ -14764,7 +14740,7 @@
             </p:txBody>
           </p:sp>
         </mc:Choice>
-        <mc:Fallback>
+        <mc:Fallback xmlns="">
           <p:sp>
             <p:nvSpPr>
               <p:cNvPr id="3" name="Espaço Reservado para Conteúdo 2">
@@ -21201,8 +21177,8 @@
           </p:sp>
         </mc:Fallback>
       </mc:AlternateContent>
-      <mc:AlternateContent xmlns:mc="http://schemas.openxmlformats.org/markup-compatibility/2006">
-        <mc:Choice xmlns:a14="http://schemas.microsoft.com/office/drawing/2010/main" Requires="a14">
+      <mc:AlternateContent xmlns:mc="http://schemas.openxmlformats.org/markup-compatibility/2006" xmlns:a14="http://schemas.microsoft.com/office/drawing/2010/main">
+        <mc:Choice Requires="a14">
           <p:sp>
             <p:nvSpPr>
               <p:cNvPr id="3" name="Espaço Reservado para Conteúdo 2">
@@ -21478,7 +21454,7 @@
             </p:txBody>
           </p:sp>
         </mc:Choice>
-        <mc:Fallback>
+        <mc:Fallback xmlns="">
           <p:sp>
             <p:nvSpPr>
               <p:cNvPr id="3" name="Espaço Reservado para Conteúdo 2">
@@ -24752,8 +24728,8 @@
           </p:txBody>
         </p:sp>
       </p:grpSp>
-      <mc:AlternateContent xmlns:mc="http://schemas.openxmlformats.org/markup-compatibility/2006">
-        <mc:Choice xmlns:a14="http://schemas.microsoft.com/office/drawing/2010/main" Requires="a14">
+      <mc:AlternateContent xmlns:mc="http://schemas.openxmlformats.org/markup-compatibility/2006" xmlns:a14="http://schemas.microsoft.com/office/drawing/2010/main">
+        <mc:Choice Requires="a14">
           <p:sp>
             <p:nvSpPr>
               <p:cNvPr id="62" name="TextBox 61">
@@ -24818,7 +24794,7 @@
             </p:txBody>
           </p:sp>
         </mc:Choice>
-        <mc:Fallback>
+        <mc:Fallback xmlns="">
           <p:sp>
             <p:nvSpPr>
               <p:cNvPr id="62" name="TextBox 61">
@@ -29068,8 +29044,8 @@
           </p:sp>
         </mc:Fallback>
       </mc:AlternateContent>
-      <mc:AlternateContent xmlns:mc="http://schemas.openxmlformats.org/markup-compatibility/2006">
-        <mc:Choice xmlns:a14="http://schemas.microsoft.com/office/drawing/2010/main" Requires="a14">
+      <mc:AlternateContent xmlns:mc="http://schemas.openxmlformats.org/markup-compatibility/2006" xmlns:a14="http://schemas.microsoft.com/office/drawing/2010/main">
+        <mc:Choice Requires="a14">
           <p:sp>
             <p:nvSpPr>
               <p:cNvPr id="3" name="Espaço Reservado para Conteúdo 2">
@@ -29743,7 +29719,7 @@
             </p:txBody>
           </p:sp>
         </mc:Choice>
-        <mc:Fallback>
+        <mc:Fallback xmlns="">
           <p:sp>
             <p:nvSpPr>
               <p:cNvPr id="3" name="Espaço Reservado para Conteúdo 2">
@@ -42814,7 +42790,7 @@
           <p:nvPr>
             <p:extLst>
               <p:ext uri="{D42A27DB-BD31-4B8C-83A1-F6EECF244321}">
-                <p14:modId xmlns:p14="http://schemas.microsoft.com/office/powerpoint/2010/main" val="1208791775"/>
+                <p14:modId xmlns:p14="http://schemas.microsoft.com/office/powerpoint/2010/main" val="662083701"/>
               </p:ext>
             </p:extLst>
           </p:nvPr>
@@ -46065,7 +46041,7 @@
                           </a:solidFill>
                           <a:effectLst/>
                         </a:rPr>
-                        <a:t>(Sala I-??)</a:t>
+                        <a:t>(Sala I-18)</a:t>
                       </a:r>
                       <a:endParaRPr lang="en-US" sz="1400" dirty="0">
                         <a:effectLst/>
@@ -47330,7 +47306,16 @@
                           </a:solidFill>
                           <a:effectLst/>
                         </a:rPr>
-                        <a:t>(Sala I-??)</a:t>
+                        <a:t>(</a:t>
+                      </a:r>
+                      <a:r>
+                        <a:rPr lang="en-US" sz="1400" b="1" baseline="0">
+                          <a:solidFill>
+                            <a:srgbClr val="FF0000"/>
+                          </a:solidFill>
+                          <a:effectLst/>
+                        </a:rPr>
+                        <a:t>Sala I-18)</a:t>
                       </a:r>
                       <a:endParaRPr lang="en-US" sz="1400" b="1" dirty="0">
                         <a:solidFill>
@@ -48960,8 +48945,8 @@
           </a:p>
         </p:txBody>
       </p:sp>
-      <mc:AlternateContent xmlns:mc="http://schemas.openxmlformats.org/markup-compatibility/2006">
-        <mc:Choice xmlns:a14="http://schemas.microsoft.com/office/drawing/2010/main" Requires="a14">
+      <mc:AlternateContent xmlns:mc="http://schemas.openxmlformats.org/markup-compatibility/2006" xmlns:a14="http://schemas.microsoft.com/office/drawing/2010/main">
+        <mc:Choice Requires="a14">
           <p:sp>
             <p:nvSpPr>
               <p:cNvPr id="3" name="Espaço Reservado para Conteúdo 2"/>
@@ -49075,7 +49060,7 @@
             </p:txBody>
           </p:sp>
         </mc:Choice>
-        <mc:Fallback>
+        <mc:Fallback xmlns="">
           <p:sp>
             <p:nvSpPr>
               <p:cNvPr id="3" name="Espaço Reservado para Conteúdo 2"/>
@@ -49563,8 +49548,8 @@
           </p:sp>
         </mc:Fallback>
       </mc:AlternateContent>
-      <mc:AlternateContent xmlns:mc="http://schemas.openxmlformats.org/markup-compatibility/2006">
-        <mc:Choice xmlns:a14="http://schemas.microsoft.com/office/drawing/2010/main" Requires="a14">
+      <mc:AlternateContent xmlns:mc="http://schemas.openxmlformats.org/markup-compatibility/2006" xmlns:a14="http://schemas.microsoft.com/office/drawing/2010/main">
+        <mc:Choice Requires="a14">
           <p:sp>
             <p:nvSpPr>
               <p:cNvPr id="8" name="CaixaDeTexto 5">
@@ -49646,7 +49631,7 @@
             </p:txBody>
           </p:sp>
         </mc:Choice>
-        <mc:Fallback>
+        <mc:Fallback xmlns="">
           <p:sp>
             <p:nvSpPr>
               <p:cNvPr id="8" name="CaixaDeTexto 5">

--- a/slides/T320_Classificação (Parte I).pptx
+++ b/slides/T320_Classificação (Parte I).pptx
@@ -305,7 +305,7 @@
           <a:p>
             <a:fld id="{144F1436-6906-4D93-B7A2-786C327BFA14}" type="datetimeFigureOut">
               <a:rPr lang="nl-BE" smtClean="0"/>
-              <a:t>26/02/2026</a:t>
+              <a:t>31/07/2026</a:t>
             </a:fld>
             <a:endParaRPr lang="nl-BE"/>
           </a:p>
@@ -371,7 +371,7 @@
           <a:p>
             <a:fld id="{F7E56D9B-79AD-444A-AFED-DEC23408F8B4}" type="slidenum">
               <a:rPr lang="nl-BE" smtClean="0"/>
-              <a:t>‹#›</a:t>
+              <a:t>‹nº›</a:t>
             </a:fld>
             <a:endParaRPr lang="nl-BE"/>
           </a:p>
@@ -470,7 +470,7 @@
           <a:p>
             <a:fld id="{AA8CD09E-2914-4F47-B6C1-51B2C31814C9}" type="datetimeFigureOut">
               <a:rPr lang="pt-BR" smtClean="0"/>
-              <a:t>26/02/2026</a:t>
+              <a:t>31/07/2026</a:t>
             </a:fld>
             <a:endParaRPr lang="pt-BR"/>
           </a:p>
@@ -628,7 +628,7 @@
           <a:p>
             <a:fld id="{6FC8D850-966F-45A6-8DE7-15B891E7D40D}" type="slidenum">
               <a:rPr lang="pt-BR" smtClean="0"/>
-              <a:t>‹#›</a:t>
+              <a:t>‹nº›</a:t>
             </a:fld>
             <a:endParaRPr lang="pt-BR"/>
           </a:p>
@@ -2990,7 +2990,7 @@
           <a:p>
             <a:fld id="{63289F7E-B80B-496E-81B4-D396C37C9454}" type="datetimeFigureOut">
               <a:rPr lang="pt-BR" smtClean="0"/>
-              <a:t>26/02/2026</a:t>
+              <a:t>31/07/2026</a:t>
             </a:fld>
             <a:endParaRPr lang="pt-BR"/>
           </a:p>
@@ -3044,7 +3044,7 @@
           <a:p>
             <a:fld id="{1A7E88B7-70CE-4035-AE73-13FA6FB985D4}" type="slidenum">
               <a:rPr lang="pt-BR" smtClean="0"/>
-              <a:t>‹#›</a:t>
+              <a:t>‹nº›</a:t>
             </a:fld>
             <a:endParaRPr lang="pt-BR"/>
           </a:p>
@@ -3188,7 +3188,7 @@
           <a:p>
             <a:fld id="{63289F7E-B80B-496E-81B4-D396C37C9454}" type="datetimeFigureOut">
               <a:rPr lang="pt-BR" smtClean="0"/>
-              <a:t>26/02/2026</a:t>
+              <a:t>31/07/2026</a:t>
             </a:fld>
             <a:endParaRPr lang="pt-BR"/>
           </a:p>
@@ -3242,7 +3242,7 @@
           <a:p>
             <a:fld id="{1A7E88B7-70CE-4035-AE73-13FA6FB985D4}" type="slidenum">
               <a:rPr lang="pt-BR" smtClean="0"/>
-              <a:t>‹#›</a:t>
+              <a:t>‹nº›</a:t>
             </a:fld>
             <a:endParaRPr lang="pt-BR"/>
           </a:p>
@@ -3396,7 +3396,7 @@
           <a:p>
             <a:fld id="{63289F7E-B80B-496E-81B4-D396C37C9454}" type="datetimeFigureOut">
               <a:rPr lang="pt-BR" smtClean="0"/>
-              <a:t>26/02/2026</a:t>
+              <a:t>31/07/2026</a:t>
             </a:fld>
             <a:endParaRPr lang="pt-BR"/>
           </a:p>
@@ -3450,7 +3450,7 @@
           <a:p>
             <a:fld id="{1A7E88B7-70CE-4035-AE73-13FA6FB985D4}" type="slidenum">
               <a:rPr lang="pt-BR" smtClean="0"/>
-              <a:t>‹#›</a:t>
+              <a:t>‹nº›</a:t>
             </a:fld>
             <a:endParaRPr lang="pt-BR"/>
           </a:p>
@@ -3594,7 +3594,7 @@
           <a:p>
             <a:fld id="{63289F7E-B80B-496E-81B4-D396C37C9454}" type="datetimeFigureOut">
               <a:rPr lang="pt-BR" smtClean="0"/>
-              <a:t>26/02/2026</a:t>
+              <a:t>31/07/2026</a:t>
             </a:fld>
             <a:endParaRPr lang="pt-BR"/>
           </a:p>
@@ -3648,7 +3648,7 @@
           <a:p>
             <a:fld id="{1A7E88B7-70CE-4035-AE73-13FA6FB985D4}" type="slidenum">
               <a:rPr lang="pt-BR" smtClean="0"/>
-              <a:t>‹#›</a:t>
+              <a:t>‹nº›</a:t>
             </a:fld>
             <a:endParaRPr lang="pt-BR"/>
           </a:p>
@@ -3869,7 +3869,7 @@
           <a:p>
             <a:fld id="{63289F7E-B80B-496E-81B4-D396C37C9454}" type="datetimeFigureOut">
               <a:rPr lang="pt-BR" smtClean="0"/>
-              <a:t>26/02/2026</a:t>
+              <a:t>31/07/2026</a:t>
             </a:fld>
             <a:endParaRPr lang="pt-BR"/>
           </a:p>
@@ -3923,7 +3923,7 @@
           <a:p>
             <a:fld id="{1A7E88B7-70CE-4035-AE73-13FA6FB985D4}" type="slidenum">
               <a:rPr lang="pt-BR" smtClean="0"/>
-              <a:t>‹#›</a:t>
+              <a:t>‹nº›</a:t>
             </a:fld>
             <a:endParaRPr lang="pt-BR"/>
           </a:p>
@@ -4134,7 +4134,7 @@
           <a:p>
             <a:fld id="{63289F7E-B80B-496E-81B4-D396C37C9454}" type="datetimeFigureOut">
               <a:rPr lang="pt-BR" smtClean="0"/>
-              <a:t>26/02/2026</a:t>
+              <a:t>31/07/2026</a:t>
             </a:fld>
             <a:endParaRPr lang="pt-BR"/>
           </a:p>
@@ -4188,7 +4188,7 @@
           <a:p>
             <a:fld id="{1A7E88B7-70CE-4035-AE73-13FA6FB985D4}" type="slidenum">
               <a:rPr lang="pt-BR" smtClean="0"/>
-              <a:t>‹#›</a:t>
+              <a:t>‹nº›</a:t>
             </a:fld>
             <a:endParaRPr lang="pt-BR"/>
           </a:p>
@@ -4546,7 +4546,7 @@
           <a:p>
             <a:fld id="{63289F7E-B80B-496E-81B4-D396C37C9454}" type="datetimeFigureOut">
               <a:rPr lang="pt-BR" smtClean="0"/>
-              <a:t>26/02/2026</a:t>
+              <a:t>31/07/2026</a:t>
             </a:fld>
             <a:endParaRPr lang="pt-BR"/>
           </a:p>
@@ -4600,7 +4600,7 @@
           <a:p>
             <a:fld id="{1A7E88B7-70CE-4035-AE73-13FA6FB985D4}" type="slidenum">
               <a:rPr lang="pt-BR" smtClean="0"/>
-              <a:t>‹#›</a:t>
+              <a:t>‹nº›</a:t>
             </a:fld>
             <a:endParaRPr lang="pt-BR"/>
           </a:p>
@@ -4687,7 +4687,7 @@
           <a:p>
             <a:fld id="{63289F7E-B80B-496E-81B4-D396C37C9454}" type="datetimeFigureOut">
               <a:rPr lang="pt-BR" smtClean="0"/>
-              <a:t>26/02/2026</a:t>
+              <a:t>31/07/2026</a:t>
             </a:fld>
             <a:endParaRPr lang="pt-BR"/>
           </a:p>
@@ -4741,7 +4741,7 @@
           <a:p>
             <a:fld id="{1A7E88B7-70CE-4035-AE73-13FA6FB985D4}" type="slidenum">
               <a:rPr lang="pt-BR" smtClean="0"/>
-              <a:t>‹#›</a:t>
+              <a:t>‹nº›</a:t>
             </a:fld>
             <a:endParaRPr lang="pt-BR"/>
           </a:p>
@@ -4800,7 +4800,7 @@
           <a:p>
             <a:fld id="{63289F7E-B80B-496E-81B4-D396C37C9454}" type="datetimeFigureOut">
               <a:rPr lang="pt-BR" smtClean="0"/>
-              <a:t>26/02/2026</a:t>
+              <a:t>31/07/2026</a:t>
             </a:fld>
             <a:endParaRPr lang="pt-BR"/>
           </a:p>
@@ -4854,7 +4854,7 @@
           <a:p>
             <a:fld id="{1A7E88B7-70CE-4035-AE73-13FA6FB985D4}" type="slidenum">
               <a:rPr lang="pt-BR" smtClean="0"/>
-              <a:t>‹#›</a:t>
+              <a:t>‹nº›</a:t>
             </a:fld>
             <a:endParaRPr lang="pt-BR"/>
           </a:p>
@@ -5111,7 +5111,7 @@
           <a:p>
             <a:fld id="{63289F7E-B80B-496E-81B4-D396C37C9454}" type="datetimeFigureOut">
               <a:rPr lang="pt-BR" smtClean="0"/>
-              <a:t>26/02/2026</a:t>
+              <a:t>31/07/2026</a:t>
             </a:fld>
             <a:endParaRPr lang="pt-BR"/>
           </a:p>
@@ -5165,7 +5165,7 @@
           <a:p>
             <a:fld id="{1A7E88B7-70CE-4035-AE73-13FA6FB985D4}" type="slidenum">
               <a:rPr lang="pt-BR" smtClean="0"/>
-              <a:t>‹#›</a:t>
+              <a:t>‹nº›</a:t>
             </a:fld>
             <a:endParaRPr lang="pt-BR"/>
           </a:p>
@@ -5399,7 +5399,7 @@
           <a:p>
             <a:fld id="{63289F7E-B80B-496E-81B4-D396C37C9454}" type="datetimeFigureOut">
               <a:rPr lang="pt-BR" smtClean="0"/>
-              <a:t>26/02/2026</a:t>
+              <a:t>31/07/2026</a:t>
             </a:fld>
             <a:endParaRPr lang="pt-BR"/>
           </a:p>
@@ -5453,7 +5453,7 @@
           <a:p>
             <a:fld id="{1A7E88B7-70CE-4035-AE73-13FA6FB985D4}" type="slidenum">
               <a:rPr lang="pt-BR" smtClean="0"/>
-              <a:t>‹#›</a:t>
+              <a:t>‹nº›</a:t>
             </a:fld>
             <a:endParaRPr lang="pt-BR"/>
           </a:p>
@@ -5640,7 +5640,7 @@
           <a:p>
             <a:fld id="{63289F7E-B80B-496E-81B4-D396C37C9454}" type="datetimeFigureOut">
               <a:rPr lang="pt-BR" smtClean="0"/>
-              <a:t>26/02/2026</a:t>
+              <a:t>31/07/2026</a:t>
             </a:fld>
             <a:endParaRPr lang="pt-BR"/>
           </a:p>
@@ -5730,7 +5730,7 @@
           <a:p>
             <a:fld id="{1A7E88B7-70CE-4035-AE73-13FA6FB985D4}" type="slidenum">
               <a:rPr lang="pt-BR" smtClean="0"/>
-              <a:t>‹#›</a:t>
+              <a:t>‹nº›</a:t>
             </a:fld>
             <a:endParaRPr lang="pt-BR"/>
           </a:p>
@@ -10929,21 +10929,21 @@
                                   <m:rPr>
                                     <m:nor/>
                                   </m:rPr>
-                                  <a:rPr lang="pt-BR" sz="2200" i="1" dirty="0"/>
+                                  <a:rPr lang="pt-BR" sz="2200" i="0" dirty="0"/>
                                   <m:t>esporte</m:t>
                                 </m:r>
                                 <m:r>
                                   <m:rPr>
                                     <m:nor/>
                                   </m:rPr>
-                                  <a:rPr lang="pt-BR" sz="2200" b="0" i="1" dirty="0" smtClean="0"/>
+                                  <a:rPr lang="pt-BR" sz="2200" b="0" i="0" dirty="0" smtClean="0"/>
                                   <m:t>s</m:t>
                                 </m:r>
                                 <m:r>
                                   <m:rPr>
                                     <m:nor/>
                                   </m:rPr>
-                                  <a:rPr lang="pt-BR" sz="2200" b="0" i="1" dirty="0" smtClean="0"/>
+                                  <a:rPr lang="pt-BR" sz="2200" b="0" i="0" dirty="0" smtClean="0"/>
                                   <m:t>:     </m:t>
                                 </m:r>
                                 <m:sSup>
@@ -11064,28 +11064,28 @@
                                   <m:rPr>
                                     <m:nor/>
                                   </m:rPr>
-                                  <a:rPr lang="pt-BR" sz="2200" i="1" dirty="0"/>
+                                  <a:rPr lang="pt-BR" sz="2200" i="0" dirty="0"/>
                                   <m:t>pol</m:t>
                                 </m:r>
                                 <m:r>
                                   <m:rPr>
                                     <m:nor/>
                                   </m:rPr>
-                                  <a:rPr lang="pt-BR" sz="2200" i="1" dirty="0"/>
+                                  <a:rPr lang="pt-BR" sz="2200" i="0" dirty="0"/>
                                   <m:t>í</m:t>
                                 </m:r>
                                 <m:r>
                                   <m:rPr>
                                     <m:nor/>
                                   </m:rPr>
-                                  <a:rPr lang="pt-BR" sz="2200" i="1" dirty="0"/>
+                                  <a:rPr lang="pt-BR" sz="2200" i="0" dirty="0"/>
                                   <m:t>tica</m:t>
                                 </m:r>
                                 <m:r>
                                   <m:rPr>
                                     <m:nor/>
                                   </m:rPr>
-                                  <a:rPr lang="pt-BR" sz="2200" i="1" dirty="0"/>
+                                  <a:rPr lang="pt-BR" sz="2200" i="0" dirty="0"/>
                                   <m:t>:       </m:t>
                                 </m:r>
                                 <m:sSup>
@@ -11224,28 +11224,28 @@
                                         <m:rPr>
                                           <m:nor/>
                                         </m:rPr>
-                                        <a:rPr lang="pt-BR" sz="2200" i="1" dirty="0"/>
+                                        <a:rPr lang="pt-BR" sz="2200" i="0" dirty="0"/>
                                         <m:t>ci</m:t>
                                       </m:r>
                                       <m:r>
                                         <m:rPr>
                                           <m:nor/>
                                         </m:rPr>
-                                        <a:rPr lang="pt-BR" sz="2200" i="1" dirty="0"/>
+                                        <a:rPr lang="pt-BR" sz="2200" i="0" dirty="0"/>
                                         <m:t>ê</m:t>
                                       </m:r>
                                       <m:r>
                                         <m:rPr>
                                           <m:nor/>
                                         </m:rPr>
-                                        <a:rPr lang="pt-BR" sz="2200" i="1" dirty="0"/>
+                                        <a:rPr lang="pt-BR" sz="2200" i="0" dirty="0"/>
                                         <m:t>ncias</m:t>
                                       </m:r>
                                       <m:r>
                                         <m:rPr>
                                           <m:nor/>
                                         </m:rPr>
-                                        <a:rPr lang="pt-BR" sz="2200" i="1" dirty="0"/>
+                                        <a:rPr lang="pt-BR" sz="2200" i="0" dirty="0"/>
                                         <m:t>: </m:t>
                                       </m:r>
                                       <m:sSup>
@@ -11372,14 +11372,14 @@
                                         <m:rPr>
                                           <m:nor/>
                                         </m:rPr>
-                                        <a:rPr lang="pt-BR" sz="2200" i="1" dirty="0"/>
+                                        <a:rPr lang="pt-BR" sz="2200" i="0" dirty="0"/>
                                         <m:t>variedades</m:t>
                                       </m:r>
                                       <m:r>
                                         <m:rPr>
                                           <m:nor/>
                                         </m:rPr>
-                                        <a:rPr lang="pt-BR" sz="2200" i="1" dirty="0"/>
+                                        <a:rPr lang="pt-BR" sz="2200" i="0" dirty="0"/>
                                         <m:t>: </m:t>
                                       </m:r>
                                       <m:sSup>
@@ -14427,21 +14427,21 @@
                                 <m:rPr>
                                   <m:nor/>
                                 </m:rPr>
-                                <a:rPr lang="pt-BR" sz="2400" dirty="0"/>
+                                <a:rPr lang="pt-BR" sz="2400" i="0" dirty="0"/>
                                 <m:t>ndetermina</m:t>
                               </m:r>
                               <m:r>
                                 <m:rPr>
                                   <m:nor/>
                                 </m:rPr>
-                                <a:rPr lang="pt-BR" sz="2400" dirty="0"/>
+                                <a:rPr lang="pt-BR" sz="2400" i="0" dirty="0"/>
                                 <m:t>çã</m:t>
                               </m:r>
                               <m:r>
                                 <m:rPr>
                                   <m:nor/>
                                 </m:rPr>
-                                <a:rPr lang="pt-BR" sz="2400" dirty="0"/>
+                                <a:rPr lang="pt-BR" sz="2400" i="0" dirty="0"/>
                                 <m:t>o</m:t>
                               </m:r>
                               <m:r>
@@ -42790,7 +42790,7 @@
           <p:nvPr>
             <p:extLst>
               <p:ext uri="{D42A27DB-BD31-4B8C-83A1-F6EECF244321}">
-                <p14:modId xmlns:p14="http://schemas.microsoft.com/office/powerpoint/2010/main" val="662083701"/>
+                <p14:modId xmlns:p14="http://schemas.microsoft.com/office/powerpoint/2010/main" val="2432590914"/>
               </p:ext>
             </p:extLst>
           </p:nvPr>
@@ -43180,14 +43180,19 @@
                     <a:bodyPr/>
                     <a:lstStyle/>
                     <a:p>
-                      <a:pPr algn="ctr" rtl="0" fontAlgn="b">
+                      <a:pPr marL="0" algn="ctr" defTabSz="914400" rtl="0" eaLnBrk="1" fontAlgn="b" latinLnBrk="0" hangingPunct="1">
                         <a:buNone/>
                       </a:pPr>
                       <a:r>
-                        <a:rPr lang="en-US" sz="1400" dirty="0">
-                          <a:effectLst/>
+                        <a:rPr lang="en-US" sz="1400" kern="1200" dirty="0">
+                          <a:solidFill>
+                            <a:schemeClr val="tx1"/>
+                          </a:solidFill>
+                          <a:latin typeface="+mn-lt"/>
+                          <a:ea typeface="+mn-ea"/>
+                          <a:cs typeface="+mn-cs"/>
                         </a:rPr>
-                        <a:t>14/2/2026</a:t>
+                        <a:t>1/8/2026</a:t>
                       </a:r>
                     </a:p>
                   </a:txBody>
@@ -43460,14 +43465,19 @@
                     <a:bodyPr/>
                     <a:lstStyle/>
                     <a:p>
-                      <a:pPr algn="ctr" rtl="0" fontAlgn="b">
+                      <a:pPr marL="0" algn="ctr" defTabSz="914400" rtl="0" eaLnBrk="1" fontAlgn="b" latinLnBrk="0" hangingPunct="1">
                         <a:buNone/>
                       </a:pPr>
                       <a:r>
-                        <a:rPr lang="en-US" sz="1400">
-                          <a:effectLst/>
+                        <a:rPr lang="en-US" sz="1400" kern="1200">
+                          <a:solidFill>
+                            <a:schemeClr val="tx1"/>
+                          </a:solidFill>
+                          <a:latin typeface="+mn-lt"/>
+                          <a:ea typeface="+mn-ea"/>
+                          <a:cs typeface="+mn-cs"/>
                         </a:rPr>
-                        <a:t>21/2/2026</a:t>
+                        <a:t>8/8/2026</a:t>
                       </a:r>
                     </a:p>
                   </a:txBody>
@@ -43710,14 +43720,19 @@
                     <a:bodyPr/>
                     <a:lstStyle/>
                     <a:p>
-                      <a:pPr algn="ctr" rtl="0" fontAlgn="b">
+                      <a:pPr marL="0" algn="ctr" defTabSz="914400" rtl="0" eaLnBrk="1" fontAlgn="b" latinLnBrk="0" hangingPunct="1">
                         <a:buNone/>
                       </a:pPr>
                       <a:r>
-                        <a:rPr lang="en-US" sz="1400">
-                          <a:effectLst/>
+                        <a:rPr lang="en-US" sz="1400" kern="1200" dirty="0">
+                          <a:solidFill>
+                            <a:schemeClr val="tx1"/>
+                          </a:solidFill>
+                          <a:latin typeface="+mn-lt"/>
+                          <a:ea typeface="+mn-ea"/>
+                          <a:cs typeface="+mn-cs"/>
                         </a:rPr>
-                        <a:t>28/2/2026</a:t>
+                        <a:t>15/8/2026</a:t>
                       </a:r>
                     </a:p>
                   </a:txBody>
@@ -43890,14 +43905,14 @@
                     <a:p>
                       <a:pPr algn="ctr" rtl="0" fontAlgn="b"/>
                       <a:r>
-                        <a:rPr lang="en-US" sz="1400">
+                        <a:rPr lang="en-US" sz="1400" b="0" dirty="0">
+                          <a:solidFill>
+                            <a:schemeClr val="tx1"/>
+                          </a:solidFill>
                           <a:effectLst/>
                         </a:rPr>
                         <a:t>4</a:t>
                       </a:r>
-                      <a:endParaRPr lang="en-US" sz="1400" dirty="0">
-                        <a:effectLst/>
-                      </a:endParaRPr>
                     </a:p>
                   </a:txBody>
                   <a:tcPr marL="28575" marR="28575" marT="19050" marB="19050" anchor="b">
@@ -43944,14 +43959,19 @@
                     <a:bodyPr/>
                     <a:lstStyle/>
                     <a:p>
-                      <a:pPr algn="ctr" rtl="0" fontAlgn="b">
+                      <a:pPr marL="0" algn="ctr" defTabSz="914400" rtl="0" eaLnBrk="1" fontAlgn="b" latinLnBrk="0" hangingPunct="1">
                         <a:buNone/>
                       </a:pPr>
                       <a:r>
-                        <a:rPr lang="en-US" sz="1400">
-                          <a:effectLst/>
+                        <a:rPr lang="en-US" sz="1400" kern="1200">
+                          <a:solidFill>
+                            <a:schemeClr val="tx1"/>
+                          </a:solidFill>
+                          <a:latin typeface="+mn-lt"/>
+                          <a:ea typeface="+mn-ea"/>
+                          <a:cs typeface="+mn-cs"/>
                         </a:rPr>
-                        <a:t>7/3/2026</a:t>
+                        <a:t>22/8/2026</a:t>
                       </a:r>
                     </a:p>
                   </a:txBody>
@@ -44124,14 +44144,14 @@
                     <a:p>
                       <a:pPr algn="ctr" rtl="0" fontAlgn="b"/>
                       <a:r>
-                        <a:rPr lang="en-US" sz="1400">
+                        <a:rPr lang="en-US" sz="1400" b="0" dirty="0">
+                          <a:solidFill>
+                            <a:schemeClr val="tx1"/>
+                          </a:solidFill>
                           <a:effectLst/>
                         </a:rPr>
                         <a:t>5</a:t>
                       </a:r>
-                      <a:endParaRPr lang="en-US" sz="1400" dirty="0">
-                        <a:effectLst/>
-                      </a:endParaRPr>
                     </a:p>
                   </a:txBody>
                   <a:tcPr marL="28575" marR="28575" marT="19050" marB="19050" anchor="b">
@@ -44178,14 +44198,19 @@
                     <a:bodyPr/>
                     <a:lstStyle/>
                     <a:p>
-                      <a:pPr algn="ctr" rtl="0" fontAlgn="b">
+                      <a:pPr marL="0" algn="ctr" defTabSz="914400" rtl="0" eaLnBrk="1" fontAlgn="b" latinLnBrk="0" hangingPunct="1">
                         <a:buNone/>
                       </a:pPr>
                       <a:r>
-                        <a:rPr lang="en-US" sz="1400">
-                          <a:effectLst/>
+                        <a:rPr lang="en-US" sz="1400" kern="1200" dirty="0">
+                          <a:solidFill>
+                            <a:schemeClr val="tx1"/>
+                          </a:solidFill>
+                          <a:latin typeface="+mn-lt"/>
+                          <a:ea typeface="+mn-ea"/>
+                          <a:cs typeface="+mn-cs"/>
                         </a:rPr>
-                        <a:t>14/3/2026</a:t>
+                        <a:t>29/8/2026</a:t>
                       </a:r>
                     </a:p>
                   </a:txBody>
@@ -44358,14 +44383,14 @@
                     <a:p>
                       <a:pPr algn="ctr" rtl="0" fontAlgn="b"/>
                       <a:r>
-                        <a:rPr lang="en-US" sz="1400">
+                        <a:rPr lang="en-US" sz="1400" b="0" dirty="0">
+                          <a:solidFill>
+                            <a:schemeClr val="tx1"/>
+                          </a:solidFill>
                           <a:effectLst/>
                         </a:rPr>
                         <a:t>6</a:t>
                       </a:r>
-                      <a:endParaRPr lang="en-US" sz="1400" dirty="0">
-                        <a:effectLst/>
-                      </a:endParaRPr>
                     </a:p>
                   </a:txBody>
                   <a:tcPr marL="28575" marR="28575" marT="19050" marB="19050" anchor="b">
@@ -44412,14 +44437,19 @@
                     <a:bodyPr/>
                     <a:lstStyle/>
                     <a:p>
-                      <a:pPr algn="ctr" rtl="0" fontAlgn="b">
+                      <a:pPr marL="0" algn="ctr" defTabSz="914400" rtl="0" eaLnBrk="1" fontAlgn="b" latinLnBrk="0" hangingPunct="1">
                         <a:buNone/>
                       </a:pPr>
                       <a:r>
-                        <a:rPr lang="en-US" sz="1400">
-                          <a:effectLst/>
+                        <a:rPr lang="en-US" sz="1400" kern="1200">
+                          <a:solidFill>
+                            <a:schemeClr val="tx1"/>
+                          </a:solidFill>
+                          <a:latin typeface="+mn-lt"/>
+                          <a:ea typeface="+mn-ea"/>
+                          <a:cs typeface="+mn-cs"/>
                         </a:rPr>
-                        <a:t>21/3/2026</a:t>
+                        <a:t>5/9/2026</a:t>
                       </a:r>
                     </a:p>
                   </a:txBody>
@@ -44592,12 +44622,18 @@
                     <a:p>
                       <a:pPr algn="ctr" rtl="0" fontAlgn="b"/>
                       <a:r>
-                        <a:rPr lang="en-US" sz="1400">
+                        <a:rPr lang="en-US" sz="1400" b="0">
+                          <a:solidFill>
+                            <a:schemeClr val="tx1"/>
+                          </a:solidFill>
                           <a:effectLst/>
                         </a:rPr>
                         <a:t>7</a:t>
                       </a:r>
-                      <a:endParaRPr lang="en-US" sz="1400" dirty="0">
+                      <a:endParaRPr lang="en-US" sz="1400" b="0" dirty="0">
+                        <a:solidFill>
+                          <a:schemeClr val="tx1"/>
+                        </a:solidFill>
                         <a:effectLst/>
                       </a:endParaRPr>
                     </a:p>
@@ -44646,14 +44682,19 @@
                     <a:bodyPr/>
                     <a:lstStyle/>
                     <a:p>
-                      <a:pPr algn="ctr" rtl="0" fontAlgn="b">
+                      <a:pPr marL="0" algn="ctr" defTabSz="914400" rtl="0" eaLnBrk="1" fontAlgn="b" latinLnBrk="0" hangingPunct="1">
                         <a:buNone/>
                       </a:pPr>
                       <a:r>
-                        <a:rPr lang="en-US" sz="1400">
-                          <a:effectLst/>
+                        <a:rPr lang="en-US" sz="1400" kern="1200">
+                          <a:solidFill>
+                            <a:schemeClr val="tx1"/>
+                          </a:solidFill>
+                          <a:latin typeface="+mn-lt"/>
+                          <a:ea typeface="+mn-ea"/>
+                          <a:cs typeface="+mn-cs"/>
                         </a:rPr>
-                        <a:t>28/3/2026</a:t>
+                        <a:t>12/9/2026</a:t>
                       </a:r>
                     </a:p>
                   </a:txBody>
@@ -44826,9 +44867,9 @@
                     <a:p>
                       <a:pPr algn="ctr" rtl="0" fontAlgn="b"/>
                       <a:r>
-                        <a:rPr lang="en-US" sz="1400" b="1" dirty="0">
+                        <a:rPr lang="en-US" sz="1400" b="0" dirty="0">
                           <a:solidFill>
-                            <a:srgbClr val="00B0F0"/>
+                            <a:schemeClr val="tx1"/>
                           </a:solidFill>
                           <a:effectLst/>
                         </a:rPr>
@@ -44880,17 +44921,19 @@
                     <a:bodyPr/>
                     <a:lstStyle/>
                     <a:p>
-                      <a:pPr algn="ctr" rtl="0" fontAlgn="b">
+                      <a:pPr marL="0" algn="ctr" defTabSz="914400" rtl="0" eaLnBrk="1" fontAlgn="b" latinLnBrk="0" hangingPunct="1">
                         <a:buNone/>
                       </a:pPr>
                       <a:r>
-                        <a:rPr lang="en-US" sz="1400" b="1" dirty="0">
+                        <a:rPr lang="en-US" sz="1400" kern="1200" dirty="0">
                           <a:solidFill>
-                            <a:srgbClr val="00B0F0"/>
+                            <a:schemeClr val="tx1"/>
                           </a:solidFill>
-                          <a:effectLst/>
+                          <a:latin typeface="+mn-lt"/>
+                          <a:ea typeface="+mn-ea"/>
+                          <a:cs typeface="+mn-cs"/>
                         </a:rPr>
-                        <a:t>4/4/2026*</a:t>
+                        <a:t>19/9/2026</a:t>
                       </a:r>
                     </a:p>
                   </a:txBody>
@@ -45084,12 +45127,18 @@
                     <a:p>
                       <a:pPr algn="ctr" rtl="0" fontAlgn="b"/>
                       <a:r>
-                        <a:rPr lang="en-US" sz="1400">
+                        <a:rPr lang="en-US" sz="1400" b="0">
+                          <a:solidFill>
+                            <a:schemeClr val="tx1"/>
+                          </a:solidFill>
                           <a:effectLst/>
                         </a:rPr>
                         <a:t>9</a:t>
                       </a:r>
-                      <a:endParaRPr lang="en-US" sz="1400" dirty="0">
+                      <a:endParaRPr lang="en-US" sz="1400" b="0" dirty="0">
+                        <a:solidFill>
+                          <a:schemeClr val="tx1"/>
+                        </a:solidFill>
                         <a:effectLst/>
                       </a:endParaRPr>
                     </a:p>
@@ -45138,14 +45187,19 @@
                     <a:bodyPr/>
                     <a:lstStyle/>
                     <a:p>
-                      <a:pPr algn="ctr" rtl="0" fontAlgn="b">
+                      <a:pPr marL="0" algn="ctr" defTabSz="914400" rtl="0" eaLnBrk="1" fontAlgn="b" latinLnBrk="0" hangingPunct="1">
                         <a:buNone/>
                       </a:pPr>
                       <a:r>
-                        <a:rPr lang="en-US" sz="1400">
-                          <a:effectLst/>
+                        <a:rPr lang="en-US" sz="1400" kern="1200">
+                          <a:solidFill>
+                            <a:schemeClr val="tx1"/>
+                          </a:solidFill>
+                          <a:latin typeface="+mn-lt"/>
+                          <a:ea typeface="+mn-ea"/>
+                          <a:cs typeface="+mn-cs"/>
                         </a:rPr>
-                        <a:t>11/4/2026</a:t>
+                        <a:t>26/9/2026</a:t>
                       </a:r>
                     </a:p>
                   </a:txBody>
@@ -45320,500 +45374,13 @@
                     <a:p>
                       <a:pPr algn="ctr" rtl="0" fontAlgn="b"/>
                       <a:r>
-                        <a:rPr lang="en-US" sz="1400">
-                          <a:effectLst/>
-                        </a:rPr>
-                        <a:t>10</a:t>
-                      </a:r>
-                      <a:endParaRPr lang="en-US" sz="1400" dirty="0">
-                        <a:effectLst/>
-                      </a:endParaRPr>
-                    </a:p>
-                  </a:txBody>
-                  <a:tcPr marL="28575" marR="28575" marT="19050" marB="19050" anchor="b">
-                    <a:lnL w="9525" cap="flat" cmpd="sng" algn="ctr">
-                      <a:solidFill>
-                        <a:srgbClr val="000000"/>
-                      </a:solidFill>
-                      <a:prstDash val="solid"/>
-                      <a:round/>
-                      <a:headEnd type="none" w="med" len="med"/>
-                      <a:tailEnd type="none" w="med" len="med"/>
-                    </a:lnL>
-                    <a:lnR w="9525" cap="flat" cmpd="sng" algn="ctr">
-                      <a:solidFill>
-                        <a:srgbClr val="CCCCCC"/>
-                      </a:solidFill>
-                      <a:prstDash val="solid"/>
-                      <a:round/>
-                      <a:headEnd type="none" w="med" len="med"/>
-                      <a:tailEnd type="none" w="med" len="med"/>
-                    </a:lnR>
-                    <a:lnT w="9525" cap="flat" cmpd="sng" algn="ctr">
-                      <a:solidFill>
-                        <a:srgbClr val="CCCCCC"/>
-                      </a:solidFill>
-                      <a:prstDash val="solid"/>
-                      <a:round/>
-                      <a:headEnd type="none" w="med" len="med"/>
-                      <a:tailEnd type="none" w="med" len="med"/>
-                    </a:lnT>
-                    <a:lnB w="9525" cap="flat" cmpd="sng" algn="ctr">
-                      <a:solidFill>
-                        <a:srgbClr val="CCCCCC"/>
-                      </a:solidFill>
-                      <a:prstDash val="solid"/>
-                      <a:round/>
-                      <a:headEnd type="none" w="med" len="med"/>
-                      <a:tailEnd type="none" w="med" len="med"/>
-                    </a:lnB>
-                  </a:tcPr>
-                </a:tc>
-                <a:tc>
-                  <a:txBody>
-                    <a:bodyPr/>
-                    <a:lstStyle/>
-                    <a:p>
-                      <a:pPr algn="ctr" rtl="0" fontAlgn="b">
-                        <a:buNone/>
-                      </a:pPr>
-                      <a:r>
-                        <a:rPr lang="en-US" sz="1400">
-                          <a:effectLst/>
-                        </a:rPr>
-                        <a:t>18/4/2026</a:t>
-                      </a:r>
-                    </a:p>
-                  </a:txBody>
-                  <a:tcPr marL="28575" marR="28575" marT="19050" marB="19050" anchor="b">
-                    <a:lnL w="9525" cap="flat" cmpd="sng" algn="ctr">
-                      <a:solidFill>
-                        <a:srgbClr val="CCCCCC"/>
-                      </a:solidFill>
-                      <a:prstDash val="solid"/>
-                      <a:round/>
-                      <a:headEnd type="none" w="med" len="med"/>
-                      <a:tailEnd type="none" w="med" len="med"/>
-                    </a:lnL>
-                    <a:lnR w="9525" cap="flat" cmpd="sng" algn="ctr">
-                      <a:solidFill>
-                        <a:srgbClr val="CCCCCC"/>
-                      </a:solidFill>
-                      <a:prstDash val="solid"/>
-                      <a:round/>
-                      <a:headEnd type="none" w="med" len="med"/>
-                      <a:tailEnd type="none" w="med" len="med"/>
-                    </a:lnR>
-                    <a:lnT w="9525" cap="flat" cmpd="sng" algn="ctr">
-                      <a:solidFill>
-                        <a:srgbClr val="CCCCCC"/>
-                      </a:solidFill>
-                      <a:prstDash val="solid"/>
-                      <a:round/>
-                      <a:headEnd type="none" w="med" len="med"/>
-                      <a:tailEnd type="none" w="med" len="med"/>
-                    </a:lnT>
-                    <a:lnB w="9525" cap="flat" cmpd="sng" algn="ctr">
-                      <a:solidFill>
-                        <a:srgbClr val="CCCCCC"/>
-                      </a:solidFill>
-                      <a:prstDash val="solid"/>
-                      <a:round/>
-                      <a:headEnd type="none" w="med" len="med"/>
-                      <a:tailEnd type="none" w="med" len="med"/>
-                    </a:lnB>
-                  </a:tcPr>
-                </a:tc>
-                <a:tc vMerge="1">
-                  <a:txBody>
-                    <a:bodyPr/>
-                    <a:lstStyle/>
-                    <a:p>
-                      <a:pPr algn="ctr" rtl="0" fontAlgn="b"/>
-                      <a:endParaRPr lang="en-US" sz="1400" dirty="0">
-                        <a:effectLst/>
-                      </a:endParaRPr>
-                    </a:p>
-                  </a:txBody>
-                  <a:tcPr marL="10288" marR="10288" marT="6859" marB="6859" anchor="b">
-                    <a:lnL w="9525" cap="flat" cmpd="sng" algn="ctr">
-                      <a:solidFill>
-                        <a:srgbClr val="CCCCCC"/>
-                      </a:solidFill>
-                      <a:prstDash val="solid"/>
-                      <a:round/>
-                      <a:headEnd type="none" w="med" len="med"/>
-                      <a:tailEnd type="none" w="med" len="med"/>
-                    </a:lnL>
-                    <a:lnR w="9525" cap="flat" cmpd="sng" algn="ctr">
-                      <a:solidFill>
-                        <a:srgbClr val="CCCCCC"/>
-                      </a:solidFill>
-                      <a:prstDash val="solid"/>
-                      <a:round/>
-                      <a:headEnd type="none" w="med" len="med"/>
-                      <a:tailEnd type="none" w="med" len="med"/>
-                    </a:lnR>
-                    <a:lnT w="9525" cap="flat" cmpd="sng" algn="ctr">
-                      <a:solidFill>
-                        <a:srgbClr val="CCCCCC"/>
-                      </a:solidFill>
-                      <a:prstDash val="solid"/>
-                      <a:round/>
-                      <a:headEnd type="none" w="med" len="med"/>
-                      <a:tailEnd type="none" w="med" len="med"/>
-                    </a:lnT>
-                    <a:lnB w="9525" cap="flat" cmpd="sng" algn="ctr">
-                      <a:solidFill>
-                        <a:srgbClr val="CCCCCC"/>
-                      </a:solidFill>
-                      <a:prstDash val="solid"/>
-                      <a:round/>
-                      <a:headEnd type="none" w="med" len="med"/>
-                      <a:tailEnd type="none" w="med" len="med"/>
-                    </a:lnB>
-                  </a:tcPr>
-                </a:tc>
-                <a:tc vMerge="1">
-                  <a:txBody>
-                    <a:bodyPr/>
-                    <a:lstStyle/>
-                    <a:p>
-                      <a:endParaRPr lang="en-US"/>
-                    </a:p>
-                  </a:txBody>
-                  <a:tcPr/>
-                </a:tc>
-                <a:tc>
-                  <a:txBody>
-                    <a:bodyPr/>
-                    <a:lstStyle/>
-                    <a:p>
-                      <a:pPr algn="ctr" rtl="0" fontAlgn="b"/>
-                      <a:r>
-                        <a:rPr lang="pt-BR" sz="1400" dirty="0"/>
-                        <a:t>Introdução</a:t>
-                      </a:r>
-                      <a:r>
-                        <a:rPr lang="pt-BR" sz="1400" baseline="0" dirty="0"/>
-                        <a:t> ao Aprendizado de Máquina</a:t>
-                      </a:r>
-                      <a:endParaRPr lang="en-US" sz="1400" dirty="0">
-                        <a:effectLst/>
-                      </a:endParaRPr>
-                    </a:p>
-                  </a:txBody>
-                  <a:tcPr marL="10288" marR="10288" marT="6859" marB="6859" anchor="b">
-                    <a:lnL w="9525" cap="flat" cmpd="sng" algn="ctr">
-                      <a:solidFill>
-                        <a:srgbClr val="CCCCCC"/>
-                      </a:solidFill>
-                      <a:prstDash val="solid"/>
-                      <a:round/>
-                      <a:headEnd type="none" w="med" len="med"/>
-                      <a:tailEnd type="none" w="med" len="med"/>
-                    </a:lnL>
-                    <a:lnR w="9525" cap="flat" cmpd="sng" algn="ctr">
-                      <a:solidFill>
-                        <a:srgbClr val="000000"/>
-                      </a:solidFill>
-                      <a:prstDash val="solid"/>
-                      <a:round/>
-                      <a:headEnd type="none" w="med" len="med"/>
-                      <a:tailEnd type="none" w="med" len="med"/>
-                    </a:lnR>
-                    <a:lnT w="9525" cap="flat" cmpd="sng" algn="ctr">
-                      <a:solidFill>
-                        <a:srgbClr val="CCCCCC"/>
-                      </a:solidFill>
-                      <a:prstDash val="solid"/>
-                      <a:round/>
-                      <a:headEnd type="none" w="med" len="med"/>
-                      <a:tailEnd type="none" w="med" len="med"/>
-                    </a:lnT>
-                    <a:lnB w="9525" cap="flat" cmpd="sng" algn="ctr">
-                      <a:solidFill>
-                        <a:srgbClr val="CCCCCC"/>
-                      </a:solidFill>
-                      <a:prstDash val="solid"/>
-                      <a:round/>
-                      <a:headEnd type="none" w="med" len="med"/>
-                      <a:tailEnd type="none" w="med" len="med"/>
-                    </a:lnB>
-                  </a:tcPr>
-                </a:tc>
-                <a:extLst>
-                  <a:ext uri="{0D108BD9-81ED-4DB2-BD59-A6C34878D82A}">
-                    <a16:rowId xmlns:a16="http://schemas.microsoft.com/office/drawing/2014/main" val="10010"/>
-                  </a:ext>
-                </a:extLst>
-              </a:tr>
-              <a:tr h="232673">
-                <a:tc>
-                  <a:txBody>
-                    <a:bodyPr/>
-                    <a:lstStyle/>
-                    <a:p>
-                      <a:pPr algn="ctr" rtl="0" fontAlgn="b"/>
-                      <a:r>
-                        <a:rPr lang="en-US" sz="1400" kern="1200">
-                          <a:solidFill>
-                            <a:schemeClr val="tx1"/>
-                          </a:solidFill>
-                          <a:effectLst/>
-                          <a:latin typeface="+mn-lt"/>
-                          <a:ea typeface="+mn-ea"/>
-                          <a:cs typeface="+mn-cs"/>
-                        </a:rPr>
-                        <a:t>11</a:t>
-                      </a:r>
-                      <a:endParaRPr lang="en-US" sz="1400" kern="1200" dirty="0">
-                        <a:solidFill>
-                          <a:schemeClr val="tx1"/>
-                        </a:solidFill>
-                        <a:effectLst/>
-                        <a:latin typeface="+mn-lt"/>
-                        <a:ea typeface="+mn-ea"/>
-                        <a:cs typeface="+mn-cs"/>
-                      </a:endParaRPr>
-                    </a:p>
-                  </a:txBody>
-                  <a:tcPr marL="28575" marR="28575" marT="19050" marB="19050" anchor="b">
-                    <a:lnL w="9525" cap="flat" cmpd="sng" algn="ctr">
-                      <a:solidFill>
-                        <a:srgbClr val="000000"/>
-                      </a:solidFill>
-                      <a:prstDash val="solid"/>
-                      <a:round/>
-                      <a:headEnd type="none" w="med" len="med"/>
-                      <a:tailEnd type="none" w="med" len="med"/>
-                    </a:lnL>
-                    <a:lnR w="9525" cap="flat" cmpd="sng" algn="ctr">
-                      <a:solidFill>
-                        <a:srgbClr val="CCCCCC"/>
-                      </a:solidFill>
-                      <a:prstDash val="solid"/>
-                      <a:round/>
-                      <a:headEnd type="none" w="med" len="med"/>
-                      <a:tailEnd type="none" w="med" len="med"/>
-                    </a:lnR>
-                    <a:lnT w="9525" cap="flat" cmpd="sng" algn="ctr">
-                      <a:solidFill>
-                        <a:srgbClr val="CCCCCC"/>
-                      </a:solidFill>
-                      <a:prstDash val="solid"/>
-                      <a:round/>
-                      <a:headEnd type="none" w="med" len="med"/>
-                      <a:tailEnd type="none" w="med" len="med"/>
-                    </a:lnT>
-                    <a:lnB w="9525" cap="flat" cmpd="sng" algn="ctr">
-                      <a:solidFill>
-                        <a:srgbClr val="CCCCCC"/>
-                      </a:solidFill>
-                      <a:prstDash val="solid"/>
-                      <a:round/>
-                      <a:headEnd type="none" w="med" len="med"/>
-                      <a:tailEnd type="none" w="med" len="med"/>
-                    </a:lnB>
-                  </a:tcPr>
-                </a:tc>
-                <a:tc>
-                  <a:txBody>
-                    <a:bodyPr/>
-                    <a:lstStyle/>
-                    <a:p>
-                      <a:pPr algn="ctr" rtl="0" fontAlgn="b">
-                        <a:buNone/>
-                      </a:pPr>
-                      <a:r>
-                        <a:rPr lang="en-US" sz="1400">
-                          <a:effectLst/>
-                        </a:rPr>
-                        <a:t>25/4/2026</a:t>
-                      </a:r>
-                    </a:p>
-                  </a:txBody>
-                  <a:tcPr marL="28575" marR="28575" marT="19050" marB="19050" anchor="b">
-                    <a:lnL w="9525" cap="flat" cmpd="sng" algn="ctr">
-                      <a:solidFill>
-                        <a:srgbClr val="CCCCCC"/>
-                      </a:solidFill>
-                      <a:prstDash val="solid"/>
-                      <a:round/>
-                      <a:headEnd type="none" w="med" len="med"/>
-                      <a:tailEnd type="none" w="med" len="med"/>
-                    </a:lnL>
-                    <a:lnR w="9525" cap="flat" cmpd="sng" algn="ctr">
-                      <a:solidFill>
-                        <a:srgbClr val="CCCCCC"/>
-                      </a:solidFill>
-                      <a:prstDash val="solid"/>
-                      <a:round/>
-                      <a:headEnd type="none" w="med" len="med"/>
-                      <a:tailEnd type="none" w="med" len="med"/>
-                    </a:lnR>
-                    <a:lnT w="9525" cap="flat" cmpd="sng" algn="ctr">
-                      <a:solidFill>
-                        <a:srgbClr val="CCCCCC"/>
-                      </a:solidFill>
-                      <a:prstDash val="solid"/>
-                      <a:round/>
-                      <a:headEnd type="none" w="med" len="med"/>
-                      <a:tailEnd type="none" w="med" len="med"/>
-                    </a:lnT>
-                    <a:lnB w="9525" cap="flat" cmpd="sng" algn="ctr">
-                      <a:solidFill>
-                        <a:srgbClr val="CCCCCC"/>
-                      </a:solidFill>
-                      <a:prstDash val="solid"/>
-                      <a:round/>
-                      <a:headEnd type="none" w="med" len="med"/>
-                      <a:tailEnd type="none" w="med" len="med"/>
-                    </a:lnB>
-                  </a:tcPr>
-                </a:tc>
-                <a:tc vMerge="1">
-                  <a:txBody>
-                    <a:bodyPr/>
-                    <a:lstStyle/>
-                    <a:p>
-                      <a:pPr algn="ctr" rtl="0" fontAlgn="b"/>
-                      <a:endParaRPr lang="en-US" sz="1400" dirty="0">
-                        <a:effectLst/>
-                      </a:endParaRPr>
-                    </a:p>
-                  </a:txBody>
-                  <a:tcPr marL="10288" marR="10288" marT="6859" marB="6859" anchor="b">
-                    <a:lnL w="9525" cap="flat" cmpd="sng" algn="ctr">
-                      <a:solidFill>
-                        <a:srgbClr val="CCCCCC"/>
-                      </a:solidFill>
-                      <a:prstDash val="solid"/>
-                      <a:round/>
-                      <a:headEnd type="none" w="med" len="med"/>
-                      <a:tailEnd type="none" w="med" len="med"/>
-                    </a:lnL>
-                    <a:lnR w="9525" cap="flat" cmpd="sng" algn="ctr">
-                      <a:solidFill>
-                        <a:srgbClr val="CCCCCC"/>
-                      </a:solidFill>
-                      <a:prstDash val="solid"/>
-                      <a:round/>
-                      <a:headEnd type="none" w="med" len="med"/>
-                      <a:tailEnd type="none" w="med" len="med"/>
-                    </a:lnR>
-                    <a:lnT w="9525" cap="flat" cmpd="sng" algn="ctr">
-                      <a:solidFill>
-                        <a:srgbClr val="CCCCCC"/>
-                      </a:solidFill>
-                      <a:prstDash val="solid"/>
-                      <a:round/>
-                      <a:headEnd type="none" w="med" len="med"/>
-                      <a:tailEnd type="none" w="med" len="med"/>
-                    </a:lnT>
-                    <a:lnB w="9525" cap="flat" cmpd="sng" algn="ctr">
-                      <a:solidFill>
-                        <a:srgbClr val="CCCCCC"/>
-                      </a:solidFill>
-                      <a:prstDash val="solid"/>
-                      <a:round/>
-                      <a:headEnd type="none" w="med" len="med"/>
-                      <a:tailEnd type="none" w="med" len="med"/>
-                    </a:lnB>
-                  </a:tcPr>
-                </a:tc>
-                <a:tc vMerge="1">
-                  <a:txBody>
-                    <a:bodyPr/>
-                    <a:lstStyle/>
-                    <a:p>
-                      <a:endParaRPr lang="en-US"/>
-                    </a:p>
-                  </a:txBody>
-                  <a:tcPr/>
-                </a:tc>
-                <a:tc>
-                  <a:txBody>
-                    <a:bodyPr/>
-                    <a:lstStyle/>
-                    <a:p>
-                      <a:pPr algn="ctr" rtl="0" fontAlgn="b"/>
-                      <a:r>
-                        <a:rPr lang="pt-BR" sz="1400" dirty="0"/>
-                        <a:t>Introdução</a:t>
-                      </a:r>
-                      <a:r>
-                        <a:rPr lang="pt-BR" sz="1400" baseline="0" dirty="0"/>
-                        <a:t> ao Aprendizado de Máquina</a:t>
-                      </a:r>
-                      <a:endParaRPr lang="en-US" sz="1400" b="1" dirty="0">
-                        <a:solidFill>
-                          <a:srgbClr val="FF0000"/>
-                        </a:solidFill>
-                        <a:effectLst/>
-                      </a:endParaRPr>
-                    </a:p>
-                  </a:txBody>
-                  <a:tcPr marL="10288" marR="10288" marT="6859" marB="6859" anchor="b">
-                    <a:lnL w="9525" cap="flat" cmpd="sng" algn="ctr">
-                      <a:solidFill>
-                        <a:srgbClr val="CCCCCC"/>
-                      </a:solidFill>
-                      <a:prstDash val="solid"/>
-                      <a:round/>
-                      <a:headEnd type="none" w="med" len="med"/>
-                      <a:tailEnd type="none" w="med" len="med"/>
-                    </a:lnL>
-                    <a:lnR w="9525" cap="flat" cmpd="sng" algn="ctr">
-                      <a:solidFill>
-                        <a:srgbClr val="000000"/>
-                      </a:solidFill>
-                      <a:prstDash val="solid"/>
-                      <a:round/>
-                      <a:headEnd type="none" w="med" len="med"/>
-                      <a:tailEnd type="none" w="med" len="med"/>
-                    </a:lnR>
-                    <a:lnT w="9525" cap="flat" cmpd="sng" algn="ctr">
-                      <a:solidFill>
-                        <a:srgbClr val="CCCCCC"/>
-                      </a:solidFill>
-                      <a:prstDash val="solid"/>
-                      <a:round/>
-                      <a:headEnd type="none" w="med" len="med"/>
-                      <a:tailEnd type="none" w="med" len="med"/>
-                    </a:lnT>
-                    <a:lnB w="9525" cap="flat" cmpd="sng" algn="ctr">
-                      <a:solidFill>
-                        <a:srgbClr val="CCCCCC"/>
-                      </a:solidFill>
-                      <a:prstDash val="solid"/>
-                      <a:round/>
-                      <a:headEnd type="none" w="med" len="med"/>
-                      <a:tailEnd type="none" w="med" len="med"/>
-                    </a:lnB>
-                  </a:tcPr>
-                </a:tc>
-                <a:extLst>
-                  <a:ext uri="{0D108BD9-81ED-4DB2-BD59-A6C34878D82A}">
-                    <a16:rowId xmlns:a16="http://schemas.microsoft.com/office/drawing/2014/main" val="10011"/>
-                  </a:ext>
-                </a:extLst>
-              </a:tr>
-              <a:tr h="232673">
-                <a:tc>
-                  <a:txBody>
-                    <a:bodyPr/>
-                    <a:lstStyle/>
-                    <a:p>
-                      <a:pPr algn="ctr" rtl="0" fontAlgn="b"/>
-                      <a:r>
                         <a:rPr lang="en-US" sz="1400" b="1" dirty="0">
                           <a:solidFill>
                             <a:srgbClr val="00B050"/>
                           </a:solidFill>
                           <a:effectLst/>
                         </a:rPr>
-                        <a:t>12</a:t>
+                        <a:t>10</a:t>
                       </a:r>
                     </a:p>
                   </a:txBody>
@@ -45861,17 +45428,19 @@
                     <a:bodyPr/>
                     <a:lstStyle/>
                     <a:p>
-                      <a:pPr algn="ctr" rtl="0" fontAlgn="b">
+                      <a:pPr marL="0" algn="ctr" defTabSz="914400" rtl="0" eaLnBrk="1" fontAlgn="b" latinLnBrk="0" hangingPunct="1">
                         <a:buNone/>
                       </a:pPr>
                       <a:r>
-                        <a:rPr lang="en-US" sz="1400" b="1" dirty="0">
+                        <a:rPr lang="en-US" sz="1400" b="1" kern="1200" dirty="0">
                           <a:solidFill>
                             <a:srgbClr val="00B050"/>
                           </a:solidFill>
-                          <a:effectLst/>
+                          <a:latin typeface="+mn-lt"/>
+                          <a:ea typeface="+mn-ea"/>
+                          <a:cs typeface="+mn-cs"/>
                         </a:rPr>
-                        <a:t>2/5/2026</a:t>
+                        <a:t>3/10/2026</a:t>
                       </a:r>
                     </a:p>
                   </a:txBody>
@@ -46041,9 +45610,532 @@
                           </a:solidFill>
                           <a:effectLst/>
                         </a:rPr>
-                        <a:t>(Sala I-18)</a:t>
+                        <a:t>(Sala ??)</a:t>
                       </a:r>
                       <a:endParaRPr lang="en-US" sz="1400" dirty="0">
+                        <a:effectLst/>
+                      </a:endParaRPr>
+                    </a:p>
+                  </a:txBody>
+                  <a:tcPr marL="10288" marR="10288" marT="6859" marB="6859" anchor="b">
+                    <a:lnL w="9525" cap="flat" cmpd="sng" algn="ctr">
+                      <a:solidFill>
+                        <a:srgbClr val="CCCCCC"/>
+                      </a:solidFill>
+                      <a:prstDash val="solid"/>
+                      <a:round/>
+                      <a:headEnd type="none" w="med" len="med"/>
+                      <a:tailEnd type="none" w="med" len="med"/>
+                    </a:lnL>
+                    <a:lnR w="9525" cap="flat" cmpd="sng" algn="ctr">
+                      <a:solidFill>
+                        <a:srgbClr val="000000"/>
+                      </a:solidFill>
+                      <a:prstDash val="solid"/>
+                      <a:round/>
+                      <a:headEnd type="none" w="med" len="med"/>
+                      <a:tailEnd type="none" w="med" len="med"/>
+                    </a:lnR>
+                    <a:lnT w="9525" cap="flat" cmpd="sng" algn="ctr">
+                      <a:solidFill>
+                        <a:srgbClr val="CCCCCC"/>
+                      </a:solidFill>
+                      <a:prstDash val="solid"/>
+                      <a:round/>
+                      <a:headEnd type="none" w="med" len="med"/>
+                      <a:tailEnd type="none" w="med" len="med"/>
+                    </a:lnT>
+                    <a:lnB w="9525" cap="flat" cmpd="sng" algn="ctr">
+                      <a:solidFill>
+                        <a:srgbClr val="CCCCCC"/>
+                      </a:solidFill>
+                      <a:prstDash val="solid"/>
+                      <a:round/>
+                      <a:headEnd type="none" w="med" len="med"/>
+                      <a:tailEnd type="none" w="med" len="med"/>
+                    </a:lnB>
+                  </a:tcPr>
+                </a:tc>
+                <a:extLst>
+                  <a:ext uri="{0D108BD9-81ED-4DB2-BD59-A6C34878D82A}">
+                    <a16:rowId xmlns:a16="http://schemas.microsoft.com/office/drawing/2014/main" val="10010"/>
+                  </a:ext>
+                </a:extLst>
+              </a:tr>
+              <a:tr h="232673">
+                <a:tc>
+                  <a:txBody>
+                    <a:bodyPr/>
+                    <a:lstStyle/>
+                    <a:p>
+                      <a:pPr algn="ctr" rtl="0" fontAlgn="b"/>
+                      <a:r>
+                        <a:rPr lang="en-US" sz="1400" b="0" kern="1200" dirty="0">
+                          <a:solidFill>
+                            <a:schemeClr val="tx1"/>
+                          </a:solidFill>
+                          <a:effectLst/>
+                          <a:latin typeface="+mn-lt"/>
+                          <a:ea typeface="+mn-ea"/>
+                          <a:cs typeface="+mn-cs"/>
+                        </a:rPr>
+                        <a:t>11</a:t>
+                      </a:r>
+                    </a:p>
+                  </a:txBody>
+                  <a:tcPr marL="28575" marR="28575" marT="19050" marB="19050" anchor="b">
+                    <a:lnL w="9525" cap="flat" cmpd="sng" algn="ctr">
+                      <a:solidFill>
+                        <a:srgbClr val="000000"/>
+                      </a:solidFill>
+                      <a:prstDash val="solid"/>
+                      <a:round/>
+                      <a:headEnd type="none" w="med" len="med"/>
+                      <a:tailEnd type="none" w="med" len="med"/>
+                    </a:lnL>
+                    <a:lnR w="9525" cap="flat" cmpd="sng" algn="ctr">
+                      <a:solidFill>
+                        <a:srgbClr val="CCCCCC"/>
+                      </a:solidFill>
+                      <a:prstDash val="solid"/>
+                      <a:round/>
+                      <a:headEnd type="none" w="med" len="med"/>
+                      <a:tailEnd type="none" w="med" len="med"/>
+                    </a:lnR>
+                    <a:lnT w="9525" cap="flat" cmpd="sng" algn="ctr">
+                      <a:solidFill>
+                        <a:srgbClr val="CCCCCC"/>
+                      </a:solidFill>
+                      <a:prstDash val="solid"/>
+                      <a:round/>
+                      <a:headEnd type="none" w="med" len="med"/>
+                      <a:tailEnd type="none" w="med" len="med"/>
+                    </a:lnT>
+                    <a:lnB w="9525" cap="flat" cmpd="sng" algn="ctr">
+                      <a:solidFill>
+                        <a:srgbClr val="CCCCCC"/>
+                      </a:solidFill>
+                      <a:prstDash val="solid"/>
+                      <a:round/>
+                      <a:headEnd type="none" w="med" len="med"/>
+                      <a:tailEnd type="none" w="med" len="med"/>
+                    </a:lnB>
+                  </a:tcPr>
+                </a:tc>
+                <a:tc>
+                  <a:txBody>
+                    <a:bodyPr/>
+                    <a:lstStyle/>
+                    <a:p>
+                      <a:pPr marL="0" algn="ctr" defTabSz="914400" rtl="0" eaLnBrk="1" fontAlgn="b" latinLnBrk="0" hangingPunct="1">
+                        <a:buNone/>
+                      </a:pPr>
+                      <a:r>
+                        <a:rPr lang="en-US" sz="1400" kern="1200">
+                          <a:solidFill>
+                            <a:schemeClr val="tx1"/>
+                          </a:solidFill>
+                          <a:latin typeface="+mn-lt"/>
+                          <a:ea typeface="+mn-ea"/>
+                          <a:cs typeface="+mn-cs"/>
+                        </a:rPr>
+                        <a:t>10/10/2026</a:t>
+                      </a:r>
+                    </a:p>
+                  </a:txBody>
+                  <a:tcPr marL="28575" marR="28575" marT="19050" marB="19050" anchor="b">
+                    <a:lnL w="9525" cap="flat" cmpd="sng" algn="ctr">
+                      <a:solidFill>
+                        <a:srgbClr val="CCCCCC"/>
+                      </a:solidFill>
+                      <a:prstDash val="solid"/>
+                      <a:round/>
+                      <a:headEnd type="none" w="med" len="med"/>
+                      <a:tailEnd type="none" w="med" len="med"/>
+                    </a:lnL>
+                    <a:lnR w="9525" cap="flat" cmpd="sng" algn="ctr">
+                      <a:solidFill>
+                        <a:srgbClr val="CCCCCC"/>
+                      </a:solidFill>
+                      <a:prstDash val="solid"/>
+                      <a:round/>
+                      <a:headEnd type="none" w="med" len="med"/>
+                      <a:tailEnd type="none" w="med" len="med"/>
+                    </a:lnR>
+                    <a:lnT w="9525" cap="flat" cmpd="sng" algn="ctr">
+                      <a:solidFill>
+                        <a:srgbClr val="CCCCCC"/>
+                      </a:solidFill>
+                      <a:prstDash val="solid"/>
+                      <a:round/>
+                      <a:headEnd type="none" w="med" len="med"/>
+                      <a:tailEnd type="none" w="med" len="med"/>
+                    </a:lnT>
+                    <a:lnB w="9525" cap="flat" cmpd="sng" algn="ctr">
+                      <a:solidFill>
+                        <a:srgbClr val="CCCCCC"/>
+                      </a:solidFill>
+                      <a:prstDash val="solid"/>
+                      <a:round/>
+                      <a:headEnd type="none" w="med" len="med"/>
+                      <a:tailEnd type="none" w="med" len="med"/>
+                    </a:lnB>
+                  </a:tcPr>
+                </a:tc>
+                <a:tc vMerge="1">
+                  <a:txBody>
+                    <a:bodyPr/>
+                    <a:lstStyle/>
+                    <a:p>
+                      <a:pPr algn="ctr" rtl="0" fontAlgn="b"/>
+                      <a:endParaRPr lang="en-US" sz="1400" dirty="0">
+                        <a:effectLst/>
+                      </a:endParaRPr>
+                    </a:p>
+                  </a:txBody>
+                  <a:tcPr marL="10288" marR="10288" marT="6859" marB="6859" anchor="b">
+                    <a:lnL w="9525" cap="flat" cmpd="sng" algn="ctr">
+                      <a:solidFill>
+                        <a:srgbClr val="CCCCCC"/>
+                      </a:solidFill>
+                      <a:prstDash val="solid"/>
+                      <a:round/>
+                      <a:headEnd type="none" w="med" len="med"/>
+                      <a:tailEnd type="none" w="med" len="med"/>
+                    </a:lnL>
+                    <a:lnR w="9525" cap="flat" cmpd="sng" algn="ctr">
+                      <a:solidFill>
+                        <a:srgbClr val="CCCCCC"/>
+                      </a:solidFill>
+                      <a:prstDash val="solid"/>
+                      <a:round/>
+                      <a:headEnd type="none" w="med" len="med"/>
+                      <a:tailEnd type="none" w="med" len="med"/>
+                    </a:lnR>
+                    <a:lnT w="9525" cap="flat" cmpd="sng" algn="ctr">
+                      <a:solidFill>
+                        <a:srgbClr val="CCCCCC"/>
+                      </a:solidFill>
+                      <a:prstDash val="solid"/>
+                      <a:round/>
+                      <a:headEnd type="none" w="med" len="med"/>
+                      <a:tailEnd type="none" w="med" len="med"/>
+                    </a:lnT>
+                    <a:lnB w="9525" cap="flat" cmpd="sng" algn="ctr">
+                      <a:solidFill>
+                        <a:srgbClr val="CCCCCC"/>
+                      </a:solidFill>
+                      <a:prstDash val="solid"/>
+                      <a:round/>
+                      <a:headEnd type="none" w="med" len="med"/>
+                      <a:tailEnd type="none" w="med" len="med"/>
+                    </a:lnB>
+                  </a:tcPr>
+                </a:tc>
+                <a:tc vMerge="1">
+                  <a:txBody>
+                    <a:bodyPr/>
+                    <a:lstStyle/>
+                    <a:p>
+                      <a:endParaRPr lang="en-US"/>
+                    </a:p>
+                  </a:txBody>
+                  <a:tcPr/>
+                </a:tc>
+                <a:tc>
+                  <a:txBody>
+                    <a:bodyPr/>
+                    <a:lstStyle/>
+                    <a:p>
+                      <a:pPr marL="0" marR="0" lvl="0" indent="0" algn="ctr" defTabSz="914400" rtl="0" eaLnBrk="1" fontAlgn="b" latinLnBrk="0" hangingPunct="1">
+                        <a:lnSpc>
+                          <a:spcPct val="100000"/>
+                        </a:lnSpc>
+                        <a:spcBef>
+                          <a:spcPts val="0"/>
+                        </a:spcBef>
+                        <a:spcAft>
+                          <a:spcPts val="0"/>
+                        </a:spcAft>
+                        <a:buClrTx/>
+                        <a:buSzTx/>
+                        <a:buFontTx/>
+                        <a:buNone/>
+                        <a:tabLst/>
+                        <a:defRPr/>
+                      </a:pPr>
+                      <a:r>
+                        <a:rPr lang="pt-BR" sz="1400" dirty="0"/>
+                        <a:t>Introdução</a:t>
+                      </a:r>
+                      <a:r>
+                        <a:rPr lang="pt-BR" sz="1400" baseline="0" dirty="0"/>
+                        <a:t> ao Aprendizado de Máquina</a:t>
+                      </a:r>
+                      <a:endParaRPr lang="en-US" sz="1400" b="1" dirty="0">
+                        <a:solidFill>
+                          <a:srgbClr val="FF0000"/>
+                        </a:solidFill>
+                        <a:effectLst/>
+                      </a:endParaRPr>
+                    </a:p>
+                  </a:txBody>
+                  <a:tcPr marL="10288" marR="10288" marT="6859" marB="6859" anchor="b">
+                    <a:lnL w="9525" cap="flat" cmpd="sng" algn="ctr">
+                      <a:solidFill>
+                        <a:srgbClr val="CCCCCC"/>
+                      </a:solidFill>
+                      <a:prstDash val="solid"/>
+                      <a:round/>
+                      <a:headEnd type="none" w="med" len="med"/>
+                      <a:tailEnd type="none" w="med" len="med"/>
+                    </a:lnL>
+                    <a:lnR w="9525" cap="flat" cmpd="sng" algn="ctr">
+                      <a:solidFill>
+                        <a:srgbClr val="000000"/>
+                      </a:solidFill>
+                      <a:prstDash val="solid"/>
+                      <a:round/>
+                      <a:headEnd type="none" w="med" len="med"/>
+                      <a:tailEnd type="none" w="med" len="med"/>
+                    </a:lnR>
+                    <a:lnT w="9525" cap="flat" cmpd="sng" algn="ctr">
+                      <a:solidFill>
+                        <a:srgbClr val="CCCCCC"/>
+                      </a:solidFill>
+                      <a:prstDash val="solid"/>
+                      <a:round/>
+                      <a:headEnd type="none" w="med" len="med"/>
+                      <a:tailEnd type="none" w="med" len="med"/>
+                    </a:lnT>
+                    <a:lnB w="9525" cap="flat" cmpd="sng" algn="ctr">
+                      <a:solidFill>
+                        <a:srgbClr val="CCCCCC"/>
+                      </a:solidFill>
+                      <a:prstDash val="solid"/>
+                      <a:round/>
+                      <a:headEnd type="none" w="med" len="med"/>
+                      <a:tailEnd type="none" w="med" len="med"/>
+                    </a:lnB>
+                  </a:tcPr>
+                </a:tc>
+                <a:extLst>
+                  <a:ext uri="{0D108BD9-81ED-4DB2-BD59-A6C34878D82A}">
+                    <a16:rowId xmlns:a16="http://schemas.microsoft.com/office/drawing/2014/main" val="10011"/>
+                  </a:ext>
+                </a:extLst>
+              </a:tr>
+              <a:tr h="232673">
+                <a:tc>
+                  <a:txBody>
+                    <a:bodyPr/>
+                    <a:lstStyle/>
+                    <a:p>
+                      <a:pPr algn="ctr" rtl="0" fontAlgn="b"/>
+                      <a:r>
+                        <a:rPr lang="en-US" sz="1400" b="0" dirty="0">
+                          <a:solidFill>
+                            <a:schemeClr val="tx1"/>
+                          </a:solidFill>
+                          <a:effectLst/>
+                        </a:rPr>
+                        <a:t>12</a:t>
+                      </a:r>
+                    </a:p>
+                  </a:txBody>
+                  <a:tcPr marL="28575" marR="28575" marT="19050" marB="19050" anchor="b">
+                    <a:lnL w="9525" cap="flat" cmpd="sng" algn="ctr">
+                      <a:solidFill>
+                        <a:srgbClr val="000000"/>
+                      </a:solidFill>
+                      <a:prstDash val="solid"/>
+                      <a:round/>
+                      <a:headEnd type="none" w="med" len="med"/>
+                      <a:tailEnd type="none" w="med" len="med"/>
+                    </a:lnL>
+                    <a:lnR w="9525" cap="flat" cmpd="sng" algn="ctr">
+                      <a:solidFill>
+                        <a:srgbClr val="CCCCCC"/>
+                      </a:solidFill>
+                      <a:prstDash val="solid"/>
+                      <a:round/>
+                      <a:headEnd type="none" w="med" len="med"/>
+                      <a:tailEnd type="none" w="med" len="med"/>
+                    </a:lnR>
+                    <a:lnT w="9525" cap="flat" cmpd="sng" algn="ctr">
+                      <a:solidFill>
+                        <a:srgbClr val="CCCCCC"/>
+                      </a:solidFill>
+                      <a:prstDash val="solid"/>
+                      <a:round/>
+                      <a:headEnd type="none" w="med" len="med"/>
+                      <a:tailEnd type="none" w="med" len="med"/>
+                    </a:lnT>
+                    <a:lnB w="9525" cap="flat" cmpd="sng" algn="ctr">
+                      <a:solidFill>
+                        <a:srgbClr val="CCCCCC"/>
+                      </a:solidFill>
+                      <a:prstDash val="solid"/>
+                      <a:round/>
+                      <a:headEnd type="none" w="med" len="med"/>
+                      <a:tailEnd type="none" w="med" len="med"/>
+                    </a:lnB>
+                  </a:tcPr>
+                </a:tc>
+                <a:tc>
+                  <a:txBody>
+                    <a:bodyPr/>
+                    <a:lstStyle/>
+                    <a:p>
+                      <a:pPr marL="0" algn="ctr" defTabSz="914400" rtl="0" eaLnBrk="1" fontAlgn="b" latinLnBrk="0" hangingPunct="1">
+                        <a:buNone/>
+                      </a:pPr>
+                      <a:r>
+                        <a:rPr lang="en-US" sz="1400" kern="1200">
+                          <a:solidFill>
+                            <a:schemeClr val="tx1"/>
+                          </a:solidFill>
+                          <a:latin typeface="+mn-lt"/>
+                          <a:ea typeface="+mn-ea"/>
+                          <a:cs typeface="+mn-cs"/>
+                        </a:rPr>
+                        <a:t>17/10/2026</a:t>
+                      </a:r>
+                    </a:p>
+                  </a:txBody>
+                  <a:tcPr marL="28575" marR="28575" marT="19050" marB="19050" anchor="b">
+                    <a:lnL w="9525" cap="flat" cmpd="sng" algn="ctr">
+                      <a:solidFill>
+                        <a:srgbClr val="CCCCCC"/>
+                      </a:solidFill>
+                      <a:prstDash val="solid"/>
+                      <a:round/>
+                      <a:headEnd type="none" w="med" len="med"/>
+                      <a:tailEnd type="none" w="med" len="med"/>
+                    </a:lnL>
+                    <a:lnR w="9525" cap="flat" cmpd="sng" algn="ctr">
+                      <a:solidFill>
+                        <a:srgbClr val="CCCCCC"/>
+                      </a:solidFill>
+                      <a:prstDash val="solid"/>
+                      <a:round/>
+                      <a:headEnd type="none" w="med" len="med"/>
+                      <a:tailEnd type="none" w="med" len="med"/>
+                    </a:lnR>
+                    <a:lnT w="9525" cap="flat" cmpd="sng" algn="ctr">
+                      <a:solidFill>
+                        <a:srgbClr val="CCCCCC"/>
+                      </a:solidFill>
+                      <a:prstDash val="solid"/>
+                      <a:round/>
+                      <a:headEnd type="none" w="med" len="med"/>
+                      <a:tailEnd type="none" w="med" len="med"/>
+                    </a:lnT>
+                    <a:lnB w="9525" cap="flat" cmpd="sng" algn="ctr">
+                      <a:solidFill>
+                        <a:srgbClr val="CCCCCC"/>
+                      </a:solidFill>
+                      <a:prstDash val="solid"/>
+                      <a:round/>
+                      <a:headEnd type="none" w="med" len="med"/>
+                      <a:tailEnd type="none" w="med" len="med"/>
+                    </a:lnB>
+                  </a:tcPr>
+                </a:tc>
+                <a:tc vMerge="1">
+                  <a:txBody>
+                    <a:bodyPr/>
+                    <a:lstStyle/>
+                    <a:p>
+                      <a:pPr algn="ctr" rtl="0" fontAlgn="b"/>
+                      <a:endParaRPr lang="en-US" sz="1400" dirty="0">
+                        <a:effectLst/>
+                      </a:endParaRPr>
+                    </a:p>
+                  </a:txBody>
+                  <a:tcPr marL="10288" marR="10288" marT="6859" marB="6859" anchor="b">
+                    <a:lnL w="9525" cap="flat" cmpd="sng" algn="ctr">
+                      <a:solidFill>
+                        <a:srgbClr val="CCCCCC"/>
+                      </a:solidFill>
+                      <a:prstDash val="solid"/>
+                      <a:round/>
+                      <a:headEnd type="none" w="med" len="med"/>
+                      <a:tailEnd type="none" w="med" len="med"/>
+                    </a:lnL>
+                    <a:lnR w="9525" cap="flat" cmpd="sng" algn="ctr">
+                      <a:solidFill>
+                        <a:srgbClr val="CCCCCC"/>
+                      </a:solidFill>
+                      <a:prstDash val="solid"/>
+                      <a:round/>
+                      <a:headEnd type="none" w="med" len="med"/>
+                      <a:tailEnd type="none" w="med" len="med"/>
+                    </a:lnR>
+                    <a:lnT w="9525" cap="flat" cmpd="sng" algn="ctr">
+                      <a:solidFill>
+                        <a:srgbClr val="CCCCCC"/>
+                      </a:solidFill>
+                      <a:prstDash val="solid"/>
+                      <a:round/>
+                      <a:headEnd type="none" w="med" len="med"/>
+                      <a:tailEnd type="none" w="med" len="med"/>
+                    </a:lnT>
+                    <a:lnB w="9525" cap="flat" cmpd="sng" algn="ctr">
+                      <a:solidFill>
+                        <a:srgbClr val="CCCCCC"/>
+                      </a:solidFill>
+                      <a:prstDash val="solid"/>
+                      <a:round/>
+                      <a:headEnd type="none" w="med" len="med"/>
+                      <a:tailEnd type="none" w="med" len="med"/>
+                    </a:lnB>
+                  </a:tcPr>
+                </a:tc>
+                <a:tc vMerge="1">
+                  <a:txBody>
+                    <a:bodyPr/>
+                    <a:lstStyle/>
+                    <a:p>
+                      <a:endParaRPr lang="en-US"/>
+                    </a:p>
+                  </a:txBody>
+                  <a:tcPr/>
+                </a:tc>
+                <a:tc>
+                  <a:txBody>
+                    <a:bodyPr/>
+                    <a:lstStyle/>
+                    <a:p>
+                      <a:pPr marL="0" marR="0" lvl="0" indent="0" algn="ctr" defTabSz="914400" rtl="0" eaLnBrk="1" fontAlgn="b" latinLnBrk="0" hangingPunct="1">
+                        <a:lnSpc>
+                          <a:spcPct val="100000"/>
+                        </a:lnSpc>
+                        <a:spcBef>
+                          <a:spcPts val="0"/>
+                        </a:spcBef>
+                        <a:spcAft>
+                          <a:spcPts val="0"/>
+                        </a:spcAft>
+                        <a:buClrTx/>
+                        <a:buSzTx/>
+                        <a:buFontTx/>
+                        <a:buNone/>
+                        <a:tabLst/>
+                        <a:defRPr/>
+                      </a:pPr>
+                      <a:r>
+                        <a:rPr lang="pt-BR" sz="1400" dirty="0"/>
+                        <a:t>Introdução</a:t>
+                      </a:r>
+                      <a:r>
+                        <a:rPr lang="pt-BR" sz="1400" baseline="0" dirty="0"/>
+                        <a:t> ao Aprendizado de Máquina</a:t>
+                      </a:r>
+                      <a:endParaRPr lang="en-US" sz="1400" b="1" dirty="0">
+                        <a:solidFill>
+                          <a:srgbClr val="FF0000"/>
+                        </a:solidFill>
                         <a:effectLst/>
                       </a:endParaRPr>
                     </a:p>
@@ -46101,14 +46193,14 @@
                     <a:p>
                       <a:pPr algn="ctr" rtl="0" fontAlgn="b"/>
                       <a:r>
-                        <a:rPr lang="en-US" sz="1400">
+                        <a:rPr lang="en-US" sz="1400" b="0" dirty="0">
+                          <a:solidFill>
+                            <a:schemeClr val="tx1"/>
+                          </a:solidFill>
                           <a:effectLst/>
                         </a:rPr>
                         <a:t>13</a:t>
                       </a:r>
-                      <a:endParaRPr lang="en-US" sz="1400" dirty="0">
-                        <a:effectLst/>
-                      </a:endParaRPr>
                     </a:p>
                   </a:txBody>
                   <a:tcPr marL="28575" marR="28575" marT="19050" marB="19050" anchor="b">
@@ -46155,14 +46247,19 @@
                     <a:bodyPr/>
                     <a:lstStyle/>
                     <a:p>
-                      <a:pPr algn="ctr" rtl="0" fontAlgn="b">
+                      <a:pPr marL="0" algn="ctr" defTabSz="914400" rtl="0" eaLnBrk="1" fontAlgn="b" latinLnBrk="0" hangingPunct="1">
                         <a:buNone/>
                       </a:pPr>
                       <a:r>
-                        <a:rPr lang="en-US" sz="1400">
-                          <a:effectLst/>
+                        <a:rPr lang="en-US" sz="1400" kern="1200" dirty="0">
+                          <a:solidFill>
+                            <a:schemeClr val="tx1"/>
+                          </a:solidFill>
+                          <a:latin typeface="+mn-lt"/>
+                          <a:ea typeface="+mn-ea"/>
+                          <a:cs typeface="+mn-cs"/>
                         </a:rPr>
-                        <a:t>9/5/2026</a:t>
+                        <a:t>24/10/2026</a:t>
                       </a:r>
                     </a:p>
                   </a:txBody>
@@ -46337,14 +46434,14 @@
                     <a:p>
                       <a:pPr algn="ctr" rtl="0" fontAlgn="b"/>
                       <a:r>
-                        <a:rPr lang="en-US" sz="1400">
+                        <a:rPr lang="en-US" sz="1400" b="0" dirty="0">
+                          <a:solidFill>
+                            <a:schemeClr val="tx1"/>
+                          </a:solidFill>
                           <a:effectLst/>
                         </a:rPr>
                         <a:t>14</a:t>
                       </a:r>
-                      <a:endParaRPr lang="en-US" sz="1400" dirty="0">
-                        <a:effectLst/>
-                      </a:endParaRPr>
                     </a:p>
                   </a:txBody>
                   <a:tcPr marL="28575" marR="28575" marT="19050" marB="19050" anchor="b">
@@ -46391,14 +46488,19 @@
                     <a:bodyPr/>
                     <a:lstStyle/>
                     <a:p>
-                      <a:pPr algn="ctr" rtl="0" fontAlgn="b">
+                      <a:pPr marL="0" algn="ctr" defTabSz="914400" rtl="0" eaLnBrk="1" fontAlgn="b" latinLnBrk="0" hangingPunct="1">
                         <a:buNone/>
                       </a:pPr>
                       <a:r>
-                        <a:rPr lang="en-US" sz="1400">
-                          <a:effectLst/>
+                        <a:rPr lang="en-US" sz="1400" kern="1200" dirty="0">
+                          <a:solidFill>
+                            <a:schemeClr val="tx1"/>
+                          </a:solidFill>
+                          <a:latin typeface="+mn-lt"/>
+                          <a:ea typeface="+mn-ea"/>
+                          <a:cs typeface="+mn-cs"/>
                         </a:rPr>
-                        <a:t>16/5/2026</a:t>
+                        <a:t>31/10/2026</a:t>
                       </a:r>
                     </a:p>
                   </a:txBody>
@@ -46573,9 +46675,9 @@
                     <a:p>
                       <a:pPr algn="ctr" rtl="0" fontAlgn="b"/>
                       <a:r>
-                        <a:rPr lang="en-US" sz="1400" b="1" dirty="0">
+                        <a:rPr lang="en-US" sz="1400" b="0" dirty="0">
                           <a:solidFill>
-                            <a:srgbClr val="00B0F0"/>
+                            <a:schemeClr val="tx1"/>
                           </a:solidFill>
                           <a:effectLst/>
                         </a:rPr>
@@ -46627,17 +46729,19 @@
                     <a:bodyPr/>
                     <a:lstStyle/>
                     <a:p>
-                      <a:pPr algn="ctr" rtl="0" fontAlgn="b">
+                      <a:pPr marL="0" algn="ctr" defTabSz="914400" rtl="0" eaLnBrk="1" fontAlgn="b" latinLnBrk="0" hangingPunct="1">
                         <a:buNone/>
                       </a:pPr>
                       <a:r>
-                        <a:rPr lang="en-US" sz="1400" b="1" dirty="0">
+                        <a:rPr lang="en-US" sz="1400" kern="1200" dirty="0">
                           <a:solidFill>
-                            <a:srgbClr val="00B0F0"/>
+                            <a:schemeClr val="tx1"/>
                           </a:solidFill>
-                          <a:effectLst/>
+                          <a:latin typeface="+mn-lt"/>
+                          <a:ea typeface="+mn-ea"/>
+                          <a:cs typeface="+mn-cs"/>
                         </a:rPr>
-                        <a:t>23/5/2026*</a:t>
+                        <a:t>7/11/2026</a:t>
                       </a:r>
                     </a:p>
                   </a:txBody>
@@ -46814,9 +46918,9 @@
                         <a:buNone/>
                       </a:pPr>
                       <a:r>
-                        <a:rPr lang="en-US" sz="1400" kern="1200" dirty="0">
+                        <a:rPr lang="en-US" sz="1400" b="1" kern="1200" dirty="0">
                           <a:solidFill>
-                            <a:schemeClr val="tx1"/>
+                            <a:srgbClr val="00B050"/>
                           </a:solidFill>
                           <a:effectLst/>
                           <a:latin typeface="+mn-lt"/>
@@ -46871,14 +46975,19 @@
                     <a:bodyPr/>
                     <a:lstStyle/>
                     <a:p>
-                      <a:pPr algn="ctr" rtl="0" fontAlgn="b">
+                      <a:pPr marL="0" algn="ctr" defTabSz="914400" rtl="0" eaLnBrk="1" fontAlgn="b" latinLnBrk="0" hangingPunct="1">
                         <a:buNone/>
                       </a:pPr>
                       <a:r>
-                        <a:rPr lang="en-US" sz="1400" dirty="0">
-                          <a:effectLst/>
+                        <a:rPr lang="en-US" sz="1400" b="1" kern="1200" dirty="0">
+                          <a:solidFill>
+                            <a:srgbClr val="00B050"/>
+                          </a:solidFill>
+                          <a:latin typeface="+mn-lt"/>
+                          <a:ea typeface="+mn-ea"/>
+                          <a:cs typeface="+mn-cs"/>
                         </a:rPr>
-                        <a:t>30/5/2026</a:t>
+                        <a:t>14/11/2026</a:t>
                       </a:r>
                     </a:p>
                   </a:txBody>
@@ -46931,6 +47040,305 @@
                         <a:solidFill>
                           <a:srgbClr val="00B050"/>
                         </a:solidFill>
+                        <a:effectLst/>
+                      </a:endParaRPr>
+                    </a:p>
+                  </a:txBody>
+                  <a:tcPr marL="10288" marR="10288" marT="6859" marB="6859" anchor="b">
+                    <a:lnL w="9525" cap="flat" cmpd="sng" algn="ctr">
+                      <a:solidFill>
+                        <a:srgbClr val="CCCCCC"/>
+                      </a:solidFill>
+                      <a:prstDash val="solid"/>
+                      <a:round/>
+                      <a:headEnd type="none" w="med" len="med"/>
+                      <a:tailEnd type="none" w="med" len="med"/>
+                    </a:lnL>
+                    <a:lnR w="9525" cap="flat" cmpd="sng" algn="ctr">
+                      <a:solidFill>
+                        <a:srgbClr val="CCCCCC"/>
+                      </a:solidFill>
+                      <a:prstDash val="solid"/>
+                      <a:round/>
+                      <a:headEnd type="none" w="med" len="med"/>
+                      <a:tailEnd type="none" w="med" len="med"/>
+                    </a:lnR>
+                    <a:lnT w="9525" cap="flat" cmpd="sng" algn="ctr">
+                      <a:solidFill>
+                        <a:srgbClr val="CCCCCC"/>
+                      </a:solidFill>
+                      <a:prstDash val="solid"/>
+                      <a:round/>
+                      <a:headEnd type="none" w="med" len="med"/>
+                      <a:tailEnd type="none" w="med" len="med"/>
+                    </a:lnT>
+                    <a:lnB w="9525" cap="flat" cmpd="sng" algn="ctr">
+                      <a:solidFill>
+                        <a:srgbClr val="CCCCCC"/>
+                      </a:solidFill>
+                      <a:prstDash val="solid"/>
+                      <a:round/>
+                      <a:headEnd type="none" w="med" len="med"/>
+                      <a:tailEnd type="none" w="med" len="med"/>
+                    </a:lnB>
+                  </a:tcPr>
+                </a:tc>
+                <a:tc vMerge="1">
+                  <a:txBody>
+                    <a:bodyPr/>
+                    <a:lstStyle/>
+                    <a:p>
+                      <a:endParaRPr lang="en-US"/>
+                    </a:p>
+                  </a:txBody>
+                  <a:tcPr/>
+                </a:tc>
+                <a:tc>
+                  <a:txBody>
+                    <a:bodyPr/>
+                    <a:lstStyle/>
+                    <a:p>
+                      <a:pPr algn="ctr" rtl="0" fontAlgn="b"/>
+                      <a:r>
+                        <a:rPr lang="en-US" sz="1400" b="1" dirty="0" err="1">
+                          <a:solidFill>
+                            <a:srgbClr val="00B050"/>
+                          </a:solidFill>
+                          <a:effectLst/>
+                        </a:rPr>
+                        <a:t>Avaliação</a:t>
+                      </a:r>
+                      <a:r>
+                        <a:rPr lang="en-US" sz="1400" b="1" dirty="0">
+                          <a:solidFill>
+                            <a:srgbClr val="00B050"/>
+                          </a:solidFill>
+                          <a:effectLst/>
+                        </a:rPr>
+                        <a:t> </a:t>
+                      </a:r>
+                      <a:r>
+                        <a:rPr lang="en-US" sz="1400" b="1" dirty="0" err="1">
+                          <a:solidFill>
+                            <a:srgbClr val="00B050"/>
+                          </a:solidFill>
+                          <a:effectLst/>
+                        </a:rPr>
+                        <a:t>Presencial</a:t>
+                      </a:r>
+                      <a:r>
+                        <a:rPr lang="en-US" sz="1400" b="1" dirty="0">
+                          <a:solidFill>
+                            <a:srgbClr val="00B050"/>
+                          </a:solidFill>
+                          <a:effectLst/>
+                        </a:rPr>
+                        <a:t> II (</a:t>
+                      </a:r>
+                      <a:r>
+                        <a:rPr lang="en-US" sz="1400" b="1" dirty="0" err="1">
+                          <a:solidFill>
+                            <a:srgbClr val="00B050"/>
+                          </a:solidFill>
+                          <a:effectLst/>
+                        </a:rPr>
+                        <a:t>Projeto</a:t>
+                      </a:r>
+                      <a:r>
+                        <a:rPr lang="en-US" sz="1400" b="1" baseline="0" dirty="0">
+                          <a:solidFill>
+                            <a:srgbClr val="00B050"/>
+                          </a:solidFill>
+                          <a:effectLst/>
+                        </a:rPr>
+                        <a:t> II) </a:t>
+                      </a:r>
+                      <a:r>
+                        <a:rPr lang="en-US" sz="1400" b="1" baseline="0" dirty="0">
+                          <a:solidFill>
+                            <a:srgbClr val="FF0000"/>
+                          </a:solidFill>
+                          <a:effectLst/>
+                        </a:rPr>
+                        <a:t>(Sala ??)</a:t>
+                      </a:r>
+                      <a:endParaRPr lang="en-US" sz="1400" b="1" dirty="0">
+                        <a:solidFill>
+                          <a:srgbClr val="FF0000"/>
+                        </a:solidFill>
+                        <a:effectLst/>
+                      </a:endParaRPr>
+                    </a:p>
+                  </a:txBody>
+                  <a:tcPr marL="10288" marR="10288" marT="6859" marB="6859" anchor="b">
+                    <a:lnL w="9525" cap="flat" cmpd="sng" algn="ctr">
+                      <a:solidFill>
+                        <a:srgbClr val="CCCCCC"/>
+                      </a:solidFill>
+                      <a:prstDash val="solid"/>
+                      <a:round/>
+                      <a:headEnd type="none" w="med" len="med"/>
+                      <a:tailEnd type="none" w="med" len="med"/>
+                    </a:lnL>
+                    <a:lnR w="9525" cap="flat" cmpd="sng" algn="ctr">
+                      <a:solidFill>
+                        <a:srgbClr val="000000"/>
+                      </a:solidFill>
+                      <a:prstDash val="solid"/>
+                      <a:round/>
+                      <a:headEnd type="none" w="med" len="med"/>
+                      <a:tailEnd type="none" w="med" len="med"/>
+                    </a:lnR>
+                    <a:lnT w="9525" cap="flat" cmpd="sng" algn="ctr">
+                      <a:solidFill>
+                        <a:srgbClr val="CCCCCC"/>
+                      </a:solidFill>
+                      <a:prstDash val="solid"/>
+                      <a:round/>
+                      <a:headEnd type="none" w="med" len="med"/>
+                      <a:tailEnd type="none" w="med" len="med"/>
+                    </a:lnT>
+                    <a:lnB w="9525" cap="flat" cmpd="sng" algn="ctr">
+                      <a:solidFill>
+                        <a:srgbClr val="CCCCCC"/>
+                      </a:solidFill>
+                      <a:prstDash val="solid"/>
+                      <a:round/>
+                      <a:headEnd type="none" w="med" len="med"/>
+                      <a:tailEnd type="none" w="med" len="med"/>
+                    </a:lnB>
+                  </a:tcPr>
+                </a:tc>
+                <a:extLst>
+                  <a:ext uri="{0D108BD9-81ED-4DB2-BD59-A6C34878D82A}">
+                    <a16:rowId xmlns:a16="http://schemas.microsoft.com/office/drawing/2014/main" val="10016"/>
+                  </a:ext>
+                </a:extLst>
+              </a:tr>
+              <a:tr h="232673">
+                <a:tc>
+                  <a:txBody>
+                    <a:bodyPr/>
+                    <a:lstStyle/>
+                    <a:p>
+                      <a:pPr algn="ctr" rtl="0" fontAlgn="b"/>
+                      <a:r>
+                        <a:rPr lang="en-US" sz="1400" b="0" dirty="0">
+                          <a:solidFill>
+                            <a:schemeClr val="tx1"/>
+                          </a:solidFill>
+                          <a:effectLst/>
+                        </a:rPr>
+                        <a:t>17</a:t>
+                      </a:r>
+                    </a:p>
+                  </a:txBody>
+                  <a:tcPr marL="28575" marR="28575" marT="19050" marB="19050" anchor="b">
+                    <a:lnL w="9525" cap="flat" cmpd="sng" algn="ctr">
+                      <a:solidFill>
+                        <a:srgbClr val="000000"/>
+                      </a:solidFill>
+                      <a:prstDash val="solid"/>
+                      <a:round/>
+                      <a:headEnd type="none" w="med" len="med"/>
+                      <a:tailEnd type="none" w="med" len="med"/>
+                    </a:lnL>
+                    <a:lnR w="9525" cap="flat" cmpd="sng" algn="ctr">
+                      <a:solidFill>
+                        <a:srgbClr val="CCCCCC"/>
+                      </a:solidFill>
+                      <a:prstDash val="solid"/>
+                      <a:round/>
+                      <a:headEnd type="none" w="med" len="med"/>
+                      <a:tailEnd type="none" w="med" len="med"/>
+                    </a:lnR>
+                    <a:lnT w="9525" cap="flat" cmpd="sng" algn="ctr">
+                      <a:solidFill>
+                        <a:srgbClr val="CCCCCC"/>
+                      </a:solidFill>
+                      <a:prstDash val="solid"/>
+                      <a:round/>
+                      <a:headEnd type="none" w="med" len="med"/>
+                      <a:tailEnd type="none" w="med" len="med"/>
+                    </a:lnT>
+                    <a:lnB w="9525" cap="flat" cmpd="sng" algn="ctr">
+                      <a:solidFill>
+                        <a:srgbClr val="CCCCCC"/>
+                      </a:solidFill>
+                      <a:prstDash val="solid"/>
+                      <a:round/>
+                      <a:headEnd type="none" w="med" len="med"/>
+                      <a:tailEnd type="none" w="med" len="med"/>
+                    </a:lnB>
+                  </a:tcPr>
+                </a:tc>
+                <a:tc>
+                  <a:txBody>
+                    <a:bodyPr/>
+                    <a:lstStyle/>
+                    <a:p>
+                      <a:pPr marL="0" algn="ctr" defTabSz="914400" rtl="0" eaLnBrk="1" fontAlgn="b" latinLnBrk="0" hangingPunct="1">
+                        <a:buNone/>
+                      </a:pPr>
+                      <a:r>
+                        <a:rPr lang="en-US" sz="1400" kern="1200" dirty="0">
+                          <a:solidFill>
+                            <a:schemeClr val="tx1"/>
+                          </a:solidFill>
+                          <a:latin typeface="+mn-lt"/>
+                          <a:ea typeface="+mn-ea"/>
+                          <a:cs typeface="+mn-cs"/>
+                        </a:rPr>
+                        <a:t>21/11/2026</a:t>
+                      </a:r>
+                    </a:p>
+                  </a:txBody>
+                  <a:tcPr marL="28575" marR="28575" marT="19050" marB="19050" anchor="b">
+                    <a:lnL w="9525" cap="flat" cmpd="sng" algn="ctr">
+                      <a:solidFill>
+                        <a:srgbClr val="CCCCCC"/>
+                      </a:solidFill>
+                      <a:prstDash val="solid"/>
+                      <a:round/>
+                      <a:headEnd type="none" w="med" len="med"/>
+                      <a:tailEnd type="none" w="med" len="med"/>
+                    </a:lnL>
+                    <a:lnR w="9525" cap="flat" cmpd="sng" algn="ctr">
+                      <a:solidFill>
+                        <a:srgbClr val="CCCCCC"/>
+                      </a:solidFill>
+                      <a:prstDash val="solid"/>
+                      <a:round/>
+                      <a:headEnd type="none" w="med" len="med"/>
+                      <a:tailEnd type="none" w="med" len="med"/>
+                    </a:lnR>
+                    <a:lnT w="9525" cap="flat" cmpd="sng" algn="ctr">
+                      <a:solidFill>
+                        <a:srgbClr val="CCCCCC"/>
+                      </a:solidFill>
+                      <a:prstDash val="solid"/>
+                      <a:round/>
+                      <a:headEnd type="none" w="med" len="med"/>
+                      <a:tailEnd type="none" w="med" len="med"/>
+                    </a:lnT>
+                    <a:lnB w="9525" cap="flat" cmpd="sng" algn="ctr">
+                      <a:solidFill>
+                        <a:srgbClr val="CCCCCC"/>
+                      </a:solidFill>
+                      <a:prstDash val="solid"/>
+                      <a:round/>
+                      <a:headEnd type="none" w="med" len="med"/>
+                      <a:tailEnd type="none" w="med" len="med"/>
+                    </a:lnB>
+                  </a:tcPr>
+                </a:tc>
+                <a:tc vMerge="1">
+                  <a:txBody>
+                    <a:bodyPr/>
+                    <a:lstStyle/>
+                    <a:p>
+                      <a:pPr algn="ctr" rtl="0" fontAlgn="b"/>
+                      <a:endParaRPr lang="en-US" sz="1400" dirty="0">
                         <a:effectLst/>
                       </a:endParaRPr>
                     </a:p>
@@ -47060,7 +47468,7 @@
                 </a:tc>
                 <a:extLst>
                   <a:ext uri="{0D108BD9-81ED-4DB2-BD59-A6C34878D82A}">
-                    <a16:rowId xmlns:a16="http://schemas.microsoft.com/office/drawing/2014/main" val="10016"/>
+                    <a16:rowId xmlns:a16="http://schemas.microsoft.com/office/drawing/2014/main" val="10017"/>
                   </a:ext>
                 </a:extLst>
               </a:tr>
@@ -47072,13 +47480,13 @@
                     <a:p>
                       <a:pPr algn="ctr" rtl="0" fontAlgn="b"/>
                       <a:r>
-                        <a:rPr lang="en-US" sz="1400" b="1" dirty="0">
+                        <a:rPr lang="en-US" sz="1400" b="0" dirty="0">
                           <a:solidFill>
-                            <a:srgbClr val="00B050"/>
+                            <a:schemeClr val="tx1"/>
                           </a:solidFill>
                           <a:effectLst/>
                         </a:rPr>
-                        <a:t>17</a:t>
+                        <a:t>18</a:t>
                       </a:r>
                     </a:p>
                   </a:txBody>
@@ -47126,17 +47534,19 @@
                     <a:bodyPr/>
                     <a:lstStyle/>
                     <a:p>
-                      <a:pPr algn="ctr" rtl="0" fontAlgn="b">
+                      <a:pPr marL="0" algn="ctr" defTabSz="914400" rtl="0" eaLnBrk="1" fontAlgn="b" latinLnBrk="0" hangingPunct="1">
                         <a:buNone/>
                       </a:pPr>
                       <a:r>
-                        <a:rPr lang="en-US" sz="1400" b="1" dirty="0">
+                        <a:rPr lang="en-US" sz="1400" kern="1200" dirty="0">
                           <a:solidFill>
-                            <a:srgbClr val="00B050"/>
+                            <a:schemeClr val="tx1"/>
                           </a:solidFill>
-                          <a:effectLst/>
+                          <a:latin typeface="+mn-lt"/>
+                          <a:ea typeface="+mn-ea"/>
+                          <a:cs typeface="+mn-cs"/>
                         </a:rPr>
-                        <a:t>6/6/2026</a:t>
+                        <a:t>28/11/2026</a:t>
                       </a:r>
                     </a:p>
                   </a:txBody>
@@ -47246,314 +47656,11 @@
                     <a:p>
                       <a:pPr algn="ctr" rtl="0" fontAlgn="b"/>
                       <a:r>
-                        <a:rPr lang="en-US" sz="1400" b="1" dirty="0" err="1">
-                          <a:solidFill>
-                            <a:srgbClr val="00B050"/>
-                          </a:solidFill>
-                          <a:effectLst/>
-                        </a:rPr>
-                        <a:t>Avaliação</a:t>
-                      </a:r>
-                      <a:r>
-                        <a:rPr lang="en-US" sz="1400" b="1" dirty="0">
-                          <a:solidFill>
-                            <a:srgbClr val="00B050"/>
-                          </a:solidFill>
-                          <a:effectLst/>
-                        </a:rPr>
-                        <a:t> </a:t>
-                      </a:r>
-                      <a:r>
-                        <a:rPr lang="en-US" sz="1400" b="1" dirty="0" err="1">
-                          <a:solidFill>
-                            <a:srgbClr val="00B050"/>
-                          </a:solidFill>
-                          <a:effectLst/>
-                        </a:rPr>
-                        <a:t>Presencial</a:t>
-                      </a:r>
-                      <a:r>
-                        <a:rPr lang="en-US" sz="1400" b="1" dirty="0">
-                          <a:solidFill>
-                            <a:srgbClr val="00B050"/>
-                          </a:solidFill>
-                          <a:effectLst/>
-                        </a:rPr>
-                        <a:t> II (</a:t>
-                      </a:r>
-                      <a:r>
-                        <a:rPr lang="en-US" sz="1400" b="1" dirty="0" err="1">
-                          <a:solidFill>
-                            <a:srgbClr val="00B050"/>
-                          </a:solidFill>
-                          <a:effectLst/>
-                        </a:rPr>
-                        <a:t>Projeto</a:t>
-                      </a:r>
-                      <a:r>
-                        <a:rPr lang="en-US" sz="1400" b="1" baseline="0" dirty="0">
-                          <a:solidFill>
-                            <a:srgbClr val="00B050"/>
-                          </a:solidFill>
-                          <a:effectLst/>
-                        </a:rPr>
-                        <a:t> II) </a:t>
-                      </a:r>
-                      <a:r>
-                        <a:rPr lang="en-US" sz="1400" b="1" baseline="0" dirty="0">
-                          <a:solidFill>
-                            <a:srgbClr val="FF0000"/>
-                          </a:solidFill>
-                          <a:effectLst/>
-                        </a:rPr>
-                        <a:t>(</a:t>
-                      </a:r>
-                      <a:r>
-                        <a:rPr lang="en-US" sz="1400" b="1" baseline="0">
-                          <a:solidFill>
-                            <a:srgbClr val="FF0000"/>
-                          </a:solidFill>
-                          <a:effectLst/>
-                        </a:rPr>
-                        <a:t>Sala I-18)</a:t>
-                      </a:r>
-                      <a:endParaRPr lang="en-US" sz="1400" b="1" dirty="0">
-                        <a:solidFill>
-                          <a:srgbClr val="FF0000"/>
-                        </a:solidFill>
-                        <a:effectLst/>
-                      </a:endParaRPr>
-                    </a:p>
-                  </a:txBody>
-                  <a:tcPr marL="10288" marR="10288" marT="6859" marB="6859" anchor="b">
-                    <a:lnL w="9525" cap="flat" cmpd="sng" algn="ctr">
-                      <a:solidFill>
-                        <a:srgbClr val="CCCCCC"/>
-                      </a:solidFill>
-                      <a:prstDash val="solid"/>
-                      <a:round/>
-                      <a:headEnd type="none" w="med" len="med"/>
-                      <a:tailEnd type="none" w="med" len="med"/>
-                    </a:lnL>
-                    <a:lnR w="9525" cap="flat" cmpd="sng" algn="ctr">
-                      <a:solidFill>
-                        <a:srgbClr val="000000"/>
-                      </a:solidFill>
-                      <a:prstDash val="solid"/>
-                      <a:round/>
-                      <a:headEnd type="none" w="med" len="med"/>
-                      <a:tailEnd type="none" w="med" len="med"/>
-                    </a:lnR>
-                    <a:lnT w="9525" cap="flat" cmpd="sng" algn="ctr">
-                      <a:solidFill>
-                        <a:srgbClr val="CCCCCC"/>
-                      </a:solidFill>
-                      <a:prstDash val="solid"/>
-                      <a:round/>
-                      <a:headEnd type="none" w="med" len="med"/>
-                      <a:tailEnd type="none" w="med" len="med"/>
-                    </a:lnT>
-                    <a:lnB w="9525" cap="flat" cmpd="sng" algn="ctr">
-                      <a:solidFill>
-                        <a:srgbClr val="CCCCCC"/>
-                      </a:solidFill>
-                      <a:prstDash val="solid"/>
-                      <a:round/>
-                      <a:headEnd type="none" w="med" len="med"/>
-                      <a:tailEnd type="none" w="med" len="med"/>
-                    </a:lnB>
-                  </a:tcPr>
-                </a:tc>
-                <a:extLst>
-                  <a:ext uri="{0D108BD9-81ED-4DB2-BD59-A6C34878D82A}">
-                    <a16:rowId xmlns:a16="http://schemas.microsoft.com/office/drawing/2014/main" val="10017"/>
-                  </a:ext>
-                </a:extLst>
-              </a:tr>
-              <a:tr h="232673">
-                <a:tc>
-                  <a:txBody>
-                    <a:bodyPr/>
-                    <a:lstStyle/>
-                    <a:p>
-                      <a:pPr algn="ctr" rtl="0" fontAlgn="b"/>
-                      <a:r>
-                        <a:rPr lang="en-US" sz="1400">
-                          <a:effectLst/>
-                        </a:rPr>
-                        <a:t>18</a:t>
-                      </a:r>
-                      <a:endParaRPr lang="en-US" sz="1400" dirty="0">
-                        <a:effectLst/>
-                      </a:endParaRPr>
-                    </a:p>
-                  </a:txBody>
-                  <a:tcPr marL="28575" marR="28575" marT="19050" marB="19050" anchor="b">
-                    <a:lnL w="9525" cap="flat" cmpd="sng" algn="ctr">
-                      <a:solidFill>
-                        <a:srgbClr val="000000"/>
-                      </a:solidFill>
-                      <a:prstDash val="solid"/>
-                      <a:round/>
-                      <a:headEnd type="none" w="med" len="med"/>
-                      <a:tailEnd type="none" w="med" len="med"/>
-                    </a:lnL>
-                    <a:lnR w="9525" cap="flat" cmpd="sng" algn="ctr">
-                      <a:solidFill>
-                        <a:srgbClr val="CCCCCC"/>
-                      </a:solidFill>
-                      <a:prstDash val="solid"/>
-                      <a:round/>
-                      <a:headEnd type="none" w="med" len="med"/>
-                      <a:tailEnd type="none" w="med" len="med"/>
-                    </a:lnR>
-                    <a:lnT w="9525" cap="flat" cmpd="sng" algn="ctr">
-                      <a:solidFill>
-                        <a:srgbClr val="CCCCCC"/>
-                      </a:solidFill>
-                      <a:prstDash val="solid"/>
-                      <a:round/>
-                      <a:headEnd type="none" w="med" len="med"/>
-                      <a:tailEnd type="none" w="med" len="med"/>
-                    </a:lnT>
-                    <a:lnB w="9525" cap="flat" cmpd="sng" algn="ctr">
-                      <a:solidFill>
-                        <a:srgbClr val="CCCCCC"/>
-                      </a:solidFill>
-                      <a:prstDash val="solid"/>
-                      <a:round/>
-                      <a:headEnd type="none" w="med" len="med"/>
-                      <a:tailEnd type="none" w="med" len="med"/>
-                    </a:lnB>
-                  </a:tcPr>
-                </a:tc>
-                <a:tc>
-                  <a:txBody>
-                    <a:bodyPr/>
-                    <a:lstStyle/>
-                    <a:p>
-                      <a:pPr algn="ctr" rtl="0" fontAlgn="b">
-                        <a:buNone/>
-                      </a:pPr>
-                      <a:r>
-                        <a:rPr lang="en-US" sz="1400">
-                          <a:effectLst/>
-                        </a:rPr>
-                        <a:t>13/6/2026</a:t>
-                      </a:r>
-                    </a:p>
-                  </a:txBody>
-                  <a:tcPr marL="28575" marR="28575" marT="19050" marB="19050" anchor="b">
-                    <a:lnL w="9525" cap="flat" cmpd="sng" algn="ctr">
-                      <a:solidFill>
-                        <a:srgbClr val="CCCCCC"/>
-                      </a:solidFill>
-                      <a:prstDash val="solid"/>
-                      <a:round/>
-                      <a:headEnd type="none" w="med" len="med"/>
-                      <a:tailEnd type="none" w="med" len="med"/>
-                    </a:lnL>
-                    <a:lnR w="9525" cap="flat" cmpd="sng" algn="ctr">
-                      <a:solidFill>
-                        <a:srgbClr val="CCCCCC"/>
-                      </a:solidFill>
-                      <a:prstDash val="solid"/>
-                      <a:round/>
-                      <a:headEnd type="none" w="med" len="med"/>
-                      <a:tailEnd type="none" w="med" len="med"/>
-                    </a:lnR>
-                    <a:lnT w="9525" cap="flat" cmpd="sng" algn="ctr">
-                      <a:solidFill>
-                        <a:srgbClr val="CCCCCC"/>
-                      </a:solidFill>
-                      <a:prstDash val="solid"/>
-                      <a:round/>
-                      <a:headEnd type="none" w="med" len="med"/>
-                      <a:tailEnd type="none" w="med" len="med"/>
-                    </a:lnT>
-                    <a:lnB w="9525" cap="flat" cmpd="sng" algn="ctr">
-                      <a:solidFill>
-                        <a:srgbClr val="CCCCCC"/>
-                      </a:solidFill>
-                      <a:prstDash val="solid"/>
-                      <a:round/>
-                      <a:headEnd type="none" w="med" len="med"/>
-                      <a:tailEnd type="none" w="med" len="med"/>
-                    </a:lnB>
-                  </a:tcPr>
-                </a:tc>
-                <a:tc vMerge="1">
-                  <a:txBody>
-                    <a:bodyPr/>
-                    <a:lstStyle/>
-                    <a:p>
-                      <a:pPr algn="ctr" rtl="0" fontAlgn="b"/>
-                      <a:endParaRPr lang="en-US" sz="1400" dirty="0">
-                        <a:effectLst/>
-                      </a:endParaRPr>
-                    </a:p>
-                  </a:txBody>
-                  <a:tcPr marL="10288" marR="10288" marT="6859" marB="6859" anchor="b">
-                    <a:lnL w="9525" cap="flat" cmpd="sng" algn="ctr">
-                      <a:solidFill>
-                        <a:srgbClr val="CCCCCC"/>
-                      </a:solidFill>
-                      <a:prstDash val="solid"/>
-                      <a:round/>
-                      <a:headEnd type="none" w="med" len="med"/>
-                      <a:tailEnd type="none" w="med" len="med"/>
-                    </a:lnL>
-                    <a:lnR w="9525" cap="flat" cmpd="sng" algn="ctr">
-                      <a:solidFill>
-                        <a:srgbClr val="CCCCCC"/>
-                      </a:solidFill>
-                      <a:prstDash val="solid"/>
-                      <a:round/>
-                      <a:headEnd type="none" w="med" len="med"/>
-                      <a:tailEnd type="none" w="med" len="med"/>
-                    </a:lnR>
-                    <a:lnT w="9525" cap="flat" cmpd="sng" algn="ctr">
-                      <a:solidFill>
-                        <a:srgbClr val="CCCCCC"/>
-                      </a:solidFill>
-                      <a:prstDash val="solid"/>
-                      <a:round/>
-                      <a:headEnd type="none" w="med" len="med"/>
-                      <a:tailEnd type="none" w="med" len="med"/>
-                    </a:lnT>
-                    <a:lnB w="9525" cap="flat" cmpd="sng" algn="ctr">
-                      <a:solidFill>
-                        <a:srgbClr val="CCCCCC"/>
-                      </a:solidFill>
-                      <a:prstDash val="solid"/>
-                      <a:round/>
-                      <a:headEnd type="none" w="med" len="med"/>
-                      <a:tailEnd type="none" w="med" len="med"/>
-                    </a:lnB>
-                  </a:tcPr>
-                </a:tc>
-                <a:tc vMerge="1">
-                  <a:txBody>
-                    <a:bodyPr/>
-                    <a:lstStyle/>
-                    <a:p>
-                      <a:endParaRPr lang="en-US"/>
-                    </a:p>
-                  </a:txBody>
-                  <a:tcPr/>
-                </a:tc>
-                <a:tc>
-                  <a:txBody>
-                    <a:bodyPr/>
-                    <a:lstStyle/>
-                    <a:p>
-                      <a:pPr algn="ctr" rtl="0" fontAlgn="b"/>
-                      <a:r>
-                        <a:rPr lang="pt-BR" sz="1400"/>
+                        <a:rPr lang="pt-BR" sz="1400" dirty="0"/>
                         <a:t>Introdução</a:t>
                       </a:r>
                       <a:r>
-                        <a:rPr lang="pt-BR" sz="1400" baseline="0"/>
+                        <a:rPr lang="pt-BR" sz="1400" baseline="0" dirty="0"/>
                         <a:t> ao Aprendizado de Máquina</a:t>
                       </a:r>
                       <a:endParaRPr lang="en-US" sz="1400" dirty="0">
@@ -47614,14 +47721,14 @@
                     <a:p>
                       <a:pPr algn="ctr" rtl="0" fontAlgn="b"/>
                       <a:r>
-                        <a:rPr lang="en-US" sz="1400">
+                        <a:rPr lang="en-US" sz="1400" b="0" dirty="0">
+                          <a:solidFill>
+                            <a:schemeClr val="tx1"/>
+                          </a:solidFill>
                           <a:effectLst/>
                         </a:rPr>
                         <a:t>19</a:t>
                       </a:r>
-                      <a:endParaRPr lang="en-US" sz="1400" dirty="0">
-                        <a:effectLst/>
-                      </a:endParaRPr>
                     </a:p>
                   </a:txBody>
                   <a:tcPr marL="28575" marR="28575" marT="19050" marB="19050" anchor="b">
@@ -47668,14 +47775,19 @@
                     <a:bodyPr/>
                     <a:lstStyle/>
                     <a:p>
-                      <a:pPr algn="ctr" rtl="0" fontAlgn="b">
+                      <a:pPr marL="0" algn="ctr" defTabSz="914400" rtl="0" eaLnBrk="1" fontAlgn="b" latinLnBrk="0" hangingPunct="1">
                         <a:buNone/>
                       </a:pPr>
                       <a:r>
-                        <a:rPr lang="en-US" sz="1400">
-                          <a:effectLst/>
+                        <a:rPr lang="en-US" sz="1400" kern="1200" dirty="0">
+                          <a:solidFill>
+                            <a:schemeClr val="tx1"/>
+                          </a:solidFill>
+                          <a:latin typeface="+mn-lt"/>
+                          <a:ea typeface="+mn-ea"/>
+                          <a:cs typeface="+mn-cs"/>
                         </a:rPr>
-                        <a:t>20/6/2026</a:t>
+                        <a:t>5/12/2026</a:t>
                       </a:r>
                     </a:p>
                   </a:txBody>
@@ -47850,14 +47962,14 @@
                     <a:p>
                       <a:pPr algn="ctr" rtl="0" fontAlgn="b"/>
                       <a:r>
-                        <a:rPr lang="en-US" sz="1400">
+                        <a:rPr lang="en-US" sz="1400" b="1" dirty="0">
+                          <a:solidFill>
+                            <a:srgbClr val="00B050"/>
+                          </a:solidFill>
                           <a:effectLst/>
                         </a:rPr>
                         <a:t>20</a:t>
                       </a:r>
-                      <a:endParaRPr lang="en-US" sz="1400" dirty="0">
-                        <a:effectLst/>
-                      </a:endParaRPr>
                     </a:p>
                   </a:txBody>
                   <a:tcPr marL="28575" marR="28575" marT="19050" marB="19050" anchor="b">
@@ -47904,14 +48016,19 @@
                     <a:bodyPr/>
                     <a:lstStyle/>
                     <a:p>
-                      <a:pPr algn="ctr" rtl="0" fontAlgn="b">
+                      <a:pPr marL="0" algn="ctr" defTabSz="914400" rtl="0" eaLnBrk="1" fontAlgn="b" latinLnBrk="0" hangingPunct="1">
                         <a:buNone/>
                       </a:pPr>
                       <a:r>
-                        <a:rPr lang="en-US" sz="1400" dirty="0">
-                          <a:effectLst/>
+                        <a:rPr lang="en-US" sz="1400" b="1" kern="1200" dirty="0">
+                          <a:solidFill>
+                            <a:srgbClr val="00B050"/>
+                          </a:solidFill>
+                          <a:latin typeface="+mn-lt"/>
+                          <a:ea typeface="+mn-ea"/>
+                          <a:cs typeface="+mn-cs"/>
                         </a:rPr>
-                        <a:t>27/6/2026</a:t>
+                        <a:t>12/12/2026</a:t>
                       </a:r>
                     </a:p>
                   </a:txBody>
@@ -48021,14 +48138,17 @@
                     <a:p>
                       <a:pPr algn="ctr" rtl="0" fontAlgn="b"/>
                       <a:r>
-                        <a:rPr lang="pt-BR" sz="1400" dirty="0"/>
-                        <a:t>Introdução</a:t>
+                        <a:rPr lang="pt-BR" sz="1400" b="1" dirty="0">
+                          <a:solidFill>
+                            <a:srgbClr val="00B050"/>
+                          </a:solidFill>
+                        </a:rPr>
+                        <a:t>NP3 (via Teams)</a:t>
                       </a:r>
-                      <a:r>
-                        <a:rPr lang="pt-BR" sz="1400" baseline="0" dirty="0"/>
-                        <a:t> ao Aprendizado de Máquina</a:t>
-                      </a:r>
-                      <a:endParaRPr lang="en-US" sz="1400" dirty="0">
+                      <a:endParaRPr lang="en-US" sz="1400" b="1" dirty="0">
+                        <a:solidFill>
+                          <a:srgbClr val="00B050"/>
+                        </a:solidFill>
                         <a:effectLst/>
                       </a:endParaRPr>
                     </a:p>
@@ -48082,51 +48202,6 @@
           </a:graphicData>
         </a:graphic>
       </p:graphicFrame>
-      <p:sp>
-        <p:nvSpPr>
-          <p:cNvPr id="5" name="CaixaDeTexto 4">
-            <a:extLst>
-              <a:ext uri="{FF2B5EF4-FFF2-40B4-BE49-F238E27FC236}">
-                <a16:creationId xmlns:a16="http://schemas.microsoft.com/office/drawing/2014/main" id="{F387808C-8D5B-1136-B23E-C9104C846CFC}"/>
-              </a:ext>
-            </a:extLst>
-          </p:cNvPr>
-          <p:cNvSpPr txBox="1"/>
-          <p:nvPr/>
-        </p:nvSpPr>
-        <p:spPr>
-          <a:xfrm>
-            <a:off x="711200" y="6631771"/>
-            <a:ext cx="6096000" cy="276999"/>
-          </a:xfrm>
-          <a:prstGeom prst="rect">
-            <a:avLst/>
-          </a:prstGeom>
-          <a:noFill/>
-        </p:spPr>
-        <p:txBody>
-          <a:bodyPr wrap="square">
-            <a:spAutoFit/>
-          </a:bodyPr>
-          <a:lstStyle/>
-          <a:p>
-            <a:r>
-              <a:rPr lang="pt-BR" sz="1200" b="1" dirty="0">
-                <a:solidFill>
-                  <a:srgbClr val="00B0F0"/>
-                </a:solidFill>
-                <a:effectLst/>
-              </a:rPr>
-              <a:t>*Feriados (as reposições serão assíncronas)</a:t>
-            </a:r>
-            <a:endParaRPr lang="pt-BR" sz="1200" b="1" dirty="0">
-              <a:solidFill>
-                <a:srgbClr val="00B0F0"/>
-              </a:solidFill>
-            </a:endParaRPr>
-          </a:p>
-        </p:txBody>
-      </p:sp>
     </p:spTree>
     <p:extLst>
       <p:ext uri="{BB962C8B-B14F-4D97-AF65-F5344CB8AC3E}">
@@ -48627,7 +48702,7 @@
         <p:spPr>
           <a:xfrm>
             <a:off x="838200" y="1825624"/>
-            <a:ext cx="11233728" cy="5032376"/>
+            <a:ext cx="11353800" cy="5032376"/>
           </a:xfrm>
         </p:spPr>
         <p:txBody>
@@ -48857,7 +48932,7 @@
             </a:pPr>
             <a:r>
               <a:rPr lang="pt-BR" dirty="0"/>
-              <a:t>Professor: sextas-feiras das 18:30 às 19:30.</a:t>
+              <a:t>Professor: terças-feiras das 10:00 às 11:00 e das 17:30 às 18:30.</a:t>
             </a:r>
           </a:p>
           <a:p>
@@ -48867,18 +48942,29 @@
             </a:pPr>
             <a:r>
               <a:rPr lang="pt-BR" dirty="0"/>
-              <a:t>Monitor (Marcus Wilians Gomes Chagas: </a:t>
+              <a:t>Monitor (</a:t>
             </a:r>
             <a:r>
-              <a:rPr lang="pt-BR" dirty="0">
-                <a:hlinkClick r:id="rId3"/>
-              </a:rPr>
-              <a:t>marcuswilians@gea.inatel.br</a:t>
+              <a:rPr lang="en-US" dirty="0"/>
+              <a:t>João Gabriel: joao.g@get.inatel.br): </a:t>
             </a:r>
             <a:r>
-              <a:rPr lang="pt-BR" dirty="0"/>
-              <a:t>): todas as terças-feiras das 17:30 às 19:30.</a:t>
+              <a:rPr lang="en-US" dirty="0" err="1"/>
+              <a:t>segundas-feiras</a:t>
             </a:r>
+            <a:r>
+              <a:rPr lang="en-US" dirty="0"/>
+              <a:t> das 17:30 </a:t>
+            </a:r>
+            <a:r>
+              <a:rPr lang="en-US" dirty="0" err="1"/>
+              <a:t>às</a:t>
+            </a:r>
+            <a:r>
+              <a:rPr lang="en-US" dirty="0"/>
+              <a:t> 19:30.</a:t>
+            </a:r>
+            <a:endParaRPr lang="pt-BR" dirty="0"/>
           </a:p>
           <a:p>
             <a:pPr lvl="1">

--- a/slides/T320_Classificação (Parte I).pptx
+++ b/slides/T320_Classificação (Parte I).pptx
@@ -5,10 +5,10 @@
     <p:sldMasterId id="2147483648" r:id="rId1"/>
   </p:sldMasterIdLst>
   <p:notesMasterIdLst>
-    <p:notesMasterId r:id="rId33"/>
+    <p:notesMasterId r:id="rId36"/>
   </p:notesMasterIdLst>
   <p:handoutMasterIdLst>
-    <p:handoutMasterId r:id="rId34"/>
+    <p:handoutMasterId r:id="rId37"/>
   </p:handoutMasterIdLst>
   <p:sldIdLst>
     <p:sldId id="256" r:id="rId2"/>
@@ -22,26 +22,29 @@
     <p:sldId id="348" r:id="rId10"/>
     <p:sldId id="329" r:id="rId11"/>
     <p:sldId id="338" r:id="rId12"/>
-    <p:sldId id="331" r:id="rId13"/>
-    <p:sldId id="360" r:id="rId14"/>
-    <p:sldId id="332" r:id="rId15"/>
-    <p:sldId id="350" r:id="rId16"/>
-    <p:sldId id="361" r:id="rId17"/>
-    <p:sldId id="344" r:id="rId18"/>
-    <p:sldId id="351" r:id="rId19"/>
-    <p:sldId id="345" r:id="rId20"/>
-    <p:sldId id="352" r:id="rId21"/>
-    <p:sldId id="353" r:id="rId22"/>
-    <p:sldId id="355" r:id="rId23"/>
-    <p:sldId id="356" r:id="rId24"/>
-    <p:sldId id="357" r:id="rId25"/>
-    <p:sldId id="337" r:id="rId26"/>
-    <p:sldId id="359" r:id="rId27"/>
-    <p:sldId id="324" r:id="rId28"/>
-    <p:sldId id="306" r:id="rId29"/>
-    <p:sldId id="339" r:id="rId30"/>
-    <p:sldId id="341" r:id="rId31"/>
-    <p:sldId id="343" r:id="rId32"/>
+    <p:sldId id="362" r:id="rId13"/>
+    <p:sldId id="331" r:id="rId14"/>
+    <p:sldId id="360" r:id="rId15"/>
+    <p:sldId id="332" r:id="rId16"/>
+    <p:sldId id="350" r:id="rId17"/>
+    <p:sldId id="361" r:id="rId18"/>
+    <p:sldId id="364" r:id="rId19"/>
+    <p:sldId id="344" r:id="rId20"/>
+    <p:sldId id="351" r:id="rId21"/>
+    <p:sldId id="345" r:id="rId22"/>
+    <p:sldId id="352" r:id="rId23"/>
+    <p:sldId id="353" r:id="rId24"/>
+    <p:sldId id="365" r:id="rId25"/>
+    <p:sldId id="355" r:id="rId26"/>
+    <p:sldId id="356" r:id="rId27"/>
+    <p:sldId id="357" r:id="rId28"/>
+    <p:sldId id="337" r:id="rId29"/>
+    <p:sldId id="359" r:id="rId30"/>
+    <p:sldId id="324" r:id="rId31"/>
+    <p:sldId id="306" r:id="rId32"/>
+    <p:sldId id="339" r:id="rId33"/>
+    <p:sldId id="341" r:id="rId34"/>
+    <p:sldId id="343" r:id="rId35"/>
   </p:sldIdLst>
   <p:sldSz cx="12192000" cy="6858000"/>
   <p:notesSz cx="7315200" cy="9601200"/>
@@ -305,7 +308,7 @@
           <a:p>
             <a:fld id="{144F1436-6906-4D93-B7A2-786C327BFA14}" type="datetimeFigureOut">
               <a:rPr lang="nl-BE" smtClean="0"/>
-              <a:t>31/07/2026</a:t>
+              <a:t>1/08/2026</a:t>
             </a:fld>
             <a:endParaRPr lang="nl-BE"/>
           </a:p>
@@ -470,7 +473,7 @@
           <a:p>
             <a:fld id="{AA8CD09E-2914-4F47-B6C1-51B2C31814C9}" type="datetimeFigureOut">
               <a:rPr lang="pt-BR" smtClean="0"/>
-              <a:t>31/07/2026</a:t>
+              <a:t>01/08/2026</a:t>
             </a:fld>
             <a:endParaRPr lang="pt-BR"/>
           </a:p>
@@ -948,7 +951,7 @@
           <a:p>
             <a:fld id="{6FC8D850-966F-45A6-8DE7-15B891E7D40D}" type="slidenum">
               <a:rPr lang="pt-BR" smtClean="0"/>
-              <a:t>17</a:t>
+              <a:t>19</a:t>
             </a:fld>
             <a:endParaRPr lang="pt-BR"/>
           </a:p>
@@ -1094,7 +1097,7 @@
           <a:p>
             <a:fld id="{6FC8D850-966F-45A6-8DE7-15B891E7D40D}" type="slidenum">
               <a:rPr lang="pt-BR" smtClean="0"/>
-              <a:t>18</a:t>
+              <a:t>20</a:t>
             </a:fld>
             <a:endParaRPr lang="pt-BR"/>
           </a:p>
@@ -1206,7 +1209,7 @@
           <a:p>
             <a:fld id="{6FC8D850-966F-45A6-8DE7-15B891E7D40D}" type="slidenum">
               <a:rPr lang="pt-BR" smtClean="0"/>
-              <a:t>19</a:t>
+              <a:t>21</a:t>
             </a:fld>
             <a:endParaRPr lang="pt-BR"/>
           </a:p>
@@ -1316,7 +1319,7 @@
           <a:p>
             <a:fld id="{6FC8D850-966F-45A6-8DE7-15B891E7D40D}" type="slidenum">
               <a:rPr lang="pt-BR" smtClean="0"/>
-              <a:t>20</a:t>
+              <a:t>22</a:t>
             </a:fld>
             <a:endParaRPr lang="pt-BR"/>
           </a:p>
@@ -1426,7 +1429,7 @@
           <a:p>
             <a:fld id="{6FC8D850-966F-45A6-8DE7-15B891E7D40D}" type="slidenum">
               <a:rPr lang="pt-BR" smtClean="0"/>
-              <a:t>21</a:t>
+              <a:t>23</a:t>
             </a:fld>
             <a:endParaRPr lang="pt-BR"/>
           </a:p>
@@ -1682,7 +1685,7 @@
           <a:p>
             <a:fld id="{6FC8D850-966F-45A6-8DE7-15B891E7D40D}" type="slidenum">
               <a:rPr lang="pt-BR" smtClean="0"/>
-              <a:t>25</a:t>
+              <a:t>28</a:t>
             </a:fld>
             <a:endParaRPr lang="pt-BR"/>
           </a:p>
@@ -1776,7 +1779,7 @@
           <a:p>
             <a:fld id="{6FC8D850-966F-45A6-8DE7-15B891E7D40D}" type="slidenum">
               <a:rPr lang="pt-BR" smtClean="0"/>
-              <a:t>27</a:t>
+              <a:t>30</a:t>
             </a:fld>
             <a:endParaRPr lang="pt-BR"/>
           </a:p>
@@ -2572,7 +2575,7 @@
           <a:p>
             <a:fld id="{6FC8D850-966F-45A6-8DE7-15B891E7D40D}" type="slidenum">
               <a:rPr lang="pt-BR" smtClean="0"/>
-              <a:t>12</a:t>
+              <a:t>13</a:t>
             </a:fld>
             <a:endParaRPr lang="pt-BR"/>
           </a:p>
@@ -2824,7 +2827,7 @@
           <a:p>
             <a:fld id="{6FC8D850-966F-45A6-8DE7-15B891E7D40D}" type="slidenum">
               <a:rPr lang="pt-BR" smtClean="0"/>
-              <a:t>13</a:t>
+              <a:t>14</a:t>
             </a:fld>
             <a:endParaRPr lang="pt-BR"/>
           </a:p>
@@ -2865,7 +2868,7 @@
           <p:cNvPr id="2" name="Título 1">
             <a:extLst>
               <a:ext uri="{FF2B5EF4-FFF2-40B4-BE49-F238E27FC236}">
-                <a16:creationId xmlns:a16="http://schemas.microsoft.com/office/drawing/2014/main" id="{1DB9B4FF-B06E-403C-A326-BDC64D8FF94E}"/>
+                <a16:creationId xmlns:a16="http://schemas.microsoft.com/office/drawing/2014/main" xmlns="" id="{1DB9B4FF-B06E-403C-A326-BDC64D8FF94E}"/>
               </a:ext>
             </a:extLst>
           </p:cNvPr>
@@ -2902,7 +2905,7 @@
           <p:cNvPr id="3" name="Subtítulo 2">
             <a:extLst>
               <a:ext uri="{FF2B5EF4-FFF2-40B4-BE49-F238E27FC236}">
-                <a16:creationId xmlns:a16="http://schemas.microsoft.com/office/drawing/2014/main" id="{247BDFCE-746E-45BF-A319-4733D58D1632}"/>
+                <a16:creationId xmlns:a16="http://schemas.microsoft.com/office/drawing/2014/main" xmlns="" id="{247BDFCE-746E-45BF-A319-4733D58D1632}"/>
               </a:ext>
             </a:extLst>
           </p:cNvPr>
@@ -2972,7 +2975,7 @@
           <p:cNvPr id="4" name="Espaço Reservado para Data 3">
             <a:extLst>
               <a:ext uri="{FF2B5EF4-FFF2-40B4-BE49-F238E27FC236}">
-                <a16:creationId xmlns:a16="http://schemas.microsoft.com/office/drawing/2014/main" id="{9EDE2778-5372-4104-B96D-968184DA8288}"/>
+                <a16:creationId xmlns:a16="http://schemas.microsoft.com/office/drawing/2014/main" xmlns="" id="{9EDE2778-5372-4104-B96D-968184DA8288}"/>
               </a:ext>
             </a:extLst>
           </p:cNvPr>
@@ -2990,7 +2993,7 @@
           <a:p>
             <a:fld id="{63289F7E-B80B-496E-81B4-D396C37C9454}" type="datetimeFigureOut">
               <a:rPr lang="pt-BR" smtClean="0"/>
-              <a:t>31/07/2026</a:t>
+              <a:t>01/08/2026</a:t>
             </a:fld>
             <a:endParaRPr lang="pt-BR"/>
           </a:p>
@@ -3001,7 +3004,7 @@
           <p:cNvPr id="5" name="Espaço Reservado para Rodapé 4">
             <a:extLst>
               <a:ext uri="{FF2B5EF4-FFF2-40B4-BE49-F238E27FC236}">
-                <a16:creationId xmlns:a16="http://schemas.microsoft.com/office/drawing/2014/main" id="{C1DD0F41-C861-4051-988D-3024A37A4B93}"/>
+                <a16:creationId xmlns:a16="http://schemas.microsoft.com/office/drawing/2014/main" xmlns="" id="{C1DD0F41-C861-4051-988D-3024A37A4B93}"/>
               </a:ext>
             </a:extLst>
           </p:cNvPr>
@@ -3026,7 +3029,7 @@
           <p:cNvPr id="6" name="Espaço Reservado para Número de Slide 5">
             <a:extLst>
               <a:ext uri="{FF2B5EF4-FFF2-40B4-BE49-F238E27FC236}">
-                <a16:creationId xmlns:a16="http://schemas.microsoft.com/office/drawing/2014/main" id="{07E5967E-D980-431A-A5DB-3F0C5030A81E}"/>
+                <a16:creationId xmlns:a16="http://schemas.microsoft.com/office/drawing/2014/main" xmlns="" id="{07E5967E-D980-431A-A5DB-3F0C5030A81E}"/>
               </a:ext>
             </a:extLst>
           </p:cNvPr>
@@ -3085,7 +3088,7 @@
           <p:cNvPr id="2" name="Título 1">
             <a:extLst>
               <a:ext uri="{FF2B5EF4-FFF2-40B4-BE49-F238E27FC236}">
-                <a16:creationId xmlns:a16="http://schemas.microsoft.com/office/drawing/2014/main" id="{9036C49F-3E68-4175-81BA-3C3FEE44308A}"/>
+                <a16:creationId xmlns:a16="http://schemas.microsoft.com/office/drawing/2014/main" xmlns="" id="{9036C49F-3E68-4175-81BA-3C3FEE44308A}"/>
               </a:ext>
             </a:extLst>
           </p:cNvPr>
@@ -3113,7 +3116,7 @@
           <p:cNvPr id="3" name="Espaço Reservado para Texto Vertical 2">
             <a:extLst>
               <a:ext uri="{FF2B5EF4-FFF2-40B4-BE49-F238E27FC236}">
-                <a16:creationId xmlns:a16="http://schemas.microsoft.com/office/drawing/2014/main" id="{426FA736-3DD3-4D4E-B57B-BBE1D8F7D424}"/>
+                <a16:creationId xmlns:a16="http://schemas.microsoft.com/office/drawing/2014/main" xmlns="" id="{426FA736-3DD3-4D4E-B57B-BBE1D8F7D424}"/>
               </a:ext>
             </a:extLst>
           </p:cNvPr>
@@ -3170,7 +3173,7 @@
           <p:cNvPr id="4" name="Espaço Reservado para Data 3">
             <a:extLst>
               <a:ext uri="{FF2B5EF4-FFF2-40B4-BE49-F238E27FC236}">
-                <a16:creationId xmlns:a16="http://schemas.microsoft.com/office/drawing/2014/main" id="{99E8855C-D8FD-48F6-B14E-861E0DE4D915}"/>
+                <a16:creationId xmlns:a16="http://schemas.microsoft.com/office/drawing/2014/main" xmlns="" id="{99E8855C-D8FD-48F6-B14E-861E0DE4D915}"/>
               </a:ext>
             </a:extLst>
           </p:cNvPr>
@@ -3188,7 +3191,7 @@
           <a:p>
             <a:fld id="{63289F7E-B80B-496E-81B4-D396C37C9454}" type="datetimeFigureOut">
               <a:rPr lang="pt-BR" smtClean="0"/>
-              <a:t>31/07/2026</a:t>
+              <a:t>01/08/2026</a:t>
             </a:fld>
             <a:endParaRPr lang="pt-BR"/>
           </a:p>
@@ -3199,7 +3202,7 @@
           <p:cNvPr id="5" name="Espaço Reservado para Rodapé 4">
             <a:extLst>
               <a:ext uri="{FF2B5EF4-FFF2-40B4-BE49-F238E27FC236}">
-                <a16:creationId xmlns:a16="http://schemas.microsoft.com/office/drawing/2014/main" id="{97C0BB88-2F21-42A5-ACFF-83DA47F2D340}"/>
+                <a16:creationId xmlns:a16="http://schemas.microsoft.com/office/drawing/2014/main" xmlns="" id="{97C0BB88-2F21-42A5-ACFF-83DA47F2D340}"/>
               </a:ext>
             </a:extLst>
           </p:cNvPr>
@@ -3224,7 +3227,7 @@
           <p:cNvPr id="6" name="Espaço Reservado para Número de Slide 5">
             <a:extLst>
               <a:ext uri="{FF2B5EF4-FFF2-40B4-BE49-F238E27FC236}">
-                <a16:creationId xmlns:a16="http://schemas.microsoft.com/office/drawing/2014/main" id="{6CB462B3-1F22-4C05-B4B8-7A279FB7D5E9}"/>
+                <a16:creationId xmlns:a16="http://schemas.microsoft.com/office/drawing/2014/main" xmlns="" id="{6CB462B3-1F22-4C05-B4B8-7A279FB7D5E9}"/>
               </a:ext>
             </a:extLst>
           </p:cNvPr>
@@ -3283,7 +3286,7 @@
           <p:cNvPr id="2" name="Título Vertical 1">
             <a:extLst>
               <a:ext uri="{FF2B5EF4-FFF2-40B4-BE49-F238E27FC236}">
-                <a16:creationId xmlns:a16="http://schemas.microsoft.com/office/drawing/2014/main" id="{EAEAB728-701C-4207-A9D5-23FF45C60502}"/>
+                <a16:creationId xmlns:a16="http://schemas.microsoft.com/office/drawing/2014/main" xmlns="" id="{EAEAB728-701C-4207-A9D5-23FF45C60502}"/>
               </a:ext>
             </a:extLst>
           </p:cNvPr>
@@ -3316,7 +3319,7 @@
           <p:cNvPr id="3" name="Espaço Reservado para Texto Vertical 2">
             <a:extLst>
               <a:ext uri="{FF2B5EF4-FFF2-40B4-BE49-F238E27FC236}">
-                <a16:creationId xmlns:a16="http://schemas.microsoft.com/office/drawing/2014/main" id="{BA8C8CCF-7823-480A-9A19-0F664DD17E3B}"/>
+                <a16:creationId xmlns:a16="http://schemas.microsoft.com/office/drawing/2014/main" xmlns="" id="{BA8C8CCF-7823-480A-9A19-0F664DD17E3B}"/>
               </a:ext>
             </a:extLst>
           </p:cNvPr>
@@ -3378,7 +3381,7 @@
           <p:cNvPr id="4" name="Espaço Reservado para Data 3">
             <a:extLst>
               <a:ext uri="{FF2B5EF4-FFF2-40B4-BE49-F238E27FC236}">
-                <a16:creationId xmlns:a16="http://schemas.microsoft.com/office/drawing/2014/main" id="{721D5734-7B1F-425D-942F-6EB73344027C}"/>
+                <a16:creationId xmlns:a16="http://schemas.microsoft.com/office/drawing/2014/main" xmlns="" id="{721D5734-7B1F-425D-942F-6EB73344027C}"/>
               </a:ext>
             </a:extLst>
           </p:cNvPr>
@@ -3396,7 +3399,7 @@
           <a:p>
             <a:fld id="{63289F7E-B80B-496E-81B4-D396C37C9454}" type="datetimeFigureOut">
               <a:rPr lang="pt-BR" smtClean="0"/>
-              <a:t>31/07/2026</a:t>
+              <a:t>01/08/2026</a:t>
             </a:fld>
             <a:endParaRPr lang="pt-BR"/>
           </a:p>
@@ -3407,7 +3410,7 @@
           <p:cNvPr id="5" name="Espaço Reservado para Rodapé 4">
             <a:extLst>
               <a:ext uri="{FF2B5EF4-FFF2-40B4-BE49-F238E27FC236}">
-                <a16:creationId xmlns:a16="http://schemas.microsoft.com/office/drawing/2014/main" id="{1E1AAEAC-F08D-45FE-89EC-B1B349A868C9}"/>
+                <a16:creationId xmlns:a16="http://schemas.microsoft.com/office/drawing/2014/main" xmlns="" id="{1E1AAEAC-F08D-45FE-89EC-B1B349A868C9}"/>
               </a:ext>
             </a:extLst>
           </p:cNvPr>
@@ -3432,7 +3435,7 @@
           <p:cNvPr id="6" name="Espaço Reservado para Número de Slide 5">
             <a:extLst>
               <a:ext uri="{FF2B5EF4-FFF2-40B4-BE49-F238E27FC236}">
-                <a16:creationId xmlns:a16="http://schemas.microsoft.com/office/drawing/2014/main" id="{BAA44493-9911-47B2-87A6-C2141A972BC8}"/>
+                <a16:creationId xmlns:a16="http://schemas.microsoft.com/office/drawing/2014/main" xmlns="" id="{BAA44493-9911-47B2-87A6-C2141A972BC8}"/>
               </a:ext>
             </a:extLst>
           </p:cNvPr>
@@ -3491,7 +3494,7 @@
           <p:cNvPr id="2" name="Título 1">
             <a:extLst>
               <a:ext uri="{FF2B5EF4-FFF2-40B4-BE49-F238E27FC236}">
-                <a16:creationId xmlns:a16="http://schemas.microsoft.com/office/drawing/2014/main" id="{71BD44A5-8F21-4626-A01D-48A1C874B1D5}"/>
+                <a16:creationId xmlns:a16="http://schemas.microsoft.com/office/drawing/2014/main" xmlns="" id="{71BD44A5-8F21-4626-A01D-48A1C874B1D5}"/>
               </a:ext>
             </a:extLst>
           </p:cNvPr>
@@ -3519,7 +3522,7 @@
           <p:cNvPr id="3" name="Espaço Reservado para Conteúdo 2">
             <a:extLst>
               <a:ext uri="{FF2B5EF4-FFF2-40B4-BE49-F238E27FC236}">
-                <a16:creationId xmlns:a16="http://schemas.microsoft.com/office/drawing/2014/main" id="{B79E8085-65A9-48AA-951D-71D978BFF4ED}"/>
+                <a16:creationId xmlns:a16="http://schemas.microsoft.com/office/drawing/2014/main" xmlns="" id="{B79E8085-65A9-48AA-951D-71D978BFF4ED}"/>
               </a:ext>
             </a:extLst>
           </p:cNvPr>
@@ -3576,7 +3579,7 @@
           <p:cNvPr id="4" name="Espaço Reservado para Data 3">
             <a:extLst>
               <a:ext uri="{FF2B5EF4-FFF2-40B4-BE49-F238E27FC236}">
-                <a16:creationId xmlns:a16="http://schemas.microsoft.com/office/drawing/2014/main" id="{F05BE1AF-51EA-425D-B188-DE7BD675009F}"/>
+                <a16:creationId xmlns:a16="http://schemas.microsoft.com/office/drawing/2014/main" xmlns="" id="{F05BE1AF-51EA-425D-B188-DE7BD675009F}"/>
               </a:ext>
             </a:extLst>
           </p:cNvPr>
@@ -3594,7 +3597,7 @@
           <a:p>
             <a:fld id="{63289F7E-B80B-496E-81B4-D396C37C9454}" type="datetimeFigureOut">
               <a:rPr lang="pt-BR" smtClean="0"/>
-              <a:t>31/07/2026</a:t>
+              <a:t>01/08/2026</a:t>
             </a:fld>
             <a:endParaRPr lang="pt-BR"/>
           </a:p>
@@ -3605,7 +3608,7 @@
           <p:cNvPr id="5" name="Espaço Reservado para Rodapé 4">
             <a:extLst>
               <a:ext uri="{FF2B5EF4-FFF2-40B4-BE49-F238E27FC236}">
-                <a16:creationId xmlns:a16="http://schemas.microsoft.com/office/drawing/2014/main" id="{121BE632-29CF-4CB9-B365-C9EF38F89BE6}"/>
+                <a16:creationId xmlns:a16="http://schemas.microsoft.com/office/drawing/2014/main" xmlns="" id="{121BE632-29CF-4CB9-B365-C9EF38F89BE6}"/>
               </a:ext>
             </a:extLst>
           </p:cNvPr>
@@ -3630,7 +3633,7 @@
           <p:cNvPr id="6" name="Espaço Reservado para Número de Slide 5">
             <a:extLst>
               <a:ext uri="{FF2B5EF4-FFF2-40B4-BE49-F238E27FC236}">
-                <a16:creationId xmlns:a16="http://schemas.microsoft.com/office/drawing/2014/main" id="{60CF3DD1-9AEC-4A57-B461-4E4DD86FAC18}"/>
+                <a16:creationId xmlns:a16="http://schemas.microsoft.com/office/drawing/2014/main" xmlns="" id="{60CF3DD1-9AEC-4A57-B461-4E4DD86FAC18}"/>
               </a:ext>
             </a:extLst>
           </p:cNvPr>
@@ -3689,7 +3692,7 @@
           <p:cNvPr id="2" name="Título 1">
             <a:extLst>
               <a:ext uri="{FF2B5EF4-FFF2-40B4-BE49-F238E27FC236}">
-                <a16:creationId xmlns:a16="http://schemas.microsoft.com/office/drawing/2014/main" id="{34AB2FF0-A4D7-4E28-991D-FF26140D5988}"/>
+                <a16:creationId xmlns:a16="http://schemas.microsoft.com/office/drawing/2014/main" xmlns="" id="{34AB2FF0-A4D7-4E28-991D-FF26140D5988}"/>
               </a:ext>
             </a:extLst>
           </p:cNvPr>
@@ -3726,7 +3729,7 @@
           <p:cNvPr id="3" name="Espaço Reservado para Texto 2">
             <a:extLst>
               <a:ext uri="{FF2B5EF4-FFF2-40B4-BE49-F238E27FC236}">
-                <a16:creationId xmlns:a16="http://schemas.microsoft.com/office/drawing/2014/main" id="{E2AC45B0-4145-40DB-8E61-105461170604}"/>
+                <a16:creationId xmlns:a16="http://schemas.microsoft.com/office/drawing/2014/main" xmlns="" id="{E2AC45B0-4145-40DB-8E61-105461170604}"/>
               </a:ext>
             </a:extLst>
           </p:cNvPr>
@@ -3851,7 +3854,7 @@
           <p:cNvPr id="4" name="Espaço Reservado para Data 3">
             <a:extLst>
               <a:ext uri="{FF2B5EF4-FFF2-40B4-BE49-F238E27FC236}">
-                <a16:creationId xmlns:a16="http://schemas.microsoft.com/office/drawing/2014/main" id="{50F1D3FB-740A-4EBA-A309-2CE71D12ECFB}"/>
+                <a16:creationId xmlns:a16="http://schemas.microsoft.com/office/drawing/2014/main" xmlns="" id="{50F1D3FB-740A-4EBA-A309-2CE71D12ECFB}"/>
               </a:ext>
             </a:extLst>
           </p:cNvPr>
@@ -3869,7 +3872,7 @@
           <a:p>
             <a:fld id="{63289F7E-B80B-496E-81B4-D396C37C9454}" type="datetimeFigureOut">
               <a:rPr lang="pt-BR" smtClean="0"/>
-              <a:t>31/07/2026</a:t>
+              <a:t>01/08/2026</a:t>
             </a:fld>
             <a:endParaRPr lang="pt-BR"/>
           </a:p>
@@ -3880,7 +3883,7 @@
           <p:cNvPr id="5" name="Espaço Reservado para Rodapé 4">
             <a:extLst>
               <a:ext uri="{FF2B5EF4-FFF2-40B4-BE49-F238E27FC236}">
-                <a16:creationId xmlns:a16="http://schemas.microsoft.com/office/drawing/2014/main" id="{BDCAB18F-8715-4465-A940-F9C193A2ACE9}"/>
+                <a16:creationId xmlns:a16="http://schemas.microsoft.com/office/drawing/2014/main" xmlns="" id="{BDCAB18F-8715-4465-A940-F9C193A2ACE9}"/>
               </a:ext>
             </a:extLst>
           </p:cNvPr>
@@ -3905,7 +3908,7 @@
           <p:cNvPr id="6" name="Espaço Reservado para Número de Slide 5">
             <a:extLst>
               <a:ext uri="{FF2B5EF4-FFF2-40B4-BE49-F238E27FC236}">
-                <a16:creationId xmlns:a16="http://schemas.microsoft.com/office/drawing/2014/main" id="{353466C6-8248-429F-8056-FF040BF509EB}"/>
+                <a16:creationId xmlns:a16="http://schemas.microsoft.com/office/drawing/2014/main" xmlns="" id="{353466C6-8248-429F-8056-FF040BF509EB}"/>
               </a:ext>
             </a:extLst>
           </p:cNvPr>
@@ -3964,7 +3967,7 @@
           <p:cNvPr id="2" name="Título 1">
             <a:extLst>
               <a:ext uri="{FF2B5EF4-FFF2-40B4-BE49-F238E27FC236}">
-                <a16:creationId xmlns:a16="http://schemas.microsoft.com/office/drawing/2014/main" id="{BC7BB9F0-F14B-4A91-B2B7-35BC47FE4DE7}"/>
+                <a16:creationId xmlns:a16="http://schemas.microsoft.com/office/drawing/2014/main" xmlns="" id="{BC7BB9F0-F14B-4A91-B2B7-35BC47FE4DE7}"/>
               </a:ext>
             </a:extLst>
           </p:cNvPr>
@@ -3992,7 +3995,7 @@
           <p:cNvPr id="3" name="Espaço Reservado para Conteúdo 2">
             <a:extLst>
               <a:ext uri="{FF2B5EF4-FFF2-40B4-BE49-F238E27FC236}">
-                <a16:creationId xmlns:a16="http://schemas.microsoft.com/office/drawing/2014/main" id="{EC1FC1C4-73DA-47A6-8496-B0B457F7D39A}"/>
+                <a16:creationId xmlns:a16="http://schemas.microsoft.com/office/drawing/2014/main" xmlns="" id="{EC1FC1C4-73DA-47A6-8496-B0B457F7D39A}"/>
               </a:ext>
             </a:extLst>
           </p:cNvPr>
@@ -4054,7 +4057,7 @@
           <p:cNvPr id="4" name="Espaço Reservado para Conteúdo 3">
             <a:extLst>
               <a:ext uri="{FF2B5EF4-FFF2-40B4-BE49-F238E27FC236}">
-                <a16:creationId xmlns:a16="http://schemas.microsoft.com/office/drawing/2014/main" id="{E92F06A8-A449-4D92-9912-76873E529B38}"/>
+                <a16:creationId xmlns:a16="http://schemas.microsoft.com/office/drawing/2014/main" xmlns="" id="{E92F06A8-A449-4D92-9912-76873E529B38}"/>
               </a:ext>
             </a:extLst>
           </p:cNvPr>
@@ -4116,7 +4119,7 @@
           <p:cNvPr id="5" name="Espaço Reservado para Data 4">
             <a:extLst>
               <a:ext uri="{FF2B5EF4-FFF2-40B4-BE49-F238E27FC236}">
-                <a16:creationId xmlns:a16="http://schemas.microsoft.com/office/drawing/2014/main" id="{938070A4-BC2F-4D55-BD8D-DEAF11BB9EE9}"/>
+                <a16:creationId xmlns:a16="http://schemas.microsoft.com/office/drawing/2014/main" xmlns="" id="{938070A4-BC2F-4D55-BD8D-DEAF11BB9EE9}"/>
               </a:ext>
             </a:extLst>
           </p:cNvPr>
@@ -4134,7 +4137,7 @@
           <a:p>
             <a:fld id="{63289F7E-B80B-496E-81B4-D396C37C9454}" type="datetimeFigureOut">
               <a:rPr lang="pt-BR" smtClean="0"/>
-              <a:t>31/07/2026</a:t>
+              <a:t>01/08/2026</a:t>
             </a:fld>
             <a:endParaRPr lang="pt-BR"/>
           </a:p>
@@ -4145,7 +4148,7 @@
           <p:cNvPr id="6" name="Espaço Reservado para Rodapé 5">
             <a:extLst>
               <a:ext uri="{FF2B5EF4-FFF2-40B4-BE49-F238E27FC236}">
-                <a16:creationId xmlns:a16="http://schemas.microsoft.com/office/drawing/2014/main" id="{45CC2DB8-844A-465F-BA9A-7734C80C7F43}"/>
+                <a16:creationId xmlns:a16="http://schemas.microsoft.com/office/drawing/2014/main" xmlns="" id="{45CC2DB8-844A-465F-BA9A-7734C80C7F43}"/>
               </a:ext>
             </a:extLst>
           </p:cNvPr>
@@ -4170,7 +4173,7 @@
           <p:cNvPr id="7" name="Espaço Reservado para Número de Slide 6">
             <a:extLst>
               <a:ext uri="{FF2B5EF4-FFF2-40B4-BE49-F238E27FC236}">
-                <a16:creationId xmlns:a16="http://schemas.microsoft.com/office/drawing/2014/main" id="{4CC606A8-097B-4040-94E0-CD8C88280D8F}"/>
+                <a16:creationId xmlns:a16="http://schemas.microsoft.com/office/drawing/2014/main" xmlns="" id="{4CC606A8-097B-4040-94E0-CD8C88280D8F}"/>
               </a:ext>
             </a:extLst>
           </p:cNvPr>
@@ -4229,7 +4232,7 @@
           <p:cNvPr id="2" name="Título 1">
             <a:extLst>
               <a:ext uri="{FF2B5EF4-FFF2-40B4-BE49-F238E27FC236}">
-                <a16:creationId xmlns:a16="http://schemas.microsoft.com/office/drawing/2014/main" id="{76D66686-0143-4CB6-8C09-BA326F1E7ACA}"/>
+                <a16:creationId xmlns:a16="http://schemas.microsoft.com/office/drawing/2014/main" xmlns="" id="{76D66686-0143-4CB6-8C09-BA326F1E7ACA}"/>
               </a:ext>
             </a:extLst>
           </p:cNvPr>
@@ -4262,7 +4265,7 @@
           <p:cNvPr id="3" name="Espaço Reservado para Texto 2">
             <a:extLst>
               <a:ext uri="{FF2B5EF4-FFF2-40B4-BE49-F238E27FC236}">
-                <a16:creationId xmlns:a16="http://schemas.microsoft.com/office/drawing/2014/main" id="{0227AB85-F59E-4BCE-B846-4FA0992C2F23}"/>
+                <a16:creationId xmlns:a16="http://schemas.microsoft.com/office/drawing/2014/main" xmlns="" id="{0227AB85-F59E-4BCE-B846-4FA0992C2F23}"/>
               </a:ext>
             </a:extLst>
           </p:cNvPr>
@@ -4333,7 +4336,7 @@
           <p:cNvPr id="4" name="Espaço Reservado para Conteúdo 3">
             <a:extLst>
               <a:ext uri="{FF2B5EF4-FFF2-40B4-BE49-F238E27FC236}">
-                <a16:creationId xmlns:a16="http://schemas.microsoft.com/office/drawing/2014/main" id="{3373456C-7319-4D0A-827D-D29F6B083F5D}"/>
+                <a16:creationId xmlns:a16="http://schemas.microsoft.com/office/drawing/2014/main" xmlns="" id="{3373456C-7319-4D0A-827D-D29F6B083F5D}"/>
               </a:ext>
             </a:extLst>
           </p:cNvPr>
@@ -4395,7 +4398,7 @@
           <p:cNvPr id="5" name="Espaço Reservado para Texto 4">
             <a:extLst>
               <a:ext uri="{FF2B5EF4-FFF2-40B4-BE49-F238E27FC236}">
-                <a16:creationId xmlns:a16="http://schemas.microsoft.com/office/drawing/2014/main" id="{4CD109D0-2E83-4262-8029-A871CEC47406}"/>
+                <a16:creationId xmlns:a16="http://schemas.microsoft.com/office/drawing/2014/main" xmlns="" id="{4CD109D0-2E83-4262-8029-A871CEC47406}"/>
               </a:ext>
             </a:extLst>
           </p:cNvPr>
@@ -4466,7 +4469,7 @@
           <p:cNvPr id="6" name="Espaço Reservado para Conteúdo 5">
             <a:extLst>
               <a:ext uri="{FF2B5EF4-FFF2-40B4-BE49-F238E27FC236}">
-                <a16:creationId xmlns:a16="http://schemas.microsoft.com/office/drawing/2014/main" id="{AD706E3A-CFBB-4A6C-A65F-D0360A9E74FE}"/>
+                <a16:creationId xmlns:a16="http://schemas.microsoft.com/office/drawing/2014/main" xmlns="" id="{AD706E3A-CFBB-4A6C-A65F-D0360A9E74FE}"/>
               </a:ext>
             </a:extLst>
           </p:cNvPr>
@@ -4528,7 +4531,7 @@
           <p:cNvPr id="7" name="Espaço Reservado para Data 6">
             <a:extLst>
               <a:ext uri="{FF2B5EF4-FFF2-40B4-BE49-F238E27FC236}">
-                <a16:creationId xmlns:a16="http://schemas.microsoft.com/office/drawing/2014/main" id="{4172C0E5-5AF0-4805-BB51-443733CD2BD5}"/>
+                <a16:creationId xmlns:a16="http://schemas.microsoft.com/office/drawing/2014/main" xmlns="" id="{4172C0E5-5AF0-4805-BB51-443733CD2BD5}"/>
               </a:ext>
             </a:extLst>
           </p:cNvPr>
@@ -4546,7 +4549,7 @@
           <a:p>
             <a:fld id="{63289F7E-B80B-496E-81B4-D396C37C9454}" type="datetimeFigureOut">
               <a:rPr lang="pt-BR" smtClean="0"/>
-              <a:t>31/07/2026</a:t>
+              <a:t>01/08/2026</a:t>
             </a:fld>
             <a:endParaRPr lang="pt-BR"/>
           </a:p>
@@ -4557,7 +4560,7 @@
           <p:cNvPr id="8" name="Espaço Reservado para Rodapé 7">
             <a:extLst>
               <a:ext uri="{FF2B5EF4-FFF2-40B4-BE49-F238E27FC236}">
-                <a16:creationId xmlns:a16="http://schemas.microsoft.com/office/drawing/2014/main" id="{0E801648-156F-497E-99CF-797DF48051E1}"/>
+                <a16:creationId xmlns:a16="http://schemas.microsoft.com/office/drawing/2014/main" xmlns="" id="{0E801648-156F-497E-99CF-797DF48051E1}"/>
               </a:ext>
             </a:extLst>
           </p:cNvPr>
@@ -4582,7 +4585,7 @@
           <p:cNvPr id="9" name="Espaço Reservado para Número de Slide 8">
             <a:extLst>
               <a:ext uri="{FF2B5EF4-FFF2-40B4-BE49-F238E27FC236}">
-                <a16:creationId xmlns:a16="http://schemas.microsoft.com/office/drawing/2014/main" id="{EEE23D32-80E7-4796-A137-66BF842E4B53}"/>
+                <a16:creationId xmlns:a16="http://schemas.microsoft.com/office/drawing/2014/main" xmlns="" id="{EEE23D32-80E7-4796-A137-66BF842E4B53}"/>
               </a:ext>
             </a:extLst>
           </p:cNvPr>
@@ -4641,7 +4644,7 @@
           <p:cNvPr id="2" name="Título 1">
             <a:extLst>
               <a:ext uri="{FF2B5EF4-FFF2-40B4-BE49-F238E27FC236}">
-                <a16:creationId xmlns:a16="http://schemas.microsoft.com/office/drawing/2014/main" id="{2BCE2379-C78F-47E1-8CFC-B846E7AF148D}"/>
+                <a16:creationId xmlns:a16="http://schemas.microsoft.com/office/drawing/2014/main" xmlns="" id="{2BCE2379-C78F-47E1-8CFC-B846E7AF148D}"/>
               </a:ext>
             </a:extLst>
           </p:cNvPr>
@@ -4669,7 +4672,7 @@
           <p:cNvPr id="3" name="Espaço Reservado para Data 2">
             <a:extLst>
               <a:ext uri="{FF2B5EF4-FFF2-40B4-BE49-F238E27FC236}">
-                <a16:creationId xmlns:a16="http://schemas.microsoft.com/office/drawing/2014/main" id="{342600A9-7F92-4E22-9D94-E4717252A817}"/>
+                <a16:creationId xmlns:a16="http://schemas.microsoft.com/office/drawing/2014/main" xmlns="" id="{342600A9-7F92-4E22-9D94-E4717252A817}"/>
               </a:ext>
             </a:extLst>
           </p:cNvPr>
@@ -4687,7 +4690,7 @@
           <a:p>
             <a:fld id="{63289F7E-B80B-496E-81B4-D396C37C9454}" type="datetimeFigureOut">
               <a:rPr lang="pt-BR" smtClean="0"/>
-              <a:t>31/07/2026</a:t>
+              <a:t>01/08/2026</a:t>
             </a:fld>
             <a:endParaRPr lang="pt-BR"/>
           </a:p>
@@ -4698,7 +4701,7 @@
           <p:cNvPr id="4" name="Espaço Reservado para Rodapé 3">
             <a:extLst>
               <a:ext uri="{FF2B5EF4-FFF2-40B4-BE49-F238E27FC236}">
-                <a16:creationId xmlns:a16="http://schemas.microsoft.com/office/drawing/2014/main" id="{192E6BED-F546-40CC-A2DF-99CBA853654E}"/>
+                <a16:creationId xmlns:a16="http://schemas.microsoft.com/office/drawing/2014/main" xmlns="" id="{192E6BED-F546-40CC-A2DF-99CBA853654E}"/>
               </a:ext>
             </a:extLst>
           </p:cNvPr>
@@ -4723,7 +4726,7 @@
           <p:cNvPr id="5" name="Espaço Reservado para Número de Slide 4">
             <a:extLst>
               <a:ext uri="{FF2B5EF4-FFF2-40B4-BE49-F238E27FC236}">
-                <a16:creationId xmlns:a16="http://schemas.microsoft.com/office/drawing/2014/main" id="{6091CC40-A8C4-4063-80EB-CC5099621678}"/>
+                <a16:creationId xmlns:a16="http://schemas.microsoft.com/office/drawing/2014/main" xmlns="" id="{6091CC40-A8C4-4063-80EB-CC5099621678}"/>
               </a:ext>
             </a:extLst>
           </p:cNvPr>
@@ -4782,7 +4785,7 @@
           <p:cNvPr id="2" name="Espaço Reservado para Data 1">
             <a:extLst>
               <a:ext uri="{FF2B5EF4-FFF2-40B4-BE49-F238E27FC236}">
-                <a16:creationId xmlns:a16="http://schemas.microsoft.com/office/drawing/2014/main" id="{DD19515C-212C-4EAE-84A3-8FF4BC844F1B}"/>
+                <a16:creationId xmlns:a16="http://schemas.microsoft.com/office/drawing/2014/main" xmlns="" id="{DD19515C-212C-4EAE-84A3-8FF4BC844F1B}"/>
               </a:ext>
             </a:extLst>
           </p:cNvPr>
@@ -4800,7 +4803,7 @@
           <a:p>
             <a:fld id="{63289F7E-B80B-496E-81B4-D396C37C9454}" type="datetimeFigureOut">
               <a:rPr lang="pt-BR" smtClean="0"/>
-              <a:t>31/07/2026</a:t>
+              <a:t>01/08/2026</a:t>
             </a:fld>
             <a:endParaRPr lang="pt-BR"/>
           </a:p>
@@ -4811,7 +4814,7 @@
           <p:cNvPr id="3" name="Espaço Reservado para Rodapé 2">
             <a:extLst>
               <a:ext uri="{FF2B5EF4-FFF2-40B4-BE49-F238E27FC236}">
-                <a16:creationId xmlns:a16="http://schemas.microsoft.com/office/drawing/2014/main" id="{94D3D120-B3E8-4C96-861D-7A4F12F49B3A}"/>
+                <a16:creationId xmlns:a16="http://schemas.microsoft.com/office/drawing/2014/main" xmlns="" id="{94D3D120-B3E8-4C96-861D-7A4F12F49B3A}"/>
               </a:ext>
             </a:extLst>
           </p:cNvPr>
@@ -4836,7 +4839,7 @@
           <p:cNvPr id="4" name="Espaço Reservado para Número de Slide 3">
             <a:extLst>
               <a:ext uri="{FF2B5EF4-FFF2-40B4-BE49-F238E27FC236}">
-                <a16:creationId xmlns:a16="http://schemas.microsoft.com/office/drawing/2014/main" id="{42E49B68-FA1B-468B-9F17-D5C09243D454}"/>
+                <a16:creationId xmlns:a16="http://schemas.microsoft.com/office/drawing/2014/main" xmlns="" id="{42E49B68-FA1B-468B-9F17-D5C09243D454}"/>
               </a:ext>
             </a:extLst>
           </p:cNvPr>
@@ -4895,7 +4898,7 @@
           <p:cNvPr id="2" name="Título 1">
             <a:extLst>
               <a:ext uri="{FF2B5EF4-FFF2-40B4-BE49-F238E27FC236}">
-                <a16:creationId xmlns:a16="http://schemas.microsoft.com/office/drawing/2014/main" id="{1C17BCBE-A897-4319-85EC-D87909C24980}"/>
+                <a16:creationId xmlns:a16="http://schemas.microsoft.com/office/drawing/2014/main" xmlns="" id="{1C17BCBE-A897-4319-85EC-D87909C24980}"/>
               </a:ext>
             </a:extLst>
           </p:cNvPr>
@@ -4932,7 +4935,7 @@
           <p:cNvPr id="3" name="Espaço Reservado para Conteúdo 2">
             <a:extLst>
               <a:ext uri="{FF2B5EF4-FFF2-40B4-BE49-F238E27FC236}">
-                <a16:creationId xmlns:a16="http://schemas.microsoft.com/office/drawing/2014/main" id="{4226F885-0204-4913-868B-4B8B82576F17}"/>
+                <a16:creationId xmlns:a16="http://schemas.microsoft.com/office/drawing/2014/main" xmlns="" id="{4226F885-0204-4913-868B-4B8B82576F17}"/>
               </a:ext>
             </a:extLst>
           </p:cNvPr>
@@ -5022,7 +5025,7 @@
           <p:cNvPr id="4" name="Espaço Reservado para Texto 3">
             <a:extLst>
               <a:ext uri="{FF2B5EF4-FFF2-40B4-BE49-F238E27FC236}">
-                <a16:creationId xmlns:a16="http://schemas.microsoft.com/office/drawing/2014/main" id="{00F9F784-A858-441B-8AB5-697098141751}"/>
+                <a16:creationId xmlns:a16="http://schemas.microsoft.com/office/drawing/2014/main" xmlns="" id="{00F9F784-A858-441B-8AB5-697098141751}"/>
               </a:ext>
             </a:extLst>
           </p:cNvPr>
@@ -5093,7 +5096,7 @@
           <p:cNvPr id="5" name="Espaço Reservado para Data 4">
             <a:extLst>
               <a:ext uri="{FF2B5EF4-FFF2-40B4-BE49-F238E27FC236}">
-                <a16:creationId xmlns:a16="http://schemas.microsoft.com/office/drawing/2014/main" id="{A4DC363A-5000-472E-8B17-02E7DCB8840A}"/>
+                <a16:creationId xmlns:a16="http://schemas.microsoft.com/office/drawing/2014/main" xmlns="" id="{A4DC363A-5000-472E-8B17-02E7DCB8840A}"/>
               </a:ext>
             </a:extLst>
           </p:cNvPr>
@@ -5111,7 +5114,7 @@
           <a:p>
             <a:fld id="{63289F7E-B80B-496E-81B4-D396C37C9454}" type="datetimeFigureOut">
               <a:rPr lang="pt-BR" smtClean="0"/>
-              <a:t>31/07/2026</a:t>
+              <a:t>01/08/2026</a:t>
             </a:fld>
             <a:endParaRPr lang="pt-BR"/>
           </a:p>
@@ -5122,7 +5125,7 @@
           <p:cNvPr id="6" name="Espaço Reservado para Rodapé 5">
             <a:extLst>
               <a:ext uri="{FF2B5EF4-FFF2-40B4-BE49-F238E27FC236}">
-                <a16:creationId xmlns:a16="http://schemas.microsoft.com/office/drawing/2014/main" id="{5548425D-2C21-4C56-BAD4-662978775C28}"/>
+                <a16:creationId xmlns:a16="http://schemas.microsoft.com/office/drawing/2014/main" xmlns="" id="{5548425D-2C21-4C56-BAD4-662978775C28}"/>
               </a:ext>
             </a:extLst>
           </p:cNvPr>
@@ -5147,7 +5150,7 @@
           <p:cNvPr id="7" name="Espaço Reservado para Número de Slide 6">
             <a:extLst>
               <a:ext uri="{FF2B5EF4-FFF2-40B4-BE49-F238E27FC236}">
-                <a16:creationId xmlns:a16="http://schemas.microsoft.com/office/drawing/2014/main" id="{C63E9726-E64C-42B2-AE8A-8C235A956B48}"/>
+                <a16:creationId xmlns:a16="http://schemas.microsoft.com/office/drawing/2014/main" xmlns="" id="{C63E9726-E64C-42B2-AE8A-8C235A956B48}"/>
               </a:ext>
             </a:extLst>
           </p:cNvPr>
@@ -5206,7 +5209,7 @@
           <p:cNvPr id="2" name="Título 1">
             <a:extLst>
               <a:ext uri="{FF2B5EF4-FFF2-40B4-BE49-F238E27FC236}">
-                <a16:creationId xmlns:a16="http://schemas.microsoft.com/office/drawing/2014/main" id="{11086A78-3E74-450C-96A6-CA8AC37AF772}"/>
+                <a16:creationId xmlns:a16="http://schemas.microsoft.com/office/drawing/2014/main" xmlns="" id="{11086A78-3E74-450C-96A6-CA8AC37AF772}"/>
               </a:ext>
             </a:extLst>
           </p:cNvPr>
@@ -5243,7 +5246,7 @@
           <p:cNvPr id="3" name="Espaço Reservado para Imagem 2">
             <a:extLst>
               <a:ext uri="{FF2B5EF4-FFF2-40B4-BE49-F238E27FC236}">
-                <a16:creationId xmlns:a16="http://schemas.microsoft.com/office/drawing/2014/main" id="{5F5B7312-975A-4DBC-9B2F-3652ADA006FD}"/>
+                <a16:creationId xmlns:a16="http://schemas.microsoft.com/office/drawing/2014/main" xmlns="" id="{5F5B7312-975A-4DBC-9B2F-3652ADA006FD}"/>
               </a:ext>
             </a:extLst>
           </p:cNvPr>
@@ -5310,7 +5313,7 @@
           <p:cNvPr id="4" name="Espaço Reservado para Texto 3">
             <a:extLst>
               <a:ext uri="{FF2B5EF4-FFF2-40B4-BE49-F238E27FC236}">
-                <a16:creationId xmlns:a16="http://schemas.microsoft.com/office/drawing/2014/main" id="{AAF805F5-1DFF-41C6-944C-7D79FE0D0963}"/>
+                <a16:creationId xmlns:a16="http://schemas.microsoft.com/office/drawing/2014/main" xmlns="" id="{AAF805F5-1DFF-41C6-944C-7D79FE0D0963}"/>
               </a:ext>
             </a:extLst>
           </p:cNvPr>
@@ -5381,7 +5384,7 @@
           <p:cNvPr id="5" name="Espaço Reservado para Data 4">
             <a:extLst>
               <a:ext uri="{FF2B5EF4-FFF2-40B4-BE49-F238E27FC236}">
-                <a16:creationId xmlns:a16="http://schemas.microsoft.com/office/drawing/2014/main" id="{02113D81-8665-4516-BD81-C6A1F254EECD}"/>
+                <a16:creationId xmlns:a16="http://schemas.microsoft.com/office/drawing/2014/main" xmlns="" id="{02113D81-8665-4516-BD81-C6A1F254EECD}"/>
               </a:ext>
             </a:extLst>
           </p:cNvPr>
@@ -5399,7 +5402,7 @@
           <a:p>
             <a:fld id="{63289F7E-B80B-496E-81B4-D396C37C9454}" type="datetimeFigureOut">
               <a:rPr lang="pt-BR" smtClean="0"/>
-              <a:t>31/07/2026</a:t>
+              <a:t>01/08/2026</a:t>
             </a:fld>
             <a:endParaRPr lang="pt-BR"/>
           </a:p>
@@ -5410,7 +5413,7 @@
           <p:cNvPr id="6" name="Espaço Reservado para Rodapé 5">
             <a:extLst>
               <a:ext uri="{FF2B5EF4-FFF2-40B4-BE49-F238E27FC236}">
-                <a16:creationId xmlns:a16="http://schemas.microsoft.com/office/drawing/2014/main" id="{2B00C88B-FF32-40AA-A187-727D96FD7862}"/>
+                <a16:creationId xmlns:a16="http://schemas.microsoft.com/office/drawing/2014/main" xmlns="" id="{2B00C88B-FF32-40AA-A187-727D96FD7862}"/>
               </a:ext>
             </a:extLst>
           </p:cNvPr>
@@ -5435,7 +5438,7 @@
           <p:cNvPr id="7" name="Espaço Reservado para Número de Slide 6">
             <a:extLst>
               <a:ext uri="{FF2B5EF4-FFF2-40B4-BE49-F238E27FC236}">
-                <a16:creationId xmlns:a16="http://schemas.microsoft.com/office/drawing/2014/main" id="{A04D1A2D-69F7-4B8F-A730-BC26DC340BA6}"/>
+                <a16:creationId xmlns:a16="http://schemas.microsoft.com/office/drawing/2014/main" xmlns="" id="{A04D1A2D-69F7-4B8F-A730-BC26DC340BA6}"/>
               </a:ext>
             </a:extLst>
           </p:cNvPr>
@@ -5499,7 +5502,7 @@
           <p:cNvPr id="2" name="Espaço Reservado para Título 1">
             <a:extLst>
               <a:ext uri="{FF2B5EF4-FFF2-40B4-BE49-F238E27FC236}">
-                <a16:creationId xmlns:a16="http://schemas.microsoft.com/office/drawing/2014/main" id="{E69A0273-1966-4A1B-9370-4C1CE5036371}"/>
+                <a16:creationId xmlns:a16="http://schemas.microsoft.com/office/drawing/2014/main" xmlns="" id="{E69A0273-1966-4A1B-9370-4C1CE5036371}"/>
               </a:ext>
             </a:extLst>
           </p:cNvPr>
@@ -5537,7 +5540,7 @@
           <p:cNvPr id="3" name="Espaço Reservado para Texto 2">
             <a:extLst>
               <a:ext uri="{FF2B5EF4-FFF2-40B4-BE49-F238E27FC236}">
-                <a16:creationId xmlns:a16="http://schemas.microsoft.com/office/drawing/2014/main" id="{3B9CF87A-0448-49A7-AB25-EBC1D56A40EF}"/>
+                <a16:creationId xmlns:a16="http://schemas.microsoft.com/office/drawing/2014/main" xmlns="" id="{3B9CF87A-0448-49A7-AB25-EBC1D56A40EF}"/>
               </a:ext>
             </a:extLst>
           </p:cNvPr>
@@ -5604,7 +5607,7 @@
           <p:cNvPr id="4" name="Espaço Reservado para Data 3">
             <a:extLst>
               <a:ext uri="{FF2B5EF4-FFF2-40B4-BE49-F238E27FC236}">
-                <a16:creationId xmlns:a16="http://schemas.microsoft.com/office/drawing/2014/main" id="{2EF7B1F2-BB5A-44D0-816D-16AD2C71430E}"/>
+                <a16:creationId xmlns:a16="http://schemas.microsoft.com/office/drawing/2014/main" xmlns="" id="{2EF7B1F2-BB5A-44D0-816D-16AD2C71430E}"/>
               </a:ext>
             </a:extLst>
           </p:cNvPr>
@@ -5640,7 +5643,7 @@
           <a:p>
             <a:fld id="{63289F7E-B80B-496E-81B4-D396C37C9454}" type="datetimeFigureOut">
               <a:rPr lang="pt-BR" smtClean="0"/>
-              <a:t>31/07/2026</a:t>
+              <a:t>01/08/2026</a:t>
             </a:fld>
             <a:endParaRPr lang="pt-BR"/>
           </a:p>
@@ -5651,7 +5654,7 @@
           <p:cNvPr id="5" name="Espaço Reservado para Rodapé 4">
             <a:extLst>
               <a:ext uri="{FF2B5EF4-FFF2-40B4-BE49-F238E27FC236}">
-                <a16:creationId xmlns:a16="http://schemas.microsoft.com/office/drawing/2014/main" id="{C703F94C-2CC8-4DAA-BC35-14FC3E841DCD}"/>
+                <a16:creationId xmlns:a16="http://schemas.microsoft.com/office/drawing/2014/main" xmlns="" id="{C703F94C-2CC8-4DAA-BC35-14FC3E841DCD}"/>
               </a:ext>
             </a:extLst>
           </p:cNvPr>
@@ -5694,7 +5697,7 @@
           <p:cNvPr id="6" name="Espaço Reservado para Número de Slide 5">
             <a:extLst>
               <a:ext uri="{FF2B5EF4-FFF2-40B4-BE49-F238E27FC236}">
-                <a16:creationId xmlns:a16="http://schemas.microsoft.com/office/drawing/2014/main" id="{64051336-7048-457A-8B61-D94291D71648}"/>
+                <a16:creationId xmlns:a16="http://schemas.microsoft.com/office/drawing/2014/main" xmlns="" id="{64051336-7048-457A-8B61-D94291D71648}"/>
               </a:ext>
             </a:extLst>
           </p:cNvPr>
@@ -6062,7 +6065,7 @@
           <p:cNvPr id="2" name="Título 1">
             <a:extLst>
               <a:ext uri="{FF2B5EF4-FFF2-40B4-BE49-F238E27FC236}">
-                <a16:creationId xmlns:a16="http://schemas.microsoft.com/office/drawing/2014/main" id="{32666AC8-2E17-4DB4-B0F5-60C640CCFD2E}"/>
+                <a16:creationId xmlns:a16="http://schemas.microsoft.com/office/drawing/2014/main" xmlns="" id="{32666AC8-2E17-4DB4-B0F5-60C640CCFD2E}"/>
               </a:ext>
             </a:extLst>
           </p:cNvPr>
@@ -6089,6 +6092,10 @@
               <a:rPr lang="pt-BR" sz="5400" dirty="0"/>
               <a:t>T320 - Introdução ao Aprendizado de Máquina II:</a:t>
             </a:r>
+            <a:r>
+              <a:rPr lang="pt-BR" dirty="0"/>
+              <a:t/>
+            </a:r>
             <a:br>
               <a:rPr lang="pt-BR" dirty="0"/>
             </a:br>
@@ -6104,7 +6111,7 @@
           <p:cNvPr id="4" name="CaixaDeTexto 3">
             <a:extLst>
               <a:ext uri="{FF2B5EF4-FFF2-40B4-BE49-F238E27FC236}">
-                <a16:creationId xmlns:a16="http://schemas.microsoft.com/office/drawing/2014/main" id="{430EB894-B7D4-434C-9D1A-A14094D9BEEC}"/>
+                <a16:creationId xmlns:a16="http://schemas.microsoft.com/office/drawing/2014/main" xmlns="" id="{430EB894-B7D4-434C-9D1A-A14094D9BEEC}"/>
               </a:ext>
             </a:extLst>
           </p:cNvPr>
@@ -6145,7 +6152,7 @@
           <p:cNvPr id="1026" name="Picture 2" descr="Logo">
             <a:extLst>
               <a:ext uri="{FF2B5EF4-FFF2-40B4-BE49-F238E27FC236}">
-                <a16:creationId xmlns:a16="http://schemas.microsoft.com/office/drawing/2014/main" id="{3F2642E0-4F6A-4196-8F58-E77D36E9A33F}"/>
+                <a16:creationId xmlns:a16="http://schemas.microsoft.com/office/drawing/2014/main" xmlns="" id="{3F2642E0-4F6A-4196-8F58-E77D36E9A33F}"/>
               </a:ext>
             </a:extLst>
           </p:cNvPr>
@@ -6190,7 +6197,7 @@
           <p:cNvPr id="5122" name="Picture 2" descr="Image result for machine learning">
             <a:extLst>
               <a:ext uri="{FF2B5EF4-FFF2-40B4-BE49-F238E27FC236}">
-                <a16:creationId xmlns:a16="http://schemas.microsoft.com/office/drawing/2014/main" id="{810CE0A2-4102-44A6-A370-175E7896CDCB}"/>
+                <a16:creationId xmlns:a16="http://schemas.microsoft.com/office/drawing/2014/main" xmlns="" id="{810CE0A2-4102-44A6-A370-175E7896CDCB}"/>
               </a:ext>
             </a:extLst>
           </p:cNvPr>
@@ -6481,7 +6488,7 @@
           <p:cNvPr id="2" name="Picture 2">
             <a:extLst>
               <a:ext uri="{FF2B5EF4-FFF2-40B4-BE49-F238E27FC236}">
-                <a16:creationId xmlns:a16="http://schemas.microsoft.com/office/drawing/2014/main" id="{A9D184C6-ECA9-05BF-F6B4-C0965441E4E9}"/>
+                <a16:creationId xmlns:a16="http://schemas.microsoft.com/office/drawing/2014/main" xmlns="" id="{A9D184C6-ECA9-05BF-F6B4-C0965441E4E9}"/>
               </a:ext>
             </a:extLst>
           </p:cNvPr>
@@ -6573,8 +6580,8 @@
           </a:p>
         </p:txBody>
       </p:sp>
-      <mc:AlternateContent xmlns:mc="http://schemas.openxmlformats.org/markup-compatibility/2006" xmlns:a14="http://schemas.microsoft.com/office/drawing/2010/main">
-        <mc:Choice Requires="a14">
+      <mc:AlternateContent xmlns:mc="http://schemas.openxmlformats.org/markup-compatibility/2006">
+        <mc:Choice xmlns:a14="http://schemas.microsoft.com/office/drawing/2010/main" Requires="a14">
           <p:sp>
             <p:nvSpPr>
               <p:cNvPr id="3" name="Content Placeholder 2"/>
@@ -7263,7 +7270,11 @@
                 </a14:m>
                 <a:r>
                   <a:rPr lang="pt-BR" dirty="0"/>
-                  <a:t> representa o </a:t>
+                  <a:t> </a:t>
+                </a:r>
+                <a:r>
+                  <a:rPr lang="pt-BR" dirty="0" smtClean="0"/>
+                  <a:t>é o </a:t>
                 </a:r>
                 <a:r>
                   <a:rPr lang="pt-BR" i="1" dirty="0"/>
@@ -7420,7 +7431,11 @@
                 </a14:m>
                 <a:r>
                   <a:rPr lang="pt-BR" dirty="0"/>
-                  <a:t> representa o </a:t>
+                  <a:t> </a:t>
+                </a:r>
+                <a:r>
+                  <a:rPr lang="pt-BR" dirty="0" smtClean="0"/>
+                  <a:t>é o </a:t>
                 </a:r>
                 <a:r>
                   <a:rPr lang="pt-BR" i="1" dirty="0"/>
@@ -7442,7 +7457,7 @@
             </p:txBody>
           </p:sp>
         </mc:Choice>
-        <mc:Fallback xmlns="">
+        <mc:Fallback>
           <p:sp>
             <p:nvSpPr>
               <p:cNvPr id="3" name="Content Placeholder 2"/>
@@ -7458,7 +7473,7 @@
                 <a:off x="838199" y="1825624"/>
                 <a:ext cx="11125201" cy="5032375"/>
               </a:xfrm>
-              <a:blipFill>
+              <a:blipFill rotWithShape="0">
                 <a:blip r:embed="rId3"/>
                 <a:stretch>
                   <a:fillRect l="-931" t="-2663" b="-242"/>
@@ -7494,6 +7509,69 @@
 </file>
 
 <file path=ppt/slides/slide12.xml><?xml version="1.0" encoding="utf-8"?>
+<p:sld xmlns:a="http://schemas.openxmlformats.org/drawingml/2006/main" xmlns:r="http://schemas.openxmlformats.org/officeDocument/2006/relationships" xmlns:p="http://schemas.openxmlformats.org/presentationml/2006/main">
+  <p:cSld>
+    <p:spTree>
+      <p:nvGrpSpPr>
+        <p:cNvPr id="1" name=""/>
+        <p:cNvGrpSpPr/>
+        <p:nvPr/>
+      </p:nvGrpSpPr>
+      <p:grpSpPr>
+        <a:xfrm>
+          <a:off x="0" y="0"/>
+          <a:ext cx="0" cy="0"/>
+          <a:chOff x="0" y="0"/>
+          <a:chExt cx="0" cy="0"/>
+        </a:xfrm>
+      </p:grpSpPr>
+      <p:sp>
+        <p:nvSpPr>
+          <p:cNvPr id="3" name="Espaço Reservado para Conteúdo 2"/>
+          <p:cNvSpPr>
+            <a:spLocks noGrp="1"/>
+          </p:cNvSpPr>
+          <p:nvPr>
+            <p:ph idx="1"/>
+          </p:nvPr>
+        </p:nvSpPr>
+        <p:spPr>
+          <a:xfrm>
+            <a:off x="865909" y="2881745"/>
+            <a:ext cx="10515600" cy="1136073"/>
+          </a:xfrm>
+        </p:spPr>
+        <p:txBody>
+          <a:bodyPr>
+            <a:normAutofit/>
+          </a:bodyPr>
+          <a:lstStyle/>
+          <a:p>
+            <a:pPr marL="0" indent="0">
+              <a:buNone/>
+            </a:pPr>
+            <a:r>
+              <a:rPr lang="pt-BR" sz="6000" i="1" dirty="0" smtClean="0"/>
+              <a:t>Como representamos os rótulos?</a:t>
+            </a:r>
+            <a:endParaRPr lang="pt-BR" sz="6000" i="1" dirty="0"/>
+          </a:p>
+        </p:txBody>
+      </p:sp>
+    </p:spTree>
+    <p:extLst>
+      <p:ext uri="{BB962C8B-B14F-4D97-AF65-F5344CB8AC3E}">
+        <p14:creationId xmlns:p14="http://schemas.microsoft.com/office/powerpoint/2010/main" val="3472730112"/>
+      </p:ext>
+    </p:extLst>
+  </p:cSld>
+  <p:clrMapOvr>
+    <a:masterClrMapping/>
+  </p:clrMapOvr>
+</p:sld>
+</file>
+
+<file path=ppt/slides/slide13.xml><?xml version="1.0" encoding="utf-8"?>
 <p:sld xmlns:a="http://schemas.openxmlformats.org/drawingml/2006/main" xmlns:r="http://schemas.openxmlformats.org/officeDocument/2006/relationships" xmlns:p="http://schemas.openxmlformats.org/presentationml/2006/main">
   <p:cSld>
     <p:spTree>
@@ -7785,7 +7863,7 @@
           <p:cNvPr id="8" name="Agrupar 7">
             <a:extLst>
               <a:ext uri="{FF2B5EF4-FFF2-40B4-BE49-F238E27FC236}">
-                <a16:creationId xmlns:a16="http://schemas.microsoft.com/office/drawing/2014/main" id="{C7F00696-64EA-1DE3-26F4-7ED0C2679228}"/>
+                <a16:creationId xmlns:a16="http://schemas.microsoft.com/office/drawing/2014/main" xmlns="" id="{C7F00696-64EA-1DE3-26F4-7ED0C2679228}"/>
               </a:ext>
             </a:extLst>
           </p:cNvPr>
@@ -8159,7 +8237,7 @@
             <p:cNvPr id="5" name="Straight Arrow Connector 8">
               <a:extLst>
                 <a:ext uri="{FF2B5EF4-FFF2-40B4-BE49-F238E27FC236}">
-                  <a16:creationId xmlns:a16="http://schemas.microsoft.com/office/drawing/2014/main" id="{6C954B5F-25A1-B9C2-C45C-4B987E131C32}"/>
+                  <a16:creationId xmlns:a16="http://schemas.microsoft.com/office/drawing/2014/main" xmlns="" id="{6C954B5F-25A1-B9C2-C45C-4B987E131C32}"/>
                 </a:ext>
               </a:extLst>
             </p:cNvPr>
@@ -8198,7 +8276,7 @@
             <p:cNvPr id="7" name="CaixaDeTexto 6">
               <a:extLst>
                 <a:ext uri="{FF2B5EF4-FFF2-40B4-BE49-F238E27FC236}">
-                  <a16:creationId xmlns:a16="http://schemas.microsoft.com/office/drawing/2014/main" id="{D8ED50EE-63AF-FD00-2B7E-68F6C66B4736}"/>
+                  <a16:creationId xmlns:a16="http://schemas.microsoft.com/office/drawing/2014/main" xmlns="" id="{D8ED50EE-63AF-FD00-2B7E-68F6C66B4736}"/>
                 </a:ext>
               </a:extLst>
             </p:cNvPr>
@@ -8235,7 +8313,7 @@
           <p:cNvPr id="13" name="Retângulo 12">
             <a:extLst>
               <a:ext uri="{FF2B5EF4-FFF2-40B4-BE49-F238E27FC236}">
-                <a16:creationId xmlns:a16="http://schemas.microsoft.com/office/drawing/2014/main" id="{E3E7437A-31EF-96FF-1A36-96431F7A6F1B}"/>
+                <a16:creationId xmlns:a16="http://schemas.microsoft.com/office/drawing/2014/main" xmlns="" id="{E3E7437A-31EF-96FF-1A36-96431F7A6F1B}"/>
               </a:ext>
             </a:extLst>
           </p:cNvPr>
@@ -8295,7 +8373,7 @@
 </p:sld>
 </file>
 
-<file path=ppt/slides/slide13.xml><?xml version="1.0" encoding="utf-8"?>
+<file path=ppt/slides/slide14.xml><?xml version="1.0" encoding="utf-8"?>
 <p:sld xmlns:a="http://schemas.openxmlformats.org/drawingml/2006/main" xmlns:r="http://schemas.openxmlformats.org/officeDocument/2006/relationships" xmlns:p="http://schemas.openxmlformats.org/presentationml/2006/main">
   <p:cSld>
     <p:spTree>
@@ -8334,8 +8412,8 @@
           </a:p>
         </p:txBody>
       </p:sp>
-      <mc:AlternateContent xmlns:mc="http://schemas.openxmlformats.org/markup-compatibility/2006" xmlns:a14="http://schemas.microsoft.com/office/drawing/2010/main">
-        <mc:Choice Requires="a14">
+      <mc:AlternateContent xmlns:mc="http://schemas.openxmlformats.org/markup-compatibility/2006">
+        <mc:Choice xmlns:a14="http://schemas.microsoft.com/office/drawing/2010/main" Requires="a14">
           <p:sp>
             <p:nvSpPr>
               <p:cNvPr id="3" name="Content Placeholder 2"/>
@@ -8380,16 +8458,21 @@
                 </a:r>
                 <a:r>
                   <a:rPr lang="pt-BR" dirty="0"/>
-                  <a:t>para as </a:t>
+                  <a:t>para </a:t>
                 </a:r>
                 <a:r>
-                  <a:rPr lang="pt-BR" b="1" i="1" dirty="0"/>
-                  <a:t>saídas desejadas</a:t>
+                  <a:rPr lang="pt-BR" dirty="0" smtClean="0"/>
+                  <a:t>os </a:t>
                 </a:r>
                 <a:r>
-                  <a:rPr lang="pt-BR" dirty="0"/>
+                  <a:rPr lang="pt-BR" b="1" i="1" dirty="0" smtClean="0"/>
+                  <a:t>rótulos</a:t>
+                </a:r>
+                <a:r>
+                  <a:rPr lang="pt-BR" dirty="0" smtClean="0"/>
                   <a:t>. </a:t>
                 </a:r>
+                <a:endParaRPr lang="pt-BR" dirty="0"/>
               </a:p>
               <a:p>
                 <a:r>
@@ -8456,7 +8539,7 @@
             </p:txBody>
           </p:sp>
         </mc:Choice>
-        <mc:Fallback xmlns="">
+        <mc:Fallback>
           <p:sp>
             <p:nvSpPr>
               <p:cNvPr id="3" name="Content Placeholder 2"/>
@@ -8472,7 +8555,7 @@
                 <a:off x="6289964" y="1825624"/>
                 <a:ext cx="5768686" cy="5032376"/>
               </a:xfrm>
-              <a:blipFill>
+              <a:blipFill rotWithShape="0">
                 <a:blip r:embed="rId3"/>
                 <a:stretch>
                   <a:fillRect l="-1903" t="-1937" r="-1057"/>
@@ -8484,7 +8567,7 @@
               <a:lstStyle/>
               <a:p>
                 <a:r>
-                  <a:rPr lang="en-US">
+                  <a:rPr lang="pt-BR">
                     <a:noFill/>
                   </a:rPr>
                   <a:t> </a:t>
@@ -8499,7 +8582,7 @@
           <p:cNvPr id="8" name="Agrupar 7">
             <a:extLst>
               <a:ext uri="{FF2B5EF4-FFF2-40B4-BE49-F238E27FC236}">
-                <a16:creationId xmlns:a16="http://schemas.microsoft.com/office/drawing/2014/main" id="{C7F00696-64EA-1DE3-26F4-7ED0C2679228}"/>
+                <a16:creationId xmlns:a16="http://schemas.microsoft.com/office/drawing/2014/main" xmlns="" id="{C7F00696-64EA-1DE3-26F4-7ED0C2679228}"/>
               </a:ext>
             </a:extLst>
           </p:cNvPr>
@@ -8873,7 +8956,7 @@
             <p:cNvPr id="5" name="Straight Arrow Connector 8">
               <a:extLst>
                 <a:ext uri="{FF2B5EF4-FFF2-40B4-BE49-F238E27FC236}">
-                  <a16:creationId xmlns:a16="http://schemas.microsoft.com/office/drawing/2014/main" id="{6C954B5F-25A1-B9C2-C45C-4B987E131C32}"/>
+                  <a16:creationId xmlns:a16="http://schemas.microsoft.com/office/drawing/2014/main" xmlns="" id="{6C954B5F-25A1-B9C2-C45C-4B987E131C32}"/>
                 </a:ext>
               </a:extLst>
             </p:cNvPr>
@@ -8912,7 +8995,7 @@
             <p:cNvPr id="7" name="CaixaDeTexto 6">
               <a:extLst>
                 <a:ext uri="{FF2B5EF4-FFF2-40B4-BE49-F238E27FC236}">
-                  <a16:creationId xmlns:a16="http://schemas.microsoft.com/office/drawing/2014/main" id="{D8ED50EE-63AF-FD00-2B7E-68F6C66B4736}"/>
+                  <a16:creationId xmlns:a16="http://schemas.microsoft.com/office/drawing/2014/main" xmlns="" id="{D8ED50EE-63AF-FD00-2B7E-68F6C66B4736}"/>
                 </a:ext>
               </a:extLst>
             </p:cNvPr>
@@ -8949,7 +9032,7 @@
           <p:cNvPr id="13" name="Retângulo 12">
             <a:extLst>
               <a:ext uri="{FF2B5EF4-FFF2-40B4-BE49-F238E27FC236}">
-                <a16:creationId xmlns:a16="http://schemas.microsoft.com/office/drawing/2014/main" id="{E3E7437A-31EF-96FF-1A36-96431F7A6F1B}"/>
+                <a16:creationId xmlns:a16="http://schemas.microsoft.com/office/drawing/2014/main" xmlns="" id="{E3E7437A-31EF-96FF-1A36-96431F7A6F1B}"/>
               </a:ext>
             </a:extLst>
           </p:cNvPr>
@@ -9009,7 +9092,7 @@
 </p:sld>
 </file>
 
-<file path=ppt/slides/slide14.xml><?xml version="1.0" encoding="utf-8"?>
+<file path=ppt/slides/slide15.xml><?xml version="1.0" encoding="utf-8"?>
 <p:sld xmlns:a="http://schemas.openxmlformats.org/drawingml/2006/main" xmlns:r="http://schemas.openxmlformats.org/officeDocument/2006/relationships" xmlns:p="http://schemas.openxmlformats.org/presentationml/2006/main">
   <p:cSld>
     <p:spTree>
@@ -10268,7 +10351,7 @@
 </p:sld>
 </file>
 
-<file path=ppt/slides/slide15.xml><?xml version="1.0" encoding="utf-8"?>
+<file path=ppt/slides/slide16.xml><?xml version="1.0" encoding="utf-8"?>
 <p:sld xmlns:a="http://schemas.openxmlformats.org/drawingml/2006/main" xmlns:r="http://schemas.openxmlformats.org/officeDocument/2006/relationships" xmlns:p="http://schemas.openxmlformats.org/presentationml/2006/main">
   <p:cSld>
     <p:spTree>
@@ -10290,7 +10373,7 @@
           <p:cNvPr id="2" name="Título 1">
             <a:extLst>
               <a:ext uri="{FF2B5EF4-FFF2-40B4-BE49-F238E27FC236}">
-                <a16:creationId xmlns:a16="http://schemas.microsoft.com/office/drawing/2014/main" id="{2FAF13A7-6475-7E02-C676-D8D3C7EC527B}"/>
+                <a16:creationId xmlns:a16="http://schemas.microsoft.com/office/drawing/2014/main" xmlns="" id="{2FAF13A7-6475-7E02-C676-D8D3C7EC527B}"/>
               </a:ext>
             </a:extLst>
           </p:cNvPr>
@@ -10313,14 +10396,14 @@
           </a:p>
         </p:txBody>
       </p:sp>
-      <mc:AlternateContent xmlns:mc="http://schemas.openxmlformats.org/markup-compatibility/2006" xmlns:a14="http://schemas.microsoft.com/office/drawing/2010/main">
-        <mc:Choice Requires="a14">
+      <mc:AlternateContent xmlns:mc="http://schemas.openxmlformats.org/markup-compatibility/2006">
+        <mc:Choice xmlns:a14="http://schemas.microsoft.com/office/drawing/2010/main" Requires="a14">
           <p:sp>
             <p:nvSpPr>
               <p:cNvPr id="3" name="Espaço Reservado para Conteúdo 2">
                 <a:extLst>
                   <a:ext uri="{FF2B5EF4-FFF2-40B4-BE49-F238E27FC236}">
-                    <a16:creationId xmlns:a16="http://schemas.microsoft.com/office/drawing/2014/main" id="{93DCFC65-5F42-A4AC-CF04-CC9394A2B15E}"/>
+                    <a16:creationId xmlns:a16="http://schemas.microsoft.com/office/drawing/2014/main" xmlns="" id="{93DCFC65-5F42-A4AC-CF04-CC9394A2B15E}"/>
                   </a:ext>
                 </a:extLst>
               </p:cNvPr>
@@ -10345,7 +10428,11 @@
               <a:p>
                 <a:r>
                   <a:rPr lang="pt-BR" b="1" dirty="0"/>
-                  <a:t>Classificação multi-classes</a:t>
+                  <a:t>Classificação </a:t>
+                </a:r>
+                <a:r>
+                  <a:rPr lang="pt-BR" b="1" dirty="0" err="1" smtClean="0"/>
+                  <a:t>multiclasses</a:t>
                 </a:r>
                 <a:r>
                   <a:rPr lang="pt-BR" dirty="0"/>
@@ -10411,13 +10498,13 @@
             </p:txBody>
           </p:sp>
         </mc:Choice>
-        <mc:Fallback xmlns="">
+        <mc:Fallback>
           <p:sp>
             <p:nvSpPr>
               <p:cNvPr id="3" name="Espaço Reservado para Conteúdo 2">
                 <a:extLst>
                   <a:ext uri="{FF2B5EF4-FFF2-40B4-BE49-F238E27FC236}">
-                    <a16:creationId xmlns:a16="http://schemas.microsoft.com/office/drawing/2014/main" id="{93DCFC65-5F42-A4AC-CF04-CC9394A2B15E}"/>
+                    <a16:creationId xmlns:a16="http://schemas.microsoft.com/office/drawing/2014/main" xmlns:a14="http://schemas.microsoft.com/office/drawing/2010/main" xmlns="" id="{93DCFC65-5F42-A4AC-CF04-CC9394A2B15E}"/>
                   </a:ext>
                 </a:extLst>
               </p:cNvPr>
@@ -10433,10 +10520,10 @@
                 <a:off x="3768436" y="1825624"/>
                 <a:ext cx="8237636" cy="5032375"/>
               </a:xfrm>
-              <a:blipFill>
+              <a:blipFill rotWithShape="0">
                 <a:blip r:embed="rId2"/>
                 <a:stretch>
-                  <a:fillRect l="-1331" t="-1937" r="-740"/>
+                  <a:fillRect l="-1331" t="-1937"/>
                 </a:stretch>
               </a:blipFill>
             </p:spPr>
@@ -10460,7 +10547,7 @@
           <p:cNvPr id="5" name="Picture 2" descr="Measure Classification Performance: New in Wolfram Language 11">
             <a:extLst>
               <a:ext uri="{FF2B5EF4-FFF2-40B4-BE49-F238E27FC236}">
-                <a16:creationId xmlns:a16="http://schemas.microsoft.com/office/drawing/2014/main" id="{5AEF77B0-D576-36D5-C0B8-032120ED1D53}"/>
+                <a16:creationId xmlns:a16="http://schemas.microsoft.com/office/drawing/2014/main" xmlns="" id="{5AEF77B0-D576-36D5-C0B8-032120ED1D53}"/>
               </a:ext>
             </a:extLst>
           </p:cNvPr>
@@ -10507,7 +10594,7 @@
           <p:cNvPr id="6" name="Picture 6" descr="Analyzing Text Classification Techniques on Youtube Data">
             <a:extLst>
               <a:ext uri="{FF2B5EF4-FFF2-40B4-BE49-F238E27FC236}">
-                <a16:creationId xmlns:a16="http://schemas.microsoft.com/office/drawing/2014/main" id="{05441597-6899-F384-7DBF-4520E56A6E4E}"/>
+                <a16:creationId xmlns:a16="http://schemas.microsoft.com/office/drawing/2014/main" xmlns="" id="{05441597-6899-F384-7DBF-4520E56A6E4E}"/>
               </a:ext>
             </a:extLst>
           </p:cNvPr>
@@ -10552,7 +10639,7 @@
           <p:cNvPr id="7" name="Picture 2" descr="Sentiment Fig 1">
             <a:extLst>
               <a:ext uri="{FF2B5EF4-FFF2-40B4-BE49-F238E27FC236}">
-                <a16:creationId xmlns:a16="http://schemas.microsoft.com/office/drawing/2014/main" id="{0E3A50CA-2548-2E5C-7B42-2E69D402B415}"/>
+                <a16:creationId xmlns:a16="http://schemas.microsoft.com/office/drawing/2014/main" xmlns="" id="{0E3A50CA-2548-2E5C-7B42-2E69D402B415}"/>
               </a:ext>
             </a:extLst>
           </p:cNvPr>
@@ -10607,7 +10694,7 @@
 </p:sld>
 </file>
 
-<file path=ppt/slides/slide16.xml><?xml version="1.0" encoding="utf-8"?>
+<file path=ppt/slides/slide17.xml><?xml version="1.0" encoding="utf-8"?>
 <p:sld xmlns:a="http://schemas.openxmlformats.org/drawingml/2006/main" xmlns:r="http://schemas.openxmlformats.org/officeDocument/2006/relationships" xmlns:p="http://schemas.openxmlformats.org/presentationml/2006/main">
   <p:cSld>
     <p:spTree>
@@ -10629,7 +10716,7 @@
           <p:cNvPr id="2" name="Título 1">
             <a:extLst>
               <a:ext uri="{FF2B5EF4-FFF2-40B4-BE49-F238E27FC236}">
-                <a16:creationId xmlns:a16="http://schemas.microsoft.com/office/drawing/2014/main" id="{2FAF13A7-6475-7E02-C676-D8D3C7EC527B}"/>
+                <a16:creationId xmlns:a16="http://schemas.microsoft.com/office/drawing/2014/main" xmlns="" id="{2FAF13A7-6475-7E02-C676-D8D3C7EC527B}"/>
               </a:ext>
             </a:extLst>
           </p:cNvPr>
@@ -10652,14 +10739,14 @@
           </a:p>
         </p:txBody>
       </p:sp>
-      <mc:AlternateContent xmlns:mc="http://schemas.openxmlformats.org/markup-compatibility/2006" xmlns:a14="http://schemas.microsoft.com/office/drawing/2010/main">
-        <mc:Choice Requires="a14">
+      <mc:AlternateContent xmlns:mc="http://schemas.openxmlformats.org/markup-compatibility/2006">
+        <mc:Choice xmlns:a14="http://schemas.microsoft.com/office/drawing/2010/main" Requires="a14">
           <p:sp>
             <p:nvSpPr>
               <p:cNvPr id="3" name="Espaço Reservado para Conteúdo 2">
                 <a:extLst>
                   <a:ext uri="{FF2B5EF4-FFF2-40B4-BE49-F238E27FC236}">
-                    <a16:creationId xmlns:a16="http://schemas.microsoft.com/office/drawing/2014/main" id="{93DCFC65-5F42-A4AC-CF04-CC9394A2B15E}"/>
+                    <a16:creationId xmlns:a16="http://schemas.microsoft.com/office/drawing/2014/main" xmlns="" id="{93DCFC65-5F42-A4AC-CF04-CC9394A2B15E}"/>
                   </a:ext>
                 </a:extLst>
               </p:cNvPr>
@@ -10823,7 +10910,19 @@
                 </a:r>
                 <a:r>
                   <a:rPr lang="pt-BR" dirty="0"/>
-                  <a:t>com quatro classes possíveis: </a:t>
+                  <a:t>com </a:t>
+                </a:r>
+                <a:r>
+                  <a:rPr lang="pt-BR" b="1" i="1" dirty="0">
+                    <a:solidFill>
+                      <a:schemeClr val="accent2"/>
+                    </a:solidFill>
+                  </a:rPr>
+                  <a:t>quatro</a:t>
+                </a:r>
+                <a:r>
+                  <a:rPr lang="pt-BR" dirty="0"/>
+                  <a:t> classes possíveis: </a:t>
                 </a:r>
                 <a:r>
                   <a:rPr lang="pt-BR" i="1" dirty="0"/>
@@ -11508,13 +11607,13 @@
             </p:txBody>
           </p:sp>
         </mc:Choice>
-        <mc:Fallback xmlns="">
+        <mc:Fallback>
           <p:sp>
             <p:nvSpPr>
               <p:cNvPr id="3" name="Espaço Reservado para Conteúdo 2">
                 <a:extLst>
                   <a:ext uri="{FF2B5EF4-FFF2-40B4-BE49-F238E27FC236}">
-                    <a16:creationId xmlns:a16="http://schemas.microsoft.com/office/drawing/2014/main" id="{93DCFC65-5F42-A4AC-CF04-CC9394A2B15E}"/>
+                    <a16:creationId xmlns:a16="http://schemas.microsoft.com/office/drawing/2014/main" xmlns:a14="http://schemas.microsoft.com/office/drawing/2010/main" xmlns="" id="{93DCFC65-5F42-A4AC-CF04-CC9394A2B15E}"/>
                   </a:ext>
                 </a:extLst>
               </p:cNvPr>
@@ -11530,7 +11629,7 @@
                 <a:off x="838200" y="1825624"/>
                 <a:ext cx="11167872" cy="5032375"/>
               </a:xfrm>
-              <a:blipFill>
+              <a:blipFill rotWithShape="0">
                 <a:blip r:embed="rId2"/>
                 <a:stretch>
                   <a:fillRect l="-983" t="-1937"/>
@@ -11542,7 +11641,7 @@
               <a:lstStyle/>
               <a:p>
                 <a:r>
-                  <a:rPr lang="en-US">
+                  <a:rPr lang="pt-BR">
                     <a:noFill/>
                   </a:rPr>
                   <a:t> </a:t>
@@ -11559,7 +11658,7 @@
               <p:cNvPr id="4" name="Rectangle 3">
                 <a:extLst>
                   <a:ext uri="{FF2B5EF4-FFF2-40B4-BE49-F238E27FC236}">
-                    <a16:creationId xmlns:a16="http://schemas.microsoft.com/office/drawing/2014/main" id="{544C7BF8-36C0-F2D3-6461-F1A070E0CBC3}"/>
+                    <a16:creationId xmlns:a16="http://schemas.microsoft.com/office/drawing/2014/main" xmlns="" id="{544C7BF8-36C0-F2D3-6461-F1A070E0CBC3}"/>
                   </a:ext>
                 </a:extLst>
               </p:cNvPr>
@@ -11828,7 +11927,70 @@
 </p:sld>
 </file>
 
-<file path=ppt/slides/slide17.xml><?xml version="1.0" encoding="utf-8"?>
+<file path=ppt/slides/slide18.xml><?xml version="1.0" encoding="utf-8"?>
+<p:sld xmlns:a="http://schemas.openxmlformats.org/drawingml/2006/main" xmlns:r="http://schemas.openxmlformats.org/officeDocument/2006/relationships" xmlns:p="http://schemas.openxmlformats.org/presentationml/2006/main">
+  <p:cSld>
+    <p:spTree>
+      <p:nvGrpSpPr>
+        <p:cNvPr id="1" name=""/>
+        <p:cNvGrpSpPr/>
+        <p:nvPr/>
+      </p:nvGrpSpPr>
+      <p:grpSpPr>
+        <a:xfrm>
+          <a:off x="0" y="0"/>
+          <a:ext cx="0" cy="0"/>
+          <a:chOff x="0" y="0"/>
+          <a:chExt cx="0" cy="0"/>
+        </a:xfrm>
+      </p:grpSpPr>
+      <p:sp>
+        <p:nvSpPr>
+          <p:cNvPr id="3" name="Espaço Reservado para Conteúdo 2"/>
+          <p:cNvSpPr>
+            <a:spLocks noGrp="1"/>
+          </p:cNvSpPr>
+          <p:nvPr>
+            <p:ph idx="1"/>
+          </p:nvPr>
+        </p:nvSpPr>
+        <p:spPr>
+          <a:xfrm>
+            <a:off x="865909" y="2881745"/>
+            <a:ext cx="10515600" cy="1136073"/>
+          </a:xfrm>
+        </p:spPr>
+        <p:txBody>
+          <a:bodyPr>
+            <a:normAutofit/>
+          </a:bodyPr>
+          <a:lstStyle/>
+          <a:p>
+            <a:pPr marL="0" indent="0">
+              <a:buNone/>
+            </a:pPr>
+            <a:r>
+              <a:rPr lang="pt-BR" sz="6000" i="1" dirty="0" smtClean="0"/>
+              <a:t>Como as classes são separadas?</a:t>
+            </a:r>
+            <a:endParaRPr lang="pt-BR" sz="6000" i="1" dirty="0"/>
+          </a:p>
+        </p:txBody>
+      </p:sp>
+    </p:spTree>
+    <p:extLst>
+      <p:ext uri="{BB962C8B-B14F-4D97-AF65-F5344CB8AC3E}">
+        <p14:creationId xmlns:p14="http://schemas.microsoft.com/office/powerpoint/2010/main" val="2076139833"/>
+      </p:ext>
+    </p:extLst>
+  </p:cSld>
+  <p:clrMapOvr>
+    <a:masterClrMapping/>
+  </p:clrMapOvr>
+</p:sld>
+</file>
+
+<file path=ppt/slides/slide19.xml><?xml version="1.0" encoding="utf-8"?>
 <p:sld xmlns:a="http://schemas.openxmlformats.org/drawingml/2006/main" xmlns:r="http://schemas.openxmlformats.org/officeDocument/2006/relationships" xmlns:p="http://schemas.openxmlformats.org/presentationml/2006/main">
   <p:cSld>
     <p:spTree>
@@ -12221,7 +12383,7 @@
           <p:cNvPr id="12" name="Agrupar 11">
             <a:extLst>
               <a:ext uri="{FF2B5EF4-FFF2-40B4-BE49-F238E27FC236}">
-                <a16:creationId xmlns:a16="http://schemas.microsoft.com/office/drawing/2014/main" id="{745C0A43-FD12-CEC1-71CC-612BDB16C776}"/>
+                <a16:creationId xmlns:a16="http://schemas.microsoft.com/office/drawing/2014/main" xmlns="" id="{745C0A43-FD12-CEC1-71CC-612BDB16C776}"/>
               </a:ext>
             </a:extLst>
           </p:cNvPr>
@@ -12241,7 +12403,7 @@
             <p:cNvPr id="13" name="Picture 3">
               <a:extLst>
                 <a:ext uri="{FF2B5EF4-FFF2-40B4-BE49-F238E27FC236}">
-                  <a16:creationId xmlns:a16="http://schemas.microsoft.com/office/drawing/2014/main" id="{64DA2A01-47B5-2B94-DBFC-FB53B1B8205D}"/>
+                  <a16:creationId xmlns:a16="http://schemas.microsoft.com/office/drawing/2014/main" xmlns="" id="{64DA2A01-47B5-2B94-DBFC-FB53B1B8205D}"/>
                 </a:ext>
               </a:extLst>
             </p:cNvPr>
@@ -12276,7 +12438,7 @@
             <p:cNvPr id="14" name="TextBox 6">
               <a:extLst>
                 <a:ext uri="{FF2B5EF4-FFF2-40B4-BE49-F238E27FC236}">
-                  <a16:creationId xmlns:a16="http://schemas.microsoft.com/office/drawing/2014/main" id="{5ACECBBD-5168-48DA-64EF-8BDD58AE7E65}"/>
+                  <a16:creationId xmlns:a16="http://schemas.microsoft.com/office/drawing/2014/main" xmlns="" id="{5ACECBBD-5168-48DA-64EF-8BDD58AE7E65}"/>
                 </a:ext>
               </a:extLst>
             </p:cNvPr>
@@ -12316,7 +12478,7 @@
             <p:cNvPr id="15" name="Curved Connector 8">
               <a:extLst>
                 <a:ext uri="{FF2B5EF4-FFF2-40B4-BE49-F238E27FC236}">
-                  <a16:creationId xmlns:a16="http://schemas.microsoft.com/office/drawing/2014/main" id="{7D2B1880-C7A7-A071-10B2-08F118026EDA}"/>
+                  <a16:creationId xmlns:a16="http://schemas.microsoft.com/office/drawing/2014/main" xmlns="" id="{7D2B1880-C7A7-A071-10B2-08F118026EDA}"/>
                 </a:ext>
               </a:extLst>
             </p:cNvPr>
@@ -12357,7 +12519,7 @@
                 <p:cNvPr id="16" name="Retângulo 15">
                   <a:extLst>
                     <a:ext uri="{FF2B5EF4-FFF2-40B4-BE49-F238E27FC236}">
-                      <a16:creationId xmlns:a16="http://schemas.microsoft.com/office/drawing/2014/main" id="{036F5727-D9EE-E211-8459-926C7C8C80B1}"/>
+                      <a16:creationId xmlns:a16="http://schemas.microsoft.com/office/drawing/2014/main" xmlns="" id="{036F5727-D9EE-E211-8459-926C7C8C80B1}"/>
                     </a:ext>
                   </a:extLst>
                 </p:cNvPr>
@@ -12462,847 +12624,6 @@
     <p:extLst>
       <p:ext uri="{BB962C8B-B14F-4D97-AF65-F5344CB8AC3E}">
         <p14:creationId xmlns:p14="http://schemas.microsoft.com/office/powerpoint/2010/main" val="1422614699"/>
-      </p:ext>
-    </p:extLst>
-  </p:cSld>
-  <p:clrMapOvr>
-    <a:masterClrMapping/>
-  </p:clrMapOvr>
-</p:sld>
-</file>
-
-<file path=ppt/slides/slide18.xml><?xml version="1.0" encoding="utf-8"?>
-<p:sld xmlns:a="http://schemas.openxmlformats.org/drawingml/2006/main" xmlns:r="http://schemas.openxmlformats.org/officeDocument/2006/relationships" xmlns:p="http://schemas.openxmlformats.org/presentationml/2006/main">
-  <p:cSld>
-    <p:spTree>
-      <p:nvGrpSpPr>
-        <p:cNvPr id="1" name=""/>
-        <p:cNvGrpSpPr/>
-        <p:nvPr/>
-      </p:nvGrpSpPr>
-      <p:grpSpPr>
-        <a:xfrm>
-          <a:off x="0" y="0"/>
-          <a:ext cx="0" cy="0"/>
-          <a:chOff x="0" y="0"/>
-          <a:chExt cx="0" cy="0"/>
-        </a:xfrm>
-      </p:grpSpPr>
-      <p:sp>
-        <p:nvSpPr>
-          <p:cNvPr id="2" name="Title 1"/>
-          <p:cNvSpPr>
-            <a:spLocks noGrp="1"/>
-          </p:cNvSpPr>
-          <p:nvPr>
-            <p:ph type="title"/>
-          </p:nvPr>
-        </p:nvSpPr>
-        <p:spPr/>
-        <p:txBody>
-          <a:bodyPr/>
-          <a:lstStyle/>
-          <a:p>
-            <a:r>
-              <a:rPr lang="pt-BR" dirty="0"/>
-              <a:t>Fronteiras de decisão de um classificador</a:t>
-            </a:r>
-          </a:p>
-        </p:txBody>
-      </p:sp>
-      <mc:AlternateContent xmlns:mc="http://schemas.openxmlformats.org/markup-compatibility/2006" xmlns:a14="http://schemas.microsoft.com/office/drawing/2010/main">
-        <mc:Choice Requires="a14">
-          <p:sp>
-            <p:nvSpPr>
-              <p:cNvPr id="3" name="Content Placeholder 2"/>
-              <p:cNvSpPr>
-                <a:spLocks noGrp="1"/>
-              </p:cNvSpPr>
-              <p:nvPr>
-                <p:ph idx="1"/>
-              </p:nvPr>
-            </p:nvSpPr>
-            <p:spPr>
-              <a:xfrm>
-                <a:off x="5514249" y="1825624"/>
-                <a:ext cx="6592025" cy="5032375"/>
-              </a:xfrm>
-            </p:spPr>
-            <p:txBody>
-              <a:bodyPr>
-                <a:normAutofit lnSpcReduction="10000"/>
-              </a:bodyPr>
-              <a:lstStyle/>
-              <a:p>
-                <a:r>
-                  <a:rPr lang="pt-BR" dirty="0"/>
-                  <a:t>Esse espaço pode ser dividido em </a:t>
-                </a:r>
-                <a:r>
-                  <a:rPr lang="pt-BR" b="1" i="1" dirty="0"/>
-                  <a:t>duas</a:t>
-                </a:r>
-                <a:r>
-                  <a:rPr lang="pt-BR" dirty="0"/>
-                  <a:t> </a:t>
-                </a:r>
-                <a:r>
-                  <a:rPr lang="pt-BR" b="1" i="1" dirty="0"/>
-                  <a:t>regiões de decisão</a:t>
-                </a:r>
-                <a:r>
-                  <a:rPr lang="pt-BR" dirty="0"/>
-                  <a:t>,</a:t>
-                </a:r>
-                <a:r>
-                  <a:rPr lang="pt-BR" b="1" i="1" dirty="0"/>
-                  <a:t> </a:t>
-                </a:r>
-                <a14:m>
-                  <m:oMath xmlns:m="http://schemas.openxmlformats.org/officeDocument/2006/math">
-                    <m:sSub>
-                      <m:sSubPr>
-                        <m:ctrlPr>
-                          <a:rPr lang="pt-BR" i="1">
-                            <a:latin typeface="Cambria Math" panose="02040503050406030204" pitchFamily="18" charset="0"/>
-                          </a:rPr>
-                        </m:ctrlPr>
-                      </m:sSubPr>
-                      <m:e>
-                        <m:r>
-                          <a:rPr lang="pt-BR" i="1">
-                            <a:latin typeface="Cambria Math" panose="02040503050406030204" pitchFamily="18" charset="0"/>
-                          </a:rPr>
-                          <m:t>𝑅</m:t>
-                        </m:r>
-                      </m:e>
-                      <m:sub>
-                        <m:r>
-                          <a:rPr lang="pt-BR" b="0" i="1" smtClean="0">
-                            <a:latin typeface="Cambria Math" panose="02040503050406030204" pitchFamily="18" charset="0"/>
-                          </a:rPr>
-                          <m:t>1</m:t>
-                        </m:r>
-                      </m:sub>
-                    </m:sSub>
-                  </m:oMath>
-                </a14:m>
-                <a:r>
-                  <a:rPr lang="pt-BR" dirty="0"/>
-                  <a:t> e </a:t>
-                </a:r>
-                <a14:m>
-                  <m:oMath xmlns:m="http://schemas.openxmlformats.org/officeDocument/2006/math">
-                    <m:sSub>
-                      <m:sSubPr>
-                        <m:ctrlPr>
-                          <a:rPr lang="pt-BR" i="1">
-                            <a:latin typeface="Cambria Math" panose="02040503050406030204" pitchFamily="18" charset="0"/>
-                          </a:rPr>
-                        </m:ctrlPr>
-                      </m:sSubPr>
-                      <m:e>
-                        <m:r>
-                          <a:rPr lang="pt-BR" i="1">
-                            <a:latin typeface="Cambria Math" panose="02040503050406030204" pitchFamily="18" charset="0"/>
-                          </a:rPr>
-                          <m:t>𝑅</m:t>
-                        </m:r>
-                      </m:e>
-                      <m:sub>
-                        <m:r>
-                          <a:rPr lang="pt-BR" b="0" i="1" smtClean="0">
-                            <a:latin typeface="Cambria Math" panose="02040503050406030204" pitchFamily="18" charset="0"/>
-                          </a:rPr>
-                          <m:t>2</m:t>
-                        </m:r>
-                      </m:sub>
-                    </m:sSub>
-                  </m:oMath>
-                </a14:m>
-                <a:r>
-                  <a:rPr lang="pt-BR" dirty="0"/>
-                  <a:t>, onde </a:t>
-                </a:r>
-                <a:r>
-                  <a:rPr lang="pt-BR" b="1" i="1" dirty="0">
-                    <a:solidFill>
-                      <a:schemeClr val="accent2"/>
-                    </a:solidFill>
-                  </a:rPr>
-                  <a:t>cada região </a:t>
-                </a:r>
-                <a:r>
-                  <a:rPr lang="pt-BR" dirty="0"/>
-                  <a:t>corresponde a </a:t>
-                </a:r>
-                <a:r>
-                  <a:rPr lang="pt-BR" b="1" i="1" dirty="0">
-                    <a:solidFill>
-                      <a:schemeClr val="accent2"/>
-                    </a:solidFill>
-                  </a:rPr>
-                  <a:t>uma classe</a:t>
-                </a:r>
-                <a14:m>
-                  <m:oMath xmlns:m="http://schemas.openxmlformats.org/officeDocument/2006/math">
-                    <m:r>
-                      <a:rPr lang="pt-BR" b="0" i="0" smtClean="0">
-                        <a:latin typeface="Cambria Math" panose="02040503050406030204" pitchFamily="18" charset="0"/>
-                      </a:rPr>
-                      <m:t>.</m:t>
-                    </m:r>
-                  </m:oMath>
-                </a14:m>
-                <a:endParaRPr lang="pt-BR" dirty="0"/>
-              </a:p>
-              <a:p>
-                <a:r>
-                  <a:rPr lang="pt-BR" dirty="0"/>
-                  <a:t>As regiões de decisão são separadas por </a:t>
-                </a:r>
-                <a:r>
-                  <a:rPr lang="pt-BR" b="1" i="1" dirty="0"/>
-                  <a:t>fronteiras de decisão</a:t>
-                </a:r>
-                <a:r>
-                  <a:rPr lang="pt-BR" dirty="0"/>
-                  <a:t>, que nada mais são do que </a:t>
-                </a:r>
-                <a:r>
-                  <a:rPr lang="pt-BR" b="1" i="1" dirty="0">
-                    <a:solidFill>
-                      <a:srgbClr val="00B050"/>
-                    </a:solidFill>
-                  </a:rPr>
-                  <a:t>funções</a:t>
-                </a:r>
-                <a:r>
-                  <a:rPr lang="pt-BR" dirty="0"/>
-                  <a:t>. </a:t>
-                </a:r>
-              </a:p>
-              <a:p>
-                <a:r>
-                  <a:rPr lang="pt-BR" dirty="0"/>
-                  <a:t>Na figura, como </a:t>
-                </a:r>
-                <a14:m>
-                  <m:oMath xmlns:m="http://schemas.openxmlformats.org/officeDocument/2006/math">
-                    <m:r>
-                      <a:rPr lang="pt-BR" i="1">
-                        <a:latin typeface="Cambria Math" panose="02040503050406030204" pitchFamily="18" charset="0"/>
-                      </a:rPr>
-                      <m:t>𝑄</m:t>
-                    </m:r>
-                    <m:r>
-                      <a:rPr lang="pt-BR" i="1">
-                        <a:latin typeface="Cambria Math" panose="02040503050406030204" pitchFamily="18" charset="0"/>
-                      </a:rPr>
-                      <m:t>=2</m:t>
-                    </m:r>
-                  </m:oMath>
-                </a14:m>
-                <a:r>
-                  <a:rPr lang="pt-BR" dirty="0"/>
-                  <a:t>, temos apenas uma fronteira de decisão.</a:t>
-                </a:r>
-              </a:p>
-              <a:p>
-                <a:r>
-                  <a:rPr lang="pt-BR" dirty="0"/>
-                  <a:t>Uma </a:t>
-                </a:r>
-                <a:r>
-                  <a:rPr lang="pt-BR" b="1" i="1" dirty="0"/>
-                  <a:t>fronteira de decisão </a:t>
-                </a:r>
-                <a:r>
-                  <a:rPr lang="pt-BR" dirty="0"/>
-                  <a:t>corresponde a uma </a:t>
-                </a:r>
-                <a:r>
-                  <a:rPr lang="pt-BR" b="1" i="1" dirty="0">
-                    <a:solidFill>
-                      <a:srgbClr val="00B050"/>
-                    </a:solidFill>
-                  </a:rPr>
-                  <a:t>superfície de separação</a:t>
-                </a:r>
-                <a:r>
-                  <a:rPr lang="pt-BR" b="1" i="1" dirty="0"/>
-                  <a:t> </a:t>
-                </a:r>
-                <a:r>
-                  <a:rPr lang="pt-BR" dirty="0"/>
-                  <a:t>(1D, 2D, 3D, etc.) no </a:t>
-                </a:r>
-                <a:r>
-                  <a:rPr lang="pt-BR" b="1" i="1" dirty="0"/>
-                  <a:t>espaço de atributos </a:t>
-                </a:r>
-                <a:r>
-                  <a:rPr lang="pt-BR" dirty="0"/>
-                  <a:t>que separa as classes.</a:t>
-                </a:r>
-              </a:p>
-            </p:txBody>
-          </p:sp>
-        </mc:Choice>
-        <mc:Fallback xmlns="">
-          <p:sp>
-            <p:nvSpPr>
-              <p:cNvPr id="3" name="Content Placeholder 2"/>
-              <p:cNvSpPr>
-                <a:spLocks noGrp="1" noRot="1" noChangeAspect="1" noMove="1" noResize="1" noEditPoints="1" noAdjustHandles="1" noChangeArrowheads="1" noChangeShapeType="1" noTextEdit="1"/>
-              </p:cNvSpPr>
-              <p:nvPr>
-                <p:ph idx="1"/>
-              </p:nvPr>
-            </p:nvSpPr>
-            <p:spPr>
-              <a:xfrm>
-                <a:off x="5514249" y="1825624"/>
-                <a:ext cx="6592025" cy="5032375"/>
-              </a:xfrm>
-              <a:blipFill>
-                <a:blip r:embed="rId3"/>
-                <a:stretch>
-                  <a:fillRect l="-1665" t="-2663" r="-2313"/>
-                </a:stretch>
-              </a:blipFill>
-            </p:spPr>
-            <p:txBody>
-              <a:bodyPr/>
-              <a:lstStyle/>
-              <a:p>
-                <a:r>
-                  <a:rPr lang="en-US">
-                    <a:noFill/>
-                  </a:rPr>
-                  <a:t> </a:t>
-                </a:r>
-              </a:p>
-            </p:txBody>
-          </p:sp>
-        </mc:Fallback>
-      </mc:AlternateContent>
-      <p:grpSp>
-        <p:nvGrpSpPr>
-          <p:cNvPr id="14" name="Agrupar 13">
-            <a:extLst>
-              <a:ext uri="{FF2B5EF4-FFF2-40B4-BE49-F238E27FC236}">
-                <a16:creationId xmlns:a16="http://schemas.microsoft.com/office/drawing/2014/main" id="{D3D49D8E-0821-33E1-5823-3E158A4FB182}"/>
-              </a:ext>
-            </a:extLst>
-          </p:cNvPr>
-          <p:cNvGrpSpPr/>
-          <p:nvPr/>
-        </p:nvGrpSpPr>
-        <p:grpSpPr>
-          <a:xfrm>
-            <a:off x="1135086" y="2427640"/>
-            <a:ext cx="3089466" cy="3257287"/>
-            <a:chOff x="9125712" y="2808640"/>
-            <a:chExt cx="3089466" cy="3257287"/>
-          </a:xfrm>
-        </p:grpSpPr>
-        <p:pic>
-          <p:nvPicPr>
-            <p:cNvPr id="15" name="Picture 3">
-              <a:extLst>
-                <a:ext uri="{FF2B5EF4-FFF2-40B4-BE49-F238E27FC236}">
-                  <a16:creationId xmlns:a16="http://schemas.microsoft.com/office/drawing/2014/main" id="{BD3F5D0C-F310-ED7B-BBE9-A892027EAD08}"/>
-                </a:ext>
-              </a:extLst>
-            </p:cNvPr>
-            <p:cNvPicPr>
-              <a:picLocks noChangeAspect="1"/>
-            </p:cNvPicPr>
-            <p:nvPr/>
-          </p:nvPicPr>
-          <p:blipFill rotWithShape="1">
-            <a:blip r:embed="rId4">
-              <a:extLst>
-                <a:ext uri="{28A0092B-C50C-407E-A947-70E740481C1C}">
-                  <a14:useLocalDpi xmlns:a14="http://schemas.microsoft.com/office/drawing/2010/main" val="0"/>
-                </a:ext>
-              </a:extLst>
-            </a:blip>
-            <a:srcRect l="6615" t="3775" r="7505" b="1098"/>
-            <a:stretch/>
-          </p:blipFill>
-          <p:spPr>
-            <a:xfrm>
-              <a:off x="9125712" y="2808640"/>
-              <a:ext cx="2960664" cy="2280684"/>
-            </a:xfrm>
-            <a:prstGeom prst="rect">
-              <a:avLst/>
-            </a:prstGeom>
-          </p:spPr>
-        </p:pic>
-        <p:sp>
-          <p:nvSpPr>
-            <p:cNvPr id="16" name="TextBox 6">
-              <a:extLst>
-                <a:ext uri="{FF2B5EF4-FFF2-40B4-BE49-F238E27FC236}">
-                  <a16:creationId xmlns:a16="http://schemas.microsoft.com/office/drawing/2014/main" id="{D474B403-303E-639E-341F-AA50DF86D3BE}"/>
-                </a:ext>
-              </a:extLst>
-            </p:cNvPr>
-            <p:cNvSpPr txBox="1"/>
-            <p:nvPr/>
-          </p:nvSpPr>
-          <p:spPr>
-            <a:xfrm>
-              <a:off x="9909743" y="5327263"/>
-              <a:ext cx="1874067" cy="738664"/>
-            </a:xfrm>
-            <a:prstGeom prst="rect">
-              <a:avLst/>
-            </a:prstGeom>
-            <a:noFill/>
-          </p:spPr>
-          <p:txBody>
-            <a:bodyPr wrap="square" rtlCol="0">
-              <a:spAutoFit/>
-            </a:bodyPr>
-            <a:lstStyle/>
-            <a:p>
-              <a:pPr algn="ctr"/>
-              <a:r>
-                <a:rPr lang="pt-BR" sz="1400" b="1" dirty="0"/>
-                <a:t>Fronteira de decisão</a:t>
-              </a:r>
-              <a:r>
-                <a:rPr lang="pt-BR" sz="1400" dirty="0"/>
-                <a:t>: no caso deste exemplo, ela é uma reta.</a:t>
-              </a:r>
-            </a:p>
-          </p:txBody>
-        </p:sp>
-        <p:cxnSp>
-          <p:nvCxnSpPr>
-            <p:cNvPr id="17" name="Curved Connector 8">
-              <a:extLst>
-                <a:ext uri="{FF2B5EF4-FFF2-40B4-BE49-F238E27FC236}">
-                  <a16:creationId xmlns:a16="http://schemas.microsoft.com/office/drawing/2014/main" id="{B45603A2-AC84-D66F-F06E-0371CA5BE810}"/>
-                </a:ext>
-              </a:extLst>
-            </p:cNvPr>
-            <p:cNvCxnSpPr/>
-            <p:nvPr/>
-          </p:nvCxnSpPr>
-          <p:spPr>
-            <a:xfrm rot="5400000">
-              <a:off x="10830268" y="4695983"/>
-              <a:ext cx="657723" cy="624705"/>
-            </a:xfrm>
-            <a:prstGeom prst="curvedConnector3">
-              <a:avLst/>
-            </a:prstGeom>
-            <a:ln w="28575">
-              <a:tailEnd type="triangle"/>
-            </a:ln>
-          </p:spPr>
-          <p:style>
-            <a:lnRef idx="1">
-              <a:schemeClr val="accent1"/>
-            </a:lnRef>
-            <a:fillRef idx="0">
-              <a:schemeClr val="accent1"/>
-            </a:fillRef>
-            <a:effectRef idx="0">
-              <a:schemeClr val="accent1"/>
-            </a:effectRef>
-            <a:fontRef idx="minor">
-              <a:schemeClr val="tx1"/>
-            </a:fontRef>
-          </p:style>
-        </p:cxnSp>
-        <mc:AlternateContent xmlns:mc="http://schemas.openxmlformats.org/markup-compatibility/2006" xmlns:a14="http://schemas.microsoft.com/office/drawing/2010/main">
-          <mc:Choice Requires="a14">
-            <p:sp>
-              <p:nvSpPr>
-                <p:cNvPr id="18" name="Retângulo 17">
-                  <a:extLst>
-                    <a:ext uri="{FF2B5EF4-FFF2-40B4-BE49-F238E27FC236}">
-                      <a16:creationId xmlns:a16="http://schemas.microsoft.com/office/drawing/2014/main" id="{C5162CC1-DD2F-DFBD-35CF-B876410E54B6}"/>
-                    </a:ext>
-                  </a:extLst>
-                </p:cNvPr>
-                <p:cNvSpPr/>
-                <p:nvPr/>
-              </p:nvSpPr>
-              <p:spPr>
-                <a:xfrm>
-                  <a:off x="11374884" y="3305149"/>
-                  <a:ext cx="840294" cy="369332"/>
-                </a:xfrm>
-                <a:prstGeom prst="rect">
-                  <a:avLst/>
-                </a:prstGeom>
-              </p:spPr>
-              <p:txBody>
-                <a:bodyPr wrap="none">
-                  <a:spAutoFit/>
-                </a:bodyPr>
-                <a:lstStyle/>
-                <a:p>
-                  <a:pPr/>
-                  <a14:m>
-                    <m:oMathPara xmlns:m="http://schemas.openxmlformats.org/officeDocument/2006/math">
-                      <m:oMathParaPr>
-                        <m:jc m:val="centerGroup"/>
-                      </m:oMathParaPr>
-                      <m:oMath xmlns:m="http://schemas.openxmlformats.org/officeDocument/2006/math">
-                        <m:r>
-                          <a:rPr lang="pt-BR" b="0" i="1">
-                            <a:latin typeface="Cambria Math" panose="02040503050406030204" pitchFamily="18" charset="0"/>
-                          </a:rPr>
-                          <m:t>𝑄</m:t>
-                        </m:r>
-                        <m:r>
-                          <a:rPr lang="pt-BR" b="0">
-                            <a:latin typeface="Cambria Math" panose="02040503050406030204" pitchFamily="18" charset="0"/>
-                          </a:rPr>
-                          <m:t>=</m:t>
-                        </m:r>
-                        <m:r>
-                          <a:rPr lang="pt-BR" b="0" i="1">
-                            <a:latin typeface="Cambria Math" panose="02040503050406030204" pitchFamily="18" charset="0"/>
-                          </a:rPr>
-                          <m:t>2</m:t>
-                        </m:r>
-                      </m:oMath>
-                    </m:oMathPara>
-                  </a14:m>
-                  <a:endParaRPr lang="pt-BR" dirty="0"/>
-                </a:p>
-              </p:txBody>
-            </p:sp>
-          </mc:Choice>
-          <mc:Fallback xmlns="">
-            <p:sp>
-              <p:nvSpPr>
-                <p:cNvPr id="18" name="Retângulo 17">
-                  <a:extLst>
-                    <a:ext uri="{FF2B5EF4-FFF2-40B4-BE49-F238E27FC236}">
-                      <a16:creationId xmlns:a16="http://schemas.microsoft.com/office/drawing/2014/main" id="{C5162CC1-DD2F-DFBD-35CF-B876410E54B6}"/>
-                    </a:ext>
-                  </a:extLst>
-                </p:cNvPr>
-                <p:cNvSpPr>
-                  <a:spLocks noRot="1" noChangeAspect="1" noMove="1" noResize="1" noEditPoints="1" noAdjustHandles="1" noChangeArrowheads="1" noChangeShapeType="1" noTextEdit="1"/>
-                </p:cNvSpPr>
-                <p:nvPr/>
-              </p:nvSpPr>
-              <p:spPr>
-                <a:xfrm>
-                  <a:off x="11374884" y="3305149"/>
-                  <a:ext cx="840294" cy="369332"/>
-                </a:xfrm>
-                <a:prstGeom prst="rect">
-                  <a:avLst/>
-                </a:prstGeom>
-                <a:blipFill>
-                  <a:blip r:embed="rId5"/>
-                  <a:stretch>
-                    <a:fillRect b="-10000"/>
-                  </a:stretch>
-                </a:blipFill>
-              </p:spPr>
-              <p:txBody>
-                <a:bodyPr/>
-                <a:lstStyle/>
-                <a:p>
-                  <a:r>
-                    <a:rPr lang="pt-BR">
-                      <a:noFill/>
-                    </a:rPr>
-                    <a:t> </a:t>
-                  </a:r>
-                </a:p>
-              </p:txBody>
-            </p:sp>
-          </mc:Fallback>
-        </mc:AlternateContent>
-      </p:grpSp>
-    </p:spTree>
-    <p:extLst>
-      <p:ext uri="{BB962C8B-B14F-4D97-AF65-F5344CB8AC3E}">
-        <p14:creationId xmlns:p14="http://schemas.microsoft.com/office/powerpoint/2010/main" val="501774096"/>
-      </p:ext>
-    </p:extLst>
-  </p:cSld>
-  <p:clrMapOvr>
-    <a:masterClrMapping/>
-  </p:clrMapOvr>
-</p:sld>
-</file>
-
-<file path=ppt/slides/slide19.xml><?xml version="1.0" encoding="utf-8"?>
-<p:sld xmlns:a="http://schemas.openxmlformats.org/drawingml/2006/main" xmlns:r="http://schemas.openxmlformats.org/officeDocument/2006/relationships" xmlns:p="http://schemas.openxmlformats.org/presentationml/2006/main">
-  <p:cSld>
-    <p:spTree>
-      <p:nvGrpSpPr>
-        <p:cNvPr id="1" name=""/>
-        <p:cNvGrpSpPr/>
-        <p:nvPr/>
-      </p:nvGrpSpPr>
-      <p:grpSpPr>
-        <a:xfrm>
-          <a:off x="0" y="0"/>
-          <a:ext cx="0" cy="0"/>
-          <a:chOff x="0" y="0"/>
-          <a:chExt cx="0" cy="0"/>
-        </a:xfrm>
-      </p:grpSpPr>
-      <p:sp>
-        <p:nvSpPr>
-          <p:cNvPr id="2" name="Title 1"/>
-          <p:cNvSpPr>
-            <a:spLocks noGrp="1"/>
-          </p:cNvSpPr>
-          <p:nvPr>
-            <p:ph type="title"/>
-          </p:nvPr>
-        </p:nvSpPr>
-        <p:spPr/>
-        <p:txBody>
-          <a:bodyPr/>
-          <a:lstStyle/>
-          <a:p>
-            <a:r>
-              <a:rPr lang="pt-BR" dirty="0"/>
-              <a:t>Fronteiras de decisão de um classificador</a:t>
-            </a:r>
-          </a:p>
-        </p:txBody>
-      </p:sp>
-      <p:sp>
-        <p:nvSpPr>
-          <p:cNvPr id="3" name="Content Placeholder 2"/>
-          <p:cNvSpPr>
-            <a:spLocks noGrp="1"/>
-          </p:cNvSpPr>
-          <p:nvPr>
-            <p:ph idx="1"/>
-          </p:nvPr>
-        </p:nvSpPr>
-        <p:spPr>
-          <a:xfrm>
-            <a:off x="838200" y="1825625"/>
-            <a:ext cx="11177588" cy="3045345"/>
-          </a:xfrm>
-        </p:spPr>
-        <p:txBody>
-          <a:bodyPr>
-            <a:normAutofit fontScale="92500"/>
-          </a:bodyPr>
-          <a:lstStyle/>
-          <a:p>
-            <a:r>
-              <a:rPr lang="pt-BR" dirty="0"/>
-              <a:t>As </a:t>
-            </a:r>
-            <a:r>
-              <a:rPr lang="pt-BR" b="1" i="1" dirty="0"/>
-              <a:t>superfícies de separação</a:t>
-            </a:r>
-            <a:r>
-              <a:rPr lang="pt-BR" dirty="0"/>
-              <a:t> podem ser </a:t>
-            </a:r>
-            <a:r>
-              <a:rPr lang="pt-BR" b="1" i="1" dirty="0">
-                <a:solidFill>
-                  <a:schemeClr val="accent2"/>
-                </a:solidFill>
-              </a:rPr>
-              <a:t>lineares</a:t>
-            </a:r>
-            <a:r>
-              <a:rPr lang="pt-BR" dirty="0"/>
-              <a:t> (e.g., retas e planos) ou </a:t>
-            </a:r>
-            <a:r>
-              <a:rPr lang="pt-BR" b="1" i="1" dirty="0">
-                <a:solidFill>
-                  <a:schemeClr val="accent2"/>
-                </a:solidFill>
-              </a:rPr>
-              <a:t>não-lineares</a:t>
-            </a:r>
-            <a:r>
-              <a:rPr lang="pt-BR" dirty="0"/>
-              <a:t> (e.g., círculos e elipses).</a:t>
-            </a:r>
-          </a:p>
-          <a:p>
-            <a:r>
-              <a:rPr lang="pt-BR" b="1" i="1" dirty="0"/>
-              <a:t>Superfícies de separação </a:t>
-            </a:r>
-            <a:r>
-              <a:rPr lang="pt-BR" dirty="0"/>
-              <a:t>são </a:t>
-            </a:r>
-            <a:r>
-              <a:rPr lang="pt-BR" b="1" i="1" dirty="0">
-                <a:solidFill>
-                  <a:schemeClr val="accent2"/>
-                </a:solidFill>
-              </a:rPr>
-              <a:t>funções</a:t>
-            </a:r>
-            <a:r>
-              <a:rPr lang="pt-BR" dirty="0"/>
-              <a:t> (lineares ou não) que separam as classes. </a:t>
-            </a:r>
-          </a:p>
-          <a:p>
-            <a:r>
-              <a:rPr lang="pt-BR" dirty="0"/>
-              <a:t>Essas funções são chamadas de </a:t>
-            </a:r>
-            <a:r>
-              <a:rPr lang="pt-BR" b="1" i="1" dirty="0">
-                <a:solidFill>
-                  <a:srgbClr val="00B050"/>
-                </a:solidFill>
-              </a:rPr>
-              <a:t>funções discriminantes</a:t>
-            </a:r>
-            <a:r>
-              <a:rPr lang="pt-BR" dirty="0"/>
-              <a:t>, pois separam as classes.</a:t>
-            </a:r>
-          </a:p>
-          <a:p>
-            <a:r>
-              <a:rPr lang="pt-BR" dirty="0"/>
-              <a:t>As figuras abaixo mostram </a:t>
-            </a:r>
-            <a:r>
-              <a:rPr lang="pt-BR" b="1" i="1" dirty="0"/>
-              <a:t>regiões de separação </a:t>
-            </a:r>
-            <a:r>
-              <a:rPr lang="pt-BR" dirty="0"/>
-              <a:t>em problemas de classificação </a:t>
-            </a:r>
-            <a:r>
-              <a:rPr lang="pt-BR" b="1" i="1" dirty="0"/>
-              <a:t>binária</a:t>
-            </a:r>
-            <a:r>
-              <a:rPr lang="pt-BR" dirty="0"/>
-              <a:t> e </a:t>
-            </a:r>
-            <a:r>
-              <a:rPr lang="pt-BR" b="1" i="1" dirty="0"/>
-              <a:t>multi-classes</a:t>
-            </a:r>
-            <a:r>
-              <a:rPr lang="pt-BR" dirty="0"/>
-              <a:t>.</a:t>
-            </a:r>
-          </a:p>
-        </p:txBody>
-      </p:sp>
-      <p:pic>
-        <p:nvPicPr>
-          <p:cNvPr id="4" name="Picture 3"/>
-          <p:cNvPicPr>
-            <a:picLocks noChangeAspect="1"/>
-          </p:cNvPicPr>
-          <p:nvPr/>
-        </p:nvPicPr>
-        <p:blipFill rotWithShape="1">
-          <a:blip r:embed="rId3">
-            <a:extLst>
-              <a:ext uri="{28A0092B-C50C-407E-A947-70E740481C1C}">
-                <a14:useLocalDpi xmlns:a14="http://schemas.microsoft.com/office/drawing/2010/main" val="0"/>
-              </a:ext>
-            </a:extLst>
-          </a:blip>
-          <a:srcRect l="6615" t="3775" r="7505" b="1098"/>
-          <a:stretch/>
-        </p:blipFill>
-        <p:spPr>
-          <a:xfrm>
-            <a:off x="1014411" y="4856687"/>
-            <a:ext cx="2578071" cy="1985962"/>
-          </a:xfrm>
-          <a:prstGeom prst="rect">
-            <a:avLst/>
-          </a:prstGeom>
-        </p:spPr>
-      </p:pic>
-      <p:pic>
-        <p:nvPicPr>
-          <p:cNvPr id="5" name="Picture 4"/>
-          <p:cNvPicPr>
-            <a:picLocks noChangeAspect="1"/>
-          </p:cNvPicPr>
-          <p:nvPr/>
-        </p:nvPicPr>
-        <p:blipFill rotWithShape="1">
-          <a:blip r:embed="rId4">
-            <a:extLst>
-              <a:ext uri="{28A0092B-C50C-407E-A947-70E740481C1C}">
-                <a14:useLocalDpi xmlns:a14="http://schemas.microsoft.com/office/drawing/2010/main" val="0"/>
-              </a:ext>
-            </a:extLst>
-          </a:blip>
-          <a:srcRect l="6486" t="3773" r="7252"/>
-          <a:stretch/>
-        </p:blipFill>
-        <p:spPr>
-          <a:xfrm>
-            <a:off x="9425163" y="4842399"/>
-            <a:ext cx="2590625" cy="1981535"/>
-          </a:xfrm>
-          <a:prstGeom prst="rect">
-            <a:avLst/>
-          </a:prstGeom>
-        </p:spPr>
-      </p:pic>
-      <p:pic>
-        <p:nvPicPr>
-          <p:cNvPr id="6" name="Picture 5"/>
-          <p:cNvPicPr>
-            <a:picLocks noChangeAspect="1"/>
-          </p:cNvPicPr>
-          <p:nvPr/>
-        </p:nvPicPr>
-        <p:blipFill rotWithShape="1">
-          <a:blip r:embed="rId5">
-            <a:extLst>
-              <a:ext uri="{28A0092B-C50C-407E-A947-70E740481C1C}">
-                <a14:useLocalDpi xmlns:a14="http://schemas.microsoft.com/office/drawing/2010/main" val="0"/>
-              </a:ext>
-            </a:extLst>
-          </a:blip>
-          <a:srcRect l="6657" t="3260" r="7500" b="1927"/>
-          <a:stretch/>
-        </p:blipFill>
-        <p:spPr>
-          <a:xfrm>
-            <a:off x="5223462" y="4834394"/>
-            <a:ext cx="2570720" cy="1987030"/>
-          </a:xfrm>
-          <a:prstGeom prst="rect">
-            <a:avLst/>
-          </a:prstGeom>
-        </p:spPr>
-      </p:pic>
-    </p:spTree>
-    <p:extLst>
-      <p:ext uri="{BB962C8B-B14F-4D97-AF65-F5344CB8AC3E}">
-        <p14:creationId xmlns:p14="http://schemas.microsoft.com/office/powerpoint/2010/main" val="4190331675"/>
       </p:ext>
     </p:extLst>
   </p:cSld>
@@ -13530,10 +12851,864 @@
       </p:grpSpPr>
       <p:sp>
         <p:nvSpPr>
+          <p:cNvPr id="2" name="Title 1"/>
+          <p:cNvSpPr>
+            <a:spLocks noGrp="1"/>
+          </p:cNvSpPr>
+          <p:nvPr>
+            <p:ph type="title"/>
+          </p:nvPr>
+        </p:nvSpPr>
+        <p:spPr/>
+        <p:txBody>
+          <a:bodyPr/>
+          <a:lstStyle/>
+          <a:p>
+            <a:r>
+              <a:rPr lang="pt-BR" dirty="0"/>
+              <a:t>Fronteiras de decisão de um classificador</a:t>
+            </a:r>
+          </a:p>
+        </p:txBody>
+      </p:sp>
+      <mc:AlternateContent xmlns:mc="http://schemas.openxmlformats.org/markup-compatibility/2006">
+        <mc:Choice xmlns:a14="http://schemas.microsoft.com/office/drawing/2010/main" Requires="a14">
+          <p:sp>
+            <p:nvSpPr>
+              <p:cNvPr id="3" name="Content Placeholder 2"/>
+              <p:cNvSpPr>
+                <a:spLocks noGrp="1"/>
+              </p:cNvSpPr>
+              <p:nvPr>
+                <p:ph idx="1"/>
+              </p:nvPr>
+            </p:nvSpPr>
+            <p:spPr>
+              <a:xfrm>
+                <a:off x="5514249" y="1825624"/>
+                <a:ext cx="6592025" cy="5032375"/>
+              </a:xfrm>
+            </p:spPr>
+            <p:txBody>
+              <a:bodyPr>
+                <a:normAutofit lnSpcReduction="10000"/>
+              </a:bodyPr>
+              <a:lstStyle/>
+              <a:p>
+                <a:r>
+                  <a:rPr lang="pt-BR" dirty="0"/>
+                  <a:t>Esse espaço pode ser dividido em </a:t>
+                </a:r>
+                <a:r>
+                  <a:rPr lang="pt-BR" b="1" i="1" dirty="0"/>
+                  <a:t>duas</a:t>
+                </a:r>
+                <a:r>
+                  <a:rPr lang="pt-BR" dirty="0"/>
+                  <a:t> </a:t>
+                </a:r>
+                <a:r>
+                  <a:rPr lang="pt-BR" b="1" i="1" dirty="0"/>
+                  <a:t>regiões de decisão</a:t>
+                </a:r>
+                <a:r>
+                  <a:rPr lang="pt-BR" dirty="0"/>
+                  <a:t>,</a:t>
+                </a:r>
+                <a:r>
+                  <a:rPr lang="pt-BR" b="1" i="1" dirty="0"/>
+                  <a:t> </a:t>
+                </a:r>
+                <a14:m>
+                  <m:oMath xmlns:m="http://schemas.openxmlformats.org/officeDocument/2006/math">
+                    <m:sSub>
+                      <m:sSubPr>
+                        <m:ctrlPr>
+                          <a:rPr lang="pt-BR" i="1">
+                            <a:latin typeface="Cambria Math" panose="02040503050406030204" pitchFamily="18" charset="0"/>
+                          </a:rPr>
+                        </m:ctrlPr>
+                      </m:sSubPr>
+                      <m:e>
+                        <m:r>
+                          <a:rPr lang="pt-BR" i="1">
+                            <a:latin typeface="Cambria Math" panose="02040503050406030204" pitchFamily="18" charset="0"/>
+                          </a:rPr>
+                          <m:t>𝑅</m:t>
+                        </m:r>
+                      </m:e>
+                      <m:sub>
+                        <m:r>
+                          <a:rPr lang="pt-BR" b="0" i="1" smtClean="0">
+                            <a:latin typeface="Cambria Math" panose="02040503050406030204" pitchFamily="18" charset="0"/>
+                          </a:rPr>
+                          <m:t>1</m:t>
+                        </m:r>
+                      </m:sub>
+                    </m:sSub>
+                  </m:oMath>
+                </a14:m>
+                <a:r>
+                  <a:rPr lang="pt-BR" dirty="0"/>
+                  <a:t> e </a:t>
+                </a:r>
+                <a14:m>
+                  <m:oMath xmlns:m="http://schemas.openxmlformats.org/officeDocument/2006/math">
+                    <m:sSub>
+                      <m:sSubPr>
+                        <m:ctrlPr>
+                          <a:rPr lang="pt-BR" i="1">
+                            <a:latin typeface="Cambria Math" panose="02040503050406030204" pitchFamily="18" charset="0"/>
+                          </a:rPr>
+                        </m:ctrlPr>
+                      </m:sSubPr>
+                      <m:e>
+                        <m:r>
+                          <a:rPr lang="pt-BR" i="1">
+                            <a:latin typeface="Cambria Math" panose="02040503050406030204" pitchFamily="18" charset="0"/>
+                          </a:rPr>
+                          <m:t>𝑅</m:t>
+                        </m:r>
+                      </m:e>
+                      <m:sub>
+                        <m:r>
+                          <a:rPr lang="pt-BR" b="0" i="1" smtClean="0">
+                            <a:latin typeface="Cambria Math" panose="02040503050406030204" pitchFamily="18" charset="0"/>
+                          </a:rPr>
+                          <m:t>2</m:t>
+                        </m:r>
+                      </m:sub>
+                    </m:sSub>
+                  </m:oMath>
+                </a14:m>
+                <a:r>
+                  <a:rPr lang="pt-BR" dirty="0"/>
+                  <a:t>, onde </a:t>
+                </a:r>
+                <a:r>
+                  <a:rPr lang="pt-BR" b="1" i="1" dirty="0">
+                    <a:solidFill>
+                      <a:schemeClr val="accent2"/>
+                    </a:solidFill>
+                  </a:rPr>
+                  <a:t>cada região </a:t>
+                </a:r>
+                <a:r>
+                  <a:rPr lang="pt-BR" dirty="0"/>
+                  <a:t>corresponde a </a:t>
+                </a:r>
+                <a:r>
+                  <a:rPr lang="pt-BR" b="1" i="1" dirty="0">
+                    <a:solidFill>
+                      <a:schemeClr val="accent2"/>
+                    </a:solidFill>
+                  </a:rPr>
+                  <a:t>uma classe</a:t>
+                </a:r>
+                <a14:m>
+                  <m:oMath xmlns:m="http://schemas.openxmlformats.org/officeDocument/2006/math">
+                    <m:r>
+                      <a:rPr lang="pt-BR" b="0" i="0" smtClean="0">
+                        <a:latin typeface="Cambria Math" panose="02040503050406030204" pitchFamily="18" charset="0"/>
+                      </a:rPr>
+                      <m:t>.</m:t>
+                    </m:r>
+                  </m:oMath>
+                </a14:m>
+                <a:endParaRPr lang="pt-BR" dirty="0"/>
+              </a:p>
+              <a:p>
+                <a:r>
+                  <a:rPr lang="pt-BR" dirty="0"/>
+                  <a:t>As regiões de decisão são separadas por </a:t>
+                </a:r>
+                <a:r>
+                  <a:rPr lang="pt-BR" b="1" i="1" dirty="0"/>
+                  <a:t>fronteiras de decisão</a:t>
+                </a:r>
+                <a:r>
+                  <a:rPr lang="pt-BR" dirty="0"/>
+                  <a:t>, que nada mais são do que </a:t>
+                </a:r>
+                <a:r>
+                  <a:rPr lang="pt-BR" b="1" i="1" dirty="0">
+                    <a:solidFill>
+                      <a:srgbClr val="00B050"/>
+                    </a:solidFill>
+                  </a:rPr>
+                  <a:t>funções</a:t>
+                </a:r>
+                <a:r>
+                  <a:rPr lang="pt-BR" dirty="0"/>
+                  <a:t>. </a:t>
+                </a:r>
+              </a:p>
+              <a:p>
+                <a:r>
+                  <a:rPr lang="pt-BR" dirty="0"/>
+                  <a:t>Na figura, como </a:t>
+                </a:r>
+                <a14:m>
+                  <m:oMath xmlns:m="http://schemas.openxmlformats.org/officeDocument/2006/math">
+                    <m:r>
+                      <a:rPr lang="pt-BR" i="1">
+                        <a:latin typeface="Cambria Math" panose="02040503050406030204" pitchFamily="18" charset="0"/>
+                      </a:rPr>
+                      <m:t>𝑄</m:t>
+                    </m:r>
+                    <m:r>
+                      <a:rPr lang="pt-BR" i="1">
+                        <a:latin typeface="Cambria Math" panose="02040503050406030204" pitchFamily="18" charset="0"/>
+                      </a:rPr>
+                      <m:t>=2</m:t>
+                    </m:r>
+                  </m:oMath>
+                </a14:m>
+                <a:r>
+                  <a:rPr lang="pt-BR" dirty="0"/>
+                  <a:t>, temos </a:t>
+                </a:r>
+                <a:r>
+                  <a:rPr lang="pt-BR" b="1" i="1" dirty="0">
+                    <a:solidFill>
+                      <a:schemeClr val="accent1"/>
+                    </a:solidFill>
+                  </a:rPr>
+                  <a:t>apenas uma</a:t>
+                </a:r>
+                <a:r>
+                  <a:rPr lang="pt-BR" dirty="0"/>
+                  <a:t> fronteira de decisão.</a:t>
+                </a:r>
+              </a:p>
+              <a:p>
+                <a:r>
+                  <a:rPr lang="pt-BR" dirty="0"/>
+                  <a:t>Uma </a:t>
+                </a:r>
+                <a:r>
+                  <a:rPr lang="pt-BR" b="1" i="1" dirty="0"/>
+                  <a:t>fronteira de decisão </a:t>
+                </a:r>
+                <a:r>
+                  <a:rPr lang="pt-BR" dirty="0"/>
+                  <a:t>corresponde a uma </a:t>
+                </a:r>
+                <a:r>
+                  <a:rPr lang="pt-BR" b="1" i="1" dirty="0">
+                    <a:solidFill>
+                      <a:srgbClr val="00B050"/>
+                    </a:solidFill>
+                  </a:rPr>
+                  <a:t>superfície de separação</a:t>
+                </a:r>
+                <a:r>
+                  <a:rPr lang="pt-BR" b="1" i="1" dirty="0"/>
+                  <a:t> </a:t>
+                </a:r>
+                <a:r>
+                  <a:rPr lang="pt-BR" dirty="0"/>
+                  <a:t>(1D, 2D, 3D, etc.) no </a:t>
+                </a:r>
+                <a:r>
+                  <a:rPr lang="pt-BR" b="1" i="1" dirty="0"/>
+                  <a:t>espaço de atributos </a:t>
+                </a:r>
+                <a:r>
+                  <a:rPr lang="pt-BR" dirty="0"/>
+                  <a:t>que separa as classes.</a:t>
+                </a:r>
+              </a:p>
+            </p:txBody>
+          </p:sp>
+        </mc:Choice>
+        <mc:Fallback>
+          <p:sp>
+            <p:nvSpPr>
+              <p:cNvPr id="3" name="Content Placeholder 2"/>
+              <p:cNvSpPr>
+                <a:spLocks noGrp="1" noRot="1" noChangeAspect="1" noMove="1" noResize="1" noEditPoints="1" noAdjustHandles="1" noChangeArrowheads="1" noChangeShapeType="1" noTextEdit="1"/>
+              </p:cNvSpPr>
+              <p:nvPr>
+                <p:ph idx="1"/>
+              </p:nvPr>
+            </p:nvSpPr>
+            <p:spPr>
+              <a:xfrm>
+                <a:off x="5514249" y="1825624"/>
+                <a:ext cx="6592025" cy="5032375"/>
+              </a:xfrm>
+              <a:blipFill rotWithShape="0">
+                <a:blip r:embed="rId3"/>
+                <a:stretch>
+                  <a:fillRect l="-1665" t="-2663" r="-2313"/>
+                </a:stretch>
+              </a:blipFill>
+            </p:spPr>
+            <p:txBody>
+              <a:bodyPr/>
+              <a:lstStyle/>
+              <a:p>
+                <a:r>
+                  <a:rPr lang="pt-BR">
+                    <a:noFill/>
+                  </a:rPr>
+                  <a:t> </a:t>
+                </a:r>
+              </a:p>
+            </p:txBody>
+          </p:sp>
+        </mc:Fallback>
+      </mc:AlternateContent>
+      <p:grpSp>
+        <p:nvGrpSpPr>
+          <p:cNvPr id="14" name="Agrupar 13">
+            <a:extLst>
+              <a:ext uri="{FF2B5EF4-FFF2-40B4-BE49-F238E27FC236}">
+                <a16:creationId xmlns:a16="http://schemas.microsoft.com/office/drawing/2014/main" xmlns="" id="{D3D49D8E-0821-33E1-5823-3E158A4FB182}"/>
+              </a:ext>
+            </a:extLst>
+          </p:cNvPr>
+          <p:cNvGrpSpPr/>
+          <p:nvPr/>
+        </p:nvGrpSpPr>
+        <p:grpSpPr>
+          <a:xfrm>
+            <a:off x="1135086" y="2427640"/>
+            <a:ext cx="3089466" cy="3257287"/>
+            <a:chOff x="9125712" y="2808640"/>
+            <a:chExt cx="3089466" cy="3257287"/>
+          </a:xfrm>
+        </p:grpSpPr>
+        <p:pic>
+          <p:nvPicPr>
+            <p:cNvPr id="15" name="Picture 3">
+              <a:extLst>
+                <a:ext uri="{FF2B5EF4-FFF2-40B4-BE49-F238E27FC236}">
+                  <a16:creationId xmlns:a16="http://schemas.microsoft.com/office/drawing/2014/main" xmlns="" id="{BD3F5D0C-F310-ED7B-BBE9-A892027EAD08}"/>
+                </a:ext>
+              </a:extLst>
+            </p:cNvPr>
+            <p:cNvPicPr>
+              <a:picLocks noChangeAspect="1"/>
+            </p:cNvPicPr>
+            <p:nvPr/>
+          </p:nvPicPr>
+          <p:blipFill rotWithShape="1">
+            <a:blip r:embed="rId4">
+              <a:extLst>
+                <a:ext uri="{28A0092B-C50C-407E-A947-70E740481C1C}">
+                  <a14:useLocalDpi xmlns:a14="http://schemas.microsoft.com/office/drawing/2010/main" val="0"/>
+                </a:ext>
+              </a:extLst>
+            </a:blip>
+            <a:srcRect l="6615" t="3775" r="7505" b="1098"/>
+            <a:stretch/>
+          </p:blipFill>
+          <p:spPr>
+            <a:xfrm>
+              <a:off x="9125712" y="2808640"/>
+              <a:ext cx="2960664" cy="2280684"/>
+            </a:xfrm>
+            <a:prstGeom prst="rect">
+              <a:avLst/>
+            </a:prstGeom>
+          </p:spPr>
+        </p:pic>
+        <p:sp>
+          <p:nvSpPr>
+            <p:cNvPr id="16" name="TextBox 6">
+              <a:extLst>
+                <a:ext uri="{FF2B5EF4-FFF2-40B4-BE49-F238E27FC236}">
+                  <a16:creationId xmlns:a16="http://schemas.microsoft.com/office/drawing/2014/main" xmlns="" id="{D474B403-303E-639E-341F-AA50DF86D3BE}"/>
+                </a:ext>
+              </a:extLst>
+            </p:cNvPr>
+            <p:cNvSpPr txBox="1"/>
+            <p:nvPr/>
+          </p:nvSpPr>
+          <p:spPr>
+            <a:xfrm>
+              <a:off x="9909743" y="5327263"/>
+              <a:ext cx="1874067" cy="738664"/>
+            </a:xfrm>
+            <a:prstGeom prst="rect">
+              <a:avLst/>
+            </a:prstGeom>
+            <a:noFill/>
+          </p:spPr>
+          <p:txBody>
+            <a:bodyPr wrap="square" rtlCol="0">
+              <a:spAutoFit/>
+            </a:bodyPr>
+            <a:lstStyle/>
+            <a:p>
+              <a:pPr algn="ctr"/>
+              <a:r>
+                <a:rPr lang="pt-BR" sz="1400" b="1" dirty="0"/>
+                <a:t>Fronteira de decisão</a:t>
+              </a:r>
+              <a:r>
+                <a:rPr lang="pt-BR" sz="1400" dirty="0"/>
+                <a:t>: no caso deste exemplo, ela é uma reta.</a:t>
+              </a:r>
+            </a:p>
+          </p:txBody>
+        </p:sp>
+        <p:cxnSp>
+          <p:nvCxnSpPr>
+            <p:cNvPr id="17" name="Curved Connector 8">
+              <a:extLst>
+                <a:ext uri="{FF2B5EF4-FFF2-40B4-BE49-F238E27FC236}">
+                  <a16:creationId xmlns:a16="http://schemas.microsoft.com/office/drawing/2014/main" xmlns="" id="{B45603A2-AC84-D66F-F06E-0371CA5BE810}"/>
+                </a:ext>
+              </a:extLst>
+            </p:cNvPr>
+            <p:cNvCxnSpPr/>
+            <p:nvPr/>
+          </p:nvCxnSpPr>
+          <p:spPr>
+            <a:xfrm rot="5400000">
+              <a:off x="10830268" y="4695983"/>
+              <a:ext cx="657723" cy="624705"/>
+            </a:xfrm>
+            <a:prstGeom prst="curvedConnector3">
+              <a:avLst/>
+            </a:prstGeom>
+            <a:ln w="28575">
+              <a:tailEnd type="triangle"/>
+            </a:ln>
+          </p:spPr>
+          <p:style>
+            <a:lnRef idx="1">
+              <a:schemeClr val="accent1"/>
+            </a:lnRef>
+            <a:fillRef idx="0">
+              <a:schemeClr val="accent1"/>
+            </a:fillRef>
+            <a:effectRef idx="0">
+              <a:schemeClr val="accent1"/>
+            </a:effectRef>
+            <a:fontRef idx="minor">
+              <a:schemeClr val="tx1"/>
+            </a:fontRef>
+          </p:style>
+        </p:cxnSp>
+        <mc:AlternateContent xmlns:mc="http://schemas.openxmlformats.org/markup-compatibility/2006" xmlns:a14="http://schemas.microsoft.com/office/drawing/2010/main">
+          <mc:Choice Requires="a14">
+            <p:sp>
+              <p:nvSpPr>
+                <p:cNvPr id="18" name="Retângulo 17">
+                  <a:extLst>
+                    <a:ext uri="{FF2B5EF4-FFF2-40B4-BE49-F238E27FC236}">
+                      <a16:creationId xmlns:a16="http://schemas.microsoft.com/office/drawing/2014/main" xmlns="" id="{C5162CC1-DD2F-DFBD-35CF-B876410E54B6}"/>
+                    </a:ext>
+                  </a:extLst>
+                </p:cNvPr>
+                <p:cNvSpPr/>
+                <p:nvPr/>
+              </p:nvSpPr>
+              <p:spPr>
+                <a:xfrm>
+                  <a:off x="11374884" y="3305149"/>
+                  <a:ext cx="840294" cy="369332"/>
+                </a:xfrm>
+                <a:prstGeom prst="rect">
+                  <a:avLst/>
+                </a:prstGeom>
+              </p:spPr>
+              <p:txBody>
+                <a:bodyPr wrap="none">
+                  <a:spAutoFit/>
+                </a:bodyPr>
+                <a:lstStyle/>
+                <a:p>
+                  <a:pPr/>
+                  <a14:m>
+                    <m:oMathPara xmlns:m="http://schemas.openxmlformats.org/officeDocument/2006/math">
+                      <m:oMathParaPr>
+                        <m:jc m:val="centerGroup"/>
+                      </m:oMathParaPr>
+                      <m:oMath xmlns:m="http://schemas.openxmlformats.org/officeDocument/2006/math">
+                        <m:r>
+                          <a:rPr lang="pt-BR" b="0" i="1">
+                            <a:latin typeface="Cambria Math" panose="02040503050406030204" pitchFamily="18" charset="0"/>
+                          </a:rPr>
+                          <m:t>𝑄</m:t>
+                        </m:r>
+                        <m:r>
+                          <a:rPr lang="pt-BR" b="0">
+                            <a:latin typeface="Cambria Math" panose="02040503050406030204" pitchFamily="18" charset="0"/>
+                          </a:rPr>
+                          <m:t>=</m:t>
+                        </m:r>
+                        <m:r>
+                          <a:rPr lang="pt-BR" b="0" i="1">
+                            <a:latin typeface="Cambria Math" panose="02040503050406030204" pitchFamily="18" charset="0"/>
+                          </a:rPr>
+                          <m:t>2</m:t>
+                        </m:r>
+                      </m:oMath>
+                    </m:oMathPara>
+                  </a14:m>
+                  <a:endParaRPr lang="pt-BR" dirty="0"/>
+                </a:p>
+              </p:txBody>
+            </p:sp>
+          </mc:Choice>
+          <mc:Fallback xmlns="">
+            <p:sp>
+              <p:nvSpPr>
+                <p:cNvPr id="18" name="Retângulo 17">
+                  <a:extLst>
+                    <a:ext uri="{FF2B5EF4-FFF2-40B4-BE49-F238E27FC236}">
+                      <a16:creationId xmlns:a16="http://schemas.microsoft.com/office/drawing/2014/main" id="{C5162CC1-DD2F-DFBD-35CF-B876410E54B6}"/>
+                    </a:ext>
+                  </a:extLst>
+                </p:cNvPr>
+                <p:cNvSpPr>
+                  <a:spLocks noRot="1" noChangeAspect="1" noMove="1" noResize="1" noEditPoints="1" noAdjustHandles="1" noChangeArrowheads="1" noChangeShapeType="1" noTextEdit="1"/>
+                </p:cNvSpPr>
+                <p:nvPr/>
+              </p:nvSpPr>
+              <p:spPr>
+                <a:xfrm>
+                  <a:off x="11374884" y="3305149"/>
+                  <a:ext cx="840294" cy="369332"/>
+                </a:xfrm>
+                <a:prstGeom prst="rect">
+                  <a:avLst/>
+                </a:prstGeom>
+                <a:blipFill>
+                  <a:blip r:embed="rId5"/>
+                  <a:stretch>
+                    <a:fillRect b="-10000"/>
+                  </a:stretch>
+                </a:blipFill>
+              </p:spPr>
+              <p:txBody>
+                <a:bodyPr/>
+                <a:lstStyle/>
+                <a:p>
+                  <a:r>
+                    <a:rPr lang="pt-BR">
+                      <a:noFill/>
+                    </a:rPr>
+                    <a:t> </a:t>
+                  </a:r>
+                </a:p>
+              </p:txBody>
+            </p:sp>
+          </mc:Fallback>
+        </mc:AlternateContent>
+      </p:grpSp>
+    </p:spTree>
+    <p:extLst>
+      <p:ext uri="{BB962C8B-B14F-4D97-AF65-F5344CB8AC3E}">
+        <p14:creationId xmlns:p14="http://schemas.microsoft.com/office/powerpoint/2010/main" val="501774096"/>
+      </p:ext>
+    </p:extLst>
+  </p:cSld>
+  <p:clrMapOvr>
+    <a:masterClrMapping/>
+  </p:clrMapOvr>
+</p:sld>
+</file>
+
+<file path=ppt/slides/slide21.xml><?xml version="1.0" encoding="utf-8"?>
+<p:sld xmlns:a="http://schemas.openxmlformats.org/drawingml/2006/main" xmlns:r="http://schemas.openxmlformats.org/officeDocument/2006/relationships" xmlns:p="http://schemas.openxmlformats.org/presentationml/2006/main">
+  <p:cSld>
+    <p:spTree>
+      <p:nvGrpSpPr>
+        <p:cNvPr id="1" name=""/>
+        <p:cNvGrpSpPr/>
+        <p:nvPr/>
+      </p:nvGrpSpPr>
+      <p:grpSpPr>
+        <a:xfrm>
+          <a:off x="0" y="0"/>
+          <a:ext cx="0" cy="0"/>
+          <a:chOff x="0" y="0"/>
+          <a:chExt cx="0" cy="0"/>
+        </a:xfrm>
+      </p:grpSpPr>
+      <p:sp>
+        <p:nvSpPr>
+          <p:cNvPr id="2" name="Title 1"/>
+          <p:cNvSpPr>
+            <a:spLocks noGrp="1"/>
+          </p:cNvSpPr>
+          <p:nvPr>
+            <p:ph type="title"/>
+          </p:nvPr>
+        </p:nvSpPr>
+        <p:spPr/>
+        <p:txBody>
+          <a:bodyPr/>
+          <a:lstStyle/>
+          <a:p>
+            <a:r>
+              <a:rPr lang="pt-BR" dirty="0"/>
+              <a:t>Fronteiras de decisão de um classificador</a:t>
+            </a:r>
+          </a:p>
+        </p:txBody>
+      </p:sp>
+      <p:sp>
+        <p:nvSpPr>
+          <p:cNvPr id="3" name="Content Placeholder 2"/>
+          <p:cNvSpPr>
+            <a:spLocks noGrp="1"/>
+          </p:cNvSpPr>
+          <p:nvPr>
+            <p:ph idx="1"/>
+          </p:nvPr>
+        </p:nvSpPr>
+        <p:spPr>
+          <a:xfrm>
+            <a:off x="838200" y="1825625"/>
+            <a:ext cx="11177588" cy="3045345"/>
+          </a:xfrm>
+        </p:spPr>
+        <p:txBody>
+          <a:bodyPr>
+            <a:normAutofit fontScale="92500"/>
+          </a:bodyPr>
+          <a:lstStyle/>
+          <a:p>
+            <a:r>
+              <a:rPr lang="pt-BR" dirty="0"/>
+              <a:t>As </a:t>
+            </a:r>
+            <a:r>
+              <a:rPr lang="pt-BR" b="1" i="1" dirty="0"/>
+              <a:t>superfícies de separação</a:t>
+            </a:r>
+            <a:r>
+              <a:rPr lang="pt-BR" dirty="0"/>
+              <a:t> podem ser </a:t>
+            </a:r>
+            <a:r>
+              <a:rPr lang="pt-BR" b="1" i="1" dirty="0">
+                <a:solidFill>
+                  <a:schemeClr val="accent2"/>
+                </a:solidFill>
+              </a:rPr>
+              <a:t>lineares</a:t>
+            </a:r>
+            <a:r>
+              <a:rPr lang="pt-BR" dirty="0"/>
+              <a:t> (e.g., retas e planos) ou </a:t>
+            </a:r>
+            <a:r>
+              <a:rPr lang="pt-BR" b="1" i="1" dirty="0">
+                <a:solidFill>
+                  <a:schemeClr val="accent2"/>
+                </a:solidFill>
+              </a:rPr>
+              <a:t>não-lineares</a:t>
+            </a:r>
+            <a:r>
+              <a:rPr lang="pt-BR" dirty="0"/>
+              <a:t> (e.g., círculos e elipses).</a:t>
+            </a:r>
+          </a:p>
+          <a:p>
+            <a:r>
+              <a:rPr lang="pt-BR" b="1" i="1" dirty="0"/>
+              <a:t>Superfícies de separação </a:t>
+            </a:r>
+            <a:r>
+              <a:rPr lang="pt-BR" dirty="0"/>
+              <a:t>são </a:t>
+            </a:r>
+            <a:r>
+              <a:rPr lang="pt-BR" b="1" i="1" dirty="0">
+                <a:solidFill>
+                  <a:schemeClr val="accent2"/>
+                </a:solidFill>
+              </a:rPr>
+              <a:t>funções</a:t>
+            </a:r>
+            <a:r>
+              <a:rPr lang="pt-BR" dirty="0"/>
+              <a:t> (lineares ou não) que separam as classes. </a:t>
+            </a:r>
+          </a:p>
+          <a:p>
+            <a:r>
+              <a:rPr lang="pt-BR" dirty="0"/>
+              <a:t>Essas funções são chamadas de </a:t>
+            </a:r>
+            <a:r>
+              <a:rPr lang="pt-BR" b="1" i="1" dirty="0">
+                <a:solidFill>
+                  <a:srgbClr val="00B050"/>
+                </a:solidFill>
+              </a:rPr>
+              <a:t>funções discriminantes</a:t>
+            </a:r>
+            <a:r>
+              <a:rPr lang="pt-BR" dirty="0"/>
+              <a:t>, pois separam as classes.</a:t>
+            </a:r>
+          </a:p>
+          <a:p>
+            <a:r>
+              <a:rPr lang="pt-BR" dirty="0"/>
+              <a:t>As figuras abaixo mostram </a:t>
+            </a:r>
+            <a:r>
+              <a:rPr lang="pt-BR" b="1" i="1" dirty="0"/>
+              <a:t>regiões de separação </a:t>
+            </a:r>
+            <a:r>
+              <a:rPr lang="pt-BR" dirty="0"/>
+              <a:t>em problemas de classificação </a:t>
+            </a:r>
+            <a:r>
+              <a:rPr lang="pt-BR" b="1" i="1" dirty="0"/>
+              <a:t>binária</a:t>
+            </a:r>
+            <a:r>
+              <a:rPr lang="pt-BR" dirty="0"/>
+              <a:t> e </a:t>
+            </a:r>
+            <a:r>
+              <a:rPr lang="pt-BR" b="1" i="1" dirty="0"/>
+              <a:t>multi-classes</a:t>
+            </a:r>
+            <a:r>
+              <a:rPr lang="pt-BR" dirty="0"/>
+              <a:t>.</a:t>
+            </a:r>
+          </a:p>
+        </p:txBody>
+      </p:sp>
+      <p:pic>
+        <p:nvPicPr>
+          <p:cNvPr id="4" name="Picture 3"/>
+          <p:cNvPicPr>
+            <a:picLocks noChangeAspect="1"/>
+          </p:cNvPicPr>
+          <p:nvPr/>
+        </p:nvPicPr>
+        <p:blipFill rotWithShape="1">
+          <a:blip r:embed="rId3">
+            <a:extLst>
+              <a:ext uri="{28A0092B-C50C-407E-A947-70E740481C1C}">
+                <a14:useLocalDpi xmlns:a14="http://schemas.microsoft.com/office/drawing/2010/main" val="0"/>
+              </a:ext>
+            </a:extLst>
+          </a:blip>
+          <a:srcRect l="6615" t="3775" r="7505" b="1098"/>
+          <a:stretch/>
+        </p:blipFill>
+        <p:spPr>
+          <a:xfrm>
+            <a:off x="651561" y="4856687"/>
+            <a:ext cx="2578071" cy="1985962"/>
+          </a:xfrm>
+          <a:prstGeom prst="rect">
+            <a:avLst/>
+          </a:prstGeom>
+        </p:spPr>
+      </p:pic>
+      <p:pic>
+        <p:nvPicPr>
+          <p:cNvPr id="5" name="Picture 4"/>
+          <p:cNvPicPr>
+            <a:picLocks noChangeAspect="1"/>
+          </p:cNvPicPr>
+          <p:nvPr/>
+        </p:nvPicPr>
+        <p:blipFill rotWithShape="1">
+          <a:blip r:embed="rId4">
+            <a:extLst>
+              <a:ext uri="{28A0092B-C50C-407E-A947-70E740481C1C}">
+                <a14:useLocalDpi xmlns:a14="http://schemas.microsoft.com/office/drawing/2010/main" val="0"/>
+              </a:ext>
+            </a:extLst>
+          </a:blip>
+          <a:srcRect l="6486" t="3773" r="7252"/>
+          <a:stretch/>
+        </p:blipFill>
+        <p:spPr>
+          <a:xfrm>
+            <a:off x="9062313" y="4842399"/>
+            <a:ext cx="2590625" cy="1981535"/>
+          </a:xfrm>
+          <a:prstGeom prst="rect">
+            <a:avLst/>
+          </a:prstGeom>
+        </p:spPr>
+      </p:pic>
+      <p:pic>
+        <p:nvPicPr>
+          <p:cNvPr id="7" name="Imagem 6"/>
+          <p:cNvPicPr>
+            <a:picLocks noChangeAspect="1"/>
+          </p:cNvPicPr>
+          <p:nvPr/>
+        </p:nvPicPr>
+        <p:blipFill>
+          <a:blip r:embed="rId5">
+            <a:extLst>
+              <a:ext uri="{28A0092B-C50C-407E-A947-70E740481C1C}">
+                <a14:useLocalDpi xmlns:a14="http://schemas.microsoft.com/office/drawing/2010/main" val="0"/>
+              </a:ext>
+            </a:extLst>
+          </a:blip>
+          <a:stretch>
+            <a:fillRect/>
+          </a:stretch>
+        </p:blipFill>
+        <p:spPr>
+          <a:xfrm>
+            <a:off x="4554552" y="4652122"/>
+            <a:ext cx="3182840" cy="2205878"/>
+          </a:xfrm>
+          <a:prstGeom prst="rect">
+            <a:avLst/>
+          </a:prstGeom>
+        </p:spPr>
+      </p:pic>
+    </p:spTree>
+    <p:extLst>
+      <p:ext uri="{BB962C8B-B14F-4D97-AF65-F5344CB8AC3E}">
+        <p14:creationId xmlns:p14="http://schemas.microsoft.com/office/powerpoint/2010/main" val="4190331675"/>
+      </p:ext>
+    </p:extLst>
+  </p:cSld>
+  <p:clrMapOvr>
+    <a:masterClrMapping/>
+  </p:clrMapOvr>
+</p:sld>
+</file>
+
+<file path=ppt/slides/slide22.xml><?xml version="1.0" encoding="utf-8"?>
+<p:sld xmlns:a="http://schemas.openxmlformats.org/drawingml/2006/main" xmlns:r="http://schemas.openxmlformats.org/officeDocument/2006/relationships" xmlns:p="http://schemas.openxmlformats.org/presentationml/2006/main">
+  <p:cSld>
+    <p:spTree>
+      <p:nvGrpSpPr>
+        <p:cNvPr id="1" name=""/>
+        <p:cNvGrpSpPr/>
+        <p:nvPr/>
+      </p:nvGrpSpPr>
+      <p:grpSpPr>
+        <a:xfrm>
+          <a:off x="0" y="0"/>
+          <a:ext cx="0" cy="0"/>
+          <a:chOff x="0" y="0"/>
+          <a:chExt cx="0" cy="0"/>
+        </a:xfrm>
+      </p:grpSpPr>
+      <p:sp>
+        <p:nvSpPr>
           <p:cNvPr id="2" name="Título 1">
             <a:extLst>
               <a:ext uri="{FF2B5EF4-FFF2-40B4-BE49-F238E27FC236}">
-                <a16:creationId xmlns:a16="http://schemas.microsoft.com/office/drawing/2014/main" id="{0D0DF5BB-4965-42FA-1FE9-FA4F63D368AC}"/>
+                <a16:creationId xmlns:a16="http://schemas.microsoft.com/office/drawing/2014/main" xmlns="" id="{0D0DF5BB-4965-42FA-1FE9-FA4F63D368AC}"/>
               </a:ext>
             </a:extLst>
           </p:cNvPr>
@@ -13563,7 +13738,7 @@
               <p:cNvPr id="3" name="Espaço Reservado para Conteúdo 2">
                 <a:extLst>
                   <a:ext uri="{FF2B5EF4-FFF2-40B4-BE49-F238E27FC236}">
-                    <a16:creationId xmlns:a16="http://schemas.microsoft.com/office/drawing/2014/main" id="{057DDB69-30DD-CFD2-808A-F52FDB98EF88}"/>
+                    <a16:creationId xmlns:a16="http://schemas.microsoft.com/office/drawing/2014/main" xmlns="" id="{057DDB69-30DD-CFD2-808A-F52FDB98EF88}"/>
                   </a:ext>
                 </a:extLst>
               </p:cNvPr>
@@ -14084,7 +14259,7 @@
           <p:cNvPr id="4" name="Picture 3">
             <a:extLst>
               <a:ext uri="{FF2B5EF4-FFF2-40B4-BE49-F238E27FC236}">
-                <a16:creationId xmlns:a16="http://schemas.microsoft.com/office/drawing/2014/main" id="{DF06FD70-E89F-BC52-2900-5506EBD6CF3F}"/>
+                <a16:creationId xmlns:a16="http://schemas.microsoft.com/office/drawing/2014/main" xmlns="" id="{DF06FD70-E89F-BC52-2900-5506EBD6CF3F}"/>
               </a:ext>
             </a:extLst>
           </p:cNvPr>
@@ -14127,7 +14302,7 @@
 </p:sld>
 </file>
 
-<file path=ppt/slides/slide21.xml><?xml version="1.0" encoding="utf-8"?>
+<file path=ppt/slides/slide23.xml><?xml version="1.0" encoding="utf-8"?>
 <p:sld xmlns:a="http://schemas.openxmlformats.org/drawingml/2006/main" xmlns:r="http://schemas.openxmlformats.org/officeDocument/2006/relationships" xmlns:p="http://schemas.openxmlformats.org/presentationml/2006/main">
   <p:cSld>
     <p:spTree>
@@ -14149,7 +14324,7 @@
           <p:cNvPr id="2" name="Título 1">
             <a:extLst>
               <a:ext uri="{FF2B5EF4-FFF2-40B4-BE49-F238E27FC236}">
-                <a16:creationId xmlns:a16="http://schemas.microsoft.com/office/drawing/2014/main" id="{14850ACD-2DE0-7E6B-F65F-1A40170C1B2F}"/>
+                <a16:creationId xmlns:a16="http://schemas.microsoft.com/office/drawing/2014/main" xmlns="" id="{14850ACD-2DE0-7E6B-F65F-1A40170C1B2F}"/>
               </a:ext>
             </a:extLst>
           </p:cNvPr>
@@ -14172,14 +14347,14 @@
           </a:p>
         </p:txBody>
       </p:sp>
-      <mc:AlternateContent xmlns:mc="http://schemas.openxmlformats.org/markup-compatibility/2006" xmlns:a14="http://schemas.microsoft.com/office/drawing/2010/main">
-        <mc:Choice Requires="a14">
+      <mc:AlternateContent xmlns:mc="http://schemas.openxmlformats.org/markup-compatibility/2006">
+        <mc:Choice xmlns:a14="http://schemas.microsoft.com/office/drawing/2010/main" Requires="a14">
           <p:sp>
             <p:nvSpPr>
               <p:cNvPr id="3" name="Espaço Reservado para Conteúdo 2">
                 <a:extLst>
                   <a:ext uri="{FF2B5EF4-FFF2-40B4-BE49-F238E27FC236}">
-                    <a16:creationId xmlns:a16="http://schemas.microsoft.com/office/drawing/2014/main" id="{1C254C3E-10F9-2C66-DDBB-99D1164F61E7}"/>
+                    <a16:creationId xmlns:a16="http://schemas.microsoft.com/office/drawing/2014/main" xmlns="" id="{1C254C3E-10F9-2C66-DDBB-99D1164F61E7}"/>
                   </a:ext>
                 </a:extLst>
               </p:cNvPr>
@@ -14203,7 +14378,7 @@
               <a:lstStyle/>
               <a:p>
                 <a:r>
-                  <a:rPr lang="pt-BR" dirty="0"/>
+                  <a:rPr lang="pt-BR" dirty="0" smtClean="0"/>
                   <a:t>Nosso </a:t>
                 </a:r>
                 <a:r>
@@ -14515,7 +14690,51 @@
                       <a:srgbClr val="7030A0"/>
                     </a:solidFill>
                   </a:rPr>
-                  <a:t>mapeamentos não-lineares.</a:t>
+                  <a:t>mapeamentos </a:t>
+                </a:r>
+                <a:r>
+                  <a:rPr lang="pt-BR" b="1" i="1" dirty="0" smtClean="0">
+                    <a:solidFill>
+                      <a:srgbClr val="7030A0"/>
+                    </a:solidFill>
+                  </a:rPr>
+                  <a:t>não-lineares </a:t>
+                </a:r>
+                <a:r>
+                  <a:rPr lang="pt-BR" dirty="0" smtClean="0"/>
+                  <a:t>de </a:t>
+                </a:r>
+                <a14:m>
+                  <m:oMath xmlns:m="http://schemas.openxmlformats.org/officeDocument/2006/math">
+                    <m:r>
+                      <a:rPr lang="pt-BR" b="1" i="1" smtClean="0">
+                        <a:latin typeface="Cambria Math" panose="02040503050406030204" pitchFamily="18" charset="0"/>
+                      </a:rPr>
+                      <m:t>𝒙</m:t>
+                    </m:r>
+                  </m:oMath>
+                </a14:m>
+                <a:r>
+                  <a:rPr lang="pt-BR" dirty="0" smtClean="0"/>
+                  <a:t> em </a:t>
+                </a:r>
+                <a14:m>
+                  <m:oMath xmlns:m="http://schemas.openxmlformats.org/officeDocument/2006/math">
+                    <m:r>
+                      <a:rPr lang="pt-BR" b="0" i="1" smtClean="0">
+                        <a:latin typeface="Cambria Math" panose="02040503050406030204" pitchFamily="18" charset="0"/>
+                      </a:rPr>
+                      <m:t>𝑦</m:t>
+                    </m:r>
+                  </m:oMath>
+                </a14:m>
+                <a:r>
+                  <a:rPr lang="pt-BR" b="1" i="1" dirty="0" smtClean="0">
+                    <a:solidFill>
+                      <a:srgbClr val="7030A0"/>
+                    </a:solidFill>
+                  </a:rPr>
+                  <a:t>.</a:t>
                 </a:r>
                 <a:endParaRPr lang="pt-BR" dirty="0">
                   <a:solidFill>
@@ -14670,7 +14889,15 @@
                 </a14:m>
                 <a:r>
                   <a:rPr lang="pt-BR" dirty="0"/>
-                  <a:t> (eq. de um círculo centrado na origem, onde </a:t>
+                  <a:t> (</a:t>
+                </a:r>
+                <a:r>
+                  <a:rPr lang="pt-BR" dirty="0" smtClean="0"/>
+                  <a:t>equação </a:t>
+                </a:r>
+                <a:r>
+                  <a:rPr lang="pt-BR" dirty="0"/>
+                  <a:t>de um círculo centrado na origem, onde </a:t>
                 </a:r>
                 <a14:m>
                   <m:oMath xmlns:m="http://schemas.openxmlformats.org/officeDocument/2006/math">
@@ -14740,13 +14967,13 @@
             </p:txBody>
           </p:sp>
         </mc:Choice>
-        <mc:Fallback xmlns="">
+        <mc:Fallback>
           <p:sp>
             <p:nvSpPr>
               <p:cNvPr id="3" name="Espaço Reservado para Conteúdo 2">
                 <a:extLst>
                   <a:ext uri="{FF2B5EF4-FFF2-40B4-BE49-F238E27FC236}">
-                    <a16:creationId xmlns:a16="http://schemas.microsoft.com/office/drawing/2014/main" id="{1C254C3E-10F9-2C66-DDBB-99D1164F61E7}"/>
+                    <a16:creationId xmlns:a16="http://schemas.microsoft.com/office/drawing/2014/main" xmlns:a14="http://schemas.microsoft.com/office/drawing/2010/main" xmlns="" id="{1C254C3E-10F9-2C66-DDBB-99D1164F61E7}"/>
                   </a:ext>
                 </a:extLst>
               </p:cNvPr>
@@ -14762,10 +14989,10 @@
                 <a:off x="4648201" y="1825624"/>
                 <a:ext cx="7448550" cy="5032375"/>
               </a:xfrm>
-              <a:blipFill>
+              <a:blipFill rotWithShape="0">
                 <a:blip r:embed="rId3"/>
                 <a:stretch>
-                  <a:fillRect l="-1474" t="-1937"/>
+                  <a:fillRect l="-1474" t="-1937" r="-1638"/>
                 </a:stretch>
               </a:blipFill>
             </p:spPr>
@@ -14774,7 +15001,7 @@
               <a:lstStyle/>
               <a:p>
                 <a:r>
-                  <a:rPr lang="en-US">
+                  <a:rPr lang="pt-BR">
                     <a:noFill/>
                   </a:rPr>
                   <a:t> </a:t>
@@ -14789,7 +15016,7 @@
           <p:cNvPr id="5" name="Rectangle 4">
             <a:extLst>
               <a:ext uri="{FF2B5EF4-FFF2-40B4-BE49-F238E27FC236}">
-                <a16:creationId xmlns:a16="http://schemas.microsoft.com/office/drawing/2014/main" id="{645F5C35-CA80-831D-CD26-407BBC3BE21C}"/>
+                <a16:creationId xmlns:a16="http://schemas.microsoft.com/office/drawing/2014/main" xmlns="" id="{645F5C35-CA80-831D-CD26-407BBC3BE21C}"/>
               </a:ext>
             </a:extLst>
           </p:cNvPr>
@@ -14826,7 +15053,7 @@
           <p:cNvPr id="6" name="Straight Arrow Connector 6">
             <a:extLst>
               <a:ext uri="{FF2B5EF4-FFF2-40B4-BE49-F238E27FC236}">
-                <a16:creationId xmlns:a16="http://schemas.microsoft.com/office/drawing/2014/main" id="{2EC6DCB0-48FC-CD2A-E18F-D7B490834350}"/>
+                <a16:creationId xmlns:a16="http://schemas.microsoft.com/office/drawing/2014/main" xmlns="" id="{2EC6DCB0-48FC-CD2A-E18F-D7B490834350}"/>
               </a:ext>
             </a:extLst>
           </p:cNvPr>
@@ -14870,7 +15097,7 @@
           <p:cNvPr id="16" name="Picture 3">
             <a:extLst>
               <a:ext uri="{FF2B5EF4-FFF2-40B4-BE49-F238E27FC236}">
-                <a16:creationId xmlns:a16="http://schemas.microsoft.com/office/drawing/2014/main" id="{797B4B4A-0E8F-6A84-F64E-0B174596F8C7}"/>
+                <a16:creationId xmlns:a16="http://schemas.microsoft.com/office/drawing/2014/main" xmlns="" id="{797B4B4A-0E8F-6A84-F64E-0B174596F8C7}"/>
               </a:ext>
             </a:extLst>
           </p:cNvPr>
@@ -14905,7 +15132,7 @@
           <p:cNvPr id="4" name="Rectangle 4">
             <a:extLst>
               <a:ext uri="{FF2B5EF4-FFF2-40B4-BE49-F238E27FC236}">
-                <a16:creationId xmlns:a16="http://schemas.microsoft.com/office/drawing/2014/main" id="{6CF5207C-210F-5440-56B3-8F1EAD36FFAF}"/>
+                <a16:creationId xmlns:a16="http://schemas.microsoft.com/office/drawing/2014/main" xmlns="" id="{6CF5207C-210F-5440-56B3-8F1EAD36FFAF}"/>
               </a:ext>
             </a:extLst>
           </p:cNvPr>
@@ -14942,7 +15169,7 @@
           <p:cNvPr id="7" name="Straight Arrow Connector 6">
             <a:extLst>
               <a:ext uri="{FF2B5EF4-FFF2-40B4-BE49-F238E27FC236}">
-                <a16:creationId xmlns:a16="http://schemas.microsoft.com/office/drawing/2014/main" id="{F671CBD8-E5F7-29C9-3744-56F52318FE10}"/>
+                <a16:creationId xmlns:a16="http://schemas.microsoft.com/office/drawing/2014/main" xmlns="" id="{F671CBD8-E5F7-29C9-3744-56F52318FE10}"/>
               </a:ext>
             </a:extLst>
           </p:cNvPr>
@@ -14986,7 +15213,7 @@
           <p:cNvPr id="8" name="Rectangle 4">
             <a:extLst>
               <a:ext uri="{FF2B5EF4-FFF2-40B4-BE49-F238E27FC236}">
-                <a16:creationId xmlns:a16="http://schemas.microsoft.com/office/drawing/2014/main" id="{B8052885-3BC2-70B9-B921-5DDB2DD151B4}"/>
+                <a16:creationId xmlns:a16="http://schemas.microsoft.com/office/drawing/2014/main" xmlns="" id="{B8052885-3BC2-70B9-B921-5DDB2DD151B4}"/>
               </a:ext>
             </a:extLst>
           </p:cNvPr>
@@ -15023,7 +15250,7 @@
           <p:cNvPr id="9" name="Straight Arrow Connector 6">
             <a:extLst>
               <a:ext uri="{FF2B5EF4-FFF2-40B4-BE49-F238E27FC236}">
-                <a16:creationId xmlns:a16="http://schemas.microsoft.com/office/drawing/2014/main" id="{D8DB8446-863A-7210-136E-FC97FB27A3F5}"/>
+                <a16:creationId xmlns:a16="http://schemas.microsoft.com/office/drawing/2014/main" xmlns="" id="{D8DB8446-863A-7210-136E-FC97FB27A3F5}"/>
               </a:ext>
             </a:extLst>
           </p:cNvPr>
@@ -15075,7 +15302,70 @@
 </p:sld>
 </file>
 
-<file path=ppt/slides/slide22.xml><?xml version="1.0" encoding="utf-8"?>
+<file path=ppt/slides/slide24.xml><?xml version="1.0" encoding="utf-8"?>
+<p:sld xmlns:a="http://schemas.openxmlformats.org/drawingml/2006/main" xmlns:r="http://schemas.openxmlformats.org/officeDocument/2006/relationships" xmlns:p="http://schemas.openxmlformats.org/presentationml/2006/main">
+  <p:cSld>
+    <p:spTree>
+      <p:nvGrpSpPr>
+        <p:cNvPr id="1" name=""/>
+        <p:cNvGrpSpPr/>
+        <p:nvPr/>
+      </p:nvGrpSpPr>
+      <p:grpSpPr>
+        <a:xfrm>
+          <a:off x="0" y="0"/>
+          <a:ext cx="0" cy="0"/>
+          <a:chOff x="0" y="0"/>
+          <a:chExt cx="0" cy="0"/>
+        </a:xfrm>
+      </p:grpSpPr>
+      <p:sp>
+        <p:nvSpPr>
+          <p:cNvPr id="3" name="Espaço Reservado para Conteúdo 2"/>
+          <p:cNvSpPr>
+            <a:spLocks noGrp="1"/>
+          </p:cNvSpPr>
+          <p:nvPr>
+            <p:ph idx="1"/>
+          </p:nvPr>
+        </p:nvSpPr>
+        <p:spPr>
+          <a:xfrm>
+            <a:off x="333829" y="2133599"/>
+            <a:ext cx="11567885" cy="2830287"/>
+          </a:xfrm>
+        </p:spPr>
+        <p:txBody>
+          <a:bodyPr>
+            <a:normAutofit/>
+          </a:bodyPr>
+          <a:lstStyle/>
+          <a:p>
+            <a:pPr marL="0" indent="0" algn="ctr">
+              <a:buNone/>
+            </a:pPr>
+            <a:r>
+              <a:rPr lang="pt-BR" sz="6000" i="1" dirty="0" smtClean="0"/>
+              <a:t>Encontrando a função discriminante através do paradigma tradicional de programação</a:t>
+            </a:r>
+            <a:endParaRPr lang="pt-BR" sz="6000" i="1" dirty="0"/>
+          </a:p>
+        </p:txBody>
+      </p:sp>
+    </p:spTree>
+    <p:extLst>
+      <p:ext uri="{BB962C8B-B14F-4D97-AF65-F5344CB8AC3E}">
+        <p14:creationId xmlns:p14="http://schemas.microsoft.com/office/powerpoint/2010/main" val="1608062468"/>
+      </p:ext>
+    </p:extLst>
+  </p:cSld>
+  <p:clrMapOvr>
+    <a:masterClrMapping/>
+  </p:clrMapOvr>
+</p:sld>
+</file>
+
+<file path=ppt/slides/slide25.xml><?xml version="1.0" encoding="utf-8"?>
 <p:sld xmlns:a="http://schemas.openxmlformats.org/drawingml/2006/main" xmlns:r="http://schemas.openxmlformats.org/officeDocument/2006/relationships" xmlns:p="http://schemas.openxmlformats.org/presentationml/2006/main">
   <p:cSld>
     <p:spTree>
@@ -15099,7 +15389,7 @@
               <p:cNvPr id="2" name="Título 1">
                 <a:extLst>
                   <a:ext uri="{FF2B5EF4-FFF2-40B4-BE49-F238E27FC236}">
-                    <a16:creationId xmlns:a16="http://schemas.microsoft.com/office/drawing/2014/main" id="{8A0CFAA7-5C29-6851-46E4-B7F4A82E8A0F}"/>
+                    <a16:creationId xmlns:a16="http://schemas.microsoft.com/office/drawing/2014/main" xmlns="" id="{8A0CFAA7-5C29-6851-46E4-B7F4A82E8A0F}"/>
                   </a:ext>
                 </a:extLst>
               </p:cNvPr>
@@ -15192,14 +15482,14 @@
           </p:sp>
         </mc:Fallback>
       </mc:AlternateContent>
-      <mc:AlternateContent xmlns:mc="http://schemas.openxmlformats.org/markup-compatibility/2006" xmlns:a14="http://schemas.microsoft.com/office/drawing/2010/main">
-        <mc:Choice Requires="a14">
+      <mc:AlternateContent xmlns:mc="http://schemas.openxmlformats.org/markup-compatibility/2006">
+        <mc:Choice xmlns:a14="http://schemas.microsoft.com/office/drawing/2010/main" Requires="a14">
           <p:sp>
             <p:nvSpPr>
               <p:cNvPr id="3" name="Espaço Reservado para Conteúdo 2">
                 <a:extLst>
                   <a:ext uri="{FF2B5EF4-FFF2-40B4-BE49-F238E27FC236}">
-                    <a16:creationId xmlns:a16="http://schemas.microsoft.com/office/drawing/2014/main" id="{780068F1-0EF1-0C76-49EC-DEA1A6CCBE83}"/>
+                    <a16:creationId xmlns:a16="http://schemas.microsoft.com/office/drawing/2014/main" xmlns="" id="{780068F1-0EF1-0C76-49EC-DEA1A6CCBE83}"/>
                   </a:ext>
                 </a:extLst>
               </p:cNvPr>
@@ -15347,7 +15637,19 @@
                 </a:r>
                 <a:r>
                   <a:rPr lang="pt-BR" dirty="0"/>
-                  <a:t> para que ela tenha boa capacidade de generalização?</a:t>
+                  <a:t> para que ela tenha boa </a:t>
+                </a:r>
+                <a:r>
+                  <a:rPr lang="pt-BR" b="1" i="1" dirty="0">
+                    <a:solidFill>
+                      <a:schemeClr val="accent2"/>
+                    </a:solidFill>
+                  </a:rPr>
+                  <a:t>capacidade de generalização</a:t>
+                </a:r>
+                <a:r>
+                  <a:rPr lang="pt-BR" dirty="0"/>
+                  <a:t>?</a:t>
                 </a:r>
               </a:p>
               <a:p>
@@ -15371,13 +15673,13 @@
             </p:txBody>
           </p:sp>
         </mc:Choice>
-        <mc:Fallback xmlns="">
+        <mc:Fallback>
           <p:sp>
             <p:nvSpPr>
               <p:cNvPr id="3" name="Espaço Reservado para Conteúdo 2">
                 <a:extLst>
                   <a:ext uri="{FF2B5EF4-FFF2-40B4-BE49-F238E27FC236}">
-                    <a16:creationId xmlns:a16="http://schemas.microsoft.com/office/drawing/2014/main" id="{780068F1-0EF1-0C76-49EC-DEA1A6CCBE83}"/>
+                    <a16:creationId xmlns:a16="http://schemas.microsoft.com/office/drawing/2014/main" xmlns:a14="http://schemas.microsoft.com/office/drawing/2010/main" xmlns="" id="{780068F1-0EF1-0C76-49EC-DEA1A6CCBE83}"/>
                   </a:ext>
                 </a:extLst>
               </p:cNvPr>
@@ -15393,7 +15695,7 @@
                 <a:off x="5238750" y="1825624"/>
                 <a:ext cx="6810375" cy="5032375"/>
               </a:xfrm>
-              <a:blipFill>
+              <a:blipFill rotWithShape="0">
                 <a:blip r:embed="rId3"/>
                 <a:stretch>
                   <a:fillRect l="-1610" t="-1937" r="-1252"/>
@@ -15420,7 +15722,7 @@
           <p:cNvPr id="4" name="Group 78">
             <a:extLst>
               <a:ext uri="{FF2B5EF4-FFF2-40B4-BE49-F238E27FC236}">
-                <a16:creationId xmlns:a16="http://schemas.microsoft.com/office/drawing/2014/main" id="{487D5658-0FD0-C968-EFBE-A7E95C2E443E}"/>
+                <a16:creationId xmlns:a16="http://schemas.microsoft.com/office/drawing/2014/main" xmlns="" id="{487D5658-0FD0-C968-EFBE-A7E95C2E443E}"/>
               </a:ext>
             </a:extLst>
           </p:cNvPr>
@@ -15440,7 +15742,7 @@
             <p:cNvPr id="5" name="Oval 79">
               <a:extLst>
                 <a:ext uri="{FF2B5EF4-FFF2-40B4-BE49-F238E27FC236}">
-                  <a16:creationId xmlns:a16="http://schemas.microsoft.com/office/drawing/2014/main" id="{E89BE7AF-2058-7295-B197-E0E62CA67B80}"/>
+                  <a16:creationId xmlns:a16="http://schemas.microsoft.com/office/drawing/2014/main" xmlns="" id="{E89BE7AF-2058-7295-B197-E0E62CA67B80}"/>
                 </a:ext>
               </a:extLst>
             </p:cNvPr>
@@ -15494,7 +15796,7 @@
             <p:cNvPr id="6" name="Isosceles Triangle 80">
               <a:extLst>
                 <a:ext uri="{FF2B5EF4-FFF2-40B4-BE49-F238E27FC236}">
-                  <a16:creationId xmlns:a16="http://schemas.microsoft.com/office/drawing/2014/main" id="{5E216DC1-7B59-8729-AD9C-ABCE16E2E38D}"/>
+                  <a16:creationId xmlns:a16="http://schemas.microsoft.com/office/drawing/2014/main" xmlns="" id="{5E216DC1-7B59-8729-AD9C-ABCE16E2E38D}"/>
                 </a:ext>
               </a:extLst>
             </p:cNvPr>
@@ -15548,7 +15850,7 @@
             <p:cNvPr id="7" name="Oval 81">
               <a:extLst>
                 <a:ext uri="{FF2B5EF4-FFF2-40B4-BE49-F238E27FC236}">
-                  <a16:creationId xmlns:a16="http://schemas.microsoft.com/office/drawing/2014/main" id="{FDE081DA-35A3-0681-028B-40BCBCBB9C33}"/>
+                  <a16:creationId xmlns:a16="http://schemas.microsoft.com/office/drawing/2014/main" xmlns="" id="{FDE081DA-35A3-0681-028B-40BCBCBB9C33}"/>
                 </a:ext>
               </a:extLst>
             </p:cNvPr>
@@ -15602,7 +15904,7 @@
             <p:cNvPr id="8" name="Oval 82">
               <a:extLst>
                 <a:ext uri="{FF2B5EF4-FFF2-40B4-BE49-F238E27FC236}">
-                  <a16:creationId xmlns:a16="http://schemas.microsoft.com/office/drawing/2014/main" id="{CD56379E-2071-1597-E64B-D6E6AFAEBDCD}"/>
+                  <a16:creationId xmlns:a16="http://schemas.microsoft.com/office/drawing/2014/main" xmlns="" id="{CD56379E-2071-1597-E64B-D6E6AFAEBDCD}"/>
                 </a:ext>
               </a:extLst>
             </p:cNvPr>
@@ -15656,7 +15958,7 @@
             <p:cNvPr id="9" name="Oval 83">
               <a:extLst>
                 <a:ext uri="{FF2B5EF4-FFF2-40B4-BE49-F238E27FC236}">
-                  <a16:creationId xmlns:a16="http://schemas.microsoft.com/office/drawing/2014/main" id="{9F26F39D-B606-8295-3D00-FF4635307DAB}"/>
+                  <a16:creationId xmlns:a16="http://schemas.microsoft.com/office/drawing/2014/main" xmlns="" id="{9F26F39D-B606-8295-3D00-FF4635307DAB}"/>
                 </a:ext>
               </a:extLst>
             </p:cNvPr>
@@ -15710,7 +16012,7 @@
             <p:cNvPr id="10" name="Oval 84">
               <a:extLst>
                 <a:ext uri="{FF2B5EF4-FFF2-40B4-BE49-F238E27FC236}">
-                  <a16:creationId xmlns:a16="http://schemas.microsoft.com/office/drawing/2014/main" id="{913EE23A-1061-70DD-5BDA-C211A9951928}"/>
+                  <a16:creationId xmlns:a16="http://schemas.microsoft.com/office/drawing/2014/main" xmlns="" id="{913EE23A-1061-70DD-5BDA-C211A9951928}"/>
                 </a:ext>
               </a:extLst>
             </p:cNvPr>
@@ -15764,7 +16066,7 @@
             <p:cNvPr id="11" name="Oval 85">
               <a:extLst>
                 <a:ext uri="{FF2B5EF4-FFF2-40B4-BE49-F238E27FC236}">
-                  <a16:creationId xmlns:a16="http://schemas.microsoft.com/office/drawing/2014/main" id="{FD04490C-2F72-D1FE-464F-36C22F317BB4}"/>
+                  <a16:creationId xmlns:a16="http://schemas.microsoft.com/office/drawing/2014/main" xmlns="" id="{FD04490C-2F72-D1FE-464F-36C22F317BB4}"/>
                 </a:ext>
               </a:extLst>
             </p:cNvPr>
@@ -15818,7 +16120,7 @@
             <p:cNvPr id="12" name="Isosceles Triangle 86">
               <a:extLst>
                 <a:ext uri="{FF2B5EF4-FFF2-40B4-BE49-F238E27FC236}">
-                  <a16:creationId xmlns:a16="http://schemas.microsoft.com/office/drawing/2014/main" id="{803F83EE-6FA7-206A-3D1A-BF461F9D8E73}"/>
+                  <a16:creationId xmlns:a16="http://schemas.microsoft.com/office/drawing/2014/main" xmlns="" id="{803F83EE-6FA7-206A-3D1A-BF461F9D8E73}"/>
                 </a:ext>
               </a:extLst>
             </p:cNvPr>
@@ -15872,7 +16174,7 @@
             <p:cNvPr id="13" name="Isosceles Triangle 87">
               <a:extLst>
                 <a:ext uri="{FF2B5EF4-FFF2-40B4-BE49-F238E27FC236}">
-                  <a16:creationId xmlns:a16="http://schemas.microsoft.com/office/drawing/2014/main" id="{68BD49C0-0090-9FF3-95FD-4ECBFC459A55}"/>
+                  <a16:creationId xmlns:a16="http://schemas.microsoft.com/office/drawing/2014/main" xmlns="" id="{68BD49C0-0090-9FF3-95FD-4ECBFC459A55}"/>
                 </a:ext>
               </a:extLst>
             </p:cNvPr>
@@ -15926,7 +16228,7 @@
             <p:cNvPr id="14" name="Isosceles Triangle 88">
               <a:extLst>
                 <a:ext uri="{FF2B5EF4-FFF2-40B4-BE49-F238E27FC236}">
-                  <a16:creationId xmlns:a16="http://schemas.microsoft.com/office/drawing/2014/main" id="{C6A1D6A8-188A-3ED2-CD76-CE792D0788E8}"/>
+                  <a16:creationId xmlns:a16="http://schemas.microsoft.com/office/drawing/2014/main" xmlns="" id="{C6A1D6A8-188A-3ED2-CD76-CE792D0788E8}"/>
                 </a:ext>
               </a:extLst>
             </p:cNvPr>
@@ -15980,7 +16282,7 @@
             <p:cNvPr id="15" name="Isosceles Triangle 89">
               <a:extLst>
                 <a:ext uri="{FF2B5EF4-FFF2-40B4-BE49-F238E27FC236}">
-                  <a16:creationId xmlns:a16="http://schemas.microsoft.com/office/drawing/2014/main" id="{659CDF21-7AB2-3FEF-2E4F-93C207EFCC72}"/>
+                  <a16:creationId xmlns:a16="http://schemas.microsoft.com/office/drawing/2014/main" xmlns="" id="{659CDF21-7AB2-3FEF-2E4F-93C207EFCC72}"/>
                 </a:ext>
               </a:extLst>
             </p:cNvPr>
@@ -16034,7 +16336,7 @@
             <p:cNvPr id="16" name="Isosceles Triangle 90">
               <a:extLst>
                 <a:ext uri="{FF2B5EF4-FFF2-40B4-BE49-F238E27FC236}">
-                  <a16:creationId xmlns:a16="http://schemas.microsoft.com/office/drawing/2014/main" id="{FF6A084D-0EB5-D541-7150-65DDDD23F92E}"/>
+                  <a16:creationId xmlns:a16="http://schemas.microsoft.com/office/drawing/2014/main" xmlns="" id="{FF6A084D-0EB5-D541-7150-65DDDD23F92E}"/>
                 </a:ext>
               </a:extLst>
             </p:cNvPr>
@@ -16088,7 +16390,7 @@
             <p:cNvPr id="17" name="Isosceles Triangle 91">
               <a:extLst>
                 <a:ext uri="{FF2B5EF4-FFF2-40B4-BE49-F238E27FC236}">
-                  <a16:creationId xmlns:a16="http://schemas.microsoft.com/office/drawing/2014/main" id="{18C4667B-AF47-8F94-C29F-69647A84EDD2}"/>
+                  <a16:creationId xmlns:a16="http://schemas.microsoft.com/office/drawing/2014/main" xmlns="" id="{18C4667B-AF47-8F94-C29F-69647A84EDD2}"/>
                 </a:ext>
               </a:extLst>
             </p:cNvPr>
@@ -16142,7 +16444,7 @@
             <p:cNvPr id="18" name="Isosceles Triangle 92">
               <a:extLst>
                 <a:ext uri="{FF2B5EF4-FFF2-40B4-BE49-F238E27FC236}">
-                  <a16:creationId xmlns:a16="http://schemas.microsoft.com/office/drawing/2014/main" id="{4CF16A92-05BE-5B9F-4B3F-AB35A06BF248}"/>
+                  <a16:creationId xmlns:a16="http://schemas.microsoft.com/office/drawing/2014/main" xmlns="" id="{4CF16A92-05BE-5B9F-4B3F-AB35A06BF248}"/>
                 </a:ext>
               </a:extLst>
             </p:cNvPr>
@@ -16198,7 +16500,7 @@
                 <p:cNvPr id="19" name="TextBox 95">
                   <a:extLst>
                     <a:ext uri="{FF2B5EF4-FFF2-40B4-BE49-F238E27FC236}">
-                      <a16:creationId xmlns:a16="http://schemas.microsoft.com/office/drawing/2014/main" id="{A8DD1272-3AF8-A7AF-6C02-A3C1259B4EA7}"/>
+                      <a16:creationId xmlns:a16="http://schemas.microsoft.com/office/drawing/2014/main" xmlns="" id="{A8DD1272-3AF8-A7AF-6C02-A3C1259B4EA7}"/>
                     </a:ext>
                   </a:extLst>
                 </p:cNvPr>
@@ -16305,7 +16607,7 @@
             <p:cNvPr id="20" name="Rectangle 98">
               <a:extLst>
                 <a:ext uri="{FF2B5EF4-FFF2-40B4-BE49-F238E27FC236}">
-                  <a16:creationId xmlns:a16="http://schemas.microsoft.com/office/drawing/2014/main" id="{83B038ED-AA33-E457-BD37-7ED05EC46859}"/>
+                  <a16:creationId xmlns:a16="http://schemas.microsoft.com/office/drawing/2014/main" xmlns="" id="{83B038ED-AA33-E457-BD37-7ED05EC46859}"/>
                 </a:ext>
               </a:extLst>
             </p:cNvPr>
@@ -16357,7 +16659,7 @@
             <p:cNvPr id="21" name="Straight Arrow Connector 99">
               <a:extLst>
                 <a:ext uri="{FF2B5EF4-FFF2-40B4-BE49-F238E27FC236}">
-                  <a16:creationId xmlns:a16="http://schemas.microsoft.com/office/drawing/2014/main" id="{47DA0291-6CD0-85F5-0170-2EDF086E63DA}"/>
+                  <a16:creationId xmlns:a16="http://schemas.microsoft.com/office/drawing/2014/main" xmlns="" id="{47DA0291-6CD0-85F5-0170-2EDF086E63DA}"/>
                 </a:ext>
               </a:extLst>
             </p:cNvPr>
@@ -16399,7 +16701,7 @@
             <p:cNvPr id="22" name="Straight Arrow Connector 100">
               <a:extLst>
                 <a:ext uri="{FF2B5EF4-FFF2-40B4-BE49-F238E27FC236}">
-                  <a16:creationId xmlns:a16="http://schemas.microsoft.com/office/drawing/2014/main" id="{B21AB59B-5EB6-4D44-57C0-3DA5DA17F91B}"/>
+                  <a16:creationId xmlns:a16="http://schemas.microsoft.com/office/drawing/2014/main" xmlns="" id="{B21AB59B-5EB6-4D44-57C0-3DA5DA17F91B}"/>
                 </a:ext>
               </a:extLst>
             </p:cNvPr>
@@ -16443,7 +16745,7 @@
                 <p:cNvPr id="23" name="TextBox 101">
                   <a:extLst>
                     <a:ext uri="{FF2B5EF4-FFF2-40B4-BE49-F238E27FC236}">
-                      <a16:creationId xmlns:a16="http://schemas.microsoft.com/office/drawing/2014/main" id="{746DA016-25BC-E716-6E4E-CBF1E977C129}"/>
+                      <a16:creationId xmlns:a16="http://schemas.microsoft.com/office/drawing/2014/main" xmlns="" id="{746DA016-25BC-E716-6E4E-CBF1E977C129}"/>
                     </a:ext>
                   </a:extLst>
                 </p:cNvPr>
@@ -16550,7 +16852,7 @@
             <p:cNvPr id="24" name="TextBox 103">
               <a:extLst>
                 <a:ext uri="{FF2B5EF4-FFF2-40B4-BE49-F238E27FC236}">
-                  <a16:creationId xmlns:a16="http://schemas.microsoft.com/office/drawing/2014/main" id="{5250E4E8-B7DD-04A3-DAC8-38563AC35511}"/>
+                  <a16:creationId xmlns:a16="http://schemas.microsoft.com/office/drawing/2014/main" xmlns="" id="{5250E4E8-B7DD-04A3-DAC8-38563AC35511}"/>
                 </a:ext>
               </a:extLst>
             </p:cNvPr>
@@ -16585,7 +16887,7 @@
             <p:cNvPr id="25" name="TextBox 104">
               <a:extLst>
                 <a:ext uri="{FF2B5EF4-FFF2-40B4-BE49-F238E27FC236}">
-                  <a16:creationId xmlns:a16="http://schemas.microsoft.com/office/drawing/2014/main" id="{44208387-CBDD-A071-2AD0-32249E61BE26}"/>
+                  <a16:creationId xmlns:a16="http://schemas.microsoft.com/office/drawing/2014/main" xmlns="" id="{44208387-CBDD-A071-2AD0-32249E61BE26}"/>
                 </a:ext>
               </a:extLst>
             </p:cNvPr>
@@ -16620,7 +16922,7 @@
             <p:cNvPr id="26" name="TextBox 105">
               <a:extLst>
                 <a:ext uri="{FF2B5EF4-FFF2-40B4-BE49-F238E27FC236}">
-                  <a16:creationId xmlns:a16="http://schemas.microsoft.com/office/drawing/2014/main" id="{9DA9B49A-A1DF-75A9-6A71-339628F521DA}"/>
+                  <a16:creationId xmlns:a16="http://schemas.microsoft.com/office/drawing/2014/main" xmlns="" id="{9DA9B49A-A1DF-75A9-6A71-339628F521DA}"/>
                 </a:ext>
               </a:extLst>
             </p:cNvPr>
@@ -16655,7 +16957,7 @@
             <p:cNvPr id="27" name="TextBox 106">
               <a:extLst>
                 <a:ext uri="{FF2B5EF4-FFF2-40B4-BE49-F238E27FC236}">
-                  <a16:creationId xmlns:a16="http://schemas.microsoft.com/office/drawing/2014/main" id="{1B965F7F-7388-84C2-C3B5-0459476EC2AE}"/>
+                  <a16:creationId xmlns:a16="http://schemas.microsoft.com/office/drawing/2014/main" xmlns="" id="{1B965F7F-7388-84C2-C3B5-0459476EC2AE}"/>
                 </a:ext>
               </a:extLst>
             </p:cNvPr>
@@ -16690,7 +16992,7 @@
             <p:cNvPr id="28" name="TextBox 107">
               <a:extLst>
                 <a:ext uri="{FF2B5EF4-FFF2-40B4-BE49-F238E27FC236}">
-                  <a16:creationId xmlns:a16="http://schemas.microsoft.com/office/drawing/2014/main" id="{E37863C8-D501-6B0A-4A3E-BB3031160D5C}"/>
+                  <a16:creationId xmlns:a16="http://schemas.microsoft.com/office/drawing/2014/main" xmlns="" id="{E37863C8-D501-6B0A-4A3E-BB3031160D5C}"/>
                 </a:ext>
               </a:extLst>
             </p:cNvPr>
@@ -16725,7 +17027,7 @@
             <p:cNvPr id="29" name="TextBox 108">
               <a:extLst>
                 <a:ext uri="{FF2B5EF4-FFF2-40B4-BE49-F238E27FC236}">
-                  <a16:creationId xmlns:a16="http://schemas.microsoft.com/office/drawing/2014/main" id="{E20FE8D7-72D4-7CC6-2B72-9CB00DFCBB33}"/>
+                  <a16:creationId xmlns:a16="http://schemas.microsoft.com/office/drawing/2014/main" xmlns="" id="{E20FE8D7-72D4-7CC6-2B72-9CB00DFCBB33}"/>
                 </a:ext>
               </a:extLst>
             </p:cNvPr>
@@ -16760,7 +17062,7 @@
             <p:cNvPr id="30" name="TextBox 109">
               <a:extLst>
                 <a:ext uri="{FF2B5EF4-FFF2-40B4-BE49-F238E27FC236}">
-                  <a16:creationId xmlns:a16="http://schemas.microsoft.com/office/drawing/2014/main" id="{7C674789-D095-5162-99D7-B44DBE8D8F3E}"/>
+                  <a16:creationId xmlns:a16="http://schemas.microsoft.com/office/drawing/2014/main" xmlns="" id="{7C674789-D095-5162-99D7-B44DBE8D8F3E}"/>
                 </a:ext>
               </a:extLst>
             </p:cNvPr>
@@ -16795,7 +17097,7 @@
             <p:cNvPr id="31" name="TextBox 110">
               <a:extLst>
                 <a:ext uri="{FF2B5EF4-FFF2-40B4-BE49-F238E27FC236}">
-                  <a16:creationId xmlns:a16="http://schemas.microsoft.com/office/drawing/2014/main" id="{51F67162-69A4-7489-85AF-4978F49B4D81}"/>
+                  <a16:creationId xmlns:a16="http://schemas.microsoft.com/office/drawing/2014/main" xmlns="" id="{51F67162-69A4-7489-85AF-4978F49B4D81}"/>
                 </a:ext>
               </a:extLst>
             </p:cNvPr>
@@ -16830,7 +17132,7 @@
             <p:cNvPr id="32" name="TextBox 111">
               <a:extLst>
                 <a:ext uri="{FF2B5EF4-FFF2-40B4-BE49-F238E27FC236}">
-                  <a16:creationId xmlns:a16="http://schemas.microsoft.com/office/drawing/2014/main" id="{09FC0559-1ED2-58D0-5D8E-8D6301EA09D9}"/>
+                  <a16:creationId xmlns:a16="http://schemas.microsoft.com/office/drawing/2014/main" xmlns="" id="{09FC0559-1ED2-58D0-5D8E-8D6301EA09D9}"/>
                 </a:ext>
               </a:extLst>
             </p:cNvPr>
@@ -16865,7 +17167,7 @@
             <p:cNvPr id="33" name="Rectangle 112">
               <a:extLst>
                 <a:ext uri="{FF2B5EF4-FFF2-40B4-BE49-F238E27FC236}">
-                  <a16:creationId xmlns:a16="http://schemas.microsoft.com/office/drawing/2014/main" id="{AF36E35B-B3F5-532A-2D12-833815CB5ECB}"/>
+                  <a16:creationId xmlns:a16="http://schemas.microsoft.com/office/drawing/2014/main" xmlns="" id="{AF36E35B-B3F5-532A-2D12-833815CB5ECB}"/>
                 </a:ext>
               </a:extLst>
             </p:cNvPr>
@@ -16917,7 +17219,7 @@
             <p:cNvPr id="34" name="Rectangle 113">
               <a:extLst>
                 <a:ext uri="{FF2B5EF4-FFF2-40B4-BE49-F238E27FC236}">
-                  <a16:creationId xmlns:a16="http://schemas.microsoft.com/office/drawing/2014/main" id="{5BEF69AC-89A1-1E54-D4FA-F51670A78DC8}"/>
+                  <a16:creationId xmlns:a16="http://schemas.microsoft.com/office/drawing/2014/main" xmlns="" id="{5BEF69AC-89A1-1E54-D4FA-F51670A78DC8}"/>
                 </a:ext>
               </a:extLst>
             </p:cNvPr>
@@ -16969,7 +17271,7 @@
             <p:cNvPr id="35" name="Rectangle 114">
               <a:extLst>
                 <a:ext uri="{FF2B5EF4-FFF2-40B4-BE49-F238E27FC236}">
-                  <a16:creationId xmlns:a16="http://schemas.microsoft.com/office/drawing/2014/main" id="{6AA579BC-C30E-C031-523B-B6224C88A2C4}"/>
+                  <a16:creationId xmlns:a16="http://schemas.microsoft.com/office/drawing/2014/main" xmlns="" id="{6AA579BC-C30E-C031-523B-B6224C88A2C4}"/>
                 </a:ext>
               </a:extLst>
             </p:cNvPr>
@@ -17021,7 +17323,7 @@
             <p:cNvPr id="36" name="Rectangle 115">
               <a:extLst>
                 <a:ext uri="{FF2B5EF4-FFF2-40B4-BE49-F238E27FC236}">
-                  <a16:creationId xmlns:a16="http://schemas.microsoft.com/office/drawing/2014/main" id="{1372A63C-358E-6F46-792A-D5D077AE1A16}"/>
+                  <a16:creationId xmlns:a16="http://schemas.microsoft.com/office/drawing/2014/main" xmlns="" id="{1372A63C-358E-6F46-792A-D5D077AE1A16}"/>
                 </a:ext>
               </a:extLst>
             </p:cNvPr>
@@ -17073,7 +17375,7 @@
             <p:cNvPr id="37" name="Rectangle 116">
               <a:extLst>
                 <a:ext uri="{FF2B5EF4-FFF2-40B4-BE49-F238E27FC236}">
-                  <a16:creationId xmlns:a16="http://schemas.microsoft.com/office/drawing/2014/main" id="{03ABEB89-F00B-93C9-EBE6-0B3B9141FE57}"/>
+                  <a16:creationId xmlns:a16="http://schemas.microsoft.com/office/drawing/2014/main" xmlns="" id="{03ABEB89-F00B-93C9-EBE6-0B3B9141FE57}"/>
                 </a:ext>
               </a:extLst>
             </p:cNvPr>
@@ -17125,7 +17427,7 @@
             <p:cNvPr id="38" name="Rectangle 117">
               <a:extLst>
                 <a:ext uri="{FF2B5EF4-FFF2-40B4-BE49-F238E27FC236}">
-                  <a16:creationId xmlns:a16="http://schemas.microsoft.com/office/drawing/2014/main" id="{598EC6D8-84D5-6607-35B6-AAC7FC2ED7AA}"/>
+                  <a16:creationId xmlns:a16="http://schemas.microsoft.com/office/drawing/2014/main" xmlns="" id="{598EC6D8-84D5-6607-35B6-AAC7FC2ED7AA}"/>
                 </a:ext>
               </a:extLst>
             </p:cNvPr>
@@ -17177,7 +17479,7 @@
             <p:cNvPr id="39" name="Rectangle 118">
               <a:extLst>
                 <a:ext uri="{FF2B5EF4-FFF2-40B4-BE49-F238E27FC236}">
-                  <a16:creationId xmlns:a16="http://schemas.microsoft.com/office/drawing/2014/main" id="{47FEDB24-A32F-B651-29FD-442442B8B07A}"/>
+                  <a16:creationId xmlns:a16="http://schemas.microsoft.com/office/drawing/2014/main" xmlns="" id="{47FEDB24-A32F-B651-29FD-442442B8B07A}"/>
                 </a:ext>
               </a:extLst>
             </p:cNvPr>
@@ -17229,7 +17531,7 @@
             <p:cNvPr id="40" name="Rectangle 119">
               <a:extLst>
                 <a:ext uri="{FF2B5EF4-FFF2-40B4-BE49-F238E27FC236}">
-                  <a16:creationId xmlns:a16="http://schemas.microsoft.com/office/drawing/2014/main" id="{7B09D1F5-5E55-1FA4-C741-79F6FEF4A4C6}"/>
+                  <a16:creationId xmlns:a16="http://schemas.microsoft.com/office/drawing/2014/main" xmlns="" id="{7B09D1F5-5E55-1FA4-C741-79F6FEF4A4C6}"/>
                 </a:ext>
               </a:extLst>
             </p:cNvPr>
@@ -17281,7 +17583,7 @@
             <p:cNvPr id="41" name="Rectangle 120">
               <a:extLst>
                 <a:ext uri="{FF2B5EF4-FFF2-40B4-BE49-F238E27FC236}">
-                  <a16:creationId xmlns:a16="http://schemas.microsoft.com/office/drawing/2014/main" id="{179F9E0A-6C4C-22EE-7447-5C4C776E5093}"/>
+                  <a16:creationId xmlns:a16="http://schemas.microsoft.com/office/drawing/2014/main" xmlns="" id="{179F9E0A-6C4C-22EE-7447-5C4C776E5093}"/>
                 </a:ext>
               </a:extLst>
             </p:cNvPr>
@@ -17333,7 +17635,7 @@
             <p:cNvPr id="42" name="Rectangle 121">
               <a:extLst>
                 <a:ext uri="{FF2B5EF4-FFF2-40B4-BE49-F238E27FC236}">
-                  <a16:creationId xmlns:a16="http://schemas.microsoft.com/office/drawing/2014/main" id="{5EC463B1-4A44-DAA8-F277-2B6AD1C06DD5}"/>
+                  <a16:creationId xmlns:a16="http://schemas.microsoft.com/office/drawing/2014/main" xmlns="" id="{5EC463B1-4A44-DAA8-F277-2B6AD1C06DD5}"/>
                 </a:ext>
               </a:extLst>
             </p:cNvPr>
@@ -17385,7 +17687,7 @@
             <p:cNvPr id="43" name="Rectangle 122">
               <a:extLst>
                 <a:ext uri="{FF2B5EF4-FFF2-40B4-BE49-F238E27FC236}">
-                  <a16:creationId xmlns:a16="http://schemas.microsoft.com/office/drawing/2014/main" id="{C30A254C-7088-C718-6467-D3BC3B541801}"/>
+                  <a16:creationId xmlns:a16="http://schemas.microsoft.com/office/drawing/2014/main" xmlns="" id="{C30A254C-7088-C718-6467-D3BC3B541801}"/>
                 </a:ext>
               </a:extLst>
             </p:cNvPr>
@@ -17437,7 +17739,7 @@
             <p:cNvPr id="44" name="Rectangle 123">
               <a:extLst>
                 <a:ext uri="{FF2B5EF4-FFF2-40B4-BE49-F238E27FC236}">
-                  <a16:creationId xmlns:a16="http://schemas.microsoft.com/office/drawing/2014/main" id="{1B9FEC0A-AF88-A403-E761-3224B5F95C62}"/>
+                  <a16:creationId xmlns:a16="http://schemas.microsoft.com/office/drawing/2014/main" xmlns="" id="{1B9FEC0A-AF88-A403-E761-3224B5F95C62}"/>
                 </a:ext>
               </a:extLst>
             </p:cNvPr>
@@ -17489,7 +17791,7 @@
             <p:cNvPr id="45" name="Rectangle 124">
               <a:extLst>
                 <a:ext uri="{FF2B5EF4-FFF2-40B4-BE49-F238E27FC236}">
-                  <a16:creationId xmlns:a16="http://schemas.microsoft.com/office/drawing/2014/main" id="{79D66154-FD3E-3804-B10A-7B7283D6463E}"/>
+                  <a16:creationId xmlns:a16="http://schemas.microsoft.com/office/drawing/2014/main" xmlns="" id="{79D66154-FD3E-3804-B10A-7B7283D6463E}"/>
                 </a:ext>
               </a:extLst>
             </p:cNvPr>
@@ -17541,7 +17843,7 @@
             <p:cNvPr id="46" name="Rectangle 125">
               <a:extLst>
                 <a:ext uri="{FF2B5EF4-FFF2-40B4-BE49-F238E27FC236}">
-                  <a16:creationId xmlns:a16="http://schemas.microsoft.com/office/drawing/2014/main" id="{340AF437-9EE7-2DB1-370F-FBF3ACC408E0}"/>
+                  <a16:creationId xmlns:a16="http://schemas.microsoft.com/office/drawing/2014/main" xmlns="" id="{340AF437-9EE7-2DB1-370F-FBF3ACC408E0}"/>
                 </a:ext>
               </a:extLst>
             </p:cNvPr>
@@ -17593,7 +17895,7 @@
             <p:cNvPr id="47" name="Rectangle 126">
               <a:extLst>
                 <a:ext uri="{FF2B5EF4-FFF2-40B4-BE49-F238E27FC236}">
-                  <a16:creationId xmlns:a16="http://schemas.microsoft.com/office/drawing/2014/main" id="{D879C168-F49F-9943-3173-0EB461F700FC}"/>
+                  <a16:creationId xmlns:a16="http://schemas.microsoft.com/office/drawing/2014/main" xmlns="" id="{D879C168-F49F-9943-3173-0EB461F700FC}"/>
                 </a:ext>
               </a:extLst>
             </p:cNvPr>
@@ -17645,7 +17947,7 @@
             <p:cNvPr id="48" name="Isosceles Triangle 127">
               <a:extLst>
                 <a:ext uri="{FF2B5EF4-FFF2-40B4-BE49-F238E27FC236}">
-                  <a16:creationId xmlns:a16="http://schemas.microsoft.com/office/drawing/2014/main" id="{E66752DB-6D9E-C6F8-E975-9A43C8D709F0}"/>
+                  <a16:creationId xmlns:a16="http://schemas.microsoft.com/office/drawing/2014/main" xmlns="" id="{E66752DB-6D9E-C6F8-E975-9A43C8D709F0}"/>
                 </a:ext>
               </a:extLst>
             </p:cNvPr>
@@ -17699,7 +18001,7 @@
             <p:cNvPr id="49" name="Isosceles Triangle 128">
               <a:extLst>
                 <a:ext uri="{FF2B5EF4-FFF2-40B4-BE49-F238E27FC236}">
-                  <a16:creationId xmlns:a16="http://schemas.microsoft.com/office/drawing/2014/main" id="{FF2809A7-5680-4DE5-5D4C-D0A13E9908FF}"/>
+                  <a16:creationId xmlns:a16="http://schemas.microsoft.com/office/drawing/2014/main" xmlns="" id="{FF2809A7-5680-4DE5-5D4C-D0A13E9908FF}"/>
                 </a:ext>
               </a:extLst>
             </p:cNvPr>
@@ -17753,7 +18055,7 @@
             <p:cNvPr id="50" name="Isosceles Triangle 129">
               <a:extLst>
                 <a:ext uri="{FF2B5EF4-FFF2-40B4-BE49-F238E27FC236}">
-                  <a16:creationId xmlns:a16="http://schemas.microsoft.com/office/drawing/2014/main" id="{9F64AFE6-39B5-963E-F270-7AFFA7C84D50}"/>
+                  <a16:creationId xmlns:a16="http://schemas.microsoft.com/office/drawing/2014/main" xmlns="" id="{9F64AFE6-39B5-963E-F270-7AFFA7C84D50}"/>
                 </a:ext>
               </a:extLst>
             </p:cNvPr>
@@ -17807,7 +18109,7 @@
             <p:cNvPr id="51" name="Isosceles Triangle 130">
               <a:extLst>
                 <a:ext uri="{FF2B5EF4-FFF2-40B4-BE49-F238E27FC236}">
-                  <a16:creationId xmlns:a16="http://schemas.microsoft.com/office/drawing/2014/main" id="{1D2588A8-49CE-E1AE-7671-8CE3CE53ECF8}"/>
+                  <a16:creationId xmlns:a16="http://schemas.microsoft.com/office/drawing/2014/main" xmlns="" id="{1D2588A8-49CE-E1AE-7671-8CE3CE53ECF8}"/>
                 </a:ext>
               </a:extLst>
             </p:cNvPr>
@@ -17861,7 +18163,7 @@
             <p:cNvPr id="52" name="Isosceles Triangle 131">
               <a:extLst>
                 <a:ext uri="{FF2B5EF4-FFF2-40B4-BE49-F238E27FC236}">
-                  <a16:creationId xmlns:a16="http://schemas.microsoft.com/office/drawing/2014/main" id="{C2704713-68FB-F715-3845-FF447A418DF0}"/>
+                  <a16:creationId xmlns:a16="http://schemas.microsoft.com/office/drawing/2014/main" xmlns="" id="{C2704713-68FB-F715-3845-FF447A418DF0}"/>
                 </a:ext>
               </a:extLst>
             </p:cNvPr>
@@ -17915,7 +18217,7 @@
             <p:cNvPr id="53" name="Oval 132">
               <a:extLst>
                 <a:ext uri="{FF2B5EF4-FFF2-40B4-BE49-F238E27FC236}">
-                  <a16:creationId xmlns:a16="http://schemas.microsoft.com/office/drawing/2014/main" id="{5C6D4EF8-A172-AD9F-C206-3C0F57BE3274}"/>
+                  <a16:creationId xmlns:a16="http://schemas.microsoft.com/office/drawing/2014/main" xmlns="" id="{5C6D4EF8-A172-AD9F-C206-3C0F57BE3274}"/>
                 </a:ext>
               </a:extLst>
             </p:cNvPr>
@@ -17978,7 +18280,7 @@
 </p:sld>
 </file>
 
-<file path=ppt/slides/slide23.xml><?xml version="1.0" encoding="utf-8"?>
+<file path=ppt/slides/slide26.xml><?xml version="1.0" encoding="utf-8"?>
 <p:sld xmlns:a="http://schemas.openxmlformats.org/drawingml/2006/main" xmlns:r="http://schemas.openxmlformats.org/officeDocument/2006/relationships" xmlns:p="http://schemas.openxmlformats.org/presentationml/2006/main">
   <p:cSld>
     <p:spTree>
@@ -18002,7 +18304,7 @@
               <p:cNvPr id="2" name="Título 1">
                 <a:extLst>
                   <a:ext uri="{FF2B5EF4-FFF2-40B4-BE49-F238E27FC236}">
-                    <a16:creationId xmlns:a16="http://schemas.microsoft.com/office/drawing/2014/main" id="{8A0CFAA7-5C29-6851-46E4-B7F4A82E8A0F}"/>
+                    <a16:creationId xmlns:a16="http://schemas.microsoft.com/office/drawing/2014/main" xmlns="" id="{8A0CFAA7-5C29-6851-46E4-B7F4A82E8A0F}"/>
                   </a:ext>
                 </a:extLst>
               </p:cNvPr>
@@ -18102,7 +18404,7 @@
               <p:cNvPr id="3" name="Espaço Reservado para Conteúdo 2">
                 <a:extLst>
                   <a:ext uri="{FF2B5EF4-FFF2-40B4-BE49-F238E27FC236}">
-                    <a16:creationId xmlns:a16="http://schemas.microsoft.com/office/drawing/2014/main" id="{780068F1-0EF1-0C76-49EC-DEA1A6CCBE83}"/>
+                    <a16:creationId xmlns:a16="http://schemas.microsoft.com/office/drawing/2014/main" xmlns="" id="{780068F1-0EF1-0C76-49EC-DEA1A6CCBE83}"/>
                   </a:ext>
                 </a:extLst>
               </p:cNvPr>
@@ -18276,7 +18578,7 @@
           <p:cNvPr id="54" name="Group 3">
             <a:extLst>
               <a:ext uri="{FF2B5EF4-FFF2-40B4-BE49-F238E27FC236}">
-                <a16:creationId xmlns:a16="http://schemas.microsoft.com/office/drawing/2014/main" id="{0804103E-93D4-FECC-2D73-97363B0EA605}"/>
+                <a16:creationId xmlns:a16="http://schemas.microsoft.com/office/drawing/2014/main" xmlns="" id="{0804103E-93D4-FECC-2D73-97363B0EA605}"/>
               </a:ext>
             </a:extLst>
           </p:cNvPr>
@@ -18296,7 +18598,7 @@
             <p:cNvPr id="55" name="Oval 5">
               <a:extLst>
                 <a:ext uri="{FF2B5EF4-FFF2-40B4-BE49-F238E27FC236}">
-                  <a16:creationId xmlns:a16="http://schemas.microsoft.com/office/drawing/2014/main" id="{E1599D47-2C59-AD8D-4E8A-1A3C51FBFBCC}"/>
+                  <a16:creationId xmlns:a16="http://schemas.microsoft.com/office/drawing/2014/main" xmlns="" id="{E1599D47-2C59-AD8D-4E8A-1A3C51FBFBCC}"/>
                 </a:ext>
               </a:extLst>
             </p:cNvPr>
@@ -18350,7 +18652,7 @@
             <p:cNvPr id="56" name="Isosceles Triangle 6">
               <a:extLst>
                 <a:ext uri="{FF2B5EF4-FFF2-40B4-BE49-F238E27FC236}">
-                  <a16:creationId xmlns:a16="http://schemas.microsoft.com/office/drawing/2014/main" id="{5C959D4B-1F07-A80B-DE4F-85E60049268E}"/>
+                  <a16:creationId xmlns:a16="http://schemas.microsoft.com/office/drawing/2014/main" xmlns="" id="{5C959D4B-1F07-A80B-DE4F-85E60049268E}"/>
                 </a:ext>
               </a:extLst>
             </p:cNvPr>
@@ -18404,7 +18706,7 @@
             <p:cNvPr id="57" name="Oval 8">
               <a:extLst>
                 <a:ext uri="{FF2B5EF4-FFF2-40B4-BE49-F238E27FC236}">
-                  <a16:creationId xmlns:a16="http://schemas.microsoft.com/office/drawing/2014/main" id="{C3E1A439-B0E9-A725-CB19-E60291B4A58E}"/>
+                  <a16:creationId xmlns:a16="http://schemas.microsoft.com/office/drawing/2014/main" xmlns="" id="{C3E1A439-B0E9-A725-CB19-E60291B4A58E}"/>
                 </a:ext>
               </a:extLst>
             </p:cNvPr>
@@ -18458,7 +18760,7 @@
             <p:cNvPr id="58" name="Oval 9">
               <a:extLst>
                 <a:ext uri="{FF2B5EF4-FFF2-40B4-BE49-F238E27FC236}">
-                  <a16:creationId xmlns:a16="http://schemas.microsoft.com/office/drawing/2014/main" id="{50DABBD2-4E98-BC24-4EFF-934FC8F93B79}"/>
+                  <a16:creationId xmlns:a16="http://schemas.microsoft.com/office/drawing/2014/main" xmlns="" id="{50DABBD2-4E98-BC24-4EFF-934FC8F93B79}"/>
                 </a:ext>
               </a:extLst>
             </p:cNvPr>
@@ -18512,7 +18814,7 @@
             <p:cNvPr id="59" name="Oval 10">
               <a:extLst>
                 <a:ext uri="{FF2B5EF4-FFF2-40B4-BE49-F238E27FC236}">
-                  <a16:creationId xmlns:a16="http://schemas.microsoft.com/office/drawing/2014/main" id="{4AE61079-6614-308D-3A98-F2A771104A70}"/>
+                  <a16:creationId xmlns:a16="http://schemas.microsoft.com/office/drawing/2014/main" xmlns="" id="{4AE61079-6614-308D-3A98-F2A771104A70}"/>
                 </a:ext>
               </a:extLst>
             </p:cNvPr>
@@ -18566,7 +18868,7 @@
             <p:cNvPr id="60" name="Oval 12">
               <a:extLst>
                 <a:ext uri="{FF2B5EF4-FFF2-40B4-BE49-F238E27FC236}">
-                  <a16:creationId xmlns:a16="http://schemas.microsoft.com/office/drawing/2014/main" id="{F94CC628-659B-59A8-2047-29710CB620EE}"/>
+                  <a16:creationId xmlns:a16="http://schemas.microsoft.com/office/drawing/2014/main" xmlns="" id="{F94CC628-659B-59A8-2047-29710CB620EE}"/>
                 </a:ext>
               </a:extLst>
             </p:cNvPr>
@@ -18620,7 +18922,7 @@
             <p:cNvPr id="61" name="Oval 13">
               <a:extLst>
                 <a:ext uri="{FF2B5EF4-FFF2-40B4-BE49-F238E27FC236}">
-                  <a16:creationId xmlns:a16="http://schemas.microsoft.com/office/drawing/2014/main" id="{8B3BF275-A8C4-1D9F-0789-EAC90A71234D}"/>
+                  <a16:creationId xmlns:a16="http://schemas.microsoft.com/office/drawing/2014/main" xmlns="" id="{8B3BF275-A8C4-1D9F-0789-EAC90A71234D}"/>
                 </a:ext>
               </a:extLst>
             </p:cNvPr>
@@ -18674,7 +18976,7 @@
             <p:cNvPr id="62" name="Isosceles Triangle 14">
               <a:extLst>
                 <a:ext uri="{FF2B5EF4-FFF2-40B4-BE49-F238E27FC236}">
-                  <a16:creationId xmlns:a16="http://schemas.microsoft.com/office/drawing/2014/main" id="{62579967-A543-3E35-2276-00443A818A18}"/>
+                  <a16:creationId xmlns:a16="http://schemas.microsoft.com/office/drawing/2014/main" xmlns="" id="{62579967-A543-3E35-2276-00443A818A18}"/>
                 </a:ext>
               </a:extLst>
             </p:cNvPr>
@@ -18728,7 +19030,7 @@
             <p:cNvPr id="63" name="Isosceles Triangle 15">
               <a:extLst>
                 <a:ext uri="{FF2B5EF4-FFF2-40B4-BE49-F238E27FC236}">
-                  <a16:creationId xmlns:a16="http://schemas.microsoft.com/office/drawing/2014/main" id="{CF41BF40-C68C-2BFA-AA36-9DF97953DE5C}"/>
+                  <a16:creationId xmlns:a16="http://schemas.microsoft.com/office/drawing/2014/main" xmlns="" id="{CF41BF40-C68C-2BFA-AA36-9DF97953DE5C}"/>
                 </a:ext>
               </a:extLst>
             </p:cNvPr>
@@ -18782,7 +19084,7 @@
             <p:cNvPr id="64" name="Isosceles Triangle 16">
               <a:extLst>
                 <a:ext uri="{FF2B5EF4-FFF2-40B4-BE49-F238E27FC236}">
-                  <a16:creationId xmlns:a16="http://schemas.microsoft.com/office/drawing/2014/main" id="{7FCDA260-F08F-1790-73F4-B6BCB7008F03}"/>
+                  <a16:creationId xmlns:a16="http://schemas.microsoft.com/office/drawing/2014/main" xmlns="" id="{7FCDA260-F08F-1790-73F4-B6BCB7008F03}"/>
                 </a:ext>
               </a:extLst>
             </p:cNvPr>
@@ -18836,7 +19138,7 @@
             <p:cNvPr id="65" name="Isosceles Triangle 17">
               <a:extLst>
                 <a:ext uri="{FF2B5EF4-FFF2-40B4-BE49-F238E27FC236}">
-                  <a16:creationId xmlns:a16="http://schemas.microsoft.com/office/drawing/2014/main" id="{14391E23-11FC-3F3C-4CE7-89F024B2E572}"/>
+                  <a16:creationId xmlns:a16="http://schemas.microsoft.com/office/drawing/2014/main" xmlns="" id="{14391E23-11FC-3F3C-4CE7-89F024B2E572}"/>
                 </a:ext>
               </a:extLst>
             </p:cNvPr>
@@ -18890,7 +19192,7 @@
             <p:cNvPr id="66" name="Isosceles Triangle 18">
               <a:extLst>
                 <a:ext uri="{FF2B5EF4-FFF2-40B4-BE49-F238E27FC236}">
-                  <a16:creationId xmlns:a16="http://schemas.microsoft.com/office/drawing/2014/main" id="{8687EC5D-8A5A-E107-43D9-E35D32E79211}"/>
+                  <a16:creationId xmlns:a16="http://schemas.microsoft.com/office/drawing/2014/main" xmlns="" id="{8687EC5D-8A5A-E107-43D9-E35D32E79211}"/>
                 </a:ext>
               </a:extLst>
             </p:cNvPr>
@@ -18944,7 +19246,7 @@
             <p:cNvPr id="67" name="Isosceles Triangle 19">
               <a:extLst>
                 <a:ext uri="{FF2B5EF4-FFF2-40B4-BE49-F238E27FC236}">
-                  <a16:creationId xmlns:a16="http://schemas.microsoft.com/office/drawing/2014/main" id="{C16488B7-E303-0945-E655-7FCD98FA5B8F}"/>
+                  <a16:creationId xmlns:a16="http://schemas.microsoft.com/office/drawing/2014/main" xmlns="" id="{C16488B7-E303-0945-E655-7FCD98FA5B8F}"/>
                 </a:ext>
               </a:extLst>
             </p:cNvPr>
@@ -18998,7 +19300,7 @@
             <p:cNvPr id="68" name="Isosceles Triangle 20">
               <a:extLst>
                 <a:ext uri="{FF2B5EF4-FFF2-40B4-BE49-F238E27FC236}">
-                  <a16:creationId xmlns:a16="http://schemas.microsoft.com/office/drawing/2014/main" id="{5E441CB1-0732-3856-B82B-79DE77EDFE44}"/>
+                  <a16:creationId xmlns:a16="http://schemas.microsoft.com/office/drawing/2014/main" xmlns="" id="{5E441CB1-0732-3856-B82B-79DE77EDFE44}"/>
                 </a:ext>
               </a:extLst>
             </p:cNvPr>
@@ -19054,7 +19356,7 @@
                 <p:cNvPr id="71" name="TextBox 23">
                   <a:extLst>
                     <a:ext uri="{FF2B5EF4-FFF2-40B4-BE49-F238E27FC236}">
-                      <a16:creationId xmlns:a16="http://schemas.microsoft.com/office/drawing/2014/main" id="{11DBC759-BA8B-4950-F3F6-5AA81D9C057C}"/>
+                      <a16:creationId xmlns:a16="http://schemas.microsoft.com/office/drawing/2014/main" xmlns="" id="{11DBC759-BA8B-4950-F3F6-5AA81D9C057C}"/>
                     </a:ext>
                   </a:extLst>
                 </p:cNvPr>
@@ -19161,7 +19463,7 @@
             <p:cNvPr id="74" name="Rectangle 35">
               <a:extLst>
                 <a:ext uri="{FF2B5EF4-FFF2-40B4-BE49-F238E27FC236}">
-                  <a16:creationId xmlns:a16="http://schemas.microsoft.com/office/drawing/2014/main" id="{2EF1D3D0-9C67-6840-052F-D50312ADF1F0}"/>
+                  <a16:creationId xmlns:a16="http://schemas.microsoft.com/office/drawing/2014/main" xmlns="" id="{2EF1D3D0-9C67-6840-052F-D50312ADF1F0}"/>
                 </a:ext>
               </a:extLst>
             </p:cNvPr>
@@ -19213,7 +19515,7 @@
             <p:cNvPr id="75" name="Straight Arrow Connector 36">
               <a:extLst>
                 <a:ext uri="{FF2B5EF4-FFF2-40B4-BE49-F238E27FC236}">
-                  <a16:creationId xmlns:a16="http://schemas.microsoft.com/office/drawing/2014/main" id="{3C73BF14-3205-D356-E8E6-D163D65C572B}"/>
+                  <a16:creationId xmlns:a16="http://schemas.microsoft.com/office/drawing/2014/main" xmlns="" id="{3C73BF14-3205-D356-E8E6-D163D65C572B}"/>
                 </a:ext>
               </a:extLst>
             </p:cNvPr>
@@ -19255,7 +19557,7 @@
             <p:cNvPr id="76" name="Straight Arrow Connector 43">
               <a:extLst>
                 <a:ext uri="{FF2B5EF4-FFF2-40B4-BE49-F238E27FC236}">
-                  <a16:creationId xmlns:a16="http://schemas.microsoft.com/office/drawing/2014/main" id="{414DC7F4-B0AF-DF72-F5AA-D2C3946FBD18}"/>
+                  <a16:creationId xmlns:a16="http://schemas.microsoft.com/office/drawing/2014/main" xmlns="" id="{414DC7F4-B0AF-DF72-F5AA-D2C3946FBD18}"/>
                 </a:ext>
               </a:extLst>
             </p:cNvPr>
@@ -19299,7 +19601,7 @@
                 <p:cNvPr id="77" name="TextBox 44">
                   <a:extLst>
                     <a:ext uri="{FF2B5EF4-FFF2-40B4-BE49-F238E27FC236}">
-                      <a16:creationId xmlns:a16="http://schemas.microsoft.com/office/drawing/2014/main" id="{8DE4151A-CC72-BE59-AA9C-CE7E0FF28888}"/>
+                      <a16:creationId xmlns:a16="http://schemas.microsoft.com/office/drawing/2014/main" xmlns="" id="{8DE4151A-CC72-BE59-AA9C-CE7E0FF28888}"/>
                     </a:ext>
                   </a:extLst>
                 </p:cNvPr>
@@ -19406,7 +19708,7 @@
             <p:cNvPr id="78" name="Straight Connector 46">
               <a:extLst>
                 <a:ext uri="{FF2B5EF4-FFF2-40B4-BE49-F238E27FC236}">
-                  <a16:creationId xmlns:a16="http://schemas.microsoft.com/office/drawing/2014/main" id="{276150E5-C691-28FF-A4A1-9A4BE695FC14}"/>
+                  <a16:creationId xmlns:a16="http://schemas.microsoft.com/office/drawing/2014/main" xmlns="" id="{276150E5-C691-28FF-A4A1-9A4BE695FC14}"/>
                 </a:ext>
               </a:extLst>
             </p:cNvPr>
@@ -19447,7 +19749,7 @@
             <p:cNvPr id="79" name="TextBox 47">
               <a:extLst>
                 <a:ext uri="{FF2B5EF4-FFF2-40B4-BE49-F238E27FC236}">
-                  <a16:creationId xmlns:a16="http://schemas.microsoft.com/office/drawing/2014/main" id="{9C733B1E-D319-F58A-B08A-62B045ECFB02}"/>
+                  <a16:creationId xmlns:a16="http://schemas.microsoft.com/office/drawing/2014/main" xmlns="" id="{9C733B1E-D319-F58A-B08A-62B045ECFB02}"/>
                 </a:ext>
               </a:extLst>
             </p:cNvPr>
@@ -19482,7 +19784,7 @@
             <p:cNvPr id="80" name="TextBox 48">
               <a:extLst>
                 <a:ext uri="{FF2B5EF4-FFF2-40B4-BE49-F238E27FC236}">
-                  <a16:creationId xmlns:a16="http://schemas.microsoft.com/office/drawing/2014/main" id="{8EB74DC8-111C-00B9-F7DA-CC6ED424F3E4}"/>
+                  <a16:creationId xmlns:a16="http://schemas.microsoft.com/office/drawing/2014/main" xmlns="" id="{8EB74DC8-111C-00B9-F7DA-CC6ED424F3E4}"/>
                 </a:ext>
               </a:extLst>
             </p:cNvPr>
@@ -19517,7 +19819,7 @@
             <p:cNvPr id="81" name="TextBox 49">
               <a:extLst>
                 <a:ext uri="{FF2B5EF4-FFF2-40B4-BE49-F238E27FC236}">
-                  <a16:creationId xmlns:a16="http://schemas.microsoft.com/office/drawing/2014/main" id="{099AAD58-42B0-B96F-25A2-8FD3F16B5572}"/>
+                  <a16:creationId xmlns:a16="http://schemas.microsoft.com/office/drawing/2014/main" xmlns="" id="{099AAD58-42B0-B96F-25A2-8FD3F16B5572}"/>
                 </a:ext>
               </a:extLst>
             </p:cNvPr>
@@ -19552,7 +19854,7 @@
             <p:cNvPr id="82" name="TextBox 50">
               <a:extLst>
                 <a:ext uri="{FF2B5EF4-FFF2-40B4-BE49-F238E27FC236}">
-                  <a16:creationId xmlns:a16="http://schemas.microsoft.com/office/drawing/2014/main" id="{D7631B42-9D90-F8C9-7AA9-8970355DF2A2}"/>
+                  <a16:creationId xmlns:a16="http://schemas.microsoft.com/office/drawing/2014/main" xmlns="" id="{D7631B42-9D90-F8C9-7AA9-8970355DF2A2}"/>
                 </a:ext>
               </a:extLst>
             </p:cNvPr>
@@ -19587,7 +19889,7 @@
             <p:cNvPr id="83" name="TextBox 51">
               <a:extLst>
                 <a:ext uri="{FF2B5EF4-FFF2-40B4-BE49-F238E27FC236}">
-                  <a16:creationId xmlns:a16="http://schemas.microsoft.com/office/drawing/2014/main" id="{CA8AEF4F-B8D2-E5AD-1523-7FA3D45A47C6}"/>
+                  <a16:creationId xmlns:a16="http://schemas.microsoft.com/office/drawing/2014/main" xmlns="" id="{CA8AEF4F-B8D2-E5AD-1523-7FA3D45A47C6}"/>
                 </a:ext>
               </a:extLst>
             </p:cNvPr>
@@ -19622,7 +19924,7 @@
             <p:cNvPr id="84" name="TextBox 52">
               <a:extLst>
                 <a:ext uri="{FF2B5EF4-FFF2-40B4-BE49-F238E27FC236}">
-                  <a16:creationId xmlns:a16="http://schemas.microsoft.com/office/drawing/2014/main" id="{E4BCBBAD-3447-638D-8F4B-331EEA858B64}"/>
+                  <a16:creationId xmlns:a16="http://schemas.microsoft.com/office/drawing/2014/main" xmlns="" id="{E4BCBBAD-3447-638D-8F4B-331EEA858B64}"/>
                 </a:ext>
               </a:extLst>
             </p:cNvPr>
@@ -19657,7 +19959,7 @@
             <p:cNvPr id="85" name="TextBox 53">
               <a:extLst>
                 <a:ext uri="{FF2B5EF4-FFF2-40B4-BE49-F238E27FC236}">
-                  <a16:creationId xmlns:a16="http://schemas.microsoft.com/office/drawing/2014/main" id="{9AAFDDD9-423A-1CA6-A60F-8838E3A2168F}"/>
+                  <a16:creationId xmlns:a16="http://schemas.microsoft.com/office/drawing/2014/main" xmlns="" id="{9AAFDDD9-423A-1CA6-A60F-8838E3A2168F}"/>
                 </a:ext>
               </a:extLst>
             </p:cNvPr>
@@ -19692,7 +19994,7 @@
             <p:cNvPr id="86" name="TextBox 54">
               <a:extLst>
                 <a:ext uri="{FF2B5EF4-FFF2-40B4-BE49-F238E27FC236}">
-                  <a16:creationId xmlns:a16="http://schemas.microsoft.com/office/drawing/2014/main" id="{D4586FA2-50AD-AF82-E018-77A4F89364C7}"/>
+                  <a16:creationId xmlns:a16="http://schemas.microsoft.com/office/drawing/2014/main" xmlns="" id="{D4586FA2-50AD-AF82-E018-77A4F89364C7}"/>
                 </a:ext>
               </a:extLst>
             </p:cNvPr>
@@ -19727,7 +20029,7 @@
             <p:cNvPr id="87" name="TextBox 55">
               <a:extLst>
                 <a:ext uri="{FF2B5EF4-FFF2-40B4-BE49-F238E27FC236}">
-                  <a16:creationId xmlns:a16="http://schemas.microsoft.com/office/drawing/2014/main" id="{1A28826F-CE91-EC81-B018-3A20FE542CA0}"/>
+                  <a16:creationId xmlns:a16="http://schemas.microsoft.com/office/drawing/2014/main" xmlns="" id="{1A28826F-CE91-EC81-B018-3A20FE542CA0}"/>
                 </a:ext>
               </a:extLst>
             </p:cNvPr>
@@ -19762,7 +20064,7 @@
             <p:cNvPr id="88" name="Rectangle 45">
               <a:extLst>
                 <a:ext uri="{FF2B5EF4-FFF2-40B4-BE49-F238E27FC236}">
-                  <a16:creationId xmlns:a16="http://schemas.microsoft.com/office/drawing/2014/main" id="{23254CDF-4E3F-B861-1A9D-1B9BBFBE9B8E}"/>
+                  <a16:creationId xmlns:a16="http://schemas.microsoft.com/office/drawing/2014/main" xmlns="" id="{23254CDF-4E3F-B861-1A9D-1B9BBFBE9B8E}"/>
                 </a:ext>
               </a:extLst>
             </p:cNvPr>
@@ -19814,7 +20116,7 @@
             <p:cNvPr id="89" name="Rectangle 57">
               <a:extLst>
                 <a:ext uri="{FF2B5EF4-FFF2-40B4-BE49-F238E27FC236}">
-                  <a16:creationId xmlns:a16="http://schemas.microsoft.com/office/drawing/2014/main" id="{4536833C-6783-11AA-DBA8-7FF921EFF45A}"/>
+                  <a16:creationId xmlns:a16="http://schemas.microsoft.com/office/drawing/2014/main" xmlns="" id="{4536833C-6783-11AA-DBA8-7FF921EFF45A}"/>
                 </a:ext>
               </a:extLst>
             </p:cNvPr>
@@ -19866,7 +20168,7 @@
             <p:cNvPr id="90" name="Rectangle 58">
               <a:extLst>
                 <a:ext uri="{FF2B5EF4-FFF2-40B4-BE49-F238E27FC236}">
-                  <a16:creationId xmlns:a16="http://schemas.microsoft.com/office/drawing/2014/main" id="{B7643E05-5FBD-8578-2C68-60517383B5AC}"/>
+                  <a16:creationId xmlns:a16="http://schemas.microsoft.com/office/drawing/2014/main" xmlns="" id="{B7643E05-5FBD-8578-2C68-60517383B5AC}"/>
                 </a:ext>
               </a:extLst>
             </p:cNvPr>
@@ -19918,7 +20220,7 @@
             <p:cNvPr id="91" name="Rectangle 59">
               <a:extLst>
                 <a:ext uri="{FF2B5EF4-FFF2-40B4-BE49-F238E27FC236}">
-                  <a16:creationId xmlns:a16="http://schemas.microsoft.com/office/drawing/2014/main" id="{0DCD453D-CB4C-D4A7-4176-29BB7B44F03D}"/>
+                  <a16:creationId xmlns:a16="http://schemas.microsoft.com/office/drawing/2014/main" xmlns="" id="{0DCD453D-CB4C-D4A7-4176-29BB7B44F03D}"/>
                 </a:ext>
               </a:extLst>
             </p:cNvPr>
@@ -19970,7 +20272,7 @@
             <p:cNvPr id="92" name="Rectangle 60">
               <a:extLst>
                 <a:ext uri="{FF2B5EF4-FFF2-40B4-BE49-F238E27FC236}">
-                  <a16:creationId xmlns:a16="http://schemas.microsoft.com/office/drawing/2014/main" id="{2CFF6AA0-A741-D9AC-7EB6-D1C06A007E6E}"/>
+                  <a16:creationId xmlns:a16="http://schemas.microsoft.com/office/drawing/2014/main" xmlns="" id="{2CFF6AA0-A741-D9AC-7EB6-D1C06A007E6E}"/>
                 </a:ext>
               </a:extLst>
             </p:cNvPr>
@@ -20022,7 +20324,7 @@
             <p:cNvPr id="93" name="Rectangle 61">
               <a:extLst>
                 <a:ext uri="{FF2B5EF4-FFF2-40B4-BE49-F238E27FC236}">
-                  <a16:creationId xmlns:a16="http://schemas.microsoft.com/office/drawing/2014/main" id="{E63B669A-0B88-3351-DE15-FCE664BB2896}"/>
+                  <a16:creationId xmlns:a16="http://schemas.microsoft.com/office/drawing/2014/main" xmlns="" id="{E63B669A-0B88-3351-DE15-FCE664BB2896}"/>
                 </a:ext>
               </a:extLst>
             </p:cNvPr>
@@ -20074,7 +20376,7 @@
             <p:cNvPr id="94" name="Rectangle 62">
               <a:extLst>
                 <a:ext uri="{FF2B5EF4-FFF2-40B4-BE49-F238E27FC236}">
-                  <a16:creationId xmlns:a16="http://schemas.microsoft.com/office/drawing/2014/main" id="{564A3FC0-A340-C039-CDCE-EAE26E443D50}"/>
+                  <a16:creationId xmlns:a16="http://schemas.microsoft.com/office/drawing/2014/main" xmlns="" id="{564A3FC0-A340-C039-CDCE-EAE26E443D50}"/>
                 </a:ext>
               </a:extLst>
             </p:cNvPr>
@@ -20126,7 +20428,7 @@
             <p:cNvPr id="95" name="Rectangle 63">
               <a:extLst>
                 <a:ext uri="{FF2B5EF4-FFF2-40B4-BE49-F238E27FC236}">
-                  <a16:creationId xmlns:a16="http://schemas.microsoft.com/office/drawing/2014/main" id="{B6424DF6-BCDE-B38A-840B-94878A526B23}"/>
+                  <a16:creationId xmlns:a16="http://schemas.microsoft.com/office/drawing/2014/main" xmlns="" id="{B6424DF6-BCDE-B38A-840B-94878A526B23}"/>
                 </a:ext>
               </a:extLst>
             </p:cNvPr>
@@ -20178,7 +20480,7 @@
             <p:cNvPr id="96" name="Rectangle 64">
               <a:extLst>
                 <a:ext uri="{FF2B5EF4-FFF2-40B4-BE49-F238E27FC236}">
-                  <a16:creationId xmlns:a16="http://schemas.microsoft.com/office/drawing/2014/main" id="{6740E770-FD9C-13C7-4ED7-FB7F549D75FA}"/>
+                  <a16:creationId xmlns:a16="http://schemas.microsoft.com/office/drawing/2014/main" xmlns="" id="{6740E770-FD9C-13C7-4ED7-FB7F549D75FA}"/>
                 </a:ext>
               </a:extLst>
             </p:cNvPr>
@@ -20230,7 +20532,7 @@
             <p:cNvPr id="97" name="Rectangle 65">
               <a:extLst>
                 <a:ext uri="{FF2B5EF4-FFF2-40B4-BE49-F238E27FC236}">
-                  <a16:creationId xmlns:a16="http://schemas.microsoft.com/office/drawing/2014/main" id="{71FB09BB-5380-5382-3E05-F4A7D67BD650}"/>
+                  <a16:creationId xmlns:a16="http://schemas.microsoft.com/office/drawing/2014/main" xmlns="" id="{71FB09BB-5380-5382-3E05-F4A7D67BD650}"/>
                 </a:ext>
               </a:extLst>
             </p:cNvPr>
@@ -20282,7 +20584,7 @@
             <p:cNvPr id="98" name="Rectangle 66">
               <a:extLst>
                 <a:ext uri="{FF2B5EF4-FFF2-40B4-BE49-F238E27FC236}">
-                  <a16:creationId xmlns:a16="http://schemas.microsoft.com/office/drawing/2014/main" id="{560EBFDA-1461-99F4-7FF4-B421F799A683}"/>
+                  <a16:creationId xmlns:a16="http://schemas.microsoft.com/office/drawing/2014/main" xmlns="" id="{560EBFDA-1461-99F4-7FF4-B421F799A683}"/>
                 </a:ext>
               </a:extLst>
             </p:cNvPr>
@@ -20334,7 +20636,7 @@
             <p:cNvPr id="99" name="Rectangle 67">
               <a:extLst>
                 <a:ext uri="{FF2B5EF4-FFF2-40B4-BE49-F238E27FC236}">
-                  <a16:creationId xmlns:a16="http://schemas.microsoft.com/office/drawing/2014/main" id="{328A587F-F15E-35CE-18A9-6E4677DD5407}"/>
+                  <a16:creationId xmlns:a16="http://schemas.microsoft.com/office/drawing/2014/main" xmlns="" id="{328A587F-F15E-35CE-18A9-6E4677DD5407}"/>
                 </a:ext>
               </a:extLst>
             </p:cNvPr>
@@ -20386,7 +20688,7 @@
             <p:cNvPr id="100" name="Rectangle 68">
               <a:extLst>
                 <a:ext uri="{FF2B5EF4-FFF2-40B4-BE49-F238E27FC236}">
-                  <a16:creationId xmlns:a16="http://schemas.microsoft.com/office/drawing/2014/main" id="{717AB771-049C-E1F4-E1A2-AB1A30FA9FA6}"/>
+                  <a16:creationId xmlns:a16="http://schemas.microsoft.com/office/drawing/2014/main" xmlns="" id="{717AB771-049C-E1F4-E1A2-AB1A30FA9FA6}"/>
                 </a:ext>
               </a:extLst>
             </p:cNvPr>
@@ -20438,7 +20740,7 @@
             <p:cNvPr id="101" name="Rectangle 69">
               <a:extLst>
                 <a:ext uri="{FF2B5EF4-FFF2-40B4-BE49-F238E27FC236}">
-                  <a16:creationId xmlns:a16="http://schemas.microsoft.com/office/drawing/2014/main" id="{AE9F8F3D-8379-85E1-D832-1EFCC08EC161}"/>
+                  <a16:creationId xmlns:a16="http://schemas.microsoft.com/office/drawing/2014/main" xmlns="" id="{AE9F8F3D-8379-85E1-D832-1EFCC08EC161}"/>
                 </a:ext>
               </a:extLst>
             </p:cNvPr>
@@ -20490,7 +20792,7 @@
             <p:cNvPr id="102" name="Rectangle 70">
               <a:extLst>
                 <a:ext uri="{FF2B5EF4-FFF2-40B4-BE49-F238E27FC236}">
-                  <a16:creationId xmlns:a16="http://schemas.microsoft.com/office/drawing/2014/main" id="{0296EAEF-21CC-BA7C-9A9C-8FAB137D4C8F}"/>
+                  <a16:creationId xmlns:a16="http://schemas.microsoft.com/office/drawing/2014/main" xmlns="" id="{0296EAEF-21CC-BA7C-9A9C-8FAB137D4C8F}"/>
                 </a:ext>
               </a:extLst>
             </p:cNvPr>
@@ -20542,7 +20844,7 @@
             <p:cNvPr id="103" name="Isosceles Triangle 73">
               <a:extLst>
                 <a:ext uri="{FF2B5EF4-FFF2-40B4-BE49-F238E27FC236}">
-                  <a16:creationId xmlns:a16="http://schemas.microsoft.com/office/drawing/2014/main" id="{B51D8FDA-A2A2-67D2-6665-DC4752058981}"/>
+                  <a16:creationId xmlns:a16="http://schemas.microsoft.com/office/drawing/2014/main" xmlns="" id="{B51D8FDA-A2A2-67D2-6665-DC4752058981}"/>
                 </a:ext>
               </a:extLst>
             </p:cNvPr>
@@ -20596,7 +20898,7 @@
             <p:cNvPr id="104" name="Isosceles Triangle 74">
               <a:extLst>
                 <a:ext uri="{FF2B5EF4-FFF2-40B4-BE49-F238E27FC236}">
-                  <a16:creationId xmlns:a16="http://schemas.microsoft.com/office/drawing/2014/main" id="{874D7E6E-A039-DF47-0A40-2D860D0D6A1F}"/>
+                  <a16:creationId xmlns:a16="http://schemas.microsoft.com/office/drawing/2014/main" xmlns="" id="{874D7E6E-A039-DF47-0A40-2D860D0D6A1F}"/>
                 </a:ext>
               </a:extLst>
             </p:cNvPr>
@@ -20650,7 +20952,7 @@
             <p:cNvPr id="105" name="Isosceles Triangle 75">
               <a:extLst>
                 <a:ext uri="{FF2B5EF4-FFF2-40B4-BE49-F238E27FC236}">
-                  <a16:creationId xmlns:a16="http://schemas.microsoft.com/office/drawing/2014/main" id="{AB3161B6-C712-D209-F00F-C0470B547387}"/>
+                  <a16:creationId xmlns:a16="http://schemas.microsoft.com/office/drawing/2014/main" xmlns="" id="{AB3161B6-C712-D209-F00F-C0470B547387}"/>
                 </a:ext>
               </a:extLst>
             </p:cNvPr>
@@ -20704,7 +21006,7 @@
             <p:cNvPr id="106" name="Isosceles Triangle 76">
               <a:extLst>
                 <a:ext uri="{FF2B5EF4-FFF2-40B4-BE49-F238E27FC236}">
-                  <a16:creationId xmlns:a16="http://schemas.microsoft.com/office/drawing/2014/main" id="{F2562716-3534-F5E6-59B8-971FFC5F5540}"/>
+                  <a16:creationId xmlns:a16="http://schemas.microsoft.com/office/drawing/2014/main" xmlns="" id="{F2562716-3534-F5E6-59B8-971FFC5F5540}"/>
                 </a:ext>
               </a:extLst>
             </p:cNvPr>
@@ -20758,7 +21060,7 @@
             <p:cNvPr id="107" name="Isosceles Triangle 77">
               <a:extLst>
                 <a:ext uri="{FF2B5EF4-FFF2-40B4-BE49-F238E27FC236}">
-                  <a16:creationId xmlns:a16="http://schemas.microsoft.com/office/drawing/2014/main" id="{68D5851B-0F91-BF8E-4DC4-0B12A785F289}"/>
+                  <a16:creationId xmlns:a16="http://schemas.microsoft.com/office/drawing/2014/main" xmlns="" id="{68D5851B-0F91-BF8E-4DC4-0B12A785F289}"/>
                 </a:ext>
               </a:extLst>
             </p:cNvPr>
@@ -20812,7 +21114,7 @@
             <p:cNvPr id="108" name="Oval 11">
               <a:extLst>
                 <a:ext uri="{FF2B5EF4-FFF2-40B4-BE49-F238E27FC236}">
-                  <a16:creationId xmlns:a16="http://schemas.microsoft.com/office/drawing/2014/main" id="{C6D2D7F0-3DA4-AA9F-D600-D3EA1B16F4EA}"/>
+                  <a16:creationId xmlns:a16="http://schemas.microsoft.com/office/drawing/2014/main" xmlns="" id="{C6D2D7F0-3DA4-AA9F-D600-D3EA1B16F4EA}"/>
                 </a:ext>
               </a:extLst>
             </p:cNvPr>
@@ -20868,7 +21170,7 @@
                 <p:cNvPr id="109" name="Rectangle 71">
                   <a:extLst>
                     <a:ext uri="{FF2B5EF4-FFF2-40B4-BE49-F238E27FC236}">
-                      <a16:creationId xmlns:a16="http://schemas.microsoft.com/office/drawing/2014/main" id="{8E71EFEB-4005-724E-9EFA-199E5FBD6BE5}"/>
+                      <a16:creationId xmlns:a16="http://schemas.microsoft.com/office/drawing/2014/main" xmlns="" id="{8E71EFEB-4005-724E-9EFA-199E5FBD6BE5}"/>
                     </a:ext>
                   </a:extLst>
                 </p:cNvPr>
@@ -20972,7 +21274,7 @@
             <p:cNvPr id="110" name="Freeform 72">
               <a:extLst>
                 <a:ext uri="{FF2B5EF4-FFF2-40B4-BE49-F238E27FC236}">
-                  <a16:creationId xmlns:a16="http://schemas.microsoft.com/office/drawing/2014/main" id="{1D9CF7FE-A9E8-5BC7-A557-D41813198BCC}"/>
+                  <a16:creationId xmlns:a16="http://schemas.microsoft.com/office/drawing/2014/main" xmlns="" id="{1D9CF7FE-A9E8-5BC7-A557-D41813198BCC}"/>
                 </a:ext>
               </a:extLst>
             </p:cNvPr>
@@ -21060,7 +21362,7 @@
 </p:sld>
 </file>
 
-<file path=ppt/slides/slide24.xml><?xml version="1.0" encoding="utf-8"?>
+<file path=ppt/slides/slide27.xml><?xml version="1.0" encoding="utf-8"?>
 <p:sld xmlns:a="http://schemas.openxmlformats.org/drawingml/2006/main" xmlns:r="http://schemas.openxmlformats.org/officeDocument/2006/relationships" xmlns:p="http://schemas.openxmlformats.org/presentationml/2006/main">
   <p:cSld>
     <p:spTree>
@@ -21084,7 +21386,7 @@
               <p:cNvPr id="2" name="Título 1">
                 <a:extLst>
                   <a:ext uri="{FF2B5EF4-FFF2-40B4-BE49-F238E27FC236}">
-                    <a16:creationId xmlns:a16="http://schemas.microsoft.com/office/drawing/2014/main" id="{E6A71149-3D12-4F5B-CFAD-CB5E31E5AA23}"/>
+                    <a16:creationId xmlns:a16="http://schemas.microsoft.com/office/drawing/2014/main" xmlns="" id="{E6A71149-3D12-4F5B-CFAD-CB5E31E5AA23}"/>
                   </a:ext>
                 </a:extLst>
               </p:cNvPr>
@@ -21184,7 +21486,7 @@
               <p:cNvPr id="3" name="Espaço Reservado para Conteúdo 2">
                 <a:extLst>
                   <a:ext uri="{FF2B5EF4-FFF2-40B4-BE49-F238E27FC236}">
-                    <a16:creationId xmlns:a16="http://schemas.microsoft.com/office/drawing/2014/main" id="{1406D1FE-9F3C-0C92-B3EF-6F24E0D66561}"/>
+                    <a16:creationId xmlns:a16="http://schemas.microsoft.com/office/drawing/2014/main" xmlns="" id="{1406D1FE-9F3C-0C92-B3EF-6F24E0D66561}"/>
                   </a:ext>
                 </a:extLst>
               </p:cNvPr>
@@ -21503,7 +21805,7 @@
           <p:cNvPr id="4" name="Group 3">
             <a:extLst>
               <a:ext uri="{FF2B5EF4-FFF2-40B4-BE49-F238E27FC236}">
-                <a16:creationId xmlns:a16="http://schemas.microsoft.com/office/drawing/2014/main" id="{060563BF-B64C-5EEB-D453-CEEC94869E4C}"/>
+                <a16:creationId xmlns:a16="http://schemas.microsoft.com/office/drawing/2014/main" xmlns="" id="{060563BF-B64C-5EEB-D453-CEEC94869E4C}"/>
               </a:ext>
             </a:extLst>
           </p:cNvPr>
@@ -21523,7 +21825,7 @@
             <p:cNvPr id="5" name="Oval 5">
               <a:extLst>
                 <a:ext uri="{FF2B5EF4-FFF2-40B4-BE49-F238E27FC236}">
-                  <a16:creationId xmlns:a16="http://schemas.microsoft.com/office/drawing/2014/main" id="{640E0144-5597-99E8-C833-30E06AFE7678}"/>
+                  <a16:creationId xmlns:a16="http://schemas.microsoft.com/office/drawing/2014/main" xmlns="" id="{640E0144-5597-99E8-C833-30E06AFE7678}"/>
                 </a:ext>
               </a:extLst>
             </p:cNvPr>
@@ -21577,7 +21879,7 @@
             <p:cNvPr id="6" name="Isosceles Triangle 6">
               <a:extLst>
                 <a:ext uri="{FF2B5EF4-FFF2-40B4-BE49-F238E27FC236}">
-                  <a16:creationId xmlns:a16="http://schemas.microsoft.com/office/drawing/2014/main" id="{D961BC48-0820-8C22-18B6-F7AAD9FEA825}"/>
+                  <a16:creationId xmlns:a16="http://schemas.microsoft.com/office/drawing/2014/main" xmlns="" id="{D961BC48-0820-8C22-18B6-F7AAD9FEA825}"/>
                 </a:ext>
               </a:extLst>
             </p:cNvPr>
@@ -21631,7 +21933,7 @@
             <p:cNvPr id="7" name="Oval 8">
               <a:extLst>
                 <a:ext uri="{FF2B5EF4-FFF2-40B4-BE49-F238E27FC236}">
-                  <a16:creationId xmlns:a16="http://schemas.microsoft.com/office/drawing/2014/main" id="{54CF6FD7-CC71-4C99-CB24-65088165FD26}"/>
+                  <a16:creationId xmlns:a16="http://schemas.microsoft.com/office/drawing/2014/main" xmlns="" id="{54CF6FD7-CC71-4C99-CB24-65088165FD26}"/>
                 </a:ext>
               </a:extLst>
             </p:cNvPr>
@@ -21685,7 +21987,7 @@
             <p:cNvPr id="8" name="Oval 9">
               <a:extLst>
                 <a:ext uri="{FF2B5EF4-FFF2-40B4-BE49-F238E27FC236}">
-                  <a16:creationId xmlns:a16="http://schemas.microsoft.com/office/drawing/2014/main" id="{C7DD2C36-0991-6C5D-F0A6-F1EE8F16D1C1}"/>
+                  <a16:creationId xmlns:a16="http://schemas.microsoft.com/office/drawing/2014/main" xmlns="" id="{C7DD2C36-0991-6C5D-F0A6-F1EE8F16D1C1}"/>
                 </a:ext>
               </a:extLst>
             </p:cNvPr>
@@ -21739,7 +22041,7 @@
             <p:cNvPr id="9" name="Oval 10">
               <a:extLst>
                 <a:ext uri="{FF2B5EF4-FFF2-40B4-BE49-F238E27FC236}">
-                  <a16:creationId xmlns:a16="http://schemas.microsoft.com/office/drawing/2014/main" id="{7F4B6B60-DA3D-E820-D471-FDA4C2027EBC}"/>
+                  <a16:creationId xmlns:a16="http://schemas.microsoft.com/office/drawing/2014/main" xmlns="" id="{7F4B6B60-DA3D-E820-D471-FDA4C2027EBC}"/>
                 </a:ext>
               </a:extLst>
             </p:cNvPr>
@@ -21793,7 +22095,7 @@
             <p:cNvPr id="10" name="Oval 12">
               <a:extLst>
                 <a:ext uri="{FF2B5EF4-FFF2-40B4-BE49-F238E27FC236}">
-                  <a16:creationId xmlns:a16="http://schemas.microsoft.com/office/drawing/2014/main" id="{223236FA-907E-EBA0-CB3E-028F0D9E2706}"/>
+                  <a16:creationId xmlns:a16="http://schemas.microsoft.com/office/drawing/2014/main" xmlns="" id="{223236FA-907E-EBA0-CB3E-028F0D9E2706}"/>
                 </a:ext>
               </a:extLst>
             </p:cNvPr>
@@ -21847,7 +22149,7 @@
             <p:cNvPr id="11" name="Oval 13">
               <a:extLst>
                 <a:ext uri="{FF2B5EF4-FFF2-40B4-BE49-F238E27FC236}">
-                  <a16:creationId xmlns:a16="http://schemas.microsoft.com/office/drawing/2014/main" id="{7B119CDE-38FF-635E-79E3-F03A68592EA6}"/>
+                  <a16:creationId xmlns:a16="http://schemas.microsoft.com/office/drawing/2014/main" xmlns="" id="{7B119CDE-38FF-635E-79E3-F03A68592EA6}"/>
                 </a:ext>
               </a:extLst>
             </p:cNvPr>
@@ -21901,7 +22203,7 @@
             <p:cNvPr id="12" name="Isosceles Triangle 14">
               <a:extLst>
                 <a:ext uri="{FF2B5EF4-FFF2-40B4-BE49-F238E27FC236}">
-                  <a16:creationId xmlns:a16="http://schemas.microsoft.com/office/drawing/2014/main" id="{157D094F-6F7C-3800-FAF7-4476B250BC50}"/>
+                  <a16:creationId xmlns:a16="http://schemas.microsoft.com/office/drawing/2014/main" xmlns="" id="{157D094F-6F7C-3800-FAF7-4476B250BC50}"/>
                 </a:ext>
               </a:extLst>
             </p:cNvPr>
@@ -21955,7 +22257,7 @@
             <p:cNvPr id="13" name="Isosceles Triangle 15">
               <a:extLst>
                 <a:ext uri="{FF2B5EF4-FFF2-40B4-BE49-F238E27FC236}">
-                  <a16:creationId xmlns:a16="http://schemas.microsoft.com/office/drawing/2014/main" id="{E8AAEE5F-0CF0-B811-24D0-B7835F68CE4E}"/>
+                  <a16:creationId xmlns:a16="http://schemas.microsoft.com/office/drawing/2014/main" xmlns="" id="{E8AAEE5F-0CF0-B811-24D0-B7835F68CE4E}"/>
                 </a:ext>
               </a:extLst>
             </p:cNvPr>
@@ -22009,7 +22311,7 @@
             <p:cNvPr id="14" name="Isosceles Triangle 16">
               <a:extLst>
                 <a:ext uri="{FF2B5EF4-FFF2-40B4-BE49-F238E27FC236}">
-                  <a16:creationId xmlns:a16="http://schemas.microsoft.com/office/drawing/2014/main" id="{E8819065-C933-D4A6-8B55-4E6598C58FDD}"/>
+                  <a16:creationId xmlns:a16="http://schemas.microsoft.com/office/drawing/2014/main" xmlns="" id="{E8819065-C933-D4A6-8B55-4E6598C58FDD}"/>
                 </a:ext>
               </a:extLst>
             </p:cNvPr>
@@ -22063,7 +22365,7 @@
             <p:cNvPr id="15" name="Isosceles Triangle 17">
               <a:extLst>
                 <a:ext uri="{FF2B5EF4-FFF2-40B4-BE49-F238E27FC236}">
-                  <a16:creationId xmlns:a16="http://schemas.microsoft.com/office/drawing/2014/main" id="{7FBD92D1-C8CF-BF78-4543-562964B60702}"/>
+                  <a16:creationId xmlns:a16="http://schemas.microsoft.com/office/drawing/2014/main" xmlns="" id="{7FBD92D1-C8CF-BF78-4543-562964B60702}"/>
                 </a:ext>
               </a:extLst>
             </p:cNvPr>
@@ -22117,7 +22419,7 @@
             <p:cNvPr id="16" name="Isosceles Triangle 18">
               <a:extLst>
                 <a:ext uri="{FF2B5EF4-FFF2-40B4-BE49-F238E27FC236}">
-                  <a16:creationId xmlns:a16="http://schemas.microsoft.com/office/drawing/2014/main" id="{44EBC8DE-4048-5DF0-5ADB-96BEF8E86D32}"/>
+                  <a16:creationId xmlns:a16="http://schemas.microsoft.com/office/drawing/2014/main" xmlns="" id="{44EBC8DE-4048-5DF0-5ADB-96BEF8E86D32}"/>
                 </a:ext>
               </a:extLst>
             </p:cNvPr>
@@ -22171,7 +22473,7 @@
             <p:cNvPr id="17" name="Isosceles Triangle 19">
               <a:extLst>
                 <a:ext uri="{FF2B5EF4-FFF2-40B4-BE49-F238E27FC236}">
-                  <a16:creationId xmlns:a16="http://schemas.microsoft.com/office/drawing/2014/main" id="{7E80B96D-A671-AD05-5087-000B87489FB7}"/>
+                  <a16:creationId xmlns:a16="http://schemas.microsoft.com/office/drawing/2014/main" xmlns="" id="{7E80B96D-A671-AD05-5087-000B87489FB7}"/>
                 </a:ext>
               </a:extLst>
             </p:cNvPr>
@@ -22225,7 +22527,7 @@
             <p:cNvPr id="18" name="Isosceles Triangle 20">
               <a:extLst>
                 <a:ext uri="{FF2B5EF4-FFF2-40B4-BE49-F238E27FC236}">
-                  <a16:creationId xmlns:a16="http://schemas.microsoft.com/office/drawing/2014/main" id="{FE4FB03D-3CA5-8524-7C04-396207CED08F}"/>
+                  <a16:creationId xmlns:a16="http://schemas.microsoft.com/office/drawing/2014/main" xmlns="" id="{FE4FB03D-3CA5-8524-7C04-396207CED08F}"/>
                 </a:ext>
               </a:extLst>
             </p:cNvPr>
@@ -22281,7 +22583,7 @@
                 <p:cNvPr id="19" name="Rectangle 21">
                   <a:extLst>
                     <a:ext uri="{FF2B5EF4-FFF2-40B4-BE49-F238E27FC236}">
-                      <a16:creationId xmlns:a16="http://schemas.microsoft.com/office/drawing/2014/main" id="{98CFA31E-8EBE-FD15-E9A0-8C7D7F4F4263}"/>
+                      <a16:creationId xmlns:a16="http://schemas.microsoft.com/office/drawing/2014/main" xmlns="" id="{98CFA31E-8EBE-FD15-E9A0-8C7D7F4F4263}"/>
                     </a:ext>
                   </a:extLst>
                 </p:cNvPr>
@@ -22389,7 +22691,7 @@
                 <p:cNvPr id="20" name="Rectangle 22">
                   <a:extLst>
                     <a:ext uri="{FF2B5EF4-FFF2-40B4-BE49-F238E27FC236}">
-                      <a16:creationId xmlns:a16="http://schemas.microsoft.com/office/drawing/2014/main" id="{4F8B8110-A634-BCC2-47C4-7DCDE45C26B6}"/>
+                      <a16:creationId xmlns:a16="http://schemas.microsoft.com/office/drawing/2014/main" xmlns="" id="{4F8B8110-A634-BCC2-47C4-7DCDE45C26B6}"/>
                     </a:ext>
                   </a:extLst>
                 </p:cNvPr>
@@ -22497,7 +22799,7 @@
                 <p:cNvPr id="21" name="TextBox 23">
                   <a:extLst>
                     <a:ext uri="{FF2B5EF4-FFF2-40B4-BE49-F238E27FC236}">
-                      <a16:creationId xmlns:a16="http://schemas.microsoft.com/office/drawing/2014/main" id="{12319318-275C-0FC4-3ED9-7CBC38F85706}"/>
+                      <a16:creationId xmlns:a16="http://schemas.microsoft.com/office/drawing/2014/main" xmlns="" id="{12319318-275C-0FC4-3ED9-7CBC38F85706}"/>
                     </a:ext>
                   </a:extLst>
                 </p:cNvPr>
@@ -22606,7 +22908,7 @@
                 <p:cNvPr id="22" name="Rectangle 25">
                   <a:extLst>
                     <a:ext uri="{FF2B5EF4-FFF2-40B4-BE49-F238E27FC236}">
-                      <a16:creationId xmlns:a16="http://schemas.microsoft.com/office/drawing/2014/main" id="{15E9639C-E60F-C5AF-21DF-78CC837FD73E}"/>
+                      <a16:creationId xmlns:a16="http://schemas.microsoft.com/office/drawing/2014/main" xmlns="" id="{15E9639C-E60F-C5AF-21DF-78CC837FD73E}"/>
                     </a:ext>
                   </a:extLst>
                 </p:cNvPr>
@@ -22725,7 +23027,7 @@
                 <p:cNvPr id="23" name="Rectangle 26">
                   <a:extLst>
                     <a:ext uri="{FF2B5EF4-FFF2-40B4-BE49-F238E27FC236}">
-                      <a16:creationId xmlns:a16="http://schemas.microsoft.com/office/drawing/2014/main" id="{5068A8DF-2713-C92C-B6F0-0259DF9D58C3}"/>
+                      <a16:creationId xmlns:a16="http://schemas.microsoft.com/office/drawing/2014/main" xmlns="" id="{5068A8DF-2713-C92C-B6F0-0259DF9D58C3}"/>
                     </a:ext>
                   </a:extLst>
                 </p:cNvPr>
@@ -22842,7 +23144,7 @@
             <p:cNvPr id="24" name="Rectangle 35">
               <a:extLst>
                 <a:ext uri="{FF2B5EF4-FFF2-40B4-BE49-F238E27FC236}">
-                  <a16:creationId xmlns:a16="http://schemas.microsoft.com/office/drawing/2014/main" id="{C315E367-78E0-438E-1DB1-1371AEF43B3A}"/>
+                  <a16:creationId xmlns:a16="http://schemas.microsoft.com/office/drawing/2014/main" xmlns="" id="{C315E367-78E0-438E-1DB1-1371AEF43B3A}"/>
                 </a:ext>
               </a:extLst>
             </p:cNvPr>
@@ -22894,7 +23196,7 @@
             <p:cNvPr id="25" name="Straight Arrow Connector 36">
               <a:extLst>
                 <a:ext uri="{FF2B5EF4-FFF2-40B4-BE49-F238E27FC236}">
-                  <a16:creationId xmlns:a16="http://schemas.microsoft.com/office/drawing/2014/main" id="{9EA916E6-02A4-0A96-C4AC-326F542C0901}"/>
+                  <a16:creationId xmlns:a16="http://schemas.microsoft.com/office/drawing/2014/main" xmlns="" id="{9EA916E6-02A4-0A96-C4AC-326F542C0901}"/>
                 </a:ext>
               </a:extLst>
             </p:cNvPr>
@@ -22936,7 +23238,7 @@
             <p:cNvPr id="26" name="Straight Arrow Connector 43">
               <a:extLst>
                 <a:ext uri="{FF2B5EF4-FFF2-40B4-BE49-F238E27FC236}">
-                  <a16:creationId xmlns:a16="http://schemas.microsoft.com/office/drawing/2014/main" id="{14FC6EB1-62DC-1E25-28FE-D6397B3DB0BF}"/>
+                  <a16:creationId xmlns:a16="http://schemas.microsoft.com/office/drawing/2014/main" xmlns="" id="{14FC6EB1-62DC-1E25-28FE-D6397B3DB0BF}"/>
                 </a:ext>
               </a:extLst>
             </p:cNvPr>
@@ -22980,7 +23282,7 @@
                 <p:cNvPr id="27" name="TextBox 44">
                   <a:extLst>
                     <a:ext uri="{FF2B5EF4-FFF2-40B4-BE49-F238E27FC236}">
-                      <a16:creationId xmlns:a16="http://schemas.microsoft.com/office/drawing/2014/main" id="{2EE27188-2380-072C-64EB-4A4D9E32C708}"/>
+                      <a16:creationId xmlns:a16="http://schemas.microsoft.com/office/drawing/2014/main" xmlns="" id="{2EE27188-2380-072C-64EB-4A4D9E32C708}"/>
                     </a:ext>
                   </a:extLst>
                 </p:cNvPr>
@@ -23087,7 +23389,7 @@
             <p:cNvPr id="28" name="Straight Connector 46">
               <a:extLst>
                 <a:ext uri="{FF2B5EF4-FFF2-40B4-BE49-F238E27FC236}">
-                  <a16:creationId xmlns:a16="http://schemas.microsoft.com/office/drawing/2014/main" id="{041E08B9-9EFA-200C-5EAD-4C4935276E35}"/>
+                  <a16:creationId xmlns:a16="http://schemas.microsoft.com/office/drawing/2014/main" xmlns="" id="{041E08B9-9EFA-200C-5EAD-4C4935276E35}"/>
                 </a:ext>
               </a:extLst>
             </p:cNvPr>
@@ -23128,7 +23430,7 @@
             <p:cNvPr id="29" name="TextBox 47">
               <a:extLst>
                 <a:ext uri="{FF2B5EF4-FFF2-40B4-BE49-F238E27FC236}">
-                  <a16:creationId xmlns:a16="http://schemas.microsoft.com/office/drawing/2014/main" id="{1459452D-6032-F0FA-B184-6F9A3091A541}"/>
+                  <a16:creationId xmlns:a16="http://schemas.microsoft.com/office/drawing/2014/main" xmlns="" id="{1459452D-6032-F0FA-B184-6F9A3091A541}"/>
                 </a:ext>
               </a:extLst>
             </p:cNvPr>
@@ -23163,7 +23465,7 @@
             <p:cNvPr id="30" name="TextBox 48">
               <a:extLst>
                 <a:ext uri="{FF2B5EF4-FFF2-40B4-BE49-F238E27FC236}">
-                  <a16:creationId xmlns:a16="http://schemas.microsoft.com/office/drawing/2014/main" id="{C8E0C301-2CD6-4F8E-0368-45305C473663}"/>
+                  <a16:creationId xmlns:a16="http://schemas.microsoft.com/office/drawing/2014/main" xmlns="" id="{C8E0C301-2CD6-4F8E-0368-45305C473663}"/>
                 </a:ext>
               </a:extLst>
             </p:cNvPr>
@@ -23198,7 +23500,7 @@
             <p:cNvPr id="31" name="TextBox 49">
               <a:extLst>
                 <a:ext uri="{FF2B5EF4-FFF2-40B4-BE49-F238E27FC236}">
-                  <a16:creationId xmlns:a16="http://schemas.microsoft.com/office/drawing/2014/main" id="{C2772B3D-DFC6-F0E1-7D7E-7284B664AB22}"/>
+                  <a16:creationId xmlns:a16="http://schemas.microsoft.com/office/drawing/2014/main" xmlns="" id="{C2772B3D-DFC6-F0E1-7D7E-7284B664AB22}"/>
                 </a:ext>
               </a:extLst>
             </p:cNvPr>
@@ -23233,7 +23535,7 @@
             <p:cNvPr id="32" name="TextBox 50">
               <a:extLst>
                 <a:ext uri="{FF2B5EF4-FFF2-40B4-BE49-F238E27FC236}">
-                  <a16:creationId xmlns:a16="http://schemas.microsoft.com/office/drawing/2014/main" id="{48FA6900-981E-DA5D-658A-54E0AE253B45}"/>
+                  <a16:creationId xmlns:a16="http://schemas.microsoft.com/office/drawing/2014/main" xmlns="" id="{48FA6900-981E-DA5D-658A-54E0AE253B45}"/>
                 </a:ext>
               </a:extLst>
             </p:cNvPr>
@@ -23268,7 +23570,7 @@
             <p:cNvPr id="33" name="TextBox 51">
               <a:extLst>
                 <a:ext uri="{FF2B5EF4-FFF2-40B4-BE49-F238E27FC236}">
-                  <a16:creationId xmlns:a16="http://schemas.microsoft.com/office/drawing/2014/main" id="{63E8D778-4B29-3C55-F319-A67FBE223AE1}"/>
+                  <a16:creationId xmlns:a16="http://schemas.microsoft.com/office/drawing/2014/main" xmlns="" id="{63E8D778-4B29-3C55-F319-A67FBE223AE1}"/>
                 </a:ext>
               </a:extLst>
             </p:cNvPr>
@@ -23303,7 +23605,7 @@
             <p:cNvPr id="34" name="TextBox 52">
               <a:extLst>
                 <a:ext uri="{FF2B5EF4-FFF2-40B4-BE49-F238E27FC236}">
-                  <a16:creationId xmlns:a16="http://schemas.microsoft.com/office/drawing/2014/main" id="{02A1578E-16D7-F09B-6585-EFA8AADA15CD}"/>
+                  <a16:creationId xmlns:a16="http://schemas.microsoft.com/office/drawing/2014/main" xmlns="" id="{02A1578E-16D7-F09B-6585-EFA8AADA15CD}"/>
                 </a:ext>
               </a:extLst>
             </p:cNvPr>
@@ -23338,7 +23640,7 @@
             <p:cNvPr id="35" name="TextBox 53">
               <a:extLst>
                 <a:ext uri="{FF2B5EF4-FFF2-40B4-BE49-F238E27FC236}">
-                  <a16:creationId xmlns:a16="http://schemas.microsoft.com/office/drawing/2014/main" id="{DA209521-823B-C94F-553F-F8D507BE793E}"/>
+                  <a16:creationId xmlns:a16="http://schemas.microsoft.com/office/drawing/2014/main" xmlns="" id="{DA209521-823B-C94F-553F-F8D507BE793E}"/>
                 </a:ext>
               </a:extLst>
             </p:cNvPr>
@@ -23373,7 +23675,7 @@
             <p:cNvPr id="36" name="TextBox 54">
               <a:extLst>
                 <a:ext uri="{FF2B5EF4-FFF2-40B4-BE49-F238E27FC236}">
-                  <a16:creationId xmlns:a16="http://schemas.microsoft.com/office/drawing/2014/main" id="{FA2E93F7-A5E6-F0D5-6904-7D62BBBD944B}"/>
+                  <a16:creationId xmlns:a16="http://schemas.microsoft.com/office/drawing/2014/main" xmlns="" id="{FA2E93F7-A5E6-F0D5-6904-7D62BBBD944B}"/>
                 </a:ext>
               </a:extLst>
             </p:cNvPr>
@@ -23408,7 +23710,7 @@
             <p:cNvPr id="37" name="TextBox 55">
               <a:extLst>
                 <a:ext uri="{FF2B5EF4-FFF2-40B4-BE49-F238E27FC236}">
-                  <a16:creationId xmlns:a16="http://schemas.microsoft.com/office/drawing/2014/main" id="{14394B16-918A-997F-1557-95FFCF2694CA}"/>
+                  <a16:creationId xmlns:a16="http://schemas.microsoft.com/office/drawing/2014/main" xmlns="" id="{14394B16-918A-997F-1557-95FFCF2694CA}"/>
                 </a:ext>
               </a:extLst>
             </p:cNvPr>
@@ -23443,7 +23745,7 @@
             <p:cNvPr id="38" name="Rectangle 45">
               <a:extLst>
                 <a:ext uri="{FF2B5EF4-FFF2-40B4-BE49-F238E27FC236}">
-                  <a16:creationId xmlns:a16="http://schemas.microsoft.com/office/drawing/2014/main" id="{215D2CD6-90A2-4DFA-CDEA-1532EEA97534}"/>
+                  <a16:creationId xmlns:a16="http://schemas.microsoft.com/office/drawing/2014/main" xmlns="" id="{215D2CD6-90A2-4DFA-CDEA-1532EEA97534}"/>
                 </a:ext>
               </a:extLst>
             </p:cNvPr>
@@ -23495,7 +23797,7 @@
             <p:cNvPr id="39" name="Rectangle 57">
               <a:extLst>
                 <a:ext uri="{FF2B5EF4-FFF2-40B4-BE49-F238E27FC236}">
-                  <a16:creationId xmlns:a16="http://schemas.microsoft.com/office/drawing/2014/main" id="{1156C69F-DF41-1D71-BE0E-DDCF670DCB91}"/>
+                  <a16:creationId xmlns:a16="http://schemas.microsoft.com/office/drawing/2014/main" xmlns="" id="{1156C69F-DF41-1D71-BE0E-DDCF670DCB91}"/>
                 </a:ext>
               </a:extLst>
             </p:cNvPr>
@@ -23547,7 +23849,7 @@
             <p:cNvPr id="40" name="Rectangle 58">
               <a:extLst>
                 <a:ext uri="{FF2B5EF4-FFF2-40B4-BE49-F238E27FC236}">
-                  <a16:creationId xmlns:a16="http://schemas.microsoft.com/office/drawing/2014/main" id="{6069B9FD-8320-FFDA-057E-1673BC2F4ABF}"/>
+                  <a16:creationId xmlns:a16="http://schemas.microsoft.com/office/drawing/2014/main" xmlns="" id="{6069B9FD-8320-FFDA-057E-1673BC2F4ABF}"/>
                 </a:ext>
               </a:extLst>
             </p:cNvPr>
@@ -23599,7 +23901,7 @@
             <p:cNvPr id="41" name="Rectangle 59">
               <a:extLst>
                 <a:ext uri="{FF2B5EF4-FFF2-40B4-BE49-F238E27FC236}">
-                  <a16:creationId xmlns:a16="http://schemas.microsoft.com/office/drawing/2014/main" id="{60461D92-83E4-F583-2232-3729714EC37F}"/>
+                  <a16:creationId xmlns:a16="http://schemas.microsoft.com/office/drawing/2014/main" xmlns="" id="{60461D92-83E4-F583-2232-3729714EC37F}"/>
                 </a:ext>
               </a:extLst>
             </p:cNvPr>
@@ -23651,7 +23953,7 @@
             <p:cNvPr id="42" name="Rectangle 60">
               <a:extLst>
                 <a:ext uri="{FF2B5EF4-FFF2-40B4-BE49-F238E27FC236}">
-                  <a16:creationId xmlns:a16="http://schemas.microsoft.com/office/drawing/2014/main" id="{85F882FF-7E6A-FB77-FAFE-6F03C810AF6B}"/>
+                  <a16:creationId xmlns:a16="http://schemas.microsoft.com/office/drawing/2014/main" xmlns="" id="{85F882FF-7E6A-FB77-FAFE-6F03C810AF6B}"/>
                 </a:ext>
               </a:extLst>
             </p:cNvPr>
@@ -23703,7 +24005,7 @@
             <p:cNvPr id="43" name="Rectangle 61">
               <a:extLst>
                 <a:ext uri="{FF2B5EF4-FFF2-40B4-BE49-F238E27FC236}">
-                  <a16:creationId xmlns:a16="http://schemas.microsoft.com/office/drawing/2014/main" id="{ED7C62DF-994A-2D16-617A-DF5D75FEE98C}"/>
+                  <a16:creationId xmlns:a16="http://schemas.microsoft.com/office/drawing/2014/main" xmlns="" id="{ED7C62DF-994A-2D16-617A-DF5D75FEE98C}"/>
                 </a:ext>
               </a:extLst>
             </p:cNvPr>
@@ -23755,7 +24057,7 @@
             <p:cNvPr id="44" name="Rectangle 62">
               <a:extLst>
                 <a:ext uri="{FF2B5EF4-FFF2-40B4-BE49-F238E27FC236}">
-                  <a16:creationId xmlns:a16="http://schemas.microsoft.com/office/drawing/2014/main" id="{2BC3E2A8-7479-8FE8-5B18-BE4F695D8CC8}"/>
+                  <a16:creationId xmlns:a16="http://schemas.microsoft.com/office/drawing/2014/main" xmlns="" id="{2BC3E2A8-7479-8FE8-5B18-BE4F695D8CC8}"/>
                 </a:ext>
               </a:extLst>
             </p:cNvPr>
@@ -23807,7 +24109,7 @@
             <p:cNvPr id="45" name="Rectangle 63">
               <a:extLst>
                 <a:ext uri="{FF2B5EF4-FFF2-40B4-BE49-F238E27FC236}">
-                  <a16:creationId xmlns:a16="http://schemas.microsoft.com/office/drawing/2014/main" id="{A65C23ED-46C2-516A-090C-E8F283927CFA}"/>
+                  <a16:creationId xmlns:a16="http://schemas.microsoft.com/office/drawing/2014/main" xmlns="" id="{A65C23ED-46C2-516A-090C-E8F283927CFA}"/>
                 </a:ext>
               </a:extLst>
             </p:cNvPr>
@@ -23859,7 +24161,7 @@
             <p:cNvPr id="46" name="Rectangle 64">
               <a:extLst>
                 <a:ext uri="{FF2B5EF4-FFF2-40B4-BE49-F238E27FC236}">
-                  <a16:creationId xmlns:a16="http://schemas.microsoft.com/office/drawing/2014/main" id="{4924E85E-AF86-0A9A-067E-CC27D28A2DD4}"/>
+                  <a16:creationId xmlns:a16="http://schemas.microsoft.com/office/drawing/2014/main" xmlns="" id="{4924E85E-AF86-0A9A-067E-CC27D28A2DD4}"/>
                 </a:ext>
               </a:extLst>
             </p:cNvPr>
@@ -23911,7 +24213,7 @@
             <p:cNvPr id="47" name="Rectangle 65">
               <a:extLst>
                 <a:ext uri="{FF2B5EF4-FFF2-40B4-BE49-F238E27FC236}">
-                  <a16:creationId xmlns:a16="http://schemas.microsoft.com/office/drawing/2014/main" id="{B36994BC-1EEC-FC02-84F5-1CEC2C401A1B}"/>
+                  <a16:creationId xmlns:a16="http://schemas.microsoft.com/office/drawing/2014/main" xmlns="" id="{B36994BC-1EEC-FC02-84F5-1CEC2C401A1B}"/>
                 </a:ext>
               </a:extLst>
             </p:cNvPr>
@@ -23963,7 +24265,7 @@
             <p:cNvPr id="48" name="Rectangle 66">
               <a:extLst>
                 <a:ext uri="{FF2B5EF4-FFF2-40B4-BE49-F238E27FC236}">
-                  <a16:creationId xmlns:a16="http://schemas.microsoft.com/office/drawing/2014/main" id="{6AD8E3FC-5F8A-6F8C-6461-684A29387239}"/>
+                  <a16:creationId xmlns:a16="http://schemas.microsoft.com/office/drawing/2014/main" xmlns="" id="{6AD8E3FC-5F8A-6F8C-6461-684A29387239}"/>
                 </a:ext>
               </a:extLst>
             </p:cNvPr>
@@ -24015,7 +24317,7 @@
             <p:cNvPr id="49" name="Rectangle 67">
               <a:extLst>
                 <a:ext uri="{FF2B5EF4-FFF2-40B4-BE49-F238E27FC236}">
-                  <a16:creationId xmlns:a16="http://schemas.microsoft.com/office/drawing/2014/main" id="{BC5B50D0-5AD5-C5A2-3FFB-4A55C322A0FB}"/>
+                  <a16:creationId xmlns:a16="http://schemas.microsoft.com/office/drawing/2014/main" xmlns="" id="{BC5B50D0-5AD5-C5A2-3FFB-4A55C322A0FB}"/>
                 </a:ext>
               </a:extLst>
             </p:cNvPr>
@@ -24067,7 +24369,7 @@
             <p:cNvPr id="50" name="Rectangle 68">
               <a:extLst>
                 <a:ext uri="{FF2B5EF4-FFF2-40B4-BE49-F238E27FC236}">
-                  <a16:creationId xmlns:a16="http://schemas.microsoft.com/office/drawing/2014/main" id="{5269ADFD-172A-7A19-0079-7FEB34A1DC8B}"/>
+                  <a16:creationId xmlns:a16="http://schemas.microsoft.com/office/drawing/2014/main" xmlns="" id="{5269ADFD-172A-7A19-0079-7FEB34A1DC8B}"/>
                 </a:ext>
               </a:extLst>
             </p:cNvPr>
@@ -24119,7 +24421,7 @@
             <p:cNvPr id="51" name="Rectangle 69">
               <a:extLst>
                 <a:ext uri="{FF2B5EF4-FFF2-40B4-BE49-F238E27FC236}">
-                  <a16:creationId xmlns:a16="http://schemas.microsoft.com/office/drawing/2014/main" id="{06625F8A-D7F2-C316-4E83-F0EE3613776E}"/>
+                  <a16:creationId xmlns:a16="http://schemas.microsoft.com/office/drawing/2014/main" xmlns="" id="{06625F8A-D7F2-C316-4E83-F0EE3613776E}"/>
                 </a:ext>
               </a:extLst>
             </p:cNvPr>
@@ -24171,7 +24473,7 @@
             <p:cNvPr id="52" name="Rectangle 70">
               <a:extLst>
                 <a:ext uri="{FF2B5EF4-FFF2-40B4-BE49-F238E27FC236}">
-                  <a16:creationId xmlns:a16="http://schemas.microsoft.com/office/drawing/2014/main" id="{DEBC4696-877C-EE78-5615-162903AACA6C}"/>
+                  <a16:creationId xmlns:a16="http://schemas.microsoft.com/office/drawing/2014/main" xmlns="" id="{DEBC4696-877C-EE78-5615-162903AACA6C}"/>
                 </a:ext>
               </a:extLst>
             </p:cNvPr>
@@ -24223,7 +24525,7 @@
             <p:cNvPr id="53" name="Isosceles Triangle 73">
               <a:extLst>
                 <a:ext uri="{FF2B5EF4-FFF2-40B4-BE49-F238E27FC236}">
-                  <a16:creationId xmlns:a16="http://schemas.microsoft.com/office/drawing/2014/main" id="{8F27F061-5624-3BA8-32C3-5DCBB0104981}"/>
+                  <a16:creationId xmlns:a16="http://schemas.microsoft.com/office/drawing/2014/main" xmlns="" id="{8F27F061-5624-3BA8-32C3-5DCBB0104981}"/>
                 </a:ext>
               </a:extLst>
             </p:cNvPr>
@@ -24277,7 +24579,7 @@
             <p:cNvPr id="54" name="Isosceles Triangle 74">
               <a:extLst>
                 <a:ext uri="{FF2B5EF4-FFF2-40B4-BE49-F238E27FC236}">
-                  <a16:creationId xmlns:a16="http://schemas.microsoft.com/office/drawing/2014/main" id="{5CED0B7F-65D7-5DA8-2FC9-88BCD9DD55D4}"/>
+                  <a16:creationId xmlns:a16="http://schemas.microsoft.com/office/drawing/2014/main" xmlns="" id="{5CED0B7F-65D7-5DA8-2FC9-88BCD9DD55D4}"/>
                 </a:ext>
               </a:extLst>
             </p:cNvPr>
@@ -24331,7 +24633,7 @@
             <p:cNvPr id="55" name="Isosceles Triangle 75">
               <a:extLst>
                 <a:ext uri="{FF2B5EF4-FFF2-40B4-BE49-F238E27FC236}">
-                  <a16:creationId xmlns:a16="http://schemas.microsoft.com/office/drawing/2014/main" id="{4D69BBB3-9987-AC15-4747-073357179928}"/>
+                  <a16:creationId xmlns:a16="http://schemas.microsoft.com/office/drawing/2014/main" xmlns="" id="{4D69BBB3-9987-AC15-4747-073357179928}"/>
                 </a:ext>
               </a:extLst>
             </p:cNvPr>
@@ -24385,7 +24687,7 @@
             <p:cNvPr id="56" name="Isosceles Triangle 76">
               <a:extLst>
                 <a:ext uri="{FF2B5EF4-FFF2-40B4-BE49-F238E27FC236}">
-                  <a16:creationId xmlns:a16="http://schemas.microsoft.com/office/drawing/2014/main" id="{9E57BCBF-EA54-B1B1-8B8F-F2CC814C875A}"/>
+                  <a16:creationId xmlns:a16="http://schemas.microsoft.com/office/drawing/2014/main" xmlns="" id="{9E57BCBF-EA54-B1B1-8B8F-F2CC814C875A}"/>
                 </a:ext>
               </a:extLst>
             </p:cNvPr>
@@ -24439,7 +24741,7 @@
             <p:cNvPr id="57" name="Isosceles Triangle 77">
               <a:extLst>
                 <a:ext uri="{FF2B5EF4-FFF2-40B4-BE49-F238E27FC236}">
-                  <a16:creationId xmlns:a16="http://schemas.microsoft.com/office/drawing/2014/main" id="{B9172EFF-4764-4361-6E17-4C0DD80E58A7}"/>
+                  <a16:creationId xmlns:a16="http://schemas.microsoft.com/office/drawing/2014/main" xmlns="" id="{B9172EFF-4764-4361-6E17-4C0DD80E58A7}"/>
                 </a:ext>
               </a:extLst>
             </p:cNvPr>
@@ -24493,7 +24795,7 @@
             <p:cNvPr id="58" name="Oval 11">
               <a:extLst>
                 <a:ext uri="{FF2B5EF4-FFF2-40B4-BE49-F238E27FC236}">
-                  <a16:creationId xmlns:a16="http://schemas.microsoft.com/office/drawing/2014/main" id="{02F600BF-D776-B400-3927-68FC1AE112D6}"/>
+                  <a16:creationId xmlns:a16="http://schemas.microsoft.com/office/drawing/2014/main" xmlns="" id="{02F600BF-D776-B400-3927-68FC1AE112D6}"/>
                 </a:ext>
               </a:extLst>
             </p:cNvPr>
@@ -24549,7 +24851,7 @@
                 <p:cNvPr id="59" name="Rectangle 71">
                   <a:extLst>
                     <a:ext uri="{FF2B5EF4-FFF2-40B4-BE49-F238E27FC236}">
-                      <a16:creationId xmlns:a16="http://schemas.microsoft.com/office/drawing/2014/main" id="{F0EC275F-B40D-ED86-7890-D8FE11F77618}"/>
+                      <a16:creationId xmlns:a16="http://schemas.microsoft.com/office/drawing/2014/main" xmlns="" id="{F0EC275F-B40D-ED86-7890-D8FE11F77618}"/>
                     </a:ext>
                   </a:extLst>
                 </p:cNvPr>
@@ -24653,7 +24955,7 @@
             <p:cNvPr id="60" name="Freeform 72">
               <a:extLst>
                 <a:ext uri="{FF2B5EF4-FFF2-40B4-BE49-F238E27FC236}">
-                  <a16:creationId xmlns:a16="http://schemas.microsoft.com/office/drawing/2014/main" id="{C468AB1D-D69D-CA57-E21D-0C4FFFDB2462}"/>
+                  <a16:creationId xmlns:a16="http://schemas.microsoft.com/office/drawing/2014/main" xmlns="" id="{C468AB1D-D69D-CA57-E21D-0C4FFFDB2462}"/>
                 </a:ext>
               </a:extLst>
             </p:cNvPr>
@@ -24735,7 +25037,7 @@
               <p:cNvPr id="62" name="TextBox 61">
                 <a:extLst>
                   <a:ext uri="{FF2B5EF4-FFF2-40B4-BE49-F238E27FC236}">
-                    <a16:creationId xmlns:a16="http://schemas.microsoft.com/office/drawing/2014/main" id="{CA97F457-7C68-DA7F-75E6-FBB40FEDE666}"/>
+                    <a16:creationId xmlns:a16="http://schemas.microsoft.com/office/drawing/2014/main" xmlns="" id="{CA97F457-7C68-DA7F-75E6-FBB40FEDE666}"/>
                   </a:ext>
                 </a:extLst>
               </p:cNvPr>
@@ -24852,7 +25154,7 @@
 </p:sld>
 </file>
 
-<file path=ppt/slides/slide25.xml><?xml version="1.0" encoding="utf-8"?>
+<file path=ppt/slides/slide28.xml><?xml version="1.0" encoding="utf-8"?>
 <p:sld xmlns:a="http://schemas.openxmlformats.org/drawingml/2006/main" xmlns:r="http://schemas.openxmlformats.org/officeDocument/2006/relationships" xmlns:p="http://schemas.openxmlformats.org/presentationml/2006/main">
   <p:cSld>
     <p:spTree>
@@ -27468,7 +27770,7 @@
           </p:nvCxnSpPr>
           <p:spPr>
             <a:xfrm flipV="1">
-              <a:off x="5251694" y="2065591"/>
+              <a:off x="5251694" y="2080105"/>
               <a:ext cx="1627631" cy="1621882"/>
             </a:xfrm>
             <a:prstGeom prst="line">
@@ -28924,10 +29226,17 @@
   <p:clrMapOvr>
     <a:masterClrMapping/>
   </p:clrMapOvr>
+  <p:timing>
+    <p:tnLst>
+      <p:par>
+        <p:cTn id="1" dur="indefinite" restart="never" nodeType="tmRoot"/>
+      </p:par>
+    </p:tnLst>
+  </p:timing>
 </p:sld>
 </file>
 
-<file path=ppt/slides/slide26.xml><?xml version="1.0" encoding="utf-8"?>
+<file path=ppt/slides/slide29.xml><?xml version="1.0" encoding="utf-8"?>
 <p:sld xmlns:a="http://schemas.openxmlformats.org/drawingml/2006/main" xmlns:r="http://schemas.openxmlformats.org/officeDocument/2006/relationships" xmlns:p="http://schemas.openxmlformats.org/presentationml/2006/main">
   <p:cSld>
     <p:spTree>
@@ -28951,7 +29260,7 @@
               <p:cNvPr id="2" name="Título 1">
                 <a:extLst>
                   <a:ext uri="{FF2B5EF4-FFF2-40B4-BE49-F238E27FC236}">
-                    <a16:creationId xmlns:a16="http://schemas.microsoft.com/office/drawing/2014/main" id="{A40DA219-5B1E-A50B-9F92-A49056A7DAF6}"/>
+                    <a16:creationId xmlns:a16="http://schemas.microsoft.com/office/drawing/2014/main" xmlns="" id="{A40DA219-5B1E-A50B-9F92-A49056A7DAF6}"/>
                   </a:ext>
                 </a:extLst>
               </p:cNvPr>
@@ -29051,7 +29360,7 @@
               <p:cNvPr id="3" name="Espaço Reservado para Conteúdo 2">
                 <a:extLst>
                   <a:ext uri="{FF2B5EF4-FFF2-40B4-BE49-F238E27FC236}">
-                    <a16:creationId xmlns:a16="http://schemas.microsoft.com/office/drawing/2014/main" id="{0189DCC1-6DC0-06B7-ACB8-229783AC8FFC}"/>
+                    <a16:creationId xmlns:a16="http://schemas.microsoft.com/office/drawing/2014/main" xmlns="" id="{0189DCC1-6DC0-06B7-ACB8-229783AC8FFC}"/>
                   </a:ext>
                 </a:extLst>
               </p:cNvPr>
@@ -29768,7 +30077,7 @@
           <p:cNvPr id="4" name="Group 191">
             <a:extLst>
               <a:ext uri="{FF2B5EF4-FFF2-40B4-BE49-F238E27FC236}">
-                <a16:creationId xmlns:a16="http://schemas.microsoft.com/office/drawing/2014/main" id="{131D70C2-43D2-4494-632F-3ADF1223E31B}"/>
+                <a16:creationId xmlns:a16="http://schemas.microsoft.com/office/drawing/2014/main" xmlns="" id="{131D70C2-43D2-4494-632F-3ADF1223E31B}"/>
               </a:ext>
             </a:extLst>
           </p:cNvPr>
@@ -29788,7 +30097,7 @@
             <p:cNvPr id="5" name="Oval 192">
               <a:extLst>
                 <a:ext uri="{FF2B5EF4-FFF2-40B4-BE49-F238E27FC236}">
-                  <a16:creationId xmlns:a16="http://schemas.microsoft.com/office/drawing/2014/main" id="{951BDBB1-C287-D4C4-208F-D6F0F62EDA62}"/>
+                  <a16:creationId xmlns:a16="http://schemas.microsoft.com/office/drawing/2014/main" xmlns="" id="{951BDBB1-C287-D4C4-208F-D6F0F62EDA62}"/>
                 </a:ext>
               </a:extLst>
             </p:cNvPr>
@@ -29842,7 +30151,7 @@
             <p:cNvPr id="6" name="Isosceles Triangle 193">
               <a:extLst>
                 <a:ext uri="{FF2B5EF4-FFF2-40B4-BE49-F238E27FC236}">
-                  <a16:creationId xmlns:a16="http://schemas.microsoft.com/office/drawing/2014/main" id="{4D2D75C5-D280-1FE2-0A7E-76CE08ABE7A6}"/>
+                  <a16:creationId xmlns:a16="http://schemas.microsoft.com/office/drawing/2014/main" xmlns="" id="{4D2D75C5-D280-1FE2-0A7E-76CE08ABE7A6}"/>
                 </a:ext>
               </a:extLst>
             </p:cNvPr>
@@ -29896,7 +30205,7 @@
             <p:cNvPr id="7" name="Oval 194">
               <a:extLst>
                 <a:ext uri="{FF2B5EF4-FFF2-40B4-BE49-F238E27FC236}">
-                  <a16:creationId xmlns:a16="http://schemas.microsoft.com/office/drawing/2014/main" id="{2821FDC5-FCF9-C641-ECCA-7918C60AC58D}"/>
+                  <a16:creationId xmlns:a16="http://schemas.microsoft.com/office/drawing/2014/main" xmlns="" id="{2821FDC5-FCF9-C641-ECCA-7918C60AC58D}"/>
                 </a:ext>
               </a:extLst>
             </p:cNvPr>
@@ -29950,7 +30259,7 @@
             <p:cNvPr id="8" name="Oval 195">
               <a:extLst>
                 <a:ext uri="{FF2B5EF4-FFF2-40B4-BE49-F238E27FC236}">
-                  <a16:creationId xmlns:a16="http://schemas.microsoft.com/office/drawing/2014/main" id="{5CC2CA3D-1370-9945-FAE0-9B6EE7C2A0B2}"/>
+                  <a16:creationId xmlns:a16="http://schemas.microsoft.com/office/drawing/2014/main" xmlns="" id="{5CC2CA3D-1370-9945-FAE0-9B6EE7C2A0B2}"/>
                 </a:ext>
               </a:extLst>
             </p:cNvPr>
@@ -30004,7 +30313,7 @@
             <p:cNvPr id="9" name="Oval 196">
               <a:extLst>
                 <a:ext uri="{FF2B5EF4-FFF2-40B4-BE49-F238E27FC236}">
-                  <a16:creationId xmlns:a16="http://schemas.microsoft.com/office/drawing/2014/main" id="{7A08A5AF-DA38-F554-D909-215BEA7A1DA5}"/>
+                  <a16:creationId xmlns:a16="http://schemas.microsoft.com/office/drawing/2014/main" xmlns="" id="{7A08A5AF-DA38-F554-D909-215BEA7A1DA5}"/>
                 </a:ext>
               </a:extLst>
             </p:cNvPr>
@@ -30058,7 +30367,7 @@
             <p:cNvPr id="10" name="Oval 197">
               <a:extLst>
                 <a:ext uri="{FF2B5EF4-FFF2-40B4-BE49-F238E27FC236}">
-                  <a16:creationId xmlns:a16="http://schemas.microsoft.com/office/drawing/2014/main" id="{0A2FF774-5547-1518-D571-D13D52ED6A08}"/>
+                  <a16:creationId xmlns:a16="http://schemas.microsoft.com/office/drawing/2014/main" xmlns="" id="{0A2FF774-5547-1518-D571-D13D52ED6A08}"/>
                 </a:ext>
               </a:extLst>
             </p:cNvPr>
@@ -30112,7 +30421,7 @@
             <p:cNvPr id="11" name="Oval 198">
               <a:extLst>
                 <a:ext uri="{FF2B5EF4-FFF2-40B4-BE49-F238E27FC236}">
-                  <a16:creationId xmlns:a16="http://schemas.microsoft.com/office/drawing/2014/main" id="{0495D267-CDD7-56C4-DCFD-DD2E3D63FA14}"/>
+                  <a16:creationId xmlns:a16="http://schemas.microsoft.com/office/drawing/2014/main" xmlns="" id="{0495D267-CDD7-56C4-DCFD-DD2E3D63FA14}"/>
                 </a:ext>
               </a:extLst>
             </p:cNvPr>
@@ -30166,7 +30475,7 @@
             <p:cNvPr id="12" name="Isosceles Triangle 199">
               <a:extLst>
                 <a:ext uri="{FF2B5EF4-FFF2-40B4-BE49-F238E27FC236}">
-                  <a16:creationId xmlns:a16="http://schemas.microsoft.com/office/drawing/2014/main" id="{92314B82-FBE5-26C9-6E2B-5C7068513951}"/>
+                  <a16:creationId xmlns:a16="http://schemas.microsoft.com/office/drawing/2014/main" xmlns="" id="{92314B82-FBE5-26C9-6E2B-5C7068513951}"/>
                 </a:ext>
               </a:extLst>
             </p:cNvPr>
@@ -30220,7 +30529,7 @@
             <p:cNvPr id="13" name="Isosceles Triangle 200">
               <a:extLst>
                 <a:ext uri="{FF2B5EF4-FFF2-40B4-BE49-F238E27FC236}">
-                  <a16:creationId xmlns:a16="http://schemas.microsoft.com/office/drawing/2014/main" id="{073242D9-C223-0CA5-3AB8-98AF3A4DA8D5}"/>
+                  <a16:creationId xmlns:a16="http://schemas.microsoft.com/office/drawing/2014/main" xmlns="" id="{073242D9-C223-0CA5-3AB8-98AF3A4DA8D5}"/>
                 </a:ext>
               </a:extLst>
             </p:cNvPr>
@@ -30274,7 +30583,7 @@
             <p:cNvPr id="14" name="Isosceles Triangle 201">
               <a:extLst>
                 <a:ext uri="{FF2B5EF4-FFF2-40B4-BE49-F238E27FC236}">
-                  <a16:creationId xmlns:a16="http://schemas.microsoft.com/office/drawing/2014/main" id="{7BF881C0-85CB-1F9E-1A58-B2A64447E861}"/>
+                  <a16:creationId xmlns:a16="http://schemas.microsoft.com/office/drawing/2014/main" xmlns="" id="{7BF881C0-85CB-1F9E-1A58-B2A64447E861}"/>
                 </a:ext>
               </a:extLst>
             </p:cNvPr>
@@ -30328,7 +30637,7 @@
             <p:cNvPr id="15" name="Isosceles Triangle 202">
               <a:extLst>
                 <a:ext uri="{FF2B5EF4-FFF2-40B4-BE49-F238E27FC236}">
-                  <a16:creationId xmlns:a16="http://schemas.microsoft.com/office/drawing/2014/main" id="{5D4668CE-3CC0-A625-7137-D42520E376C9}"/>
+                  <a16:creationId xmlns:a16="http://schemas.microsoft.com/office/drawing/2014/main" xmlns="" id="{5D4668CE-3CC0-A625-7137-D42520E376C9}"/>
                 </a:ext>
               </a:extLst>
             </p:cNvPr>
@@ -30382,7 +30691,7 @@
             <p:cNvPr id="16" name="Isosceles Triangle 203">
               <a:extLst>
                 <a:ext uri="{FF2B5EF4-FFF2-40B4-BE49-F238E27FC236}">
-                  <a16:creationId xmlns:a16="http://schemas.microsoft.com/office/drawing/2014/main" id="{65DB8952-5A20-B441-22B9-08189B5F79D7}"/>
+                  <a16:creationId xmlns:a16="http://schemas.microsoft.com/office/drawing/2014/main" xmlns="" id="{65DB8952-5A20-B441-22B9-08189B5F79D7}"/>
                 </a:ext>
               </a:extLst>
             </p:cNvPr>
@@ -30436,7 +30745,7 @@
             <p:cNvPr id="17" name="Isosceles Triangle 204">
               <a:extLst>
                 <a:ext uri="{FF2B5EF4-FFF2-40B4-BE49-F238E27FC236}">
-                  <a16:creationId xmlns:a16="http://schemas.microsoft.com/office/drawing/2014/main" id="{3A0AF3DE-C6E1-B01F-AA6A-B8F344293C03}"/>
+                  <a16:creationId xmlns:a16="http://schemas.microsoft.com/office/drawing/2014/main" xmlns="" id="{3A0AF3DE-C6E1-B01F-AA6A-B8F344293C03}"/>
                 </a:ext>
               </a:extLst>
             </p:cNvPr>
@@ -30490,7 +30799,7 @@
             <p:cNvPr id="18" name="Isosceles Triangle 205">
               <a:extLst>
                 <a:ext uri="{FF2B5EF4-FFF2-40B4-BE49-F238E27FC236}">
-                  <a16:creationId xmlns:a16="http://schemas.microsoft.com/office/drawing/2014/main" id="{965376A3-404D-EE15-324D-4E198BDA31B4}"/>
+                  <a16:creationId xmlns:a16="http://schemas.microsoft.com/office/drawing/2014/main" xmlns="" id="{965376A3-404D-EE15-324D-4E198BDA31B4}"/>
                 </a:ext>
               </a:extLst>
             </p:cNvPr>
@@ -30546,7 +30855,7 @@
                 <p:cNvPr id="19" name="Rectangle 206">
                   <a:extLst>
                     <a:ext uri="{FF2B5EF4-FFF2-40B4-BE49-F238E27FC236}">
-                      <a16:creationId xmlns:a16="http://schemas.microsoft.com/office/drawing/2014/main" id="{0A64D676-718C-F540-0291-CD2C158E4EDF}"/>
+                      <a16:creationId xmlns:a16="http://schemas.microsoft.com/office/drawing/2014/main" xmlns="" id="{0A64D676-718C-F540-0291-CD2C158E4EDF}"/>
                     </a:ext>
                   </a:extLst>
                 </p:cNvPr>
@@ -30696,7 +31005,7 @@
                 <p:cNvPr id="20" name="Rectangle 207">
                   <a:extLst>
                     <a:ext uri="{FF2B5EF4-FFF2-40B4-BE49-F238E27FC236}">
-                      <a16:creationId xmlns:a16="http://schemas.microsoft.com/office/drawing/2014/main" id="{7207C552-CE63-D630-382A-C51AEBF2BF7F}"/>
+                      <a16:creationId xmlns:a16="http://schemas.microsoft.com/office/drawing/2014/main" xmlns="" id="{7207C552-CE63-D630-382A-C51AEBF2BF7F}"/>
                     </a:ext>
                   </a:extLst>
                 </p:cNvPr>
@@ -30846,7 +31155,7 @@
                 <p:cNvPr id="21" name="TextBox 208">
                   <a:extLst>
                     <a:ext uri="{FF2B5EF4-FFF2-40B4-BE49-F238E27FC236}">
-                      <a16:creationId xmlns:a16="http://schemas.microsoft.com/office/drawing/2014/main" id="{A543A807-C3C8-BD51-8597-1EBB58C84893}"/>
+                      <a16:creationId xmlns:a16="http://schemas.microsoft.com/office/drawing/2014/main" xmlns="" id="{A543A807-C3C8-BD51-8597-1EBB58C84893}"/>
                     </a:ext>
                   </a:extLst>
                 </p:cNvPr>
@@ -30953,7 +31262,7 @@
             <p:cNvPr id="22" name="Rectangle 209">
               <a:extLst>
                 <a:ext uri="{FF2B5EF4-FFF2-40B4-BE49-F238E27FC236}">
-                  <a16:creationId xmlns:a16="http://schemas.microsoft.com/office/drawing/2014/main" id="{3C9EC24F-2E75-EBF6-8409-4B406FE8885F}"/>
+                  <a16:creationId xmlns:a16="http://schemas.microsoft.com/office/drawing/2014/main" xmlns="" id="{3C9EC24F-2E75-EBF6-8409-4B406FE8885F}"/>
                 </a:ext>
               </a:extLst>
             </p:cNvPr>
@@ -30984,7 +31293,7 @@
             <p:cNvPr id="23" name="Rectangle 210">
               <a:extLst>
                 <a:ext uri="{FF2B5EF4-FFF2-40B4-BE49-F238E27FC236}">
-                  <a16:creationId xmlns:a16="http://schemas.microsoft.com/office/drawing/2014/main" id="{613B01BE-7AFB-14BD-8B16-F3B017BD300E}"/>
+                  <a16:creationId xmlns:a16="http://schemas.microsoft.com/office/drawing/2014/main" xmlns="" id="{613B01BE-7AFB-14BD-8B16-F3B017BD300E}"/>
                 </a:ext>
               </a:extLst>
             </p:cNvPr>
@@ -31036,7 +31345,7 @@
             <p:cNvPr id="24" name="Straight Arrow Connector 211">
               <a:extLst>
                 <a:ext uri="{FF2B5EF4-FFF2-40B4-BE49-F238E27FC236}">
-                  <a16:creationId xmlns:a16="http://schemas.microsoft.com/office/drawing/2014/main" id="{A94D67DE-D359-015C-7A5F-F22C1603B4D4}"/>
+                  <a16:creationId xmlns:a16="http://schemas.microsoft.com/office/drawing/2014/main" xmlns="" id="{A94D67DE-D359-015C-7A5F-F22C1603B4D4}"/>
                 </a:ext>
               </a:extLst>
             </p:cNvPr>
@@ -31078,7 +31387,7 @@
             <p:cNvPr id="25" name="Straight Arrow Connector 212">
               <a:extLst>
                 <a:ext uri="{FF2B5EF4-FFF2-40B4-BE49-F238E27FC236}">
-                  <a16:creationId xmlns:a16="http://schemas.microsoft.com/office/drawing/2014/main" id="{3B3FF642-CFA5-D5DD-BCCF-4813E8B92E49}"/>
+                  <a16:creationId xmlns:a16="http://schemas.microsoft.com/office/drawing/2014/main" xmlns="" id="{3B3FF642-CFA5-D5DD-BCCF-4813E8B92E49}"/>
                 </a:ext>
               </a:extLst>
             </p:cNvPr>
@@ -31122,7 +31431,7 @@
                 <p:cNvPr id="26" name="TextBox 213">
                   <a:extLst>
                     <a:ext uri="{FF2B5EF4-FFF2-40B4-BE49-F238E27FC236}">
-                      <a16:creationId xmlns:a16="http://schemas.microsoft.com/office/drawing/2014/main" id="{C302097C-EB4F-859A-F2CE-7956A62F9AEE}"/>
+                      <a16:creationId xmlns:a16="http://schemas.microsoft.com/office/drawing/2014/main" xmlns="" id="{C302097C-EB4F-859A-F2CE-7956A62F9AEE}"/>
                     </a:ext>
                   </a:extLst>
                 </p:cNvPr>
@@ -31229,7 +31538,7 @@
             <p:cNvPr id="27" name="Straight Connector 214">
               <a:extLst>
                 <a:ext uri="{FF2B5EF4-FFF2-40B4-BE49-F238E27FC236}">
-                  <a16:creationId xmlns:a16="http://schemas.microsoft.com/office/drawing/2014/main" id="{5129EE84-529E-28A1-4C57-590CCA417322}"/>
+                  <a16:creationId xmlns:a16="http://schemas.microsoft.com/office/drawing/2014/main" xmlns="" id="{5129EE84-529E-28A1-4C57-590CCA417322}"/>
                 </a:ext>
               </a:extLst>
             </p:cNvPr>
@@ -31270,7 +31579,7 @@
             <p:cNvPr id="28" name="TextBox 215">
               <a:extLst>
                 <a:ext uri="{FF2B5EF4-FFF2-40B4-BE49-F238E27FC236}">
-                  <a16:creationId xmlns:a16="http://schemas.microsoft.com/office/drawing/2014/main" id="{419C4EF9-84E4-F619-BD46-C934DDBF20B3}"/>
+                  <a16:creationId xmlns:a16="http://schemas.microsoft.com/office/drawing/2014/main" xmlns="" id="{419C4EF9-84E4-F619-BD46-C934DDBF20B3}"/>
                 </a:ext>
               </a:extLst>
             </p:cNvPr>
@@ -31305,7 +31614,7 @@
             <p:cNvPr id="29" name="TextBox 216">
               <a:extLst>
                 <a:ext uri="{FF2B5EF4-FFF2-40B4-BE49-F238E27FC236}">
-                  <a16:creationId xmlns:a16="http://schemas.microsoft.com/office/drawing/2014/main" id="{B49C8A19-C5D3-CB8A-1FFE-C838096537D7}"/>
+                  <a16:creationId xmlns:a16="http://schemas.microsoft.com/office/drawing/2014/main" xmlns="" id="{B49C8A19-C5D3-CB8A-1FFE-C838096537D7}"/>
                 </a:ext>
               </a:extLst>
             </p:cNvPr>
@@ -31340,7 +31649,7 @@
             <p:cNvPr id="30" name="TextBox 217">
               <a:extLst>
                 <a:ext uri="{FF2B5EF4-FFF2-40B4-BE49-F238E27FC236}">
-                  <a16:creationId xmlns:a16="http://schemas.microsoft.com/office/drawing/2014/main" id="{8B5444C1-4835-4DC9-95D4-2D797009FE88}"/>
+                  <a16:creationId xmlns:a16="http://schemas.microsoft.com/office/drawing/2014/main" xmlns="" id="{8B5444C1-4835-4DC9-95D4-2D797009FE88}"/>
                 </a:ext>
               </a:extLst>
             </p:cNvPr>
@@ -31375,7 +31684,7 @@
             <p:cNvPr id="31" name="TextBox 218">
               <a:extLst>
                 <a:ext uri="{FF2B5EF4-FFF2-40B4-BE49-F238E27FC236}">
-                  <a16:creationId xmlns:a16="http://schemas.microsoft.com/office/drawing/2014/main" id="{8F598DA6-57EC-689B-4B3B-03A30C599C71}"/>
+                  <a16:creationId xmlns:a16="http://schemas.microsoft.com/office/drawing/2014/main" xmlns="" id="{8F598DA6-57EC-689B-4B3B-03A30C599C71}"/>
                 </a:ext>
               </a:extLst>
             </p:cNvPr>
@@ -31410,7 +31719,7 @@
             <p:cNvPr id="32" name="TextBox 219">
               <a:extLst>
                 <a:ext uri="{FF2B5EF4-FFF2-40B4-BE49-F238E27FC236}">
-                  <a16:creationId xmlns:a16="http://schemas.microsoft.com/office/drawing/2014/main" id="{5AFC2D2C-2E35-799B-7530-20318FD4C3FD}"/>
+                  <a16:creationId xmlns:a16="http://schemas.microsoft.com/office/drawing/2014/main" xmlns="" id="{5AFC2D2C-2E35-799B-7530-20318FD4C3FD}"/>
                 </a:ext>
               </a:extLst>
             </p:cNvPr>
@@ -31445,7 +31754,7 @@
             <p:cNvPr id="33" name="TextBox 220">
               <a:extLst>
                 <a:ext uri="{FF2B5EF4-FFF2-40B4-BE49-F238E27FC236}">
-                  <a16:creationId xmlns:a16="http://schemas.microsoft.com/office/drawing/2014/main" id="{72E7FCAD-8086-DA86-9D1A-01CD8D297D6D}"/>
+                  <a16:creationId xmlns:a16="http://schemas.microsoft.com/office/drawing/2014/main" xmlns="" id="{72E7FCAD-8086-DA86-9D1A-01CD8D297D6D}"/>
                 </a:ext>
               </a:extLst>
             </p:cNvPr>
@@ -31480,7 +31789,7 @@
             <p:cNvPr id="34" name="TextBox 221">
               <a:extLst>
                 <a:ext uri="{FF2B5EF4-FFF2-40B4-BE49-F238E27FC236}">
-                  <a16:creationId xmlns:a16="http://schemas.microsoft.com/office/drawing/2014/main" id="{67985B3B-35C0-A256-F177-DABD146D355D}"/>
+                  <a16:creationId xmlns:a16="http://schemas.microsoft.com/office/drawing/2014/main" xmlns="" id="{67985B3B-35C0-A256-F177-DABD146D355D}"/>
                 </a:ext>
               </a:extLst>
             </p:cNvPr>
@@ -31515,7 +31824,7 @@
             <p:cNvPr id="35" name="TextBox 222">
               <a:extLst>
                 <a:ext uri="{FF2B5EF4-FFF2-40B4-BE49-F238E27FC236}">
-                  <a16:creationId xmlns:a16="http://schemas.microsoft.com/office/drawing/2014/main" id="{1082F9D4-ED49-B699-3054-2512297442F3}"/>
+                  <a16:creationId xmlns:a16="http://schemas.microsoft.com/office/drawing/2014/main" xmlns="" id="{1082F9D4-ED49-B699-3054-2512297442F3}"/>
                 </a:ext>
               </a:extLst>
             </p:cNvPr>
@@ -31550,7 +31859,7 @@
             <p:cNvPr id="36" name="TextBox 223">
               <a:extLst>
                 <a:ext uri="{FF2B5EF4-FFF2-40B4-BE49-F238E27FC236}">
-                  <a16:creationId xmlns:a16="http://schemas.microsoft.com/office/drawing/2014/main" id="{B12FE238-DCF7-C2AA-53CA-BD857DDAD2CA}"/>
+                  <a16:creationId xmlns:a16="http://schemas.microsoft.com/office/drawing/2014/main" xmlns="" id="{B12FE238-DCF7-C2AA-53CA-BD857DDAD2CA}"/>
                 </a:ext>
               </a:extLst>
             </p:cNvPr>
@@ -31585,7 +31894,7 @@
             <p:cNvPr id="37" name="Rectangle 224">
               <a:extLst>
                 <a:ext uri="{FF2B5EF4-FFF2-40B4-BE49-F238E27FC236}">
-                  <a16:creationId xmlns:a16="http://schemas.microsoft.com/office/drawing/2014/main" id="{BE3C4AB5-520D-C097-9298-A5857B904614}"/>
+                  <a16:creationId xmlns:a16="http://schemas.microsoft.com/office/drawing/2014/main" xmlns="" id="{BE3C4AB5-520D-C097-9298-A5857B904614}"/>
                 </a:ext>
               </a:extLst>
             </p:cNvPr>
@@ -31637,7 +31946,7 @@
             <p:cNvPr id="38" name="Rectangle 225">
               <a:extLst>
                 <a:ext uri="{FF2B5EF4-FFF2-40B4-BE49-F238E27FC236}">
-                  <a16:creationId xmlns:a16="http://schemas.microsoft.com/office/drawing/2014/main" id="{25CE2C4D-01F0-5CAF-47B3-F308830F6DA0}"/>
+                  <a16:creationId xmlns:a16="http://schemas.microsoft.com/office/drawing/2014/main" xmlns="" id="{25CE2C4D-01F0-5CAF-47B3-F308830F6DA0}"/>
                 </a:ext>
               </a:extLst>
             </p:cNvPr>
@@ -31689,7 +31998,7 @@
             <p:cNvPr id="39" name="Rectangle 226">
               <a:extLst>
                 <a:ext uri="{FF2B5EF4-FFF2-40B4-BE49-F238E27FC236}">
-                  <a16:creationId xmlns:a16="http://schemas.microsoft.com/office/drawing/2014/main" id="{524F2839-63B5-E0B8-E4B3-12A7B9331786}"/>
+                  <a16:creationId xmlns:a16="http://schemas.microsoft.com/office/drawing/2014/main" xmlns="" id="{524F2839-63B5-E0B8-E4B3-12A7B9331786}"/>
                 </a:ext>
               </a:extLst>
             </p:cNvPr>
@@ -31741,7 +32050,7 @@
             <p:cNvPr id="40" name="Rectangle 227">
               <a:extLst>
                 <a:ext uri="{FF2B5EF4-FFF2-40B4-BE49-F238E27FC236}">
-                  <a16:creationId xmlns:a16="http://schemas.microsoft.com/office/drawing/2014/main" id="{18A9C2BE-6A76-22CC-779F-19FF0B5C6019}"/>
+                  <a16:creationId xmlns:a16="http://schemas.microsoft.com/office/drawing/2014/main" xmlns="" id="{18A9C2BE-6A76-22CC-779F-19FF0B5C6019}"/>
                 </a:ext>
               </a:extLst>
             </p:cNvPr>
@@ -31793,7 +32102,7 @@
             <p:cNvPr id="41" name="Rectangle 228">
               <a:extLst>
                 <a:ext uri="{FF2B5EF4-FFF2-40B4-BE49-F238E27FC236}">
-                  <a16:creationId xmlns:a16="http://schemas.microsoft.com/office/drawing/2014/main" id="{4809BEB6-301C-24A2-4452-4371B42601F3}"/>
+                  <a16:creationId xmlns:a16="http://schemas.microsoft.com/office/drawing/2014/main" xmlns="" id="{4809BEB6-301C-24A2-4452-4371B42601F3}"/>
                 </a:ext>
               </a:extLst>
             </p:cNvPr>
@@ -31845,7 +32154,7 @@
             <p:cNvPr id="42" name="Rectangle 229">
               <a:extLst>
                 <a:ext uri="{FF2B5EF4-FFF2-40B4-BE49-F238E27FC236}">
-                  <a16:creationId xmlns:a16="http://schemas.microsoft.com/office/drawing/2014/main" id="{55F9D93A-7C15-8DF8-23D0-7AB98387F308}"/>
+                  <a16:creationId xmlns:a16="http://schemas.microsoft.com/office/drawing/2014/main" xmlns="" id="{55F9D93A-7C15-8DF8-23D0-7AB98387F308}"/>
                 </a:ext>
               </a:extLst>
             </p:cNvPr>
@@ -31897,7 +32206,7 @@
             <p:cNvPr id="43" name="Rectangle 230">
               <a:extLst>
                 <a:ext uri="{FF2B5EF4-FFF2-40B4-BE49-F238E27FC236}">
-                  <a16:creationId xmlns:a16="http://schemas.microsoft.com/office/drawing/2014/main" id="{1FD7C302-B512-2F79-7717-AE1CC46D169D}"/>
+                  <a16:creationId xmlns:a16="http://schemas.microsoft.com/office/drawing/2014/main" xmlns="" id="{1FD7C302-B512-2F79-7717-AE1CC46D169D}"/>
                 </a:ext>
               </a:extLst>
             </p:cNvPr>
@@ -31949,7 +32258,7 @@
             <p:cNvPr id="44" name="Rectangle 231">
               <a:extLst>
                 <a:ext uri="{FF2B5EF4-FFF2-40B4-BE49-F238E27FC236}">
-                  <a16:creationId xmlns:a16="http://schemas.microsoft.com/office/drawing/2014/main" id="{F105126A-C062-5E16-EBAB-2793FBB4C5E5}"/>
+                  <a16:creationId xmlns:a16="http://schemas.microsoft.com/office/drawing/2014/main" xmlns="" id="{F105126A-C062-5E16-EBAB-2793FBB4C5E5}"/>
                 </a:ext>
               </a:extLst>
             </p:cNvPr>
@@ -32001,7 +32310,7 @@
             <p:cNvPr id="45" name="Rectangle 232">
               <a:extLst>
                 <a:ext uri="{FF2B5EF4-FFF2-40B4-BE49-F238E27FC236}">
-                  <a16:creationId xmlns:a16="http://schemas.microsoft.com/office/drawing/2014/main" id="{27054C75-3F57-C464-7E18-413CDA753AAB}"/>
+                  <a16:creationId xmlns:a16="http://schemas.microsoft.com/office/drawing/2014/main" xmlns="" id="{27054C75-3F57-C464-7E18-413CDA753AAB}"/>
                 </a:ext>
               </a:extLst>
             </p:cNvPr>
@@ -32053,7 +32362,7 @@
             <p:cNvPr id="46" name="Rectangle 233">
               <a:extLst>
                 <a:ext uri="{FF2B5EF4-FFF2-40B4-BE49-F238E27FC236}">
-                  <a16:creationId xmlns:a16="http://schemas.microsoft.com/office/drawing/2014/main" id="{6C5A7B3A-2D2B-BFE7-E8E3-C21547E926D4}"/>
+                  <a16:creationId xmlns:a16="http://schemas.microsoft.com/office/drawing/2014/main" xmlns="" id="{6C5A7B3A-2D2B-BFE7-E8E3-C21547E926D4}"/>
                 </a:ext>
               </a:extLst>
             </p:cNvPr>
@@ -32105,7 +32414,7 @@
             <p:cNvPr id="47" name="Rectangle 234">
               <a:extLst>
                 <a:ext uri="{FF2B5EF4-FFF2-40B4-BE49-F238E27FC236}">
-                  <a16:creationId xmlns:a16="http://schemas.microsoft.com/office/drawing/2014/main" id="{600541E6-B9E5-4369-A503-DE197CCE88EE}"/>
+                  <a16:creationId xmlns:a16="http://schemas.microsoft.com/office/drawing/2014/main" xmlns="" id="{600541E6-B9E5-4369-A503-DE197CCE88EE}"/>
                 </a:ext>
               </a:extLst>
             </p:cNvPr>
@@ -32157,7 +32466,7 @@
             <p:cNvPr id="48" name="Rectangle 235">
               <a:extLst>
                 <a:ext uri="{FF2B5EF4-FFF2-40B4-BE49-F238E27FC236}">
-                  <a16:creationId xmlns:a16="http://schemas.microsoft.com/office/drawing/2014/main" id="{BFE2F29F-99DA-0057-8182-0601BA2352A8}"/>
+                  <a16:creationId xmlns:a16="http://schemas.microsoft.com/office/drawing/2014/main" xmlns="" id="{BFE2F29F-99DA-0057-8182-0601BA2352A8}"/>
                 </a:ext>
               </a:extLst>
             </p:cNvPr>
@@ -32209,7 +32518,7 @@
             <p:cNvPr id="49" name="Rectangle 236">
               <a:extLst>
                 <a:ext uri="{FF2B5EF4-FFF2-40B4-BE49-F238E27FC236}">
-                  <a16:creationId xmlns:a16="http://schemas.microsoft.com/office/drawing/2014/main" id="{6A9C1E84-7EFB-9996-390A-F7D573E5BDE5}"/>
+                  <a16:creationId xmlns:a16="http://schemas.microsoft.com/office/drawing/2014/main" xmlns="" id="{6A9C1E84-7EFB-9996-390A-F7D573E5BDE5}"/>
                 </a:ext>
               </a:extLst>
             </p:cNvPr>
@@ -32261,7 +32570,7 @@
             <p:cNvPr id="50" name="Rectangle 237">
               <a:extLst>
                 <a:ext uri="{FF2B5EF4-FFF2-40B4-BE49-F238E27FC236}">
-                  <a16:creationId xmlns:a16="http://schemas.microsoft.com/office/drawing/2014/main" id="{FFEC69C1-8AE0-25B2-0DC8-0EB94E8A6620}"/>
+                  <a16:creationId xmlns:a16="http://schemas.microsoft.com/office/drawing/2014/main" xmlns="" id="{FFEC69C1-8AE0-25B2-0DC8-0EB94E8A6620}"/>
                 </a:ext>
               </a:extLst>
             </p:cNvPr>
@@ -32313,7 +32622,7 @@
             <p:cNvPr id="51" name="Rectangle 238">
               <a:extLst>
                 <a:ext uri="{FF2B5EF4-FFF2-40B4-BE49-F238E27FC236}">
-                  <a16:creationId xmlns:a16="http://schemas.microsoft.com/office/drawing/2014/main" id="{AF5BFC24-A1A6-F4F4-27C8-A1C75FB4ACA7}"/>
+                  <a16:creationId xmlns:a16="http://schemas.microsoft.com/office/drawing/2014/main" xmlns="" id="{AF5BFC24-A1A6-F4F4-27C8-A1C75FB4ACA7}"/>
                 </a:ext>
               </a:extLst>
             </p:cNvPr>
@@ -32365,7 +32674,7 @@
             <p:cNvPr id="52" name="Isosceles Triangle 239">
               <a:extLst>
                 <a:ext uri="{FF2B5EF4-FFF2-40B4-BE49-F238E27FC236}">
-                  <a16:creationId xmlns:a16="http://schemas.microsoft.com/office/drawing/2014/main" id="{B31D200D-84E6-1E3E-DF28-26CE3C2AE058}"/>
+                  <a16:creationId xmlns:a16="http://schemas.microsoft.com/office/drawing/2014/main" xmlns="" id="{B31D200D-84E6-1E3E-DF28-26CE3C2AE058}"/>
                 </a:ext>
               </a:extLst>
             </p:cNvPr>
@@ -32419,7 +32728,7 @@
             <p:cNvPr id="53" name="Isosceles Triangle 240">
               <a:extLst>
                 <a:ext uri="{FF2B5EF4-FFF2-40B4-BE49-F238E27FC236}">
-                  <a16:creationId xmlns:a16="http://schemas.microsoft.com/office/drawing/2014/main" id="{7FEF68A4-E379-3019-4460-F040608CABBC}"/>
+                  <a16:creationId xmlns:a16="http://schemas.microsoft.com/office/drawing/2014/main" xmlns="" id="{7FEF68A4-E379-3019-4460-F040608CABBC}"/>
                 </a:ext>
               </a:extLst>
             </p:cNvPr>
@@ -32473,7 +32782,7 @@
             <p:cNvPr id="54" name="Isosceles Triangle 241">
               <a:extLst>
                 <a:ext uri="{FF2B5EF4-FFF2-40B4-BE49-F238E27FC236}">
-                  <a16:creationId xmlns:a16="http://schemas.microsoft.com/office/drawing/2014/main" id="{40A76D57-0831-B181-48A0-EE3B8D2DDDCB}"/>
+                  <a16:creationId xmlns:a16="http://schemas.microsoft.com/office/drawing/2014/main" xmlns="" id="{40A76D57-0831-B181-48A0-EE3B8D2DDDCB}"/>
                 </a:ext>
               </a:extLst>
             </p:cNvPr>
@@ -32527,7 +32836,7 @@
             <p:cNvPr id="55" name="Isosceles Triangle 242">
               <a:extLst>
                 <a:ext uri="{FF2B5EF4-FFF2-40B4-BE49-F238E27FC236}">
-                  <a16:creationId xmlns:a16="http://schemas.microsoft.com/office/drawing/2014/main" id="{AFE6660D-9BDD-4BD7-3C65-779BA770EF52}"/>
+                  <a16:creationId xmlns:a16="http://schemas.microsoft.com/office/drawing/2014/main" xmlns="" id="{AFE6660D-9BDD-4BD7-3C65-779BA770EF52}"/>
                 </a:ext>
               </a:extLst>
             </p:cNvPr>
@@ -32581,7 +32890,7 @@
             <p:cNvPr id="56" name="Isosceles Triangle 243">
               <a:extLst>
                 <a:ext uri="{FF2B5EF4-FFF2-40B4-BE49-F238E27FC236}">
-                  <a16:creationId xmlns:a16="http://schemas.microsoft.com/office/drawing/2014/main" id="{7B813541-A5A8-369C-40D8-01AEDDD90FAB}"/>
+                  <a16:creationId xmlns:a16="http://schemas.microsoft.com/office/drawing/2014/main" xmlns="" id="{7B813541-A5A8-369C-40D8-01AEDDD90FAB}"/>
                 </a:ext>
               </a:extLst>
             </p:cNvPr>
@@ -32635,7 +32944,7 @@
             <p:cNvPr id="57" name="Oval 244">
               <a:extLst>
                 <a:ext uri="{FF2B5EF4-FFF2-40B4-BE49-F238E27FC236}">
-                  <a16:creationId xmlns:a16="http://schemas.microsoft.com/office/drawing/2014/main" id="{B64B1456-7B54-BB8B-E249-DA12E016EB63}"/>
+                  <a16:creationId xmlns:a16="http://schemas.microsoft.com/office/drawing/2014/main" xmlns="" id="{B64B1456-7B54-BB8B-E249-DA12E016EB63}"/>
                 </a:ext>
               </a:extLst>
             </p:cNvPr>
@@ -32691,7 +33000,7 @@
                 <p:cNvPr id="58" name="Rectangle 245">
                   <a:extLst>
                     <a:ext uri="{FF2B5EF4-FFF2-40B4-BE49-F238E27FC236}">
-                      <a16:creationId xmlns:a16="http://schemas.microsoft.com/office/drawing/2014/main" id="{B1ECE845-B3C2-A718-00AA-95A5F2CEBF75}"/>
+                      <a16:creationId xmlns:a16="http://schemas.microsoft.com/office/drawing/2014/main" xmlns="" id="{B1ECE845-B3C2-A718-00AA-95A5F2CEBF75}"/>
                     </a:ext>
                   </a:extLst>
                 </p:cNvPr>
@@ -32801,7 +33110,7 @@
             <p:cNvPr id="59" name="Freeform 246">
               <a:extLst>
                 <a:ext uri="{FF2B5EF4-FFF2-40B4-BE49-F238E27FC236}">
-                  <a16:creationId xmlns:a16="http://schemas.microsoft.com/office/drawing/2014/main" id="{F0E4220D-D436-A312-4B38-08EEBB8CA41B}"/>
+                  <a16:creationId xmlns:a16="http://schemas.microsoft.com/office/drawing/2014/main" xmlns="" id="{F0E4220D-D436-A312-4B38-08EEBB8CA41B}"/>
                 </a:ext>
               </a:extLst>
             </p:cNvPr>
@@ -32881,7 +33190,7 @@
           <p:cNvPr id="60" name="Rectangle 7">
             <a:extLst>
               <a:ext uri="{FF2B5EF4-FFF2-40B4-BE49-F238E27FC236}">
-                <a16:creationId xmlns:a16="http://schemas.microsoft.com/office/drawing/2014/main" id="{605CFD57-551E-2269-3818-45F21FD91DFC}"/>
+                <a16:creationId xmlns:a16="http://schemas.microsoft.com/office/drawing/2014/main" xmlns="" id="{605CFD57-551E-2269-3818-45F21FD91DFC}"/>
               </a:ext>
             </a:extLst>
           </p:cNvPr>
@@ -32930,7 +33239,7 @@
           <p:cNvPr id="62" name="Conector de Seta Reta 61">
             <a:extLst>
               <a:ext uri="{FF2B5EF4-FFF2-40B4-BE49-F238E27FC236}">
-                <a16:creationId xmlns:a16="http://schemas.microsoft.com/office/drawing/2014/main" id="{22C75E14-C0F8-AE30-2699-62A9682CF83A}"/>
+                <a16:creationId xmlns:a16="http://schemas.microsoft.com/office/drawing/2014/main" xmlns="" id="{22C75E14-C0F8-AE30-2699-62A9682CF83A}"/>
               </a:ext>
             </a:extLst>
           </p:cNvPr>
@@ -32974,7 +33283,7 @@
           <p:cNvPr id="64" name="Conector de Seta Reta 63">
             <a:extLst>
               <a:ext uri="{FF2B5EF4-FFF2-40B4-BE49-F238E27FC236}">
-                <a16:creationId xmlns:a16="http://schemas.microsoft.com/office/drawing/2014/main" id="{91F62356-6BE5-D2AB-E57F-27A92311839B}"/>
+                <a16:creationId xmlns:a16="http://schemas.microsoft.com/office/drawing/2014/main" xmlns="" id="{91F62356-6BE5-D2AB-E57F-27A92311839B}"/>
               </a:ext>
             </a:extLst>
           </p:cNvPr>
@@ -33023,10 +33332,312 @@
   <p:clrMapOvr>
     <a:masterClrMapping/>
   </p:clrMapOvr>
+  <p:timing>
+    <p:tnLst>
+      <p:par>
+        <p:cTn id="1" dur="indefinite" restart="never" nodeType="tmRoot"/>
+      </p:par>
+    </p:tnLst>
+  </p:timing>
 </p:sld>
 </file>
 
-<file path=ppt/slides/slide27.xml><?xml version="1.0" encoding="utf-8"?>
+<file path=ppt/slides/slide3.xml><?xml version="1.0" encoding="utf-8"?>
+<p:sld xmlns:a="http://schemas.openxmlformats.org/drawingml/2006/main" xmlns:r="http://schemas.openxmlformats.org/officeDocument/2006/relationships" xmlns:p="http://schemas.openxmlformats.org/presentationml/2006/main">
+  <p:cSld>
+    <p:spTree>
+      <p:nvGrpSpPr>
+        <p:cNvPr id="1" name=""/>
+        <p:cNvGrpSpPr/>
+        <p:nvPr/>
+      </p:nvGrpSpPr>
+      <p:grpSpPr>
+        <a:xfrm>
+          <a:off x="0" y="0"/>
+          <a:ext cx="0" cy="0"/>
+          <a:chOff x="0" y="0"/>
+          <a:chExt cx="0" cy="0"/>
+        </a:xfrm>
+      </p:grpSpPr>
+      <p:sp>
+        <p:nvSpPr>
+          <p:cNvPr id="2" name="Título 1">
+            <a:extLst>
+              <a:ext uri="{FF2B5EF4-FFF2-40B4-BE49-F238E27FC236}">
+                <a16:creationId xmlns:a16="http://schemas.microsoft.com/office/drawing/2014/main" xmlns="" id="{C4F48192-B348-4C3E-8621-D3755D2230F8}"/>
+              </a:ext>
+            </a:extLst>
+          </p:cNvPr>
+          <p:cNvSpPr>
+            <a:spLocks noGrp="1"/>
+          </p:cNvSpPr>
+          <p:nvPr>
+            <p:ph type="title"/>
+          </p:nvPr>
+        </p:nvSpPr>
+        <p:spPr/>
+        <p:txBody>
+          <a:bodyPr/>
+          <a:lstStyle/>
+          <a:p>
+            <a:r>
+              <a:rPr lang="pt-BR" dirty="0"/>
+              <a:t>Objetivo do curso</a:t>
+            </a:r>
+          </a:p>
+        </p:txBody>
+      </p:sp>
+      <p:sp>
+        <p:nvSpPr>
+          <p:cNvPr id="3" name="Espaço Reservado para Conteúdo 2">
+            <a:extLst>
+              <a:ext uri="{FF2B5EF4-FFF2-40B4-BE49-F238E27FC236}">
+                <a16:creationId xmlns:a16="http://schemas.microsoft.com/office/drawing/2014/main" xmlns="" id="{E3DECB90-AFD9-4AC6-A356-C93A7442A6E6}"/>
+              </a:ext>
+            </a:extLst>
+          </p:cNvPr>
+          <p:cNvSpPr>
+            <a:spLocks noGrp="1"/>
+          </p:cNvSpPr>
+          <p:nvPr>
+            <p:ph idx="1"/>
+          </p:nvPr>
+        </p:nvSpPr>
+        <p:spPr>
+          <a:xfrm>
+            <a:off x="838200" y="1825623"/>
+            <a:ext cx="8930268" cy="5032376"/>
+          </a:xfrm>
+        </p:spPr>
+        <p:txBody>
+          <a:bodyPr>
+            <a:normAutofit/>
+          </a:bodyPr>
+          <a:lstStyle/>
+          <a:p>
+            <a:r>
+              <a:rPr lang="pt-BR" dirty="0"/>
+              <a:t>O objetivo principal do curso é apresentar</a:t>
+            </a:r>
+          </a:p>
+          <a:p>
+            <a:pPr lvl="1">
+              <a:buFont typeface="Wingdings" panose="05000000000000000000" pitchFamily="2" charset="2"/>
+              <a:buChar char="§"/>
+            </a:pPr>
+            <a:r>
+              <a:rPr lang="pt-BR" dirty="0"/>
+              <a:t>os </a:t>
+            </a:r>
+            <a:r>
+              <a:rPr lang="pt-BR" b="1" i="1" dirty="0"/>
+              <a:t>conceitos fundamentais </a:t>
+            </a:r>
+            <a:r>
+              <a:rPr lang="pt-BR" dirty="0"/>
+              <a:t>da teoria do aprendizado de máquina.</a:t>
+            </a:r>
+          </a:p>
+          <a:p>
+            <a:pPr lvl="1">
+              <a:buFont typeface="Wingdings" panose="05000000000000000000" pitchFamily="2" charset="2"/>
+              <a:buChar char="§"/>
+            </a:pPr>
+            <a:r>
+              <a:rPr lang="pt-BR" dirty="0"/>
+              <a:t>um </a:t>
+            </a:r>
+            <a:r>
+              <a:rPr lang="pt-BR" b="1" i="1" dirty="0"/>
+              <a:t>conjunto de ferramentas</a:t>
+            </a:r>
+            <a:r>
+              <a:rPr lang="pt-BR" dirty="0"/>
+              <a:t> (i.e., </a:t>
+            </a:r>
+            <a:r>
+              <a:rPr lang="en-US" dirty="0" err="1"/>
+              <a:t>algoritmos</a:t>
+            </a:r>
+            <a:r>
+              <a:rPr lang="en-US" dirty="0"/>
+              <a:t>, </a:t>
+            </a:r>
+            <a:r>
+              <a:rPr lang="en-US" dirty="0" err="1"/>
+              <a:t>métricas</a:t>
+            </a:r>
+            <a:r>
+              <a:rPr lang="en-US" dirty="0"/>
+              <a:t>, </a:t>
+            </a:r>
+            <a:r>
+              <a:rPr lang="en-US" dirty="0" err="1"/>
+              <a:t>técnicas</a:t>
+            </a:r>
+            <a:r>
+              <a:rPr lang="pt-BR" dirty="0"/>
+              <a:t>) de aprendizado de máquina para solução de problemas.</a:t>
+            </a:r>
+          </a:p>
+          <a:p>
+            <a:r>
+              <a:rPr lang="pt-BR" dirty="0"/>
+              <a:t>Ao final do curso vocês devem ser capazes de</a:t>
+            </a:r>
+          </a:p>
+          <a:p>
+            <a:pPr lvl="1">
+              <a:buFont typeface="Wingdings" panose="05000000000000000000" pitchFamily="2" charset="2"/>
+              <a:buChar char="§"/>
+            </a:pPr>
+            <a:r>
+              <a:rPr lang="pt-BR" dirty="0"/>
+              <a:t>Entender e discutir </a:t>
+            </a:r>
+            <a:r>
+              <a:rPr lang="pt-BR" dirty="0" smtClean="0"/>
+              <a:t>os </a:t>
+            </a:r>
+            <a:r>
+              <a:rPr lang="pt-BR" dirty="0"/>
+              <a:t>principais algoritmos de ML.</a:t>
+            </a:r>
+          </a:p>
+          <a:p>
+            <a:pPr lvl="1">
+              <a:buFont typeface="Wingdings" panose="05000000000000000000" pitchFamily="2" charset="2"/>
+              <a:buChar char="§"/>
+            </a:pPr>
+            <a:r>
+              <a:rPr lang="pt-BR" dirty="0"/>
+              <a:t>Compreender a terminologia utilizada na área.</a:t>
+            </a:r>
+          </a:p>
+          <a:p>
+            <a:pPr lvl="1">
+              <a:buFont typeface="Wingdings" panose="05000000000000000000" pitchFamily="2" charset="2"/>
+              <a:buChar char="§"/>
+            </a:pPr>
+            <a:r>
+              <a:rPr lang="pt-BR" dirty="0"/>
+              <a:t>Entender o funcionamento de novos algoritmos de ML.</a:t>
+            </a:r>
+          </a:p>
+          <a:p>
+            <a:pPr lvl="1">
+              <a:buFont typeface="Wingdings" panose="05000000000000000000" pitchFamily="2" charset="2"/>
+              <a:buChar char="§"/>
+            </a:pPr>
+            <a:r>
+              <a:rPr lang="pt-BR" dirty="0"/>
+              <a:t>Aplicar algoritmos de ML para a resolução de problemas.</a:t>
+            </a:r>
+          </a:p>
+        </p:txBody>
+      </p:sp>
+      <p:pic>
+        <p:nvPicPr>
+          <p:cNvPr id="3074" name="Picture 2" descr="Image result for machine learning">
+            <a:extLst>
+              <a:ext uri="{FF2B5EF4-FFF2-40B4-BE49-F238E27FC236}">
+                <a16:creationId xmlns:a16="http://schemas.microsoft.com/office/drawing/2014/main" xmlns="" id="{78A93243-9634-4B0E-B1B2-37A218EAEADD}"/>
+              </a:ext>
+            </a:extLst>
+          </p:cNvPr>
+          <p:cNvPicPr>
+            <a:picLocks noChangeAspect="1" noChangeArrowheads="1"/>
+          </p:cNvPicPr>
+          <p:nvPr/>
+        </p:nvPicPr>
+        <p:blipFill>
+          <a:blip r:embed="rId3" cstate="print">
+            <a:extLst>
+              <a:ext uri="{28A0092B-C50C-407E-A947-70E740481C1C}">
+                <a14:useLocalDpi xmlns:a14="http://schemas.microsoft.com/office/drawing/2010/main" val="0"/>
+              </a:ext>
+            </a:extLst>
+          </a:blip>
+          <a:srcRect/>
+          <a:stretch>
+            <a:fillRect/>
+          </a:stretch>
+        </p:blipFill>
+        <p:spPr bwMode="auto">
+          <a:xfrm>
+            <a:off x="8942216" y="4583150"/>
+            <a:ext cx="3249784" cy="2274849"/>
+          </a:xfrm>
+          <a:prstGeom prst="rect">
+            <a:avLst/>
+          </a:prstGeom>
+          <a:noFill/>
+          <a:extLst>
+            <a:ext uri="{909E8E84-426E-40DD-AFC4-6F175D3DCCD1}">
+              <a14:hiddenFill xmlns:a14="http://schemas.microsoft.com/office/drawing/2010/main">
+                <a:solidFill>
+                  <a:srgbClr val="FFFFFF"/>
+                </a:solidFill>
+              </a14:hiddenFill>
+            </a:ext>
+          </a:extLst>
+        </p:spPr>
+      </p:pic>
+      <p:pic>
+        <p:nvPicPr>
+          <p:cNvPr id="1026" name="Picture 2" descr="Machine Learning | Informatec"/>
+          <p:cNvPicPr>
+            <a:picLocks noChangeAspect="1" noChangeArrowheads="1"/>
+          </p:cNvPicPr>
+          <p:nvPr/>
+        </p:nvPicPr>
+        <p:blipFill>
+          <a:blip r:embed="rId4">
+            <a:extLst>
+              <a:ext uri="{28A0092B-C50C-407E-A947-70E740481C1C}">
+                <a14:useLocalDpi xmlns:a14="http://schemas.microsoft.com/office/drawing/2010/main" val="0"/>
+              </a:ext>
+            </a:extLst>
+          </a:blip>
+          <a:srcRect/>
+          <a:stretch>
+            <a:fillRect/>
+          </a:stretch>
+        </p:blipFill>
+        <p:spPr bwMode="auto">
+          <a:xfrm>
+            <a:off x="8679543" y="132931"/>
+            <a:ext cx="3512457" cy="1620122"/>
+          </a:xfrm>
+          <a:prstGeom prst="rect">
+            <a:avLst/>
+          </a:prstGeom>
+          <a:noFill/>
+          <a:extLst>
+            <a:ext uri="{909E8E84-426E-40DD-AFC4-6F175D3DCCD1}">
+              <a14:hiddenFill xmlns:a14="http://schemas.microsoft.com/office/drawing/2010/main">
+                <a:solidFill>
+                  <a:srgbClr val="FFFFFF"/>
+                </a:solidFill>
+              </a14:hiddenFill>
+            </a:ext>
+          </a:extLst>
+        </p:spPr>
+      </p:pic>
+    </p:spTree>
+    <p:extLst>
+      <p:ext uri="{BB962C8B-B14F-4D97-AF65-F5344CB8AC3E}">
+        <p14:creationId xmlns:p14="http://schemas.microsoft.com/office/powerpoint/2010/main" val="1092791309"/>
+      </p:ext>
+    </p:extLst>
+  </p:cSld>
+  <p:clrMapOvr>
+    <a:masterClrMapping/>
+  </p:clrMapOvr>
+</p:sld>
+</file>
+
+<file path=ppt/slides/slide30.xml><?xml version="1.0" encoding="utf-8"?>
 <p:sld xmlns:a="http://schemas.openxmlformats.org/drawingml/2006/main" xmlns:r="http://schemas.openxmlformats.org/officeDocument/2006/relationships" xmlns:p="http://schemas.openxmlformats.org/presentationml/2006/main">
   <p:cSld>
     <p:spTree>
@@ -33173,10 +33784,17 @@
   <p:clrMapOvr>
     <a:masterClrMapping/>
   </p:clrMapOvr>
+  <p:timing>
+    <p:tnLst>
+      <p:par>
+        <p:cTn id="1" dur="indefinite" restart="never" nodeType="tmRoot"/>
+      </p:par>
+    </p:tnLst>
+  </p:timing>
 </p:sld>
 </file>
 
-<file path=ppt/slides/slide28.xml><?xml version="1.0" encoding="utf-8"?>
+<file path=ppt/slides/slide31.xml><?xml version="1.0" encoding="utf-8"?>
 <p:sld xmlns:a="http://schemas.openxmlformats.org/drawingml/2006/main" xmlns:r="http://schemas.openxmlformats.org/officeDocument/2006/relationships" xmlns:p="http://schemas.openxmlformats.org/presentationml/2006/main">
   <p:cSld>
     <p:spTree>
@@ -33198,7 +33816,7 @@
           <p:cNvPr id="4" name="Título 1">
             <a:extLst>
               <a:ext uri="{FF2B5EF4-FFF2-40B4-BE49-F238E27FC236}">
-                <a16:creationId xmlns:a16="http://schemas.microsoft.com/office/drawing/2014/main" id="{32666AC8-2E17-4DB4-B0F5-60C640CCFD2E}"/>
+                <a16:creationId xmlns:a16="http://schemas.microsoft.com/office/drawing/2014/main" xmlns="" id="{32666AC8-2E17-4DB4-B0F5-60C640CCFD2E}"/>
               </a:ext>
             </a:extLst>
           </p:cNvPr>
@@ -33262,7 +33880,7 @@
 </p:sld>
 </file>
 
-<file path=ppt/slides/slide29.xml><?xml version="1.0" encoding="utf-8"?>
+<file path=ppt/slides/slide32.xml><?xml version="1.0" encoding="utf-8"?>
 <p:sld xmlns:a="http://schemas.openxmlformats.org/drawingml/2006/main" xmlns:r="http://schemas.openxmlformats.org/officeDocument/2006/relationships" xmlns:p="http://schemas.openxmlformats.org/presentationml/2006/main">
   <p:cSld>
     <p:spTree>
@@ -33288,9 +33906,9 @@
         <p:grpSpPr>
           <a:xfrm>
             <a:off x="4316866" y="1705666"/>
-            <a:ext cx="3738422" cy="2613547"/>
+            <a:ext cx="3769818" cy="2613547"/>
             <a:chOff x="4316866" y="1705666"/>
-            <a:chExt cx="3738422" cy="2613547"/>
+            <a:chExt cx="3769818" cy="2613547"/>
           </a:xfrm>
         </p:grpSpPr>
         <mc:AlternateContent xmlns:mc="http://schemas.openxmlformats.org/markup-compatibility/2006" xmlns:a14="http://schemas.microsoft.com/office/drawing/2010/main">
@@ -34556,42 +35174,117 @@
             </p:txBody>
           </p:sp>
         </p:grpSp>
-        <p:sp>
-          <p:nvSpPr>
-            <p:cNvPr id="81" name="Rectangle 80"/>
-            <p:cNvSpPr/>
-            <p:nvPr/>
-          </p:nvSpPr>
-          <p:spPr>
-            <a:xfrm>
-              <a:off x="5543230" y="1767152"/>
-              <a:ext cx="2173288" cy="523220"/>
-            </a:xfrm>
-            <a:prstGeom prst="rect">
-              <a:avLst/>
-            </a:prstGeom>
-          </p:spPr>
-          <p:txBody>
-            <a:bodyPr wrap="none">
-              <a:spAutoFit/>
-            </a:bodyPr>
-            <a:lstStyle/>
-            <a:p>
-              <a:pPr algn="ctr"/>
-              <a:r>
-                <a:rPr lang="pt-BR" sz="1400" dirty="0"/>
-                <a:t>classificação não-linear</a:t>
-              </a:r>
-            </a:p>
-            <a:p>
-              <a:pPr algn="ctr"/>
-              <a:r>
-                <a:rPr lang="pt-BR" sz="1400" dirty="0"/>
-                <a:t>(com relação aos atributos)</a:t>
-              </a:r>
-            </a:p>
-          </p:txBody>
-        </p:sp>
+        <mc:AlternateContent xmlns:mc="http://schemas.openxmlformats.org/markup-compatibility/2006">
+          <mc:Choice xmlns:a14="http://schemas.microsoft.com/office/drawing/2010/main" Requires="a14">
+            <p:sp>
+              <p:nvSpPr>
+                <p:cNvPr id="81" name="Rectangle 80"/>
+                <p:cNvSpPr/>
+                <p:nvPr/>
+              </p:nvSpPr>
+              <p:spPr>
+                <a:xfrm>
+                  <a:off x="4882795" y="1767152"/>
+                  <a:ext cx="3203889" cy="523220"/>
+                </a:xfrm>
+                <a:prstGeom prst="rect">
+                  <a:avLst/>
+                </a:prstGeom>
+              </p:spPr>
+              <p:txBody>
+                <a:bodyPr wrap="none">
+                  <a:spAutoFit/>
+                </a:bodyPr>
+                <a:lstStyle/>
+                <a:p>
+                  <a:pPr algn="ctr"/>
+                  <a:r>
+                    <a:rPr lang="pt-BR" sz="1400" dirty="0" smtClean="0"/>
+                    <a:t>classificação não-linear</a:t>
+                  </a:r>
+                </a:p>
+                <a:p>
+                  <a:pPr algn="ctr"/>
+                  <a:r>
+                    <a:rPr lang="pt-BR" sz="1400" dirty="0"/>
+                    <a:t>(com relação </a:t>
+                  </a:r>
+                  <a:r>
+                    <a:rPr lang="pt-BR" sz="1400" dirty="0" smtClean="0"/>
+                    <a:t>ao mapeamento de </a:t>
+                  </a:r>
+                  <a14:m>
+                    <m:oMath xmlns:m="http://schemas.openxmlformats.org/officeDocument/2006/math">
+                      <m:r>
+                        <a:rPr lang="pt-BR" sz="1400" b="1" i="1" smtClean="0">
+                          <a:latin typeface="Cambria Math" panose="02040503050406030204" pitchFamily="18" charset="0"/>
+                        </a:rPr>
+                        <m:t>𝒙</m:t>
+                      </m:r>
+                    </m:oMath>
+                  </a14:m>
+                  <a:r>
+                    <a:rPr lang="pt-BR" sz="1400" dirty="0" smtClean="0"/>
+                    <a:t> em </a:t>
+                  </a:r>
+                  <a14:m>
+                    <m:oMath xmlns:m="http://schemas.openxmlformats.org/officeDocument/2006/math">
+                      <m:r>
+                        <a:rPr lang="pt-BR" sz="1400" b="0" i="1" smtClean="0">
+                          <a:latin typeface="Cambria Math" panose="02040503050406030204" pitchFamily="18" charset="0"/>
+                        </a:rPr>
+                        <m:t>𝑦</m:t>
+                      </m:r>
+                    </m:oMath>
+                  </a14:m>
+                  <a:r>
+                    <a:rPr lang="pt-BR" sz="1400" dirty="0" smtClean="0"/>
+                    <a:t>)</a:t>
+                  </a:r>
+                  <a:endParaRPr lang="pt-BR" sz="1400" dirty="0"/>
+                </a:p>
+              </p:txBody>
+            </p:sp>
+          </mc:Choice>
+          <mc:Fallback>
+            <p:sp>
+              <p:nvSpPr>
+                <p:cNvPr id="81" name="Rectangle 80"/>
+                <p:cNvSpPr>
+                  <a:spLocks noRot="1" noChangeAspect="1" noMove="1" noResize="1" noEditPoints="1" noAdjustHandles="1" noChangeArrowheads="1" noChangeShapeType="1" noTextEdit="1"/>
+                </p:cNvSpPr>
+                <p:nvPr/>
+              </p:nvSpPr>
+              <p:spPr>
+                <a:xfrm>
+                  <a:off x="4882795" y="1767152"/>
+                  <a:ext cx="3203889" cy="523220"/>
+                </a:xfrm>
+                <a:prstGeom prst="rect">
+                  <a:avLst/>
+                </a:prstGeom>
+                <a:blipFill rotWithShape="0">
+                  <a:blip r:embed="rId12"/>
+                  <a:stretch>
+                    <a:fillRect l="-190" t="-2326" b="-10465"/>
+                  </a:stretch>
+                </a:blipFill>
+              </p:spPr>
+              <p:txBody>
+                <a:bodyPr/>
+                <a:lstStyle/>
+                <a:p>
+                  <a:r>
+                    <a:rPr lang="pt-BR">
+                      <a:noFill/>
+                    </a:rPr>
+                    <a:t> </a:t>
+                  </a:r>
+                </a:p>
+              </p:txBody>
+            </p:sp>
+          </mc:Fallback>
+        </mc:AlternateContent>
       </p:grpSp>
       <p:grpSp>
         <p:nvGrpSpPr>
@@ -35515,7 +36208,7 @@
                   <a:avLst/>
                 </a:prstGeom>
                 <a:blipFill rotWithShape="0">
-                  <a:blip r:embed="rId12"/>
+                  <a:blip r:embed="rId13"/>
                   <a:stretch>
                     <a:fillRect/>
                   </a:stretch>
@@ -35617,7 +36310,7 @@
                   <a:avLst/>
                 </a:prstGeom>
                 <a:blipFill rotWithShape="0">
-                  <a:blip r:embed="rId13"/>
+                  <a:blip r:embed="rId14"/>
                   <a:stretch>
                     <a:fillRect b="-1538"/>
                   </a:stretch>
@@ -35720,7 +36413,7 @@
                   <a:avLst/>
                 </a:prstGeom>
                 <a:blipFill rotWithShape="0">
-                  <a:blip r:embed="rId14"/>
+                  <a:blip r:embed="rId15"/>
                   <a:stretch>
                     <a:fillRect/>
                   </a:stretch>
@@ -35823,7 +36516,7 @@
                   <a:avLst/>
                 </a:prstGeom>
                 <a:blipFill rotWithShape="0">
-                  <a:blip r:embed="rId15"/>
+                  <a:blip r:embed="rId16"/>
                   <a:stretch>
                     <a:fillRect/>
                   </a:stretch>
@@ -36774,7 +37467,7 @@
                     <a:avLst/>
                   </a:prstGeom>
                   <a:blipFill rotWithShape="0">
-                    <a:blip r:embed="rId16"/>
+                    <a:blip r:embed="rId17"/>
                     <a:stretch>
                       <a:fillRect/>
                     </a:stretch>
@@ -36876,7 +37569,7 @@
                     <a:avLst/>
                   </a:prstGeom>
                   <a:blipFill rotWithShape="0">
-                    <a:blip r:embed="rId17"/>
+                    <a:blip r:embed="rId18"/>
                     <a:stretch>
                       <a:fillRect/>
                     </a:stretch>
@@ -36979,7 +37672,7 @@
                     <a:avLst/>
                   </a:prstGeom>
                   <a:blipFill rotWithShape="0">
-                    <a:blip r:embed="rId18"/>
+                    <a:blip r:embed="rId19"/>
                     <a:stretch>
                       <a:fillRect/>
                     </a:stretch>
@@ -37417,7 +38110,7 @@
                     <a:avLst/>
                   </a:prstGeom>
                   <a:blipFill rotWithShape="0">
-                    <a:blip r:embed="rId19"/>
+                    <a:blip r:embed="rId20"/>
                     <a:stretch>
                       <a:fillRect b="-1538"/>
                     </a:stretch>
@@ -37619,7 +38312,7 @@
                   <a:avLst/>
                 </a:prstGeom>
                 <a:blipFill rotWithShape="0">
-                  <a:blip r:embed="rId20"/>
+                  <a:blip r:embed="rId21"/>
                   <a:stretch>
                     <a:fillRect/>
                   </a:stretch>
@@ -37654,294 +38347,7 @@
 </p:sld>
 </file>
 
-<file path=ppt/slides/slide3.xml><?xml version="1.0" encoding="utf-8"?>
-<p:sld xmlns:a="http://schemas.openxmlformats.org/drawingml/2006/main" xmlns:r="http://schemas.openxmlformats.org/officeDocument/2006/relationships" xmlns:p="http://schemas.openxmlformats.org/presentationml/2006/main">
-  <p:cSld>
-    <p:spTree>
-      <p:nvGrpSpPr>
-        <p:cNvPr id="1" name=""/>
-        <p:cNvGrpSpPr/>
-        <p:nvPr/>
-      </p:nvGrpSpPr>
-      <p:grpSpPr>
-        <a:xfrm>
-          <a:off x="0" y="0"/>
-          <a:ext cx="0" cy="0"/>
-          <a:chOff x="0" y="0"/>
-          <a:chExt cx="0" cy="0"/>
-        </a:xfrm>
-      </p:grpSpPr>
-      <p:sp>
-        <p:nvSpPr>
-          <p:cNvPr id="2" name="Título 1">
-            <a:extLst>
-              <a:ext uri="{FF2B5EF4-FFF2-40B4-BE49-F238E27FC236}">
-                <a16:creationId xmlns:a16="http://schemas.microsoft.com/office/drawing/2014/main" id="{C4F48192-B348-4C3E-8621-D3755D2230F8}"/>
-              </a:ext>
-            </a:extLst>
-          </p:cNvPr>
-          <p:cNvSpPr>
-            <a:spLocks noGrp="1"/>
-          </p:cNvSpPr>
-          <p:nvPr>
-            <p:ph type="title"/>
-          </p:nvPr>
-        </p:nvSpPr>
-        <p:spPr/>
-        <p:txBody>
-          <a:bodyPr/>
-          <a:lstStyle/>
-          <a:p>
-            <a:r>
-              <a:rPr lang="pt-BR" dirty="0"/>
-              <a:t>Objetivo do curso</a:t>
-            </a:r>
-          </a:p>
-        </p:txBody>
-      </p:sp>
-      <p:sp>
-        <p:nvSpPr>
-          <p:cNvPr id="3" name="Espaço Reservado para Conteúdo 2">
-            <a:extLst>
-              <a:ext uri="{FF2B5EF4-FFF2-40B4-BE49-F238E27FC236}">
-                <a16:creationId xmlns:a16="http://schemas.microsoft.com/office/drawing/2014/main" id="{E3DECB90-AFD9-4AC6-A356-C93A7442A6E6}"/>
-              </a:ext>
-            </a:extLst>
-          </p:cNvPr>
-          <p:cNvSpPr>
-            <a:spLocks noGrp="1"/>
-          </p:cNvSpPr>
-          <p:nvPr>
-            <p:ph idx="1"/>
-          </p:nvPr>
-        </p:nvSpPr>
-        <p:spPr>
-          <a:xfrm>
-            <a:off x="838200" y="1825623"/>
-            <a:ext cx="8930268" cy="5032376"/>
-          </a:xfrm>
-        </p:spPr>
-        <p:txBody>
-          <a:bodyPr>
-            <a:normAutofit/>
-          </a:bodyPr>
-          <a:lstStyle/>
-          <a:p>
-            <a:r>
-              <a:rPr lang="pt-BR" dirty="0"/>
-              <a:t>O objetivo principal do curso é apresentar</a:t>
-            </a:r>
-          </a:p>
-          <a:p>
-            <a:pPr lvl="1">
-              <a:buFont typeface="Wingdings" panose="05000000000000000000" pitchFamily="2" charset="2"/>
-              <a:buChar char="§"/>
-            </a:pPr>
-            <a:r>
-              <a:rPr lang="pt-BR" dirty="0"/>
-              <a:t>os </a:t>
-            </a:r>
-            <a:r>
-              <a:rPr lang="pt-BR" b="1" i="1" dirty="0"/>
-              <a:t>conceitos fundamentais </a:t>
-            </a:r>
-            <a:r>
-              <a:rPr lang="pt-BR" dirty="0"/>
-              <a:t>da teoria do aprendizado de máquina.</a:t>
-            </a:r>
-          </a:p>
-          <a:p>
-            <a:pPr lvl="1">
-              <a:buFont typeface="Wingdings" panose="05000000000000000000" pitchFamily="2" charset="2"/>
-              <a:buChar char="§"/>
-            </a:pPr>
-            <a:r>
-              <a:rPr lang="pt-BR" dirty="0"/>
-              <a:t>um </a:t>
-            </a:r>
-            <a:r>
-              <a:rPr lang="pt-BR" b="1" i="1" dirty="0"/>
-              <a:t>conjunto de ferramentas</a:t>
-            </a:r>
-            <a:r>
-              <a:rPr lang="pt-BR" dirty="0"/>
-              <a:t> (i.e., </a:t>
-            </a:r>
-            <a:r>
-              <a:rPr lang="en-US" dirty="0" err="1"/>
-              <a:t>algoritmos</a:t>
-            </a:r>
-            <a:r>
-              <a:rPr lang="en-US" dirty="0"/>
-              <a:t>, </a:t>
-            </a:r>
-            <a:r>
-              <a:rPr lang="en-US" dirty="0" err="1"/>
-              <a:t>métricas</a:t>
-            </a:r>
-            <a:r>
-              <a:rPr lang="en-US" dirty="0"/>
-              <a:t>, </a:t>
-            </a:r>
-            <a:r>
-              <a:rPr lang="en-US" dirty="0" err="1"/>
-              <a:t>técnicas</a:t>
-            </a:r>
-            <a:r>
-              <a:rPr lang="pt-BR" dirty="0"/>
-              <a:t>) de aprendizado de máquina para solução de problemas.</a:t>
-            </a:r>
-          </a:p>
-          <a:p>
-            <a:r>
-              <a:rPr lang="pt-BR" dirty="0"/>
-              <a:t>Ao final do curso vocês devem ser capazes de</a:t>
-            </a:r>
-          </a:p>
-          <a:p>
-            <a:pPr lvl="1">
-              <a:buFont typeface="Wingdings" panose="05000000000000000000" pitchFamily="2" charset="2"/>
-              <a:buChar char="§"/>
-            </a:pPr>
-            <a:r>
-              <a:rPr lang="pt-BR" dirty="0"/>
-              <a:t>Entender e discutir sobre os principais algoritmos de ML.</a:t>
-            </a:r>
-          </a:p>
-          <a:p>
-            <a:pPr lvl="1">
-              <a:buFont typeface="Wingdings" panose="05000000000000000000" pitchFamily="2" charset="2"/>
-              <a:buChar char="§"/>
-            </a:pPr>
-            <a:r>
-              <a:rPr lang="pt-BR" dirty="0"/>
-              <a:t>Compreender a terminologia utilizada na área.</a:t>
-            </a:r>
-          </a:p>
-          <a:p>
-            <a:pPr lvl="1">
-              <a:buFont typeface="Wingdings" panose="05000000000000000000" pitchFamily="2" charset="2"/>
-              <a:buChar char="§"/>
-            </a:pPr>
-            <a:r>
-              <a:rPr lang="pt-BR" dirty="0"/>
-              <a:t>Entender o funcionamento de novos algoritmos de ML.</a:t>
-            </a:r>
-          </a:p>
-          <a:p>
-            <a:pPr lvl="1">
-              <a:buFont typeface="Wingdings" panose="05000000000000000000" pitchFamily="2" charset="2"/>
-              <a:buChar char="§"/>
-            </a:pPr>
-            <a:r>
-              <a:rPr lang="pt-BR" dirty="0"/>
-              <a:t>Aplicar algoritmos de ML para a resolução de problemas.</a:t>
-            </a:r>
-          </a:p>
-        </p:txBody>
-      </p:sp>
-      <p:pic>
-        <p:nvPicPr>
-          <p:cNvPr id="3074" name="Picture 2" descr="Image result for machine learning">
-            <a:extLst>
-              <a:ext uri="{FF2B5EF4-FFF2-40B4-BE49-F238E27FC236}">
-                <a16:creationId xmlns:a16="http://schemas.microsoft.com/office/drawing/2014/main" id="{78A93243-9634-4B0E-B1B2-37A218EAEADD}"/>
-              </a:ext>
-            </a:extLst>
-          </p:cNvPr>
-          <p:cNvPicPr>
-            <a:picLocks noChangeAspect="1" noChangeArrowheads="1"/>
-          </p:cNvPicPr>
-          <p:nvPr/>
-        </p:nvPicPr>
-        <p:blipFill>
-          <a:blip r:embed="rId3" cstate="print">
-            <a:extLst>
-              <a:ext uri="{28A0092B-C50C-407E-A947-70E740481C1C}">
-                <a14:useLocalDpi xmlns:a14="http://schemas.microsoft.com/office/drawing/2010/main" val="0"/>
-              </a:ext>
-            </a:extLst>
-          </a:blip>
-          <a:srcRect/>
-          <a:stretch>
-            <a:fillRect/>
-          </a:stretch>
-        </p:blipFill>
-        <p:spPr bwMode="auto">
-          <a:xfrm>
-            <a:off x="8942216" y="4583150"/>
-            <a:ext cx="3249784" cy="2274849"/>
-          </a:xfrm>
-          <a:prstGeom prst="rect">
-            <a:avLst/>
-          </a:prstGeom>
-          <a:noFill/>
-          <a:extLst>
-            <a:ext uri="{909E8E84-426E-40DD-AFC4-6F175D3DCCD1}">
-              <a14:hiddenFill xmlns:a14="http://schemas.microsoft.com/office/drawing/2010/main">
-                <a:solidFill>
-                  <a:srgbClr val="FFFFFF"/>
-                </a:solidFill>
-              </a14:hiddenFill>
-            </a:ext>
-          </a:extLst>
-        </p:spPr>
-      </p:pic>
-      <p:pic>
-        <p:nvPicPr>
-          <p:cNvPr id="1026" name="Picture 2" descr="Machine Learning | Informatec"/>
-          <p:cNvPicPr>
-            <a:picLocks noChangeAspect="1" noChangeArrowheads="1"/>
-          </p:cNvPicPr>
-          <p:nvPr/>
-        </p:nvPicPr>
-        <p:blipFill>
-          <a:blip r:embed="rId4">
-            <a:extLst>
-              <a:ext uri="{28A0092B-C50C-407E-A947-70E740481C1C}">
-                <a14:useLocalDpi xmlns:a14="http://schemas.microsoft.com/office/drawing/2010/main" val="0"/>
-              </a:ext>
-            </a:extLst>
-          </a:blip>
-          <a:srcRect/>
-          <a:stretch>
-            <a:fillRect/>
-          </a:stretch>
-        </p:blipFill>
-        <p:spPr bwMode="auto">
-          <a:xfrm>
-            <a:off x="8679543" y="132931"/>
-            <a:ext cx="3512457" cy="1620122"/>
-          </a:xfrm>
-          <a:prstGeom prst="rect">
-            <a:avLst/>
-          </a:prstGeom>
-          <a:noFill/>
-          <a:extLst>
-            <a:ext uri="{909E8E84-426E-40DD-AFC4-6F175D3DCCD1}">
-              <a14:hiddenFill xmlns:a14="http://schemas.microsoft.com/office/drawing/2010/main">
-                <a:solidFill>
-                  <a:srgbClr val="FFFFFF"/>
-                </a:solidFill>
-              </a14:hiddenFill>
-            </a:ext>
-          </a:extLst>
-        </p:spPr>
-      </p:pic>
-    </p:spTree>
-    <p:extLst>
-      <p:ext uri="{BB962C8B-B14F-4D97-AF65-F5344CB8AC3E}">
-        <p14:creationId xmlns:p14="http://schemas.microsoft.com/office/powerpoint/2010/main" val="1092791309"/>
-      </p:ext>
-    </p:extLst>
-  </p:cSld>
-  <p:clrMapOvr>
-    <a:masterClrMapping/>
-  </p:clrMapOvr>
-</p:sld>
-</file>
-
-<file path=ppt/slides/slide30.xml><?xml version="1.0" encoding="utf-8"?>
+<file path=ppt/slides/slide33.xml><?xml version="1.0" encoding="utf-8"?>
 <p:sld xmlns:a="http://schemas.openxmlformats.org/drawingml/2006/main" xmlns:r="http://schemas.openxmlformats.org/officeDocument/2006/relationships" xmlns:p="http://schemas.openxmlformats.org/presentationml/2006/main">
   <p:cSld>
     <p:spTree>
@@ -39613,7 +40019,7 @@
 </p:sld>
 </file>
 
-<file path=ppt/slides/slide31.xml><?xml version="1.0" encoding="utf-8"?>
+<file path=ppt/slides/slide34.xml><?xml version="1.0" encoding="utf-8"?>
 <p:sld xmlns:a="http://schemas.openxmlformats.org/drawingml/2006/main" xmlns:r="http://schemas.openxmlformats.org/officeDocument/2006/relationships" xmlns:p="http://schemas.openxmlformats.org/presentationml/2006/main">
   <p:cSld>
     <p:spTree>
@@ -42546,7 +42952,27 @@
           <a:p>
             <a:r>
               <a:rPr lang="pt-BR" dirty="0"/>
-              <a:t>Dois (2) conjuntos de exercícios (</a:t>
+              <a:t>Dois (2) conjuntos de </a:t>
+            </a:r>
+            <a:r>
+              <a:rPr lang="pt-BR" dirty="0" smtClean="0"/>
+              <a:t>atividades (</a:t>
+            </a:r>
+            <a:r>
+              <a:rPr lang="pt-BR" b="1" i="1" dirty="0" err="1" smtClean="0">
+                <a:solidFill>
+                  <a:srgbClr val="00B050"/>
+                </a:solidFill>
+              </a:rPr>
+              <a:t>quizzes</a:t>
+            </a:r>
+            <a:r>
+              <a:rPr lang="pt-BR" b="1" i="1" dirty="0" smtClean="0">
+                <a:solidFill>
+                  <a:srgbClr val="00B050"/>
+                </a:solidFill>
+              </a:rPr>
+              <a:t> </a:t>
             </a:r>
             <a:r>
               <a:rPr lang="pt-BR" b="1" i="1" dirty="0">
@@ -42554,7 +42980,7 @@
                   <a:srgbClr val="00B050"/>
                 </a:solidFill>
               </a:rPr>
-              <a:t>quizzes e laboratórios</a:t>
+              <a:t>e laboratórios</a:t>
             </a:r>
             <a:r>
               <a:rPr lang="pt-BR" dirty="0"/>
@@ -42807,35 +43233,35 @@
                 <a:gridCol w="967543">
                   <a:extLst>
                     <a:ext uri="{9D8B030D-6E8A-4147-A177-3AD203B41FA5}">
-                      <a16:colId xmlns:a16="http://schemas.microsoft.com/office/drawing/2014/main" val="20000"/>
+                      <a16:colId xmlns:a16="http://schemas.microsoft.com/office/drawing/2014/main" xmlns="" val="20000"/>
                     </a:ext>
                   </a:extLst>
                 </a:gridCol>
                 <a:gridCol w="1252623">
                   <a:extLst>
                     <a:ext uri="{9D8B030D-6E8A-4147-A177-3AD203B41FA5}">
-                      <a16:colId xmlns:a16="http://schemas.microsoft.com/office/drawing/2014/main" val="20001"/>
+                      <a16:colId xmlns:a16="http://schemas.microsoft.com/office/drawing/2014/main" xmlns="" val="20001"/>
                     </a:ext>
                   </a:extLst>
                 </a:gridCol>
                 <a:gridCol w="1028015">
                   <a:extLst>
                     <a:ext uri="{9D8B030D-6E8A-4147-A177-3AD203B41FA5}">
-                      <a16:colId xmlns:a16="http://schemas.microsoft.com/office/drawing/2014/main" val="20002"/>
+                      <a16:colId xmlns:a16="http://schemas.microsoft.com/office/drawing/2014/main" xmlns="" val="20002"/>
                     </a:ext>
                   </a:extLst>
                 </a:gridCol>
                 <a:gridCol w="1485744">
                   <a:extLst>
                     <a:ext uri="{9D8B030D-6E8A-4147-A177-3AD203B41FA5}">
-                      <a16:colId xmlns:a16="http://schemas.microsoft.com/office/drawing/2014/main" val="20003"/>
+                      <a16:colId xmlns:a16="http://schemas.microsoft.com/office/drawing/2014/main" xmlns="" val="20003"/>
                     </a:ext>
                   </a:extLst>
                 </a:gridCol>
                 <a:gridCol w="6315076">
                   <a:extLst>
                     <a:ext uri="{9D8B030D-6E8A-4147-A177-3AD203B41FA5}">
-                      <a16:colId xmlns:a16="http://schemas.microsoft.com/office/drawing/2014/main" val="20004"/>
+                      <a16:colId xmlns:a16="http://schemas.microsoft.com/office/drawing/2014/main" xmlns="" val="20004"/>
                     </a:ext>
                   </a:extLst>
                 </a:gridCol>
@@ -43117,7 +43543,7 @@
                 </a:tc>
                 <a:extLst>
                   <a:ext uri="{0D108BD9-81ED-4DB2-BD59-A6C34878D82A}">
-                    <a16:rowId xmlns:a16="http://schemas.microsoft.com/office/drawing/2014/main" val="10000"/>
+                    <a16:rowId xmlns:a16="http://schemas.microsoft.com/office/drawing/2014/main" xmlns="" val="10000"/>
                   </a:ext>
                 </a:extLst>
               </a:tr>
@@ -43402,7 +43828,7 @@
                 </a:tc>
                 <a:extLst>
                   <a:ext uri="{0D108BD9-81ED-4DB2-BD59-A6C34878D82A}">
-                    <a16:rowId xmlns:a16="http://schemas.microsoft.com/office/drawing/2014/main" val="10001"/>
+                    <a16:rowId xmlns:a16="http://schemas.microsoft.com/office/drawing/2014/main" xmlns="" val="10001"/>
                   </a:ext>
                 </a:extLst>
               </a:tr>
@@ -43654,7 +44080,7 @@
                 </a:tc>
                 <a:extLst>
                   <a:ext uri="{0D108BD9-81ED-4DB2-BD59-A6C34878D82A}">
-                    <a16:rowId xmlns:a16="http://schemas.microsoft.com/office/drawing/2014/main" val="10002"/>
+                    <a16:rowId xmlns:a16="http://schemas.microsoft.com/office/drawing/2014/main" xmlns="" val="10002"/>
                   </a:ext>
                 </a:extLst>
               </a:tr>
@@ -43893,7 +44319,7 @@
                 </a:tc>
                 <a:extLst>
                   <a:ext uri="{0D108BD9-81ED-4DB2-BD59-A6C34878D82A}">
-                    <a16:rowId xmlns:a16="http://schemas.microsoft.com/office/drawing/2014/main" val="10003"/>
+                    <a16:rowId xmlns:a16="http://schemas.microsoft.com/office/drawing/2014/main" xmlns="" val="10003"/>
                   </a:ext>
                 </a:extLst>
               </a:tr>
@@ -44132,7 +44558,7 @@
                 </a:tc>
                 <a:extLst>
                   <a:ext uri="{0D108BD9-81ED-4DB2-BD59-A6C34878D82A}">
-                    <a16:rowId xmlns:a16="http://schemas.microsoft.com/office/drawing/2014/main" val="10004"/>
+                    <a16:rowId xmlns:a16="http://schemas.microsoft.com/office/drawing/2014/main" xmlns="" val="10004"/>
                   </a:ext>
                 </a:extLst>
               </a:tr>
@@ -44371,7 +44797,7 @@
                 </a:tc>
                 <a:extLst>
                   <a:ext uri="{0D108BD9-81ED-4DB2-BD59-A6C34878D82A}">
-                    <a16:rowId xmlns:a16="http://schemas.microsoft.com/office/drawing/2014/main" val="10005"/>
+                    <a16:rowId xmlns:a16="http://schemas.microsoft.com/office/drawing/2014/main" xmlns="" val="10005"/>
                   </a:ext>
                 </a:extLst>
               </a:tr>
@@ -44610,7 +45036,7 @@
                 </a:tc>
                 <a:extLst>
                   <a:ext uri="{0D108BD9-81ED-4DB2-BD59-A6C34878D82A}">
-                    <a16:rowId xmlns:a16="http://schemas.microsoft.com/office/drawing/2014/main" val="10006"/>
+                    <a16:rowId xmlns:a16="http://schemas.microsoft.com/office/drawing/2014/main" xmlns="" val="10006"/>
                   </a:ext>
                 </a:extLst>
               </a:tr>
@@ -44855,7 +45281,7 @@
                 </a:tc>
                 <a:extLst>
                   <a:ext uri="{0D108BD9-81ED-4DB2-BD59-A6C34878D82A}">
-                    <a16:rowId xmlns:a16="http://schemas.microsoft.com/office/drawing/2014/main" val="10007"/>
+                    <a16:rowId xmlns:a16="http://schemas.microsoft.com/office/drawing/2014/main" xmlns="" val="10007"/>
                   </a:ext>
                 </a:extLst>
               </a:tr>
@@ -45115,7 +45541,7 @@
                 </a:tc>
                 <a:extLst>
                   <a:ext uri="{0D108BD9-81ED-4DB2-BD59-A6C34878D82A}">
-                    <a16:rowId xmlns:a16="http://schemas.microsoft.com/office/drawing/2014/main" val="10008"/>
+                    <a16:rowId xmlns:a16="http://schemas.microsoft.com/office/drawing/2014/main" xmlns="" val="10008"/>
                   </a:ext>
                 </a:extLst>
               </a:tr>
@@ -45362,7 +45788,7 @@
                 </a:tc>
                 <a:extLst>
                   <a:ext uri="{0D108BD9-81ED-4DB2-BD59-A6C34878D82A}">
-                    <a16:rowId xmlns:a16="http://schemas.microsoft.com/office/drawing/2014/main" val="10009"/>
+                    <a16:rowId xmlns:a16="http://schemas.microsoft.com/office/drawing/2014/main" xmlns="" val="10009"/>
                   </a:ext>
                 </a:extLst>
               </a:tr>
@@ -45658,7 +46084,7 @@
                 </a:tc>
                 <a:extLst>
                   <a:ext uri="{0D108BD9-81ED-4DB2-BD59-A6C34878D82A}">
-                    <a16:rowId xmlns:a16="http://schemas.microsoft.com/office/drawing/2014/main" val="10010"/>
+                    <a16:rowId xmlns:a16="http://schemas.microsoft.com/office/drawing/2014/main" xmlns="" val="10010"/>
                   </a:ext>
                 </a:extLst>
               </a:tr>
@@ -45921,7 +46347,7 @@
                 </a:tc>
                 <a:extLst>
                   <a:ext uri="{0D108BD9-81ED-4DB2-BD59-A6C34878D82A}">
-                    <a16:rowId xmlns:a16="http://schemas.microsoft.com/office/drawing/2014/main" val="10011"/>
+                    <a16:rowId xmlns:a16="http://schemas.microsoft.com/office/drawing/2014/main" xmlns="" val="10011"/>
                   </a:ext>
                 </a:extLst>
               </a:tr>
@@ -46181,7 +46607,7 @@
                 </a:tc>
                 <a:extLst>
                   <a:ext uri="{0D108BD9-81ED-4DB2-BD59-A6C34878D82A}">
-                    <a16:rowId xmlns:a16="http://schemas.microsoft.com/office/drawing/2014/main" val="10012"/>
+                    <a16:rowId xmlns:a16="http://schemas.microsoft.com/office/drawing/2014/main" xmlns="" val="10012"/>
                   </a:ext>
                 </a:extLst>
               </a:tr>
@@ -46422,7 +46848,7 @@
                 </a:tc>
                 <a:extLst>
                   <a:ext uri="{0D108BD9-81ED-4DB2-BD59-A6C34878D82A}">
-                    <a16:rowId xmlns:a16="http://schemas.microsoft.com/office/drawing/2014/main" val="10013"/>
+                    <a16:rowId xmlns:a16="http://schemas.microsoft.com/office/drawing/2014/main" xmlns="" val="10013"/>
                   </a:ext>
                 </a:extLst>
               </a:tr>
@@ -46663,7 +47089,7 @@
                 </a:tc>
                 <a:extLst>
                   <a:ext uri="{0D108BD9-81ED-4DB2-BD59-A6C34878D82A}">
-                    <a16:rowId xmlns:a16="http://schemas.microsoft.com/office/drawing/2014/main" val="10014"/>
+                    <a16:rowId xmlns:a16="http://schemas.microsoft.com/office/drawing/2014/main" xmlns="" val="10014"/>
                   </a:ext>
                 </a:extLst>
               </a:tr>
@@ -46904,7 +47330,7 @@
                 </a:tc>
                 <a:extLst>
                   <a:ext uri="{0D108BD9-81ED-4DB2-BD59-A6C34878D82A}">
-                    <a16:rowId xmlns:a16="http://schemas.microsoft.com/office/drawing/2014/main" val="10015"/>
+                    <a16:rowId xmlns:a16="http://schemas.microsoft.com/office/drawing/2014/main" xmlns="" val="10015"/>
                   </a:ext>
                 </a:extLst>
               </a:tr>
@@ -47211,7 +47637,7 @@
                 </a:tc>
                 <a:extLst>
                   <a:ext uri="{0D108BD9-81ED-4DB2-BD59-A6C34878D82A}">
-                    <a16:rowId xmlns:a16="http://schemas.microsoft.com/office/drawing/2014/main" val="10016"/>
+                    <a16:rowId xmlns:a16="http://schemas.microsoft.com/office/drawing/2014/main" xmlns="" val="10016"/>
                   </a:ext>
                 </a:extLst>
               </a:tr>
@@ -47468,7 +47894,7 @@
                 </a:tc>
                 <a:extLst>
                   <a:ext uri="{0D108BD9-81ED-4DB2-BD59-A6C34878D82A}">
-                    <a16:rowId xmlns:a16="http://schemas.microsoft.com/office/drawing/2014/main" val="10017"/>
+                    <a16:rowId xmlns:a16="http://schemas.microsoft.com/office/drawing/2014/main" xmlns="" val="10017"/>
                   </a:ext>
                 </a:extLst>
               </a:tr>
@@ -47709,7 +48135,7 @@
                 </a:tc>
                 <a:extLst>
                   <a:ext uri="{0D108BD9-81ED-4DB2-BD59-A6C34878D82A}">
-                    <a16:rowId xmlns:a16="http://schemas.microsoft.com/office/drawing/2014/main" val="10018"/>
+                    <a16:rowId xmlns:a16="http://schemas.microsoft.com/office/drawing/2014/main" xmlns="" val="10018"/>
                   </a:ext>
                 </a:extLst>
               </a:tr>
@@ -47950,7 +48376,7 @@
                 </a:tc>
                 <a:extLst>
                   <a:ext uri="{0D108BD9-81ED-4DB2-BD59-A6C34878D82A}">
-                    <a16:rowId xmlns:a16="http://schemas.microsoft.com/office/drawing/2014/main" val="10019"/>
+                    <a16:rowId xmlns:a16="http://schemas.microsoft.com/office/drawing/2014/main" xmlns="" val="10019"/>
                   </a:ext>
                 </a:extLst>
               </a:tr>
@@ -48194,7 +48620,7 @@
                 </a:tc>
                 <a:extLst>
                   <a:ext uri="{0D108BD9-81ED-4DB2-BD59-A6C34878D82A}">
-                    <a16:rowId xmlns:a16="http://schemas.microsoft.com/office/drawing/2014/main" val="10020"/>
+                    <a16:rowId xmlns:a16="http://schemas.microsoft.com/office/drawing/2014/main" xmlns="" val="10020"/>
                   </a:ext>
                 </a:extLst>
               </a:tr>
@@ -48237,7 +48663,7 @@
           <p:cNvPr id="2" name="Título 1">
             <a:extLst>
               <a:ext uri="{FF2B5EF4-FFF2-40B4-BE49-F238E27FC236}">
-                <a16:creationId xmlns:a16="http://schemas.microsoft.com/office/drawing/2014/main" id="{A2A4684C-1159-4F88-A2B1-6BABEDE38C4D}"/>
+                <a16:creationId xmlns:a16="http://schemas.microsoft.com/office/drawing/2014/main" xmlns="" id="{A2A4684C-1159-4F88-A2B1-6BABEDE38C4D}"/>
               </a:ext>
             </a:extLst>
           </p:cNvPr>
@@ -48265,7 +48691,7 @@
           <p:cNvPr id="3" name="Espaço Reservado para Conteúdo 2">
             <a:extLst>
               <a:ext uri="{FF2B5EF4-FFF2-40B4-BE49-F238E27FC236}">
-                <a16:creationId xmlns:a16="http://schemas.microsoft.com/office/drawing/2014/main" id="{EC432B31-D382-41FF-BB6B-2ABDD322424B}"/>
+                <a16:creationId xmlns:a16="http://schemas.microsoft.com/office/drawing/2014/main" xmlns="" id="{EC432B31-D382-41FF-BB6B-2ABDD322424B}"/>
               </a:ext>
             </a:extLst>
           </p:cNvPr>
@@ -48759,12 +49185,20 @@
               <a:t> de </a:t>
             </a:r>
             <a:r>
-              <a:rPr lang="pt-BR" dirty="0" err="1"/>
+              <a:rPr lang="en-US" dirty="0" smtClean="0"/>
+              <a:t>l</a:t>
+            </a:r>
+            <a:r>
+              <a:rPr lang="pt-BR" dirty="0" err="1" smtClean="0"/>
               <a:t>aboratórios</a:t>
             </a:r>
             <a:r>
+              <a:rPr lang="pt-BR" dirty="0" smtClean="0"/>
+              <a:t> </a:t>
+            </a:r>
+            <a:r>
               <a:rPr lang="pt-BR" dirty="0"/>
-              <a:t> e quizzes </a:t>
+              <a:t>e quizzes </a:t>
             </a:r>
             <a:r>
               <a:rPr lang="en-US" dirty="0" err="1"/>
@@ -49513,7 +49947,7 @@
               <p:cNvPr id="6" name="CaixaDeTexto 5">
                 <a:extLst>
                   <a:ext uri="{FF2B5EF4-FFF2-40B4-BE49-F238E27FC236}">
-                    <a16:creationId xmlns:a16="http://schemas.microsoft.com/office/drawing/2014/main" id="{CECF4BC9-393F-92F3-2241-24670E5635B4}"/>
+                    <a16:creationId xmlns:a16="http://schemas.microsoft.com/office/drawing/2014/main" xmlns="" id="{CECF4BC9-393F-92F3-2241-24670E5635B4}"/>
                   </a:ext>
                 </a:extLst>
               </p:cNvPr>
@@ -49641,7 +50075,7 @@
               <p:cNvPr id="8" name="CaixaDeTexto 5">
                 <a:extLst>
                   <a:ext uri="{FF2B5EF4-FFF2-40B4-BE49-F238E27FC236}">
-                    <a16:creationId xmlns:a16="http://schemas.microsoft.com/office/drawing/2014/main" id="{48D3A820-D198-F9AB-C6B3-3F78DA6684D0}"/>
+                    <a16:creationId xmlns:a16="http://schemas.microsoft.com/office/drawing/2014/main" xmlns="" id="{48D3A820-D198-F9AB-C6B3-3F78DA6684D0}"/>
                   </a:ext>
                 </a:extLst>
               </p:cNvPr>
@@ -49896,7 +50330,7 @@
           <p:cNvPr id="4" name="Picture 5" descr="Image result for supervised learning">
             <a:extLst>
               <a:ext uri="{FF2B5EF4-FFF2-40B4-BE49-F238E27FC236}">
-                <a16:creationId xmlns:a16="http://schemas.microsoft.com/office/drawing/2014/main" id="{2520F4EA-1E3E-4F3B-97C0-DF47861DCD42}"/>
+                <a16:creationId xmlns:a16="http://schemas.microsoft.com/office/drawing/2014/main" xmlns="" id="{2520F4EA-1E3E-4F3B-97C0-DF47861DCD42}"/>
               </a:ext>
             </a:extLst>
           </p:cNvPr>
